--- a/skills/presentation-template-library/skills/artifact-template-silver-atelier/assets/reference.pptx
+++ b/skills/presentation-template-library/skills/artifact-template-silver-atelier/assets/reference.pptx
@@ -381,14 +381,14 @@
           <p:nvPr/>
         </p:nvPicPr>
         <p:blipFill>
-          <a:blip xmlns:r="http://schemas.openxmlformats.org/officeDocument/2006/relationships" xmlns:a="http://schemas.openxmlformats.org/drawingml/2006/main" r:embed="rIdOfficeKitImage31956823b229fb66_1"/>
-          <a:srcRect xmlns:a="http://schemas.openxmlformats.org/drawingml/2006/main" l="0" t="34171" r="0" b="34171"/>
+          <a:blip xmlns:r="http://schemas.openxmlformats.org/officeDocument/2006/relationships" xmlns:a="http://schemas.openxmlformats.org/drawingml/2006/main" r:embed="rIdOfficeKitImage13db13f70d7843cc_1"/>
+          <a:srcRect xmlns:a="http://schemas.openxmlformats.org/drawingml/2006/main" l="0" t="34180" r="0" b="34180"/>
           <a:stretch xmlns:a="http://schemas.openxmlformats.org/drawingml/2006/main">
             <a:fillRect/>
           </a:stretch>
         </p:blipFill>
         <p:spPr>
-          <a:xfrm xmlns:a="http://schemas.openxmlformats.org/drawingml/2006/main">
+          <a:xfrm xmlns:a="http://schemas.openxmlformats.org/drawingml/2006/main" flipH="1">
             <a:off x="0" y="0"/>
             <a:ext cx="15240000" cy="8572500"/>
           </a:xfrm>
@@ -730,8 +730,8 @@
           <p:nvPr/>
         </p:nvPicPr>
         <p:blipFill>
-          <a:blip xmlns:r="http://schemas.openxmlformats.org/officeDocument/2006/relationships" xmlns:a="http://schemas.openxmlformats.org/drawingml/2006/main" r:embed="rIdOfficeKitImagec7b73f8fac405495_1"/>
-          <a:srcRect xmlns:a="http://schemas.openxmlformats.org/drawingml/2006/main" l="0" t="34171" r="0" b="34171"/>
+          <a:blip xmlns:r="http://schemas.openxmlformats.org/officeDocument/2006/relationships" xmlns:a="http://schemas.openxmlformats.org/drawingml/2006/main" r:embed="rIdOfficeKitImage7790b68b5d8fcd92_1"/>
+          <a:srcRect xmlns:a="http://schemas.openxmlformats.org/drawingml/2006/main" l="0" t="34180" r="0" b="34180"/>
           <a:stretch xmlns:a="http://schemas.openxmlformats.org/drawingml/2006/main">
             <a:fillRect/>
           </a:stretch>
@@ -1087,8 +1087,8 @@
           <p:nvPr/>
         </p:nvPicPr>
         <p:blipFill>
-          <a:blip xmlns:r="http://schemas.openxmlformats.org/officeDocument/2006/relationships" xmlns:a="http://schemas.openxmlformats.org/drawingml/2006/main" r:embed="rIdOfficeKitImagec7b73f8fac405495_1"/>
-          <a:srcRect xmlns:a="http://schemas.openxmlformats.org/drawingml/2006/main" l="0" t="31910" r="0" b="31910"/>
+          <a:blip xmlns:r="http://schemas.openxmlformats.org/officeDocument/2006/relationships" xmlns:a="http://schemas.openxmlformats.org/drawingml/2006/main" r:embed="rIdOfficeKitImage7790b68b5d8fcd92_1"/>
+          <a:srcRect xmlns:a="http://schemas.openxmlformats.org/drawingml/2006/main" l="0" t="31920" r="0" b="31920"/>
           <a:stretch xmlns:a="http://schemas.openxmlformats.org/drawingml/2006/main">
             <a:fillRect/>
           </a:stretch>
@@ -1287,8 +1287,8 @@
           <p:nvPr/>
         </p:nvPicPr>
         <p:blipFill>
-          <a:blip xmlns:r="http://schemas.openxmlformats.org/officeDocument/2006/relationships" xmlns:a="http://schemas.openxmlformats.org/drawingml/2006/main" r:embed="rIdOfficeKitImage59ee3aa5202fd02f_1"/>
-          <a:srcRect xmlns:a="http://schemas.openxmlformats.org/drawingml/2006/main" l="0" t="34180" r="0" b="34180"/>
+          <a:blip xmlns:r="http://schemas.openxmlformats.org/officeDocument/2006/relationships" xmlns:a="http://schemas.openxmlformats.org/drawingml/2006/main" r:embed="rIdOfficeKitImage31956823b229fb66_1"/>
+          <a:srcRect xmlns:a="http://schemas.openxmlformats.org/drawingml/2006/main" l="0" t="34171" r="0" b="34171"/>
           <a:stretch xmlns:a="http://schemas.openxmlformats.org/drawingml/2006/main">
             <a:fillRect/>
           </a:stretch>
@@ -1534,7 +1534,7 @@
         </p:xfrm>
         <a:graphic xmlns:a="http://schemas.openxmlformats.org/drawingml/2006/main">
           <a:graphicData uri="http://schemas.openxmlformats.org/drawingml/2006/chart">
-            <c:chart xmlns:r="http://schemas.openxmlformats.org/officeDocument/2006/relationships" xmlns:c="http://schemas.openxmlformats.org/drawingml/2006/chart" r:id="R9a3fd21d210b4ebb"/>
+            <c:chart xmlns:r="http://schemas.openxmlformats.org/officeDocument/2006/relationships" xmlns:c="http://schemas.openxmlformats.org/drawingml/2006/chart" r:id="Rb0878afce4814278"/>
           </a:graphicData>
         </a:graphic>
       </p:graphicFrame>
@@ -3372,7 +3372,7 @@
           <p:nvPr/>
         </p:nvPicPr>
         <p:blipFill>
-          <a:blip xmlns:r="http://schemas.openxmlformats.org/officeDocument/2006/relationships" xmlns:a="http://schemas.openxmlformats.org/drawingml/2006/main" r:embed="rIdOfficeKitImage59ee3aa5202fd02f_1"/>
+          <a:blip xmlns:r="http://schemas.openxmlformats.org/officeDocument/2006/relationships" xmlns:a="http://schemas.openxmlformats.org/drawingml/2006/main" r:embed="rIdOfficeKitImageaeb6f74d36d260d0_1"/>
           <a:srcRect xmlns:a="http://schemas.openxmlformats.org/drawingml/2006/main" l="0" t="34180" r="0" b="34180"/>
           <a:stretch xmlns:a="http://schemas.openxmlformats.org/drawingml/2006/main">
             <a:fillRect/>

--- a/skills/presentation-template-library/skills/artifact-template-silver-atelier/assets/reference.pptx
+++ b/skills/presentation-template-library/skills/artifact-template-silver-atelier/assets/reference.pptx
@@ -381,14 +381,14 @@
           <p:nvPr/>
         </p:nvPicPr>
         <p:blipFill>
-          <a:blip xmlns:r="http://schemas.openxmlformats.org/officeDocument/2006/relationships" xmlns:a="http://schemas.openxmlformats.org/drawingml/2006/main" r:embed="rIdOfficeKitImage13db13f70d7843cc_1"/>
+          <a:blip xmlns:r="http://schemas.openxmlformats.org/officeDocument/2006/relationships" xmlns:a="http://schemas.openxmlformats.org/drawingml/2006/main" r:embed="rIdOfficeKitImage7790b68b5d8fcd92_1"/>
           <a:srcRect xmlns:a="http://schemas.openxmlformats.org/drawingml/2006/main" l="0" t="34180" r="0" b="34180"/>
           <a:stretch xmlns:a="http://schemas.openxmlformats.org/drawingml/2006/main">
             <a:fillRect/>
           </a:stretch>
         </p:blipFill>
         <p:spPr>
-          <a:xfrm xmlns:a="http://schemas.openxmlformats.org/drawingml/2006/main" flipH="1">
+          <a:xfrm xmlns:a="http://schemas.openxmlformats.org/drawingml/2006/main">
             <a:off x="0" y="0"/>
             <a:ext cx="15240000" cy="8572500"/>
           </a:xfrm>
@@ -730,8 +730,8 @@
           <p:nvPr/>
         </p:nvPicPr>
         <p:blipFill>
-          <a:blip xmlns:r="http://schemas.openxmlformats.org/officeDocument/2006/relationships" xmlns:a="http://schemas.openxmlformats.org/drawingml/2006/main" r:embed="rIdOfficeKitImage7790b68b5d8fcd92_1"/>
-          <a:srcRect xmlns:a="http://schemas.openxmlformats.org/drawingml/2006/main" l="0" t="34180" r="0" b="34180"/>
+          <a:blip xmlns:r="http://schemas.openxmlformats.org/officeDocument/2006/relationships" xmlns:a="http://schemas.openxmlformats.org/drawingml/2006/main" r:embed="rIdOfficeKitImagec237998db8bee20d_1"/>
+          <a:srcRect xmlns:a="http://schemas.openxmlformats.org/drawingml/2006/main" l="0" t="34170" r="0" b="34170"/>
           <a:stretch xmlns:a="http://schemas.openxmlformats.org/drawingml/2006/main">
             <a:fillRect/>
           </a:stretch>
@@ -1087,8 +1087,8 @@
           <p:nvPr/>
         </p:nvPicPr>
         <p:blipFill>
-          <a:blip xmlns:r="http://schemas.openxmlformats.org/officeDocument/2006/relationships" xmlns:a="http://schemas.openxmlformats.org/drawingml/2006/main" r:embed="rIdOfficeKitImage7790b68b5d8fcd92_1"/>
-          <a:srcRect xmlns:a="http://schemas.openxmlformats.org/drawingml/2006/main" l="0" t="31920" r="0" b="31920"/>
+          <a:blip xmlns:r="http://schemas.openxmlformats.org/officeDocument/2006/relationships" xmlns:a="http://schemas.openxmlformats.org/drawingml/2006/main" r:embed="rIdOfficeKitImagec237998db8bee20d_1"/>
+          <a:srcRect xmlns:a="http://schemas.openxmlformats.org/drawingml/2006/main" l="0" t="31908" r="0" b="31908"/>
           <a:stretch xmlns:a="http://schemas.openxmlformats.org/drawingml/2006/main">
             <a:fillRect/>
           </a:stretch>
@@ -1534,7 +1534,7 @@
         </p:xfrm>
         <a:graphic xmlns:a="http://schemas.openxmlformats.org/drawingml/2006/main">
           <a:graphicData uri="http://schemas.openxmlformats.org/drawingml/2006/chart">
-            <c:chart xmlns:r="http://schemas.openxmlformats.org/officeDocument/2006/relationships" xmlns:c="http://schemas.openxmlformats.org/drawingml/2006/chart" r:id="Rb0878afce4814278"/>
+            <c:chart xmlns:r="http://schemas.openxmlformats.org/officeDocument/2006/relationships" xmlns:c="http://schemas.openxmlformats.org/drawingml/2006/chart" r:id="R77b5f443997742e0"/>
           </a:graphicData>
         </a:graphic>
       </p:graphicFrame>

--- a/skills/presentation-template-library/skills/artifact-template-silver-atelier/assets/reference.pptx
+++ b/skills/presentation-template-library/skills/artifact-template-silver-atelier/assets/reference.pptx
@@ -354,6 +354,16 @@
 <file path=ppt/slides/slide1.xml><?xml version="1.0" encoding="utf-8"?>
 <p:sld xmlns:p="http://schemas.openxmlformats.org/presentationml/2006/main">
   <p:cSld name="Opening claim">
+    <p:bg>
+      <p:bgPr>
+        <a:blipFill xmlns:a="http://schemas.openxmlformats.org/drawingml/2006/main">
+          <a:blip xmlns:r="http://schemas.openxmlformats.org/officeDocument/2006/relationships" r:embed="rIdOfficeKitImage7790b68b5d8fcd92_1"/>
+          <a:stretch>
+            <a:fillRect/>
+          </a:stretch>
+        </a:blipFill>
+      </p:bgPr>
+    </p:bg>
     <p:spTree>
       <p:nvGrpSpPr>
         <p:cNvPr id="1" name=""/>
@@ -368,38 +378,9 @@
           <a:chExt cx="0" cy="0"/>
         </a:xfrm>
       </p:grpSpPr>
-      <p:pic>
-        <p:nvPicPr>
-          <p:cNvPr id="2" name="editorial-cover-field">
-            <a:extLst xmlns:a="http://schemas.openxmlformats.org/drawingml/2006/main">
-              <a:ext uri="{C183D7F6-B498-43B3-948B-1728B52AA6E4}">
-                <adec:decorative xmlns:adec="http://schemas.microsoft.com/office/drawing/2017/decorative" val="1"/>
-              </a:ext>
-            </a:extLst>
-          </p:cNvPr>
-          <p:cNvPicPr/>
-          <p:nvPr/>
-        </p:nvPicPr>
-        <p:blipFill>
-          <a:blip xmlns:r="http://schemas.openxmlformats.org/officeDocument/2006/relationships" xmlns:a="http://schemas.openxmlformats.org/drawingml/2006/main" r:embed="rIdOfficeKitImage7790b68b5d8fcd92_1"/>
-          <a:srcRect xmlns:a="http://schemas.openxmlformats.org/drawingml/2006/main" l="0" t="34180" r="0" b="34180"/>
-          <a:stretch xmlns:a="http://schemas.openxmlformats.org/drawingml/2006/main">
-            <a:fillRect/>
-          </a:stretch>
-        </p:blipFill>
-        <p:spPr>
-          <a:xfrm xmlns:a="http://schemas.openxmlformats.org/drawingml/2006/main">
-            <a:off x="0" y="0"/>
-            <a:ext cx="15240000" cy="8572500"/>
-          </a:xfrm>
-          <a:prstGeom xmlns:a="http://schemas.openxmlformats.org/drawingml/2006/main" prst="rect">
-            <a:avLst/>
-          </a:prstGeom>
-        </p:spPr>
-      </p:pic>
-      <p:sp>
-        <p:nvSpPr>
-          <p:cNvPr id="3" name="editorial-cover-scrim"/>
+      <p:sp>
+        <p:nvSpPr>
+          <p:cNvPr id="2" name="editorial-cover-scrim"/>
           <p:cNvSpPr/>
           <p:nvPr/>
         </p:nvSpPr>
@@ -437,7 +418,7 @@
       </p:sp>
       <p:sp>
         <p:nvSpPr>
-          <p:cNvPr id="4" name="eyebrow"/>
+          <p:cNvPr id="3" name="eyebrow"/>
           <p:cNvSpPr txBox="1"/>
           <p:nvPr/>
         </p:nvSpPr>
@@ -474,7 +455,7 @@
       </p:sp>
       <p:sp>
         <p:nvSpPr>
-          <p:cNvPr id="5" name="cover-title"/>
+          <p:cNvPr id="4" name="cover-title"/>
           <p:cNvSpPr txBox="1"/>
           <p:nvPr/>
         </p:nvSpPr>
@@ -511,7 +492,7 @@
       </p:sp>
       <p:sp>
         <p:nvSpPr>
-          <p:cNvPr id="6" name="cover-subtitle"/>
+          <p:cNvPr id="5" name="cover-subtitle"/>
           <p:cNvSpPr txBox="1"/>
           <p:nvPr/>
         </p:nvSpPr>
@@ -548,7 +529,7 @@
       </p:sp>
       <p:sp>
         <p:nvSpPr>
-          <p:cNvPr id="7" name="cover-photo-rule"/>
+          <p:cNvPr id="6" name="cover-photo-rule"/>
           <p:cNvSpPr/>
           <p:nvPr/>
         </p:nvSpPr>
@@ -582,7 +563,7 @@
       </p:sp>
       <p:sp>
         <p:nvSpPr>
-          <p:cNvPr id="8" name="cover-thesis"/>
+          <p:cNvPr id="7" name="cover-thesis"/>
           <p:cNvSpPr txBox="1"/>
           <p:nvPr/>
         </p:nvSpPr>
@@ -619,7 +600,7 @@
       </p:sp>
       <p:sp>
         <p:nvSpPr>
-          <p:cNvPr id="9" name="cover-source"/>
+          <p:cNvPr id="8" name="cover-source"/>
           <p:cNvSpPr txBox="1"/>
           <p:nvPr/>
         </p:nvSpPr>
@@ -656,7 +637,7 @@
       </p:sp>
       <p:sp>
         <p:nvSpPr>
-          <p:cNvPr id="10" name="page-number"/>
+          <p:cNvPr id="9" name="page-number"/>
           <p:cNvSpPr txBox="1"/>
           <p:nvPr/>
         </p:nvSpPr>
@@ -703,6 +684,16 @@
 <file path=ppt/slides/slide2.xml><?xml version="1.0" encoding="utf-8"?>
 <p:sld xmlns:p="http://schemas.openxmlformats.org/presentationml/2006/main">
   <p:cSld name="Argument">
+    <p:bg>
+      <p:bgPr>
+        <a:blipFill xmlns:a="http://schemas.openxmlformats.org/drawingml/2006/main">
+          <a:blip xmlns:r="http://schemas.openxmlformats.org/officeDocument/2006/relationships" r:embed="rIdOfficeKitImagec237998db8bee20d_1"/>
+          <a:stretch>
+            <a:fillRect/>
+          </a:stretch>
+        </a:blipFill>
+      </p:bgPr>
+    </p:bg>
     <p:spTree>
       <p:nvGrpSpPr>
         <p:cNvPr id="1" name=""/>
@@ -717,38 +708,9 @@
           <a:chExt cx="0" cy="0"/>
         </a:xfrm>
       </p:grpSpPr>
-      <p:pic>
-        <p:nvPicPr>
-          <p:cNvPr id="2" name="argument-visual-field">
-            <a:extLst xmlns:a="http://schemas.openxmlformats.org/drawingml/2006/main">
-              <a:ext uri="{C183D7F6-B498-43B3-948B-1728B52AA6E4}">
-                <adec:decorative xmlns:adec="http://schemas.microsoft.com/office/drawing/2017/decorative" val="1"/>
-              </a:ext>
-            </a:extLst>
-          </p:cNvPr>
-          <p:cNvPicPr/>
-          <p:nvPr/>
-        </p:nvPicPr>
-        <p:blipFill>
-          <a:blip xmlns:r="http://schemas.openxmlformats.org/officeDocument/2006/relationships" xmlns:a="http://schemas.openxmlformats.org/drawingml/2006/main" r:embed="rIdOfficeKitImagec237998db8bee20d_1"/>
-          <a:srcRect xmlns:a="http://schemas.openxmlformats.org/drawingml/2006/main" l="0" t="34170" r="0" b="34170"/>
-          <a:stretch xmlns:a="http://schemas.openxmlformats.org/drawingml/2006/main">
-            <a:fillRect/>
-          </a:stretch>
-        </p:blipFill>
-        <p:spPr>
-          <a:xfrm xmlns:a="http://schemas.openxmlformats.org/drawingml/2006/main">
-            <a:off x="0" y="0"/>
-            <a:ext cx="15240000" cy="8572500"/>
-          </a:xfrm>
-          <a:prstGeom xmlns:a="http://schemas.openxmlformats.org/drawingml/2006/main" prst="rect">
-            <a:avLst/>
-          </a:prstGeom>
-        </p:spPr>
-      </p:pic>
-      <p:sp>
-        <p:nvSpPr>
-          <p:cNvPr id="3" name="argument-paper-scrim"/>
+      <p:sp>
+        <p:nvSpPr>
+          <p:cNvPr id="2" name="argument-paper-scrim"/>
           <p:cNvSpPr/>
           <p:nvPr/>
         </p:nvSpPr>
@@ -786,7 +748,7 @@
       </p:sp>
       <p:sp>
         <p:nvSpPr>
-          <p:cNvPr id="4" name="argument-top-rule"/>
+          <p:cNvPr id="3" name="argument-top-rule"/>
           <p:cNvSpPr/>
           <p:nvPr/>
         </p:nvSpPr>
@@ -820,7 +782,7 @@
       </p:sp>
       <p:sp>
         <p:nvSpPr>
-          <p:cNvPr id="5" name="SILVER ATELIER · ARGUMENT"/>
+          <p:cNvPr id="4" name="SILVER ATELIER · ARGUMENT"/>
           <p:cNvSpPr txBox="1"/>
           <p:nvPr/>
         </p:nvSpPr>
@@ -857,7 +819,7 @@
       </p:sp>
       <p:sp>
         <p:nvSpPr>
-          <p:cNvPr id="6" name="argument-title"/>
+          <p:cNvPr id="5" name="argument-title"/>
           <p:cNvSpPr txBox="1"/>
           <p:nvPr/>
         </p:nvSpPr>
@@ -894,7 +856,7 @@
       </p:sp>
       <p:sp>
         <p:nvSpPr>
-          <p:cNvPr id="7" name="argument-basis"/>
+          <p:cNvPr id="6" name="argument-basis"/>
           <p:cNvSpPr txBox="1"/>
           <p:nvPr/>
         </p:nvSpPr>
@@ -931,7 +893,7 @@
       </p:sp>
       <p:sp>
         <p:nvSpPr>
-          <p:cNvPr id="8" name="argument-rule"/>
+          <p:cNvPr id="7" name="argument-rule"/>
           <p:cNvSpPr/>
           <p:nvPr/>
         </p:nvSpPr>
@@ -965,7 +927,7 @@
       </p:sp>
       <p:sp>
         <p:nvSpPr>
-          <p:cNvPr id="9" name="promotion-kicker"/>
+          <p:cNvPr id="8" name="promotion-kicker"/>
           <p:cNvSpPr txBox="1"/>
           <p:nvPr/>
         </p:nvSpPr>
@@ -1002,7 +964,7 @@
       </p:sp>
       <p:sp>
         <p:nvSpPr>
-          <p:cNvPr id="10" name="promotion-headline"/>
+          <p:cNvPr id="9" name="promotion-headline"/>
           <p:cNvSpPr txBox="1"/>
           <p:nvPr/>
         </p:nvSpPr>
@@ -1039,7 +1001,7 @@
       </p:sp>
       <p:sp>
         <p:nvSpPr>
-          <p:cNvPr id="11" name="promotion-body"/>
+          <p:cNvPr id="10" name="promotion-body"/>
           <p:cNvSpPr txBox="1"/>
           <p:nvPr/>
         </p:nvSpPr>
@@ -1076,7 +1038,7 @@
       </p:sp>
       <p:pic>
         <p:nvPicPr>
-          <p:cNvPr id="12" name="promotion-hero-frame">
+          <p:cNvPr id="11" name="promotion-hero-frame">
             <a:extLst xmlns:a="http://schemas.openxmlformats.org/drawingml/2006/main">
               <a:ext uri="{C183D7F6-B498-43B3-948B-1728B52AA6E4}">
                 <adec:decorative xmlns:adec="http://schemas.microsoft.com/office/drawing/2017/decorative" val="1"/>
@@ -1105,7 +1067,7 @@
       </p:pic>
       <p:sp>
         <p:nvSpPr>
-          <p:cNvPr id="13" name="promotion-image-rule"/>
+          <p:cNvPr id="12" name="promotion-image-rule"/>
           <p:cNvSpPr/>
           <p:nvPr/>
         </p:nvSpPr>
@@ -1139,7 +1101,7 @@
       </p:sp>
       <p:sp>
         <p:nvSpPr>
-          <p:cNvPr id="14" name="promotion-image-label"/>
+          <p:cNvPr id="13" name="promotion-image-label"/>
           <p:cNvSpPr txBox="1"/>
           <p:nvPr/>
         </p:nvSpPr>
@@ -1176,7 +1138,7 @@
       </p:sp>
       <p:sp>
         <p:nvSpPr>
-          <p:cNvPr id="15" name="source"/>
+          <p:cNvPr id="14" name="source"/>
           <p:cNvSpPr txBox="1"/>
           <p:nvPr/>
         </p:nvSpPr>
@@ -1213,7 +1175,7 @@
       </p:sp>
       <p:sp>
         <p:nvSpPr>
-          <p:cNvPr id="16" name="page-number"/>
+          <p:cNvPr id="15" name="page-number"/>
           <p:cNvSpPr txBox="1"/>
           <p:nvPr/>
         </p:nvSpPr>
@@ -1260,6 +1222,16 @@
 <file path=ppt/slides/slide3.xml><?xml version="1.0" encoding="utf-8"?>
 <p:sld xmlns:p="http://schemas.openxmlformats.org/presentationml/2006/main">
   <p:cSld name="Evidence">
+    <p:bg>
+      <p:bgPr>
+        <a:blipFill xmlns:a="http://schemas.openxmlformats.org/drawingml/2006/main">
+          <a:blip xmlns:r="http://schemas.openxmlformats.org/officeDocument/2006/relationships" r:embed="rIdOfficeKitImage31956823b229fb66_1"/>
+          <a:stretch>
+            <a:fillRect/>
+          </a:stretch>
+        </a:blipFill>
+      </p:bgPr>
+    </p:bg>
     <p:spTree>
       <p:nvGrpSpPr>
         <p:cNvPr id="1" name=""/>
@@ -1274,38 +1246,9 @@
           <a:chExt cx="0" cy="0"/>
         </a:xfrm>
       </p:grpSpPr>
-      <p:pic>
-        <p:nvPicPr>
-          <p:cNvPr id="2" name="evidence-visual-field">
-            <a:extLst xmlns:a="http://schemas.openxmlformats.org/drawingml/2006/main">
-              <a:ext uri="{C183D7F6-B498-43B3-948B-1728B52AA6E4}">
-                <adec:decorative xmlns:adec="http://schemas.microsoft.com/office/drawing/2017/decorative" val="1"/>
-              </a:ext>
-            </a:extLst>
-          </p:cNvPr>
-          <p:cNvPicPr/>
-          <p:nvPr/>
-        </p:nvPicPr>
-        <p:blipFill>
-          <a:blip xmlns:r="http://schemas.openxmlformats.org/officeDocument/2006/relationships" xmlns:a="http://schemas.openxmlformats.org/drawingml/2006/main" r:embed="rIdOfficeKitImage31956823b229fb66_1"/>
-          <a:srcRect xmlns:a="http://schemas.openxmlformats.org/drawingml/2006/main" l="0" t="34171" r="0" b="34171"/>
-          <a:stretch xmlns:a="http://schemas.openxmlformats.org/drawingml/2006/main">
-            <a:fillRect/>
-          </a:stretch>
-        </p:blipFill>
-        <p:spPr>
-          <a:xfrm xmlns:a="http://schemas.openxmlformats.org/drawingml/2006/main">
-            <a:off x="0" y="0"/>
-            <a:ext cx="15240000" cy="8572500"/>
-          </a:xfrm>
-          <a:prstGeom xmlns:a="http://schemas.openxmlformats.org/drawingml/2006/main" prst="rect">
-            <a:avLst/>
-          </a:prstGeom>
-        </p:spPr>
-      </p:pic>
-      <p:sp>
-        <p:nvSpPr>
-          <p:cNvPr id="3" name="evidence-paper-scrim"/>
+      <p:sp>
+        <p:nvSpPr>
+          <p:cNvPr id="2" name="evidence-paper-scrim"/>
           <p:cNvSpPr/>
           <p:nvPr/>
         </p:nvSpPr>
@@ -1343,7 +1286,7 @@
       </p:sp>
       <p:sp>
         <p:nvSpPr>
-          <p:cNvPr id="4" name="evidence-top-rule"/>
+          <p:cNvPr id="3" name="evidence-top-rule"/>
           <p:cNvSpPr/>
           <p:nvPr/>
         </p:nvSpPr>
@@ -1377,7 +1320,7 @@
       </p:sp>
       <p:sp>
         <p:nvSpPr>
-          <p:cNvPr id="5" name="SILVER ATELIER · EVIDENCE"/>
+          <p:cNvPr id="4" name="SILVER ATELIER · EVIDENCE"/>
           <p:cNvSpPr txBox="1"/>
           <p:nvPr/>
         </p:nvSpPr>
@@ -1414,7 +1357,7 @@
       </p:sp>
       <p:sp>
         <p:nvSpPr>
-          <p:cNvPr id="6" name="evidence-title"/>
+          <p:cNvPr id="5" name="evidence-title"/>
           <p:cNvSpPr txBox="1"/>
           <p:nvPr/>
         </p:nvSpPr>
@@ -1451,7 +1394,7 @@
       </p:sp>
       <p:sp>
         <p:nvSpPr>
-          <p:cNvPr id="7" name="evidence-basis"/>
+          <p:cNvPr id="6" name="evidence-basis"/>
           <p:cNvSpPr txBox="1"/>
           <p:nvPr/>
         </p:nvSpPr>
@@ -1488,7 +1431,7 @@
       </p:sp>
       <p:sp>
         <p:nvSpPr>
-          <p:cNvPr id="8" name="evidence-rule"/>
+          <p:cNvPr id="7" name="evidence-rule"/>
           <p:cNvSpPr/>
           <p:nvPr/>
         </p:nvSpPr>
@@ -1522,7 +1465,7 @@
       </p:sp>
       <p:graphicFrame>
         <p:nvGraphicFramePr>
-          <p:cNvPr id="9" name="evidence-chart"/>
+          <p:cNvPr id="8" name="evidence-chart"/>
           <p:cNvGraphicFramePr>
             <a:graphicFrameLocks xmlns:a="http://schemas.openxmlformats.org/drawingml/2006/main" noGrp="1"/>
           </p:cNvGraphicFramePr>
@@ -1534,13 +1477,13 @@
         </p:xfrm>
         <a:graphic xmlns:a="http://schemas.openxmlformats.org/drawingml/2006/main">
           <a:graphicData uri="http://schemas.openxmlformats.org/drawingml/2006/chart">
-            <c:chart xmlns:r="http://schemas.openxmlformats.org/officeDocument/2006/relationships" xmlns:c="http://schemas.openxmlformats.org/drawingml/2006/chart" r:id="R77b5f443997742e0"/>
+            <c:chart xmlns:r="http://schemas.openxmlformats.org/officeDocument/2006/relationships" xmlns:c="http://schemas.openxmlformats.org/drawingml/2006/chart" r:id="R0eb11adf5d9f4ffd"/>
           </a:graphicData>
         </a:graphic>
       </p:graphicFrame>
       <p:sp>
         <p:nvSpPr>
-          <p:cNvPr id="10" name="metric"/>
+          <p:cNvPr id="9" name="metric"/>
           <p:cNvSpPr txBox="1"/>
           <p:nvPr/>
         </p:nvSpPr>
@@ -1577,7 +1520,7 @@
       </p:sp>
       <p:sp>
         <p:nvSpPr>
-          <p:cNvPr id="11" name="metric-label"/>
+          <p:cNvPr id="10" name="metric-label"/>
           <p:cNvSpPr txBox="1"/>
           <p:nvPr/>
         </p:nvSpPr>
@@ -1614,7 +1557,7 @@
       </p:sp>
       <p:sp>
         <p:nvSpPr>
-          <p:cNvPr id="12" name="rail-rule"/>
+          <p:cNvPr id="11" name="rail-rule"/>
           <p:cNvSpPr/>
           <p:nvPr/>
         </p:nvSpPr>
@@ -1648,7 +1591,7 @@
       </p:sp>
       <p:sp>
         <p:nvSpPr>
-          <p:cNvPr id="13" name="read-through"/>
+          <p:cNvPr id="12" name="read-through"/>
           <p:cNvSpPr txBox="1"/>
           <p:nvPr/>
         </p:nvSpPr>
@@ -1685,7 +1628,7 @@
       </p:sp>
       <p:sp>
         <p:nvSpPr>
-          <p:cNvPr id="14" name="evidence-band"/>
+          <p:cNvPr id="13" name="evidence-band"/>
           <p:cNvSpPr/>
           <p:nvPr/>
         </p:nvSpPr>
@@ -1721,7 +1664,7 @@
       </p:sp>
       <p:sp>
         <p:nvSpPr>
-          <p:cNvPr id="15" name="evidence-band-text"/>
+          <p:cNvPr id="14" name="evidence-band-text"/>
           <p:cNvSpPr txBox="1"/>
           <p:nvPr/>
         </p:nvSpPr>
@@ -1758,7 +1701,7 @@
       </p:sp>
       <p:sp>
         <p:nvSpPr>
-          <p:cNvPr id="16" name="source"/>
+          <p:cNvPr id="15" name="source"/>
           <p:cNvSpPr txBox="1"/>
           <p:nvPr/>
         </p:nvSpPr>
@@ -1795,7 +1738,7 @@
       </p:sp>
       <p:sp>
         <p:nvSpPr>
-          <p:cNvPr id="17" name="page-number"/>
+          <p:cNvPr id="16" name="page-number"/>
           <p:cNvSpPr txBox="1"/>
           <p:nvPr/>
         </p:nvSpPr>
@@ -2996,6 +2939,16 @@
 <file path=ppt/slides/slide5.xml><?xml version="1.0" encoding="utf-8"?>
 <p:sld xmlns:p="http://schemas.openxmlformats.org/presentationml/2006/main">
   <p:cSld name="Visual carrier">
+    <p:bg>
+      <p:bgPr>
+        <a:blipFill xmlns:a="http://schemas.openxmlformats.org/drawingml/2006/main">
+          <a:blip xmlns:r="http://schemas.openxmlformats.org/officeDocument/2006/relationships" r:embed="rIdOfficeKitImagec7b73f8fac405495_1"/>
+          <a:stretch>
+            <a:fillRect/>
+          </a:stretch>
+        </a:blipFill>
+      </p:bgPr>
+    </p:bg>
     <p:spTree>
       <p:nvGrpSpPr>
         <p:cNvPr id="1" name=""/>
@@ -3010,38 +2963,9 @@
           <a:chExt cx="0" cy="0"/>
         </a:xfrm>
       </p:grpSpPr>
-      <p:pic>
-        <p:nvPicPr>
-          <p:cNvPr id="2" name="visual-field">
-            <a:extLst xmlns:a="http://schemas.openxmlformats.org/drawingml/2006/main">
-              <a:ext uri="{C183D7F6-B498-43B3-948B-1728B52AA6E4}">
-                <adec:decorative xmlns:adec="http://schemas.microsoft.com/office/drawing/2017/decorative" val="1"/>
-              </a:ext>
-            </a:extLst>
-          </p:cNvPr>
-          <p:cNvPicPr/>
-          <p:nvPr/>
-        </p:nvPicPr>
-        <p:blipFill>
-          <a:blip xmlns:r="http://schemas.openxmlformats.org/officeDocument/2006/relationships" xmlns:a="http://schemas.openxmlformats.org/drawingml/2006/main" r:embed="rIdOfficeKitImagec7b73f8fac405495_1"/>
-          <a:srcRect xmlns:a="http://schemas.openxmlformats.org/drawingml/2006/main" l="0" t="34171" r="0" b="34171"/>
-          <a:stretch xmlns:a="http://schemas.openxmlformats.org/drawingml/2006/main">
-            <a:fillRect/>
-          </a:stretch>
-        </p:blipFill>
-        <p:spPr>
-          <a:xfrm xmlns:a="http://schemas.openxmlformats.org/drawingml/2006/main">
-            <a:off x="0" y="0"/>
-            <a:ext cx="15240000" cy="8572500"/>
-          </a:xfrm>
-          <a:prstGeom xmlns:a="http://schemas.openxmlformats.org/drawingml/2006/main" prst="rect">
-            <a:avLst/>
-          </a:prstGeom>
-        </p:spPr>
-      </p:pic>
-      <p:sp>
-        <p:nvSpPr>
-          <p:cNvPr id="3" name="visual-scrim"/>
+      <p:sp>
+        <p:nvSpPr>
+          <p:cNvPr id="2" name="visual-scrim"/>
           <p:cNvSpPr/>
           <p:nvPr/>
         </p:nvSpPr>
@@ -3079,7 +3003,7 @@
       </p:sp>
       <p:sp>
         <p:nvSpPr>
-          <p:cNvPr id="4" name="visual-eyebrow"/>
+          <p:cNvPr id="3" name="visual-eyebrow"/>
           <p:cNvSpPr txBox="1"/>
           <p:nvPr/>
         </p:nvSpPr>
@@ -3116,7 +3040,7 @@
       </p:sp>
       <p:sp>
         <p:nvSpPr>
-          <p:cNvPr id="5" name="visual-title"/>
+          <p:cNvPr id="4" name="visual-title"/>
           <p:cNvSpPr txBox="1"/>
           <p:nvPr/>
         </p:nvSpPr>
@@ -3153,7 +3077,7 @@
       </p:sp>
       <p:sp>
         <p:nvSpPr>
-          <p:cNvPr id="6" name="visual-body"/>
+          <p:cNvPr id="5" name="visual-body"/>
           <p:cNvSpPr txBox="1"/>
           <p:nvPr/>
         </p:nvSpPr>
@@ -3190,7 +3114,7 @@
       </p:sp>
       <p:sp>
         <p:nvSpPr>
-          <p:cNvPr id="7" name="visual-rule"/>
+          <p:cNvPr id="6" name="visual-rule"/>
           <p:cNvSpPr/>
           <p:nvPr/>
         </p:nvSpPr>
@@ -3224,7 +3148,7 @@
       </p:sp>
       <p:sp>
         <p:nvSpPr>
-          <p:cNvPr id="8" name="visual-label"/>
+          <p:cNvPr id="7" name="visual-label"/>
           <p:cNvSpPr txBox="1"/>
           <p:nvPr/>
         </p:nvSpPr>
@@ -3261,7 +3185,7 @@
       </p:sp>
       <p:sp>
         <p:nvSpPr>
-          <p:cNvPr id="9" name="source"/>
+          <p:cNvPr id="8" name="source"/>
           <p:cNvSpPr txBox="1"/>
           <p:nvPr/>
         </p:nvSpPr>
@@ -3298,7 +3222,7 @@
       </p:sp>
       <p:sp>
         <p:nvSpPr>
-          <p:cNvPr id="10" name="page-number"/>
+          <p:cNvPr id="9" name="page-number"/>
           <p:cNvSpPr txBox="1"/>
           <p:nvPr/>
         </p:nvSpPr>
@@ -3345,6 +3269,16 @@
 <file path=ppt/slides/slide6.xml><?xml version="1.0" encoding="utf-8"?>
 <p:sld xmlns:p="http://schemas.openxmlformats.org/presentationml/2006/main">
   <p:cSld name="Decision close">
+    <p:bg>
+      <p:bgPr>
+        <a:blipFill xmlns:a="http://schemas.openxmlformats.org/drawingml/2006/main">
+          <a:blip xmlns:r="http://schemas.openxmlformats.org/officeDocument/2006/relationships" r:embed="rIdOfficeKitImageaeb6f74d36d260d0_1"/>
+          <a:stretch>
+            <a:fillRect/>
+          </a:stretch>
+        </a:blipFill>
+      </p:bgPr>
+    </p:bg>
     <p:spTree>
       <p:nvGrpSpPr>
         <p:cNvPr id="1" name=""/>
@@ -3359,38 +3293,9 @@
           <a:chExt cx="0" cy="0"/>
         </a:xfrm>
       </p:grpSpPr>
-      <p:pic>
-        <p:nvPicPr>
-          <p:cNvPr id="2" name="close-visual-field">
-            <a:extLst xmlns:a="http://schemas.openxmlformats.org/drawingml/2006/main">
-              <a:ext uri="{C183D7F6-B498-43B3-948B-1728B52AA6E4}">
-                <adec:decorative xmlns:adec="http://schemas.microsoft.com/office/drawing/2017/decorative" val="1"/>
-              </a:ext>
-            </a:extLst>
-          </p:cNvPr>
-          <p:cNvPicPr/>
-          <p:nvPr/>
-        </p:nvPicPr>
-        <p:blipFill>
-          <a:blip xmlns:r="http://schemas.openxmlformats.org/officeDocument/2006/relationships" xmlns:a="http://schemas.openxmlformats.org/drawingml/2006/main" r:embed="rIdOfficeKitImageaeb6f74d36d260d0_1"/>
-          <a:srcRect xmlns:a="http://schemas.openxmlformats.org/drawingml/2006/main" l="0" t="34180" r="0" b="34180"/>
-          <a:stretch xmlns:a="http://schemas.openxmlformats.org/drawingml/2006/main">
-            <a:fillRect/>
-          </a:stretch>
-        </p:blipFill>
-        <p:spPr>
-          <a:xfrm xmlns:a="http://schemas.openxmlformats.org/drawingml/2006/main">
-            <a:off x="0" y="0"/>
-            <a:ext cx="15240000" cy="8572500"/>
-          </a:xfrm>
-          <a:prstGeom xmlns:a="http://schemas.openxmlformats.org/drawingml/2006/main" prst="rect">
-            <a:avLst/>
-          </a:prstGeom>
-        </p:spPr>
-      </p:pic>
-      <p:sp>
-        <p:nvSpPr>
-          <p:cNvPr id="3" name="close-paper-scrim"/>
+      <p:sp>
+        <p:nvSpPr>
+          <p:cNvPr id="2" name="close-paper-scrim"/>
           <p:cNvSpPr/>
           <p:nvPr/>
         </p:nvSpPr>
@@ -3428,7 +3333,7 @@
       </p:sp>
       <p:sp>
         <p:nvSpPr>
-          <p:cNvPr id="4" name="close-top-rule"/>
+          <p:cNvPr id="3" name="close-top-rule"/>
           <p:cNvSpPr/>
           <p:nvPr/>
         </p:nvSpPr>
@@ -3462,7 +3367,7 @@
       </p:sp>
       <p:sp>
         <p:nvSpPr>
-          <p:cNvPr id="5" name="SILVER ATELIER · CLOSE"/>
+          <p:cNvPr id="4" name="SILVER ATELIER · CLOSE"/>
           <p:cNvSpPr txBox="1"/>
           <p:nvPr/>
         </p:nvSpPr>
@@ -3499,7 +3404,7 @@
       </p:sp>
       <p:sp>
         <p:nvSpPr>
-          <p:cNvPr id="6" name="close-title"/>
+          <p:cNvPr id="5" name="close-title"/>
           <p:cNvSpPr txBox="1"/>
           <p:nvPr/>
         </p:nvSpPr>
@@ -3536,7 +3441,7 @@
       </p:sp>
       <p:sp>
         <p:nvSpPr>
-          <p:cNvPr id="7" name="close-basis"/>
+          <p:cNvPr id="6" name="close-basis"/>
           <p:cNvSpPr txBox="1"/>
           <p:nvPr/>
         </p:nvSpPr>
@@ -3573,7 +3478,7 @@
       </p:sp>
       <p:sp>
         <p:nvSpPr>
-          <p:cNvPr id="8" name="close-rule"/>
+          <p:cNvPr id="7" name="close-rule"/>
           <p:cNvSpPr/>
           <p:nvPr/>
         </p:nvSpPr>
@@ -3607,7 +3512,7 @@
       </p:sp>
       <p:sp>
         <p:nvSpPr>
-          <p:cNvPr id="9" name="close-number-0"/>
+          <p:cNvPr id="8" name="close-number-0"/>
           <p:cNvSpPr txBox="1"/>
           <p:nvPr/>
         </p:nvSpPr>
@@ -3644,7 +3549,7 @@
       </p:sp>
       <p:sp>
         <p:nvSpPr>
-          <p:cNvPr id="10" name="close-row-rule-0"/>
+          <p:cNvPr id="9" name="close-row-rule-0"/>
           <p:cNvSpPr/>
           <p:nvPr/>
         </p:nvSpPr>
@@ -3678,7 +3583,7 @@
       </p:sp>
       <p:sp>
         <p:nvSpPr>
-          <p:cNvPr id="11" name="close-label-0"/>
+          <p:cNvPr id="10" name="close-label-0"/>
           <p:cNvSpPr txBox="1"/>
           <p:nvPr/>
         </p:nvSpPr>
@@ -3715,7 +3620,7 @@
       </p:sp>
       <p:sp>
         <p:nvSpPr>
-          <p:cNvPr id="12" name="close-text-0"/>
+          <p:cNvPr id="11" name="close-text-0"/>
           <p:cNvSpPr txBox="1"/>
           <p:nvPr/>
         </p:nvSpPr>
@@ -3752,7 +3657,7 @@
       </p:sp>
       <p:sp>
         <p:nvSpPr>
-          <p:cNvPr id="13" name="close-number-1"/>
+          <p:cNvPr id="12" name="close-number-1"/>
           <p:cNvSpPr txBox="1"/>
           <p:nvPr/>
         </p:nvSpPr>
@@ -3789,7 +3694,7 @@
       </p:sp>
       <p:sp>
         <p:nvSpPr>
-          <p:cNvPr id="14" name="close-row-rule-1"/>
+          <p:cNvPr id="13" name="close-row-rule-1"/>
           <p:cNvSpPr/>
           <p:nvPr/>
         </p:nvSpPr>
@@ -3823,7 +3728,7 @@
       </p:sp>
       <p:sp>
         <p:nvSpPr>
-          <p:cNvPr id="15" name="close-label-1"/>
+          <p:cNvPr id="14" name="close-label-1"/>
           <p:cNvSpPr txBox="1"/>
           <p:nvPr/>
         </p:nvSpPr>
@@ -3860,7 +3765,7 @@
       </p:sp>
       <p:sp>
         <p:nvSpPr>
-          <p:cNvPr id="16" name="close-text-1"/>
+          <p:cNvPr id="15" name="close-text-1"/>
           <p:cNvSpPr txBox="1"/>
           <p:nvPr/>
         </p:nvSpPr>
@@ -3897,7 +3802,7 @@
       </p:sp>
       <p:sp>
         <p:nvSpPr>
-          <p:cNvPr id="17" name="close-number-2"/>
+          <p:cNvPr id="16" name="close-number-2"/>
           <p:cNvSpPr txBox="1"/>
           <p:nvPr/>
         </p:nvSpPr>
@@ -3934,7 +3839,7 @@
       </p:sp>
       <p:sp>
         <p:nvSpPr>
-          <p:cNvPr id="18" name="close-row-rule-2"/>
+          <p:cNvPr id="17" name="close-row-rule-2"/>
           <p:cNvSpPr/>
           <p:nvPr/>
         </p:nvSpPr>
@@ -3968,7 +3873,7 @@
       </p:sp>
       <p:sp>
         <p:nvSpPr>
-          <p:cNvPr id="19" name="close-label-2"/>
+          <p:cNvPr id="18" name="close-label-2"/>
           <p:cNvSpPr txBox="1"/>
           <p:nvPr/>
         </p:nvSpPr>
@@ -4005,7 +3910,7 @@
       </p:sp>
       <p:sp>
         <p:nvSpPr>
-          <p:cNvPr id="20" name="close-text-2"/>
+          <p:cNvPr id="19" name="close-text-2"/>
           <p:cNvSpPr txBox="1"/>
           <p:nvPr/>
         </p:nvSpPr>
@@ -4042,7 +3947,7 @@
       </p:sp>
       <p:sp>
         <p:nvSpPr>
-          <p:cNvPr id="21" name="next-rule"/>
+          <p:cNvPr id="20" name="next-rule"/>
           <p:cNvSpPr/>
           <p:nvPr/>
         </p:nvSpPr>
@@ -4076,7 +3981,7 @@
       </p:sp>
       <p:sp>
         <p:nvSpPr>
-          <p:cNvPr id="22" name="next-label"/>
+          <p:cNvPr id="21" name="next-label"/>
           <p:cNvSpPr txBox="1"/>
           <p:nvPr/>
         </p:nvSpPr>
@@ -4113,7 +4018,7 @@
       </p:sp>
       <p:sp>
         <p:nvSpPr>
-          <p:cNvPr id="23" name="next-text"/>
+          <p:cNvPr id="22" name="next-text"/>
           <p:cNvSpPr txBox="1"/>
           <p:nvPr/>
         </p:nvSpPr>
@@ -4150,7 +4055,7 @@
       </p:sp>
       <p:sp>
         <p:nvSpPr>
-          <p:cNvPr id="24" name="next-foot"/>
+          <p:cNvPr id="23" name="next-foot"/>
           <p:cNvSpPr txBox="1"/>
           <p:nvPr/>
         </p:nvSpPr>
@@ -4187,7 +4092,7 @@
       </p:sp>
       <p:sp>
         <p:nvSpPr>
-          <p:cNvPr id="25" name="source"/>
+          <p:cNvPr id="24" name="source"/>
           <p:cNvSpPr txBox="1"/>
           <p:nvPr/>
         </p:nvSpPr>
@@ -4224,7 +4129,7 @@
       </p:sp>
       <p:sp>
         <p:nvSpPr>
-          <p:cNvPr id="26" name="page-number"/>
+          <p:cNvPr id="25" name="page-number"/>
           <p:cNvSpPr txBox="1"/>
           <p:nvPr/>
         </p:nvSpPr>

--- a/skills/presentation-template-library/skills/artifact-template-silver-atelier/assets/reference.pptx
+++ b/skills/presentation-template-library/skills/artifact-template-silver-atelier/assets/reference.pptx
@@ -354,6 +354,355 @@
 <file path=ppt/slides/slide1.xml><?xml version="1.0" encoding="utf-8"?>
 <p:sld xmlns:p="http://schemas.openxmlformats.org/presentationml/2006/main">
   <p:cSld name="Opening claim">
+    <p:spTree>
+      <p:nvGrpSpPr>
+        <p:cNvPr id="1" name=""/>
+        <p:cNvGrpSpPr/>
+        <p:nvPr/>
+      </p:nvGrpSpPr>
+      <p:grpSpPr>
+        <a:xfrm xmlns:a="http://schemas.openxmlformats.org/drawingml/2006/main">
+          <a:off x="0" y="0"/>
+          <a:ext cx="0" cy="0"/>
+          <a:chOff x="0" y="0"/>
+          <a:chExt cx="0" cy="0"/>
+        </a:xfrm>
+      </p:grpSpPr>
+      <p:pic>
+        <p:nvPicPr>
+          <p:cNvPr id="2" name="cover-visual-field">
+            <a:extLst xmlns:a="http://schemas.openxmlformats.org/drawingml/2006/main">
+              <a:ext uri="{C183D7F6-B498-43B3-948B-1728B52AA6E4}">
+                <adec:decorative xmlns:adec="http://schemas.microsoft.com/office/drawing/2017/decorative" val="1"/>
+              </a:ext>
+            </a:extLst>
+          </p:cNvPr>
+          <p:cNvPicPr/>
+          <p:nvPr/>
+        </p:nvPicPr>
+        <p:blipFill>
+          <a:blip xmlns:r="http://schemas.openxmlformats.org/officeDocument/2006/relationships" xmlns:a="http://schemas.openxmlformats.org/drawingml/2006/main" r:embed="rIdOfficeKitImage13db13f70d7843cc_1"/>
+          <a:srcRect xmlns:a="http://schemas.openxmlformats.org/drawingml/2006/main" l="0" t="34180" r="0" b="34180"/>
+          <a:stretch xmlns:a="http://schemas.openxmlformats.org/drawingml/2006/main">
+            <a:fillRect/>
+          </a:stretch>
+        </p:blipFill>
+        <p:spPr>
+          <a:xfrm xmlns:a="http://schemas.openxmlformats.org/drawingml/2006/main" flipH="1">
+            <a:off x="0" y="0"/>
+            <a:ext cx="15240000" cy="8572500"/>
+          </a:xfrm>
+          <a:prstGeom xmlns:a="http://schemas.openxmlformats.org/drawingml/2006/main" prst="rect">
+            <a:avLst/>
+          </a:prstGeom>
+        </p:spPr>
+      </p:pic>
+      <p:sp>
+        <p:nvSpPr>
+          <p:cNvPr id="3" name="editorial-cover-scrim"/>
+          <p:cNvSpPr/>
+          <p:nvPr/>
+        </p:nvSpPr>
+        <p:spPr>
+          <a:xfrm xmlns:a="http://schemas.openxmlformats.org/drawingml/2006/main">
+            <a:off x="0" y="0"/>
+            <a:ext cx="7239000" cy="8572500"/>
+          </a:xfrm>
+          <a:prstGeom xmlns:a="http://schemas.openxmlformats.org/drawingml/2006/main" prst="rect">
+            <a:avLst/>
+          </a:prstGeom>
+          <a:solidFill xmlns:a="http://schemas.openxmlformats.org/drawingml/2006/main">
+            <a:srgbClr val="171717">
+              <a:alpha val="84000"/>
+            </a:srgbClr>
+          </a:solidFill>
+          <a:ln xmlns:a="http://schemas.openxmlformats.org/drawingml/2006/main" w="0">
+            <a:solidFill>
+              <a:srgbClr val="171717"/>
+            </a:solidFill>
+            <a:prstDash val="solid"/>
+          </a:ln>
+        </p:spPr>
+        <p:txBody>
+          <a:bodyPr xmlns:a="http://schemas.openxmlformats.org/drawingml/2006/main" wrap="square" lIns="0" tIns="0" rIns="0" bIns="0" anchor="t"/>
+          <a:lstStyle xmlns:a="http://schemas.openxmlformats.org/drawingml/2006/main"/>
+          <a:p xmlns:a="http://schemas.openxmlformats.org/drawingml/2006/main">
+            <a:r>
+              <a:rPr lang="en-US"/>
+              <a:t/>
+            </a:r>
+            <a:endParaRPr lang="en-US"/>
+          </a:p>
+        </p:txBody>
+      </p:sp>
+      <p:sp>
+        <p:nvSpPr>
+          <p:cNvPr id="4" name="eyebrow"/>
+          <p:cNvSpPr txBox="1"/>
+          <p:nvPr/>
+        </p:nvSpPr>
+        <p:spPr>
+          <a:xfrm xmlns:a="http://schemas.openxmlformats.org/drawingml/2006/main">
+            <a:off x="914400" y="800100"/>
+            <a:ext cx="7048500" cy="228600"/>
+          </a:xfrm>
+          <a:prstGeom xmlns:a="http://schemas.openxmlformats.org/drawingml/2006/main" prst="rect">
+            <a:avLst/>
+          </a:prstGeom>
+          <a:noFill xmlns:a="http://schemas.openxmlformats.org/drawingml/2006/main"/>
+          <a:ln xmlns:a="http://schemas.openxmlformats.org/drawingml/2006/main" w="0">
+            <a:noFill/>
+          </a:ln>
+        </p:spPr>
+        <p:txBody>
+          <a:bodyPr xmlns:a="http://schemas.openxmlformats.org/drawingml/2006/main" wrap="square" lIns="0" tIns="0" rIns="0" bIns="0" anchor="t"/>
+          <a:lstStyle xmlns:a="http://schemas.openxmlformats.org/drawingml/2006/main"/>
+          <a:p xmlns:a="http://schemas.openxmlformats.org/drawingml/2006/main">
+            <a:r>
+              <a:rPr lang="en-US" sz="1125" b="1">
+                <a:solidFill>
+                  <a:srgbClr val="9A6B45"/>
+                </a:solidFill>
+                <a:latin typeface="Tahoma"/>
+                <a:ea typeface="Tahoma"/>
+              </a:rPr>
+              <a:t>PROMOTION · OFFICEKIT CALIBRATION</a:t>
+            </a:r>
+            <a:endParaRPr lang="en-US"/>
+          </a:p>
+        </p:txBody>
+      </p:sp>
+      <p:sp>
+        <p:nvSpPr>
+          <p:cNvPr id="5" name="cover-title"/>
+          <p:cNvSpPr txBox="1"/>
+          <p:nvPr/>
+        </p:nvSpPr>
+        <p:spPr>
+          <a:xfrm xmlns:a="http://schemas.openxmlformats.org/drawingml/2006/main">
+            <a:off x="914400" y="1962150"/>
+            <a:ext cx="5810250" cy="1333500"/>
+          </a:xfrm>
+          <a:prstGeom xmlns:a="http://schemas.openxmlformats.org/drawingml/2006/main" prst="rect">
+            <a:avLst/>
+          </a:prstGeom>
+          <a:noFill xmlns:a="http://schemas.openxmlformats.org/drawingml/2006/main"/>
+          <a:ln xmlns:a="http://schemas.openxmlformats.org/drawingml/2006/main" w="0">
+            <a:noFill/>
+          </a:ln>
+        </p:spPr>
+        <p:txBody>
+          <a:bodyPr xmlns:a="http://schemas.openxmlformats.org/drawingml/2006/main" wrap="square" lIns="0" tIns="0" rIns="0" bIns="0" anchor="t"/>
+          <a:lstStyle xmlns:a="http://schemas.openxmlformats.org/drawingml/2006/main"/>
+          <a:p xmlns:a="http://schemas.openxmlformats.org/drawingml/2006/main">
+            <a:r>
+              <a:rPr lang="en-US" sz="3900" b="1">
+                <a:solidFill>
+                  <a:srgbClr val="FFFFFF"/>
+                </a:solidFill>
+                <a:latin typeface="Tahoma"/>
+                <a:ea typeface="Tahoma"/>
+              </a:rPr>
+              <a:t>Silver Atelier: a claim worth testing</a:t>
+            </a:r>
+            <a:endParaRPr lang="en-US"/>
+          </a:p>
+        </p:txBody>
+      </p:sp>
+      <p:sp>
+        <p:nvSpPr>
+          <p:cNvPr id="6" name="cover-subtitle"/>
+          <p:cNvSpPr txBox="1"/>
+          <p:nvPr/>
+        </p:nvSpPr>
+        <p:spPr>
+          <a:xfrm xmlns:a="http://schemas.openxmlformats.org/drawingml/2006/main">
+            <a:off x="952500" y="3638550"/>
+            <a:ext cx="5334000" cy="323850"/>
+          </a:xfrm>
+          <a:prstGeom xmlns:a="http://schemas.openxmlformats.org/drawingml/2006/main" prst="rect">
+            <a:avLst/>
+          </a:prstGeom>
+          <a:noFill xmlns:a="http://schemas.openxmlformats.org/drawingml/2006/main"/>
+          <a:ln xmlns:a="http://schemas.openxmlformats.org/drawingml/2006/main" w="0">
+            <a:noFill/>
+          </a:ln>
+        </p:spPr>
+        <p:txBody>
+          <a:bodyPr xmlns:a="http://schemas.openxmlformats.org/drawingml/2006/main" wrap="square" lIns="0" tIns="0" rIns="0" bIns="0" anchor="t"/>
+          <a:lstStyle xmlns:a="http://schemas.openxmlformats.org/drawingml/2006/main"/>
+          <a:p xmlns:a="http://schemas.openxmlformats.org/drawingml/2006/main">
+            <a:r>
+              <a:rPr lang="en-US" sz="1650">
+                <a:solidFill>
+                  <a:srgbClr val="F0F2F2"/>
+                </a:solidFill>
+                <a:latin typeface="Tahoma"/>
+                <a:ea typeface="Tahoma"/>
+              </a:rPr>
+              <a:t>A clean-room reference for a visual proposition.</a:t>
+            </a:r>
+            <a:endParaRPr lang="en-US"/>
+          </a:p>
+        </p:txBody>
+      </p:sp>
+      <p:sp>
+        <p:nvSpPr>
+          <p:cNvPr id="7" name="cover-photo-rule"/>
+          <p:cNvSpPr/>
+          <p:nvPr/>
+        </p:nvSpPr>
+        <p:spPr>
+          <a:xfrm xmlns:a="http://schemas.openxmlformats.org/drawingml/2006/main">
+            <a:off x="914400" y="4533900"/>
+            <a:ext cx="4895850" cy="0"/>
+          </a:xfrm>
+          <a:prstGeom xmlns:a="http://schemas.openxmlformats.org/drawingml/2006/main" prst="line">
+            <a:avLst/>
+          </a:prstGeom>
+          <a:noFill xmlns:a="http://schemas.openxmlformats.org/drawingml/2006/main"/>
+          <a:ln xmlns:a="http://schemas.openxmlformats.org/drawingml/2006/main" w="38100">
+            <a:solidFill>
+              <a:srgbClr val="9A6B45"/>
+            </a:solidFill>
+            <a:prstDash val="solid"/>
+          </a:ln>
+        </p:spPr>
+        <p:txBody>
+          <a:bodyPr xmlns:a="http://schemas.openxmlformats.org/drawingml/2006/main" wrap="square" lIns="0" tIns="0" rIns="0" bIns="0" anchor="t"/>
+          <a:lstStyle xmlns:a="http://schemas.openxmlformats.org/drawingml/2006/main"/>
+          <a:p xmlns:a="http://schemas.openxmlformats.org/drawingml/2006/main">
+            <a:r>
+              <a:rPr lang="en-US"/>
+              <a:t/>
+            </a:r>
+            <a:endParaRPr lang="en-US"/>
+          </a:p>
+        </p:txBody>
+      </p:sp>
+      <p:sp>
+        <p:nvSpPr>
+          <p:cNvPr id="8" name="cover-thesis"/>
+          <p:cNvSpPr txBox="1"/>
+          <p:nvPr/>
+        </p:nvSpPr>
+        <p:spPr>
+          <a:xfrm xmlns:a="http://schemas.openxmlformats.org/drawingml/2006/main">
+            <a:off x="952500" y="4895850"/>
+            <a:ext cx="5715000" cy="647700"/>
+          </a:xfrm>
+          <a:prstGeom xmlns:a="http://schemas.openxmlformats.org/drawingml/2006/main" prst="rect">
+            <a:avLst/>
+          </a:prstGeom>
+          <a:noFill xmlns:a="http://schemas.openxmlformats.org/drawingml/2006/main"/>
+          <a:ln xmlns:a="http://schemas.openxmlformats.org/drawingml/2006/main" w="0">
+            <a:noFill/>
+          </a:ln>
+        </p:spPr>
+        <p:txBody>
+          <a:bodyPr xmlns:a="http://schemas.openxmlformats.org/drawingml/2006/main" wrap="square" lIns="0" tIns="0" rIns="0" bIns="0" anchor="t"/>
+          <a:lstStyle xmlns:a="http://schemas.openxmlformats.org/drawingml/2006/main"/>
+          <a:p xmlns:a="http://schemas.openxmlformats.org/drawingml/2006/main">
+            <a:r>
+              <a:rPr lang="en-US" sz="1950" b="1">
+                <a:solidFill>
+                  <a:srgbClr val="FFFFFF"/>
+                </a:solidFill>
+                <a:latin typeface="Tahoma"/>
+                <a:ea typeface="Tahoma"/>
+              </a:rPr>
+              <a:t>A proposition earns attention when it gives a next move.</a:t>
+            </a:r>
+            <a:endParaRPr lang="en-US"/>
+          </a:p>
+        </p:txBody>
+      </p:sp>
+      <p:sp>
+        <p:nvSpPr>
+          <p:cNvPr id="9" name="cover-source"/>
+          <p:cNvSpPr txBox="1"/>
+          <p:nvPr/>
+        </p:nvSpPr>
+        <p:spPr>
+          <a:xfrm xmlns:a="http://schemas.openxmlformats.org/drawingml/2006/main">
+            <a:off x="952500" y="7334250"/>
+            <a:ext cx="9048750" cy="228600"/>
+          </a:xfrm>
+          <a:prstGeom xmlns:a="http://schemas.openxmlformats.org/drawingml/2006/main" prst="rect">
+            <a:avLst/>
+          </a:prstGeom>
+          <a:noFill xmlns:a="http://schemas.openxmlformats.org/drawingml/2006/main"/>
+          <a:ln xmlns:a="http://schemas.openxmlformats.org/drawingml/2006/main" w="0">
+            <a:noFill/>
+          </a:ln>
+        </p:spPr>
+        <p:txBody>
+          <a:bodyPr xmlns:a="http://schemas.openxmlformats.org/drawingml/2006/main" wrap="square" lIns="0" tIns="0" rIns="0" bIns="0" anchor="t"/>
+          <a:lstStyle xmlns:a="http://schemas.openxmlformats.org/drawingml/2006/main"/>
+          <a:p xmlns:a="http://schemas.openxmlformats.org/drawingml/2006/main">
+            <a:r>
+              <a:rPr lang="en-US" sz="1050">
+                <a:solidFill>
+                  <a:srgbClr val="F0F2F2"/>
+                </a:solidFill>
+                <a:latin typeface="Tahoma"/>
+                <a:ea typeface="Tahoma"/>
+              </a:rPr>
+              <a:t>OfficeKit original clean-room calibration · fictional content · 2026-08-29</a:t>
+            </a:r>
+            <a:endParaRPr lang="en-US"/>
+          </a:p>
+        </p:txBody>
+      </p:sp>
+      <p:sp>
+        <p:nvSpPr>
+          <p:cNvPr id="10" name="page-number"/>
+          <p:cNvSpPr txBox="1"/>
+          <p:nvPr/>
+        </p:nvSpPr>
+        <p:spPr>
+          <a:xfrm xmlns:a="http://schemas.openxmlformats.org/drawingml/2006/main">
+            <a:off x="13335000" y="7810500"/>
+            <a:ext cx="952500" cy="209550"/>
+          </a:xfrm>
+          <a:prstGeom xmlns:a="http://schemas.openxmlformats.org/drawingml/2006/main" prst="rect">
+            <a:avLst/>
+          </a:prstGeom>
+          <a:noFill xmlns:a="http://schemas.openxmlformats.org/drawingml/2006/main"/>
+          <a:ln xmlns:a="http://schemas.openxmlformats.org/drawingml/2006/main" w="0">
+            <a:noFill/>
+          </a:ln>
+        </p:spPr>
+        <p:txBody>
+          <a:bodyPr xmlns:a="http://schemas.openxmlformats.org/drawingml/2006/main" wrap="square" lIns="0" tIns="0" rIns="0" bIns="0" anchor="t"/>
+          <a:lstStyle xmlns:a="http://schemas.openxmlformats.org/drawingml/2006/main"/>
+          <a:p xmlns:a="http://schemas.openxmlformats.org/drawingml/2006/main">
+            <a:pPr algn="r"/>
+            <a:r>
+              <a:rPr lang="en-US" sz="1050">
+                <a:solidFill>
+                  <a:srgbClr val="F0F2F2"/>
+                </a:solidFill>
+                <a:latin typeface="Tahoma"/>
+                <a:ea typeface="Tahoma"/>
+              </a:rPr>
+              <a:t>1 / 6</a:t>
+            </a:r>
+            <a:endParaRPr lang="en-US"/>
+          </a:p>
+        </p:txBody>
+      </p:sp>
+    </p:spTree>
+  </p:cSld>
+  <p:clrMapOvr>
+    <a:masterClrMapping xmlns:a="http://schemas.openxmlformats.org/drawingml/2006/main"/>
+  </p:clrMapOvr>
+</p:sld>
+</file>
+
+<file path=ppt/slides/slide2.xml><?xml version="1.0" encoding="utf-8"?>
+<p:sld xmlns:p="http://schemas.openxmlformats.org/presentationml/2006/main">
+  <p:cSld name="Argument">
     <p:bg>
       <p:bgPr>
         <a:blipFill xmlns:a="http://schemas.openxmlformats.org/drawingml/2006/main">
@@ -380,26 +729,26 @@
       </p:grpSpPr>
       <p:sp>
         <p:nvSpPr>
-          <p:cNvPr id="2" name="editorial-cover-scrim"/>
+          <p:cNvPr id="2" name="argument-paper-scrim"/>
           <p:cNvSpPr/>
           <p:nvPr/>
         </p:nvSpPr>
         <p:spPr>
           <a:xfrm xmlns:a="http://schemas.openxmlformats.org/drawingml/2006/main">
             <a:off x="0" y="0"/>
-            <a:ext cx="7239000" cy="8572500"/>
+            <a:ext cx="7429500" cy="8572500"/>
           </a:xfrm>
           <a:prstGeom xmlns:a="http://schemas.openxmlformats.org/drawingml/2006/main" prst="rect">
             <a:avLst/>
           </a:prstGeom>
           <a:solidFill xmlns:a="http://schemas.openxmlformats.org/drawingml/2006/main">
-            <a:srgbClr val="171717">
-              <a:alpha val="84000"/>
+            <a:srgbClr val="F2F3F3">
+              <a:alpha val="96000"/>
             </a:srgbClr>
           </a:solidFill>
           <a:ln xmlns:a="http://schemas.openxmlformats.org/drawingml/2006/main" w="0">
             <a:solidFill>
-              <a:srgbClr val="171717"/>
+              <a:srgbClr val="F2F3F3"/>
             </a:solidFill>
             <a:prstDash val="solid"/>
           </a:ln>
@@ -418,125 +767,14 @@
       </p:sp>
       <p:sp>
         <p:nvSpPr>
-          <p:cNvPr id="3" name="eyebrow"/>
-          <p:cNvSpPr txBox="1"/>
-          <p:nvPr/>
-        </p:nvSpPr>
-        <p:spPr>
-          <a:xfrm xmlns:a="http://schemas.openxmlformats.org/drawingml/2006/main">
-            <a:off x="914400" y="800100"/>
-            <a:ext cx="7048500" cy="228600"/>
-          </a:xfrm>
-          <a:prstGeom xmlns:a="http://schemas.openxmlformats.org/drawingml/2006/main" prst="rect">
-            <a:avLst/>
-          </a:prstGeom>
-          <a:noFill xmlns:a="http://schemas.openxmlformats.org/drawingml/2006/main"/>
-          <a:ln xmlns:a="http://schemas.openxmlformats.org/drawingml/2006/main" w="0">
-            <a:noFill/>
-          </a:ln>
-        </p:spPr>
-        <p:txBody>
-          <a:bodyPr xmlns:a="http://schemas.openxmlformats.org/drawingml/2006/main" wrap="square" lIns="0" tIns="0" rIns="0" bIns="0" anchor="t"/>
-          <a:lstStyle xmlns:a="http://schemas.openxmlformats.org/drawingml/2006/main"/>
-          <a:p xmlns:a="http://schemas.openxmlformats.org/drawingml/2006/main">
-            <a:r>
-              <a:rPr lang="en-US" sz="1125" b="1">
-                <a:solidFill>
-                  <a:srgbClr val="9A6B45"/>
-                </a:solidFill>
-                <a:latin typeface="Tahoma"/>
-                <a:ea typeface="Tahoma"/>
-              </a:rPr>
-              <a:t>PROMOTION · OFFICEKIT CALIBRATION</a:t>
-            </a:r>
-            <a:endParaRPr lang="en-US"/>
-          </a:p>
-        </p:txBody>
-      </p:sp>
-      <p:sp>
-        <p:nvSpPr>
-          <p:cNvPr id="4" name="cover-title"/>
-          <p:cNvSpPr txBox="1"/>
-          <p:nvPr/>
-        </p:nvSpPr>
-        <p:spPr>
-          <a:xfrm xmlns:a="http://schemas.openxmlformats.org/drawingml/2006/main">
-            <a:off x="914400" y="1962150"/>
-            <a:ext cx="5810250" cy="1333500"/>
-          </a:xfrm>
-          <a:prstGeom xmlns:a="http://schemas.openxmlformats.org/drawingml/2006/main" prst="rect">
-            <a:avLst/>
-          </a:prstGeom>
-          <a:noFill xmlns:a="http://schemas.openxmlformats.org/drawingml/2006/main"/>
-          <a:ln xmlns:a="http://schemas.openxmlformats.org/drawingml/2006/main" w="0">
-            <a:noFill/>
-          </a:ln>
-        </p:spPr>
-        <p:txBody>
-          <a:bodyPr xmlns:a="http://schemas.openxmlformats.org/drawingml/2006/main" wrap="square" lIns="0" tIns="0" rIns="0" bIns="0" anchor="t"/>
-          <a:lstStyle xmlns:a="http://schemas.openxmlformats.org/drawingml/2006/main"/>
-          <a:p xmlns:a="http://schemas.openxmlformats.org/drawingml/2006/main">
-            <a:r>
-              <a:rPr lang="en-US" sz="3900" b="1">
-                <a:solidFill>
-                  <a:srgbClr val="FFFFFF"/>
-                </a:solidFill>
-                <a:latin typeface="Tahoma"/>
-                <a:ea typeface="Tahoma"/>
-              </a:rPr>
-              <a:t>Silver Atelier: a claim worth testing</a:t>
-            </a:r>
-            <a:endParaRPr lang="en-US"/>
-          </a:p>
-        </p:txBody>
-      </p:sp>
-      <p:sp>
-        <p:nvSpPr>
-          <p:cNvPr id="5" name="cover-subtitle"/>
-          <p:cNvSpPr txBox="1"/>
-          <p:nvPr/>
-        </p:nvSpPr>
-        <p:spPr>
-          <a:xfrm xmlns:a="http://schemas.openxmlformats.org/drawingml/2006/main">
-            <a:off x="952500" y="3638550"/>
-            <a:ext cx="5334000" cy="323850"/>
-          </a:xfrm>
-          <a:prstGeom xmlns:a="http://schemas.openxmlformats.org/drawingml/2006/main" prst="rect">
-            <a:avLst/>
-          </a:prstGeom>
-          <a:noFill xmlns:a="http://schemas.openxmlformats.org/drawingml/2006/main"/>
-          <a:ln xmlns:a="http://schemas.openxmlformats.org/drawingml/2006/main" w="0">
-            <a:noFill/>
-          </a:ln>
-        </p:spPr>
-        <p:txBody>
-          <a:bodyPr xmlns:a="http://schemas.openxmlformats.org/drawingml/2006/main" wrap="square" lIns="0" tIns="0" rIns="0" bIns="0" anchor="t"/>
-          <a:lstStyle xmlns:a="http://schemas.openxmlformats.org/drawingml/2006/main"/>
-          <a:p xmlns:a="http://schemas.openxmlformats.org/drawingml/2006/main">
-            <a:r>
-              <a:rPr lang="en-US" sz="1650">
-                <a:solidFill>
-                  <a:srgbClr val="F0F2F2"/>
-                </a:solidFill>
-                <a:latin typeface="Tahoma"/>
-                <a:ea typeface="Tahoma"/>
-              </a:rPr>
-              <a:t>A clean-room reference for a visual proposition.</a:t>
-            </a:r>
-            <a:endParaRPr lang="en-US"/>
-          </a:p>
-        </p:txBody>
-      </p:sp>
-      <p:sp>
-        <p:nvSpPr>
-          <p:cNvPr id="6" name="cover-photo-rule"/>
+          <p:cNvPr id="3" name="argument-top-rule"/>
           <p:cNvSpPr/>
           <p:nvPr/>
         </p:nvSpPr>
         <p:spPr>
           <a:xfrm xmlns:a="http://schemas.openxmlformats.org/drawingml/2006/main">
-            <a:off x="914400" y="4533900"/>
-            <a:ext cx="4895850" cy="0"/>
+            <a:off x="838200" y="666750"/>
+            <a:ext cx="13563600" cy="0"/>
           </a:xfrm>
           <a:prstGeom xmlns:a="http://schemas.openxmlformats.org/drawingml/2006/main" prst="line">
             <a:avLst/>
@@ -563,51 +801,383 @@
       </p:sp>
       <p:sp>
         <p:nvSpPr>
-          <p:cNvPr id="7" name="cover-thesis"/>
-          <p:cNvSpPr txBox="1"/>
-          <p:nvPr/>
-        </p:nvSpPr>
-        <p:spPr>
-          <a:xfrm xmlns:a="http://schemas.openxmlformats.org/drawingml/2006/main">
-            <a:off x="952500" y="4895850"/>
-            <a:ext cx="5715000" cy="647700"/>
-          </a:xfrm>
-          <a:prstGeom xmlns:a="http://schemas.openxmlformats.org/drawingml/2006/main" prst="rect">
-            <a:avLst/>
-          </a:prstGeom>
-          <a:noFill xmlns:a="http://schemas.openxmlformats.org/drawingml/2006/main"/>
-          <a:ln xmlns:a="http://schemas.openxmlformats.org/drawingml/2006/main" w="0">
-            <a:noFill/>
-          </a:ln>
-        </p:spPr>
-        <p:txBody>
-          <a:bodyPr xmlns:a="http://schemas.openxmlformats.org/drawingml/2006/main" wrap="square" lIns="0" tIns="0" rIns="0" bIns="0" anchor="t"/>
-          <a:lstStyle xmlns:a="http://schemas.openxmlformats.org/drawingml/2006/main"/>
-          <a:p xmlns:a="http://schemas.openxmlformats.org/drawingml/2006/main">
-            <a:r>
-              <a:rPr lang="en-US" sz="1950" b="1">
-                <a:solidFill>
-                  <a:srgbClr val="FFFFFF"/>
-                </a:solidFill>
-                <a:latin typeface="Tahoma"/>
-                <a:ea typeface="Tahoma"/>
-              </a:rPr>
-              <a:t>A proposition earns attention when it gives a next move.</a:t>
-            </a:r>
-            <a:endParaRPr lang="en-US"/>
-          </a:p>
-        </p:txBody>
-      </p:sp>
-      <p:sp>
-        <p:nvSpPr>
-          <p:cNvPr id="8" name="cover-source"/>
-          <p:cNvSpPr txBox="1"/>
-          <p:nvPr/>
-        </p:nvSpPr>
-        <p:spPr>
-          <a:xfrm xmlns:a="http://schemas.openxmlformats.org/drawingml/2006/main">
-            <a:off x="952500" y="7334250"/>
-            <a:ext cx="9048750" cy="228600"/>
+          <p:cNvPr id="4" name="SILVER ATELIER · ARGUMENT"/>
+          <p:cNvSpPr txBox="1"/>
+          <p:nvPr/>
+        </p:nvSpPr>
+        <p:spPr>
+          <a:xfrm xmlns:a="http://schemas.openxmlformats.org/drawingml/2006/main">
+            <a:off x="914400" y="895350"/>
+            <a:ext cx="7239000" cy="228600"/>
+          </a:xfrm>
+          <a:prstGeom xmlns:a="http://schemas.openxmlformats.org/drawingml/2006/main" prst="rect">
+            <a:avLst/>
+          </a:prstGeom>
+          <a:noFill xmlns:a="http://schemas.openxmlformats.org/drawingml/2006/main"/>
+          <a:ln xmlns:a="http://schemas.openxmlformats.org/drawingml/2006/main" w="0">
+            <a:noFill/>
+          </a:ln>
+        </p:spPr>
+        <p:txBody>
+          <a:bodyPr xmlns:a="http://schemas.openxmlformats.org/drawingml/2006/main" wrap="square" lIns="0" tIns="0" rIns="0" bIns="0" anchor="t"/>
+          <a:lstStyle xmlns:a="http://schemas.openxmlformats.org/drawingml/2006/main"/>
+          <a:p xmlns:a="http://schemas.openxmlformats.org/drawingml/2006/main">
+            <a:r>
+              <a:rPr lang="en-US" sz="1200" b="1">
+                <a:solidFill>
+                  <a:srgbClr val="9A6B45"/>
+                </a:solidFill>
+                <a:latin typeface="Tahoma"/>
+                <a:ea typeface="Tahoma"/>
+              </a:rPr>
+              <a:t>SILVER ATELIER · ARGUMENT</a:t>
+            </a:r>
+            <a:endParaRPr lang="en-US"/>
+          </a:p>
+        </p:txBody>
+      </p:sp>
+      <p:sp>
+        <p:nvSpPr>
+          <p:cNvPr id="5" name="argument-title"/>
+          <p:cNvSpPr txBox="1"/>
+          <p:nvPr/>
+        </p:nvSpPr>
+        <p:spPr>
+          <a:xfrm xmlns:a="http://schemas.openxmlformats.org/drawingml/2006/main">
+            <a:off x="914400" y="1314450"/>
+            <a:ext cx="6286500" cy="914400"/>
+          </a:xfrm>
+          <a:prstGeom xmlns:a="http://schemas.openxmlformats.org/drawingml/2006/main" prst="rect">
+            <a:avLst/>
+          </a:prstGeom>
+          <a:noFill xmlns:a="http://schemas.openxmlformats.org/drawingml/2006/main"/>
+          <a:ln xmlns:a="http://schemas.openxmlformats.org/drawingml/2006/main" w="0">
+            <a:noFill/>
+          </a:ln>
+        </p:spPr>
+        <p:txBody>
+          <a:bodyPr xmlns:a="http://schemas.openxmlformats.org/drawingml/2006/main" wrap="square" lIns="0" tIns="0" rIns="0" bIns="0" anchor="t"/>
+          <a:lstStyle xmlns:a="http://schemas.openxmlformats.org/drawingml/2006/main"/>
+          <a:p xmlns:a="http://schemas.openxmlformats.org/drawingml/2006/main">
+            <a:r>
+              <a:rPr lang="en-US" sz="2550" b="1">
+                <a:solidFill>
+                  <a:srgbClr val="171717"/>
+                </a:solidFill>
+                <a:latin typeface="Tahoma"/>
+                <a:ea typeface="Tahoma"/>
+              </a:rPr>
+              <a:t>The proposition is the page's visual</a:t>
+            </a:r>
+            <a:endParaRPr lang="en-US"/>
+          </a:p>
+          <a:p xmlns:a="http://schemas.openxmlformats.org/drawingml/2006/main">
+            <a:r>
+              <a:rPr lang="en-US" sz="2550" b="1">
+                <a:solidFill>
+                  <a:srgbClr val="171717"/>
+                </a:solidFill>
+                <a:latin typeface="Tahoma"/>
+                <a:ea typeface="Tahoma"/>
+              </a:rPr>
+              <a:t>center</a:t>
+            </a:r>
+            <a:endParaRPr lang="en-US"/>
+          </a:p>
+        </p:txBody>
+      </p:sp>
+      <p:sp>
+        <p:nvSpPr>
+          <p:cNvPr id="6" name="argument-basis"/>
+          <p:cNvSpPr txBox="1"/>
+          <p:nvPr/>
+        </p:nvSpPr>
+        <p:spPr>
+          <a:xfrm xmlns:a="http://schemas.openxmlformats.org/drawingml/2006/main">
+            <a:off x="952500" y="2190750"/>
+            <a:ext cx="6096000" cy="266700"/>
+          </a:xfrm>
+          <a:prstGeom xmlns:a="http://schemas.openxmlformats.org/drawingml/2006/main" prst="rect">
+            <a:avLst/>
+          </a:prstGeom>
+          <a:noFill xmlns:a="http://schemas.openxmlformats.org/drawingml/2006/main"/>
+          <a:ln xmlns:a="http://schemas.openxmlformats.org/drawingml/2006/main" w="0">
+            <a:noFill/>
+          </a:ln>
+        </p:spPr>
+        <p:txBody>
+          <a:bodyPr xmlns:a="http://schemas.openxmlformats.org/drawingml/2006/main" wrap="square" lIns="0" tIns="0" rIns="0" bIns="0" anchor="t"/>
+          <a:lstStyle xmlns:a="http://schemas.openxmlformats.org/drawingml/2006/main"/>
+          <a:p xmlns:a="http://schemas.openxmlformats.org/drawingml/2006/main">
+            <a:r>
+              <a:rPr lang="en-US" sz="1350">
+                <a:solidFill>
+                  <a:srgbClr val="898989"/>
+                </a:solidFill>
+                <a:latin typeface="Tahoma"/>
+                <a:ea typeface="Tahoma"/>
+              </a:rPr>
+              <a:t>Scale, crop, and color invite attention without hiding the evidence.</a:t>
+            </a:r>
+            <a:endParaRPr lang="en-US"/>
+          </a:p>
+        </p:txBody>
+      </p:sp>
+      <p:sp>
+        <p:nvSpPr>
+          <p:cNvPr id="7" name="argument-rule"/>
+          <p:cNvSpPr/>
+          <p:nvPr/>
+        </p:nvSpPr>
+        <p:spPr>
+          <a:xfrm xmlns:a="http://schemas.openxmlformats.org/drawingml/2006/main">
+            <a:off x="914400" y="2457450"/>
+            <a:ext cx="13411200" cy="0"/>
+          </a:xfrm>
+          <a:prstGeom xmlns:a="http://schemas.openxmlformats.org/drawingml/2006/main" prst="line">
+            <a:avLst/>
+          </a:prstGeom>
+          <a:noFill xmlns:a="http://schemas.openxmlformats.org/drawingml/2006/main"/>
+          <a:ln xmlns:a="http://schemas.openxmlformats.org/drawingml/2006/main" w="25400">
+            <a:solidFill>
+              <a:srgbClr val="898989"/>
+            </a:solidFill>
+            <a:prstDash val="solid"/>
+          </a:ln>
+        </p:spPr>
+        <p:txBody>
+          <a:bodyPr xmlns:a="http://schemas.openxmlformats.org/drawingml/2006/main" wrap="square" lIns="0" tIns="0" rIns="0" bIns="0" anchor="t"/>
+          <a:lstStyle xmlns:a="http://schemas.openxmlformats.org/drawingml/2006/main"/>
+          <a:p xmlns:a="http://schemas.openxmlformats.org/drawingml/2006/main">
+            <a:r>
+              <a:rPr lang="en-US"/>
+              <a:t/>
+            </a:r>
+            <a:endParaRPr lang="en-US"/>
+          </a:p>
+        </p:txBody>
+      </p:sp>
+      <p:sp>
+        <p:nvSpPr>
+          <p:cNvPr id="8" name="promotion-kicker"/>
+          <p:cNvSpPr txBox="1"/>
+          <p:nvPr/>
+        </p:nvSpPr>
+        <p:spPr>
+          <a:xfrm xmlns:a="http://schemas.openxmlformats.org/drawingml/2006/main">
+            <a:off x="1104900" y="3352800"/>
+            <a:ext cx="2857500" cy="228600"/>
+          </a:xfrm>
+          <a:prstGeom xmlns:a="http://schemas.openxmlformats.org/drawingml/2006/main" prst="rect">
+            <a:avLst/>
+          </a:prstGeom>
+          <a:noFill xmlns:a="http://schemas.openxmlformats.org/drawingml/2006/main"/>
+          <a:ln xmlns:a="http://schemas.openxmlformats.org/drawingml/2006/main" w="0">
+            <a:noFill/>
+          </a:ln>
+        </p:spPr>
+        <p:txBody>
+          <a:bodyPr xmlns:a="http://schemas.openxmlformats.org/drawingml/2006/main" wrap="square" lIns="0" tIns="0" rIns="0" bIns="0" anchor="t"/>
+          <a:lstStyle xmlns:a="http://schemas.openxmlformats.org/drawingml/2006/main"/>
+          <a:p xmlns:a="http://schemas.openxmlformats.org/drawingml/2006/main">
+            <a:r>
+              <a:rPr lang="en-US" sz="1125" b="1">
+                <a:solidFill>
+                  <a:srgbClr val="9A6B45"/>
+                </a:solidFill>
+                <a:latin typeface="Tahoma"/>
+                <a:ea typeface="Tahoma"/>
+              </a:rPr>
+              <a:t>ONE PROPOSITION</a:t>
+            </a:r>
+            <a:endParaRPr lang="en-US"/>
+          </a:p>
+        </p:txBody>
+      </p:sp>
+      <p:sp>
+        <p:nvSpPr>
+          <p:cNvPr id="9" name="promotion-headline"/>
+          <p:cNvSpPr txBox="1"/>
+          <p:nvPr/>
+        </p:nvSpPr>
+        <p:spPr>
+          <a:xfrm xmlns:a="http://schemas.openxmlformats.org/drawingml/2006/main">
+            <a:off x="1104900" y="3790950"/>
+            <a:ext cx="6477000" cy="723900"/>
+          </a:xfrm>
+          <a:prstGeom xmlns:a="http://schemas.openxmlformats.org/drawingml/2006/main" prst="rect">
+            <a:avLst/>
+          </a:prstGeom>
+          <a:noFill xmlns:a="http://schemas.openxmlformats.org/drawingml/2006/main"/>
+          <a:ln xmlns:a="http://schemas.openxmlformats.org/drawingml/2006/main" w="0">
+            <a:noFill/>
+          </a:ln>
+        </p:spPr>
+        <p:txBody>
+          <a:bodyPr xmlns:a="http://schemas.openxmlformats.org/drawingml/2006/main" wrap="square" lIns="0" tIns="0" rIns="0" bIns="0" anchor="t"/>
+          <a:lstStyle xmlns:a="http://schemas.openxmlformats.org/drawingml/2006/main"/>
+          <a:p xmlns:a="http://schemas.openxmlformats.org/drawingml/2006/main">
+            <a:r>
+              <a:rPr lang="en-US" sz="2625" b="1">
+                <a:solidFill>
+                  <a:srgbClr val="171717"/>
+                </a:solidFill>
+                <a:latin typeface="Tahoma"/>
+                <a:ea typeface="Tahoma"/>
+              </a:rPr>
+              <a:t>Make the next action visible.</a:t>
+            </a:r>
+            <a:endParaRPr lang="en-US"/>
+          </a:p>
+        </p:txBody>
+      </p:sp>
+      <p:sp>
+        <p:nvSpPr>
+          <p:cNvPr id="10" name="promotion-body"/>
+          <p:cNvSpPr txBox="1"/>
+          <p:nvPr/>
+        </p:nvSpPr>
+        <p:spPr>
+          <a:xfrm xmlns:a="http://schemas.openxmlformats.org/drawingml/2006/main">
+            <a:off x="1104900" y="4762500"/>
+            <a:ext cx="6191250" cy="457200"/>
+          </a:xfrm>
+          <a:prstGeom xmlns:a="http://schemas.openxmlformats.org/drawingml/2006/main" prst="rect">
+            <a:avLst/>
+          </a:prstGeom>
+          <a:noFill xmlns:a="http://schemas.openxmlformats.org/drawingml/2006/main"/>
+          <a:ln xmlns:a="http://schemas.openxmlformats.org/drawingml/2006/main" w="0">
+            <a:noFill/>
+          </a:ln>
+        </p:spPr>
+        <p:txBody>
+          <a:bodyPr xmlns:a="http://schemas.openxmlformats.org/drawingml/2006/main" wrap="square" lIns="0" tIns="0" rIns="0" bIns="0" anchor="t"/>
+          <a:lstStyle xmlns:a="http://schemas.openxmlformats.org/drawingml/2006/main"/>
+          <a:p xmlns:a="http://schemas.openxmlformats.org/drawingml/2006/main">
+            <a:r>
+              <a:rPr lang="en-US" sz="1575">
+                <a:solidFill>
+                  <a:srgbClr val="171717"/>
+                </a:solidFill>
+                <a:latin typeface="Tahoma"/>
+                <a:ea typeface="Tahoma"/>
+              </a:rPr>
+              <a:t>A clear invitation earns attention when evidence and access arrive together.</a:t>
+            </a:r>
+            <a:endParaRPr lang="en-US"/>
+          </a:p>
+        </p:txBody>
+      </p:sp>
+      <p:pic>
+        <p:nvPicPr>
+          <p:cNvPr id="11" name="promotion-hero-frame">
+            <a:extLst xmlns:a="http://schemas.openxmlformats.org/drawingml/2006/main">
+              <a:ext uri="{C183D7F6-B498-43B3-948B-1728B52AA6E4}">
+                <adec:decorative xmlns:adec="http://schemas.microsoft.com/office/drawing/2017/decorative" val="1"/>
+              </a:ext>
+            </a:extLst>
+          </p:cNvPr>
+          <p:cNvPicPr/>
+          <p:nvPr/>
+        </p:nvPicPr>
+        <p:blipFill>
+          <a:blip xmlns:r="http://schemas.openxmlformats.org/officeDocument/2006/relationships" xmlns:a="http://schemas.openxmlformats.org/drawingml/2006/main" r:embed="rIdOfficeKitImagec237998db8bee20d_1"/>
+          <a:srcRect xmlns:a="http://schemas.openxmlformats.org/drawingml/2006/main" l="0" t="31908" r="0" b="31908"/>
+          <a:stretch xmlns:a="http://schemas.openxmlformats.org/drawingml/2006/main">
+            <a:fillRect/>
+          </a:stretch>
+        </p:blipFill>
+        <p:spPr>
+          <a:xfrm xmlns:a="http://schemas.openxmlformats.org/drawingml/2006/main">
+            <a:off x="9525000" y="3143250"/>
+            <a:ext cx="4000500" cy="2571750"/>
+          </a:xfrm>
+          <a:prstGeom xmlns:a="http://schemas.openxmlformats.org/drawingml/2006/main" prst="rect">
+            <a:avLst/>
+          </a:prstGeom>
+        </p:spPr>
+      </p:pic>
+      <p:sp>
+        <p:nvSpPr>
+          <p:cNvPr id="12" name="promotion-image-rule"/>
+          <p:cNvSpPr/>
+          <p:nvPr/>
+        </p:nvSpPr>
+        <p:spPr>
+          <a:xfrm xmlns:a="http://schemas.openxmlformats.org/drawingml/2006/main">
+            <a:off x="9525000" y="5905500"/>
+            <a:ext cx="4000500" cy="0"/>
+          </a:xfrm>
+          <a:prstGeom xmlns:a="http://schemas.openxmlformats.org/drawingml/2006/main" prst="line">
+            <a:avLst/>
+          </a:prstGeom>
+          <a:noFill xmlns:a="http://schemas.openxmlformats.org/drawingml/2006/main"/>
+          <a:ln xmlns:a="http://schemas.openxmlformats.org/drawingml/2006/main" w="38100">
+            <a:solidFill>
+              <a:srgbClr val="9A6B45"/>
+            </a:solidFill>
+            <a:prstDash val="solid"/>
+          </a:ln>
+        </p:spPr>
+        <p:txBody>
+          <a:bodyPr xmlns:a="http://schemas.openxmlformats.org/drawingml/2006/main" wrap="square" lIns="0" tIns="0" rIns="0" bIns="0" anchor="t"/>
+          <a:lstStyle xmlns:a="http://schemas.openxmlformats.org/drawingml/2006/main"/>
+          <a:p xmlns:a="http://schemas.openxmlformats.org/drawingml/2006/main">
+            <a:r>
+              <a:rPr lang="en-US"/>
+              <a:t/>
+            </a:r>
+            <a:endParaRPr lang="en-US"/>
+          </a:p>
+        </p:txBody>
+      </p:sp>
+      <p:sp>
+        <p:nvSpPr>
+          <p:cNvPr id="13" name="promotion-image-label"/>
+          <p:cNvSpPr txBox="1"/>
+          <p:nvPr/>
+        </p:nvSpPr>
+        <p:spPr>
+          <a:xfrm xmlns:a="http://schemas.openxmlformats.org/drawingml/2006/main">
+            <a:off x="9525000" y="6153150"/>
+            <a:ext cx="4000500" cy="247650"/>
+          </a:xfrm>
+          <a:prstGeom xmlns:a="http://schemas.openxmlformats.org/drawingml/2006/main" prst="rect">
+            <a:avLst/>
+          </a:prstGeom>
+          <a:noFill xmlns:a="http://schemas.openxmlformats.org/drawingml/2006/main"/>
+          <a:ln xmlns:a="http://schemas.openxmlformats.org/drawingml/2006/main" w="0">
+            <a:noFill/>
+          </a:ln>
+        </p:spPr>
+        <p:txBody>
+          <a:bodyPr xmlns:a="http://schemas.openxmlformats.org/drawingml/2006/main" wrap="square" lIns="0" tIns="0" rIns="0" bIns="0" anchor="t"/>
+          <a:lstStyle xmlns:a="http://schemas.openxmlformats.org/drawingml/2006/main"/>
+          <a:p xmlns:a="http://schemas.openxmlformats.org/drawingml/2006/main">
+            <a:r>
+              <a:rPr lang="en-US" sz="1275" b="1">
+                <a:solidFill>
+                  <a:srgbClr val="9A6B45"/>
+                </a:solidFill>
+                <a:latin typeface="Tahoma"/>
+                <a:ea typeface="Tahoma"/>
+              </a:rPr>
+              <a:t>INVITE · PROVE · MOVE</a:t>
+            </a:r>
+            <a:endParaRPr lang="en-US"/>
+          </a:p>
+        </p:txBody>
+      </p:sp>
+      <p:sp>
+        <p:nvSpPr>
+          <p:cNvPr id="14" name="source"/>
+          <p:cNvSpPr txBox="1"/>
+          <p:nvPr/>
+        </p:nvSpPr>
+        <p:spPr>
+          <a:xfrm xmlns:a="http://schemas.openxmlformats.org/drawingml/2006/main">
+            <a:off x="914400" y="7810500"/>
+            <a:ext cx="10953750" cy="209550"/>
           </a:xfrm>
           <a:prstGeom xmlns:a="http://schemas.openxmlformats.org/drawingml/2006/main" prst="rect">
             <a:avLst/>
@@ -624,20 +1194,20 @@
             <a:r>
               <a:rPr lang="en-US" sz="1050">
                 <a:solidFill>
-                  <a:srgbClr val="F0F2F2"/>
-                </a:solidFill>
-                <a:latin typeface="Tahoma"/>
-                <a:ea typeface="Tahoma"/>
-              </a:rPr>
-              <a:t>OfficeKit original clean-room calibration · fictional content · 2026-08-29</a:t>
-            </a:r>
-            <a:endParaRPr lang="en-US"/>
-          </a:p>
-        </p:txBody>
-      </p:sp>
-      <p:sp>
-        <p:nvSpPr>
-          <p:cNvPr id="9" name="page-number"/>
+                  <a:srgbClr val="898989"/>
+                </a:solidFill>
+                <a:latin typeface="Tahoma"/>
+                <a:ea typeface="Tahoma"/>
+              </a:rPr>
+              <a:t>Source: illustrative calibration brief · every claim is fictional and bounded</a:t>
+            </a:r>
+            <a:endParaRPr lang="en-US"/>
+          </a:p>
+        </p:txBody>
+      </p:sp>
+      <p:sp>
+        <p:nvSpPr>
+          <p:cNvPr id="15" name="page-number"/>
           <p:cNvSpPr txBox="1"/>
           <p:nvPr/>
         </p:nvSpPr>
@@ -662,12 +1232,12 @@
             <a:r>
               <a:rPr lang="en-US" sz="1050">
                 <a:solidFill>
-                  <a:srgbClr val="F0F2F2"/>
-                </a:solidFill>
-                <a:latin typeface="Tahoma"/>
-                <a:ea typeface="Tahoma"/>
-              </a:rPr>
-              <a:t>1 / 6</a:t>
+                  <a:srgbClr val="898989"/>
+                </a:solidFill>
+                <a:latin typeface="Tahoma"/>
+                <a:ea typeface="Tahoma"/>
+              </a:rPr>
+              <a:t>2 / 6</a:t>
             </a:r>
             <a:endParaRPr lang="en-US"/>
           </a:p>
@@ -681,13 +1251,13 @@
 </p:sld>
 </file>
 
-<file path=ppt/slides/slide2.xml><?xml version="1.0" encoding="utf-8"?>
+<file path=ppt/slides/slide3.xml><?xml version="1.0" encoding="utf-8"?>
 <p:sld xmlns:p="http://schemas.openxmlformats.org/presentationml/2006/main">
-  <p:cSld name="Argument">
+  <p:cSld name="Evidence">
     <p:bg>
       <p:bgPr>
         <a:blipFill xmlns:a="http://schemas.openxmlformats.org/drawingml/2006/main">
-          <a:blip xmlns:r="http://schemas.openxmlformats.org/officeDocument/2006/relationships" r:embed="rIdOfficeKitImagec237998db8bee20d_1"/>
+          <a:blip xmlns:r="http://schemas.openxmlformats.org/officeDocument/2006/relationships" r:embed="rIdOfficeKitImaged71bfa074cda59bb_1"/>
           <a:stretch>
             <a:fillRect/>
           </a:stretch>
@@ -710,7 +1280,7 @@
       </p:grpSpPr>
       <p:sp>
         <p:nvSpPr>
-          <p:cNvPr id="2" name="argument-paper-scrim"/>
+          <p:cNvPr id="2" name="evidence-paper-scrim"/>
           <p:cNvSpPr/>
           <p:nvPr/>
         </p:nvSpPr>
@@ -748,7 +1318,7 @@
       </p:sp>
       <p:sp>
         <p:nvSpPr>
-          <p:cNvPr id="3" name="argument-top-rule"/>
+          <p:cNvPr id="3" name="evidence-top-rule"/>
           <p:cNvSpPr/>
           <p:nvPr/>
         </p:nvSpPr>
@@ -782,7 +1352,7 @@
       </p:sp>
       <p:sp>
         <p:nvSpPr>
-          <p:cNvPr id="4" name="SILVER ATELIER · ARGUMENT"/>
+          <p:cNvPr id="4" name="SILVER ATELIER · EVIDENCE"/>
           <p:cNvSpPr txBox="1"/>
           <p:nvPr/>
         </p:nvSpPr>
@@ -811,582 +1381,57 @@
                 <a:latin typeface="Tahoma"/>
                 <a:ea typeface="Tahoma"/>
               </a:rPr>
-              <a:t>SILVER ATELIER · ARGUMENT</a:t>
-            </a:r>
-            <a:endParaRPr lang="en-US"/>
-          </a:p>
-        </p:txBody>
-      </p:sp>
-      <p:sp>
-        <p:nvSpPr>
-          <p:cNvPr id="5" name="argument-title"/>
+              <a:t>SILVER ATELIER · EVIDENCE</a:t>
+            </a:r>
+            <a:endParaRPr lang="en-US"/>
+          </a:p>
+        </p:txBody>
+      </p:sp>
+      <p:sp>
+        <p:nvSpPr>
+          <p:cNvPr id="5" name="evidence-title"/>
           <p:cNvSpPr txBox="1"/>
           <p:nvPr/>
         </p:nvSpPr>
         <p:spPr>
           <a:xfrm xmlns:a="http://schemas.openxmlformats.org/drawingml/2006/main">
             <a:off x="914400" y="1314450"/>
-            <a:ext cx="6286500" cy="552450"/>
-          </a:xfrm>
-          <a:prstGeom xmlns:a="http://schemas.openxmlformats.org/drawingml/2006/main" prst="rect">
-            <a:avLst/>
-          </a:prstGeom>
-          <a:noFill xmlns:a="http://schemas.openxmlformats.org/drawingml/2006/main"/>
-          <a:ln xmlns:a="http://schemas.openxmlformats.org/drawingml/2006/main" w="0">
-            <a:noFill/>
-          </a:ln>
-        </p:spPr>
-        <p:txBody>
-          <a:bodyPr xmlns:a="http://schemas.openxmlformats.org/drawingml/2006/main" wrap="square" lIns="0" tIns="0" rIns="0" bIns="0" anchor="t"/>
-          <a:lstStyle xmlns:a="http://schemas.openxmlformats.org/drawingml/2006/main"/>
-          <a:p xmlns:a="http://schemas.openxmlformats.org/drawingml/2006/main">
-            <a:r>
-              <a:rPr lang="en-US" sz="2850" b="1">
+            <a:ext cx="6286500" cy="914400"/>
+          </a:xfrm>
+          <a:prstGeom xmlns:a="http://schemas.openxmlformats.org/drawingml/2006/main" prst="rect">
+            <a:avLst/>
+          </a:prstGeom>
+          <a:noFill xmlns:a="http://schemas.openxmlformats.org/drawingml/2006/main"/>
+          <a:ln xmlns:a="http://schemas.openxmlformats.org/drawingml/2006/main" w="0">
+            <a:noFill/>
+          </a:ln>
+        </p:spPr>
+        <p:txBody>
+          <a:bodyPr xmlns:a="http://schemas.openxmlformats.org/drawingml/2006/main" wrap="square" lIns="0" tIns="0" rIns="0" bIns="0" anchor="t"/>
+          <a:lstStyle xmlns:a="http://schemas.openxmlformats.org/drawingml/2006/main"/>
+          <a:p xmlns:a="http://schemas.openxmlformats.org/drawingml/2006/main">
+            <a:r>
+              <a:rPr lang="en-US" sz="2550" b="1">
                 <a:solidFill>
                   <a:srgbClr val="171717"/>
                 </a:solidFill>
                 <a:latin typeface="Tahoma"/>
                 <a:ea typeface="Tahoma"/>
               </a:rPr>
-              <a:t>The proposition is the page's visual center</a:t>
-            </a:r>
-            <a:endParaRPr lang="en-US"/>
-          </a:p>
-        </p:txBody>
-      </p:sp>
-      <p:sp>
-        <p:nvSpPr>
-          <p:cNvPr id="6" name="argument-basis"/>
-          <p:cNvSpPr txBox="1"/>
-          <p:nvPr/>
-        </p:nvSpPr>
-        <p:spPr>
-          <a:xfrm xmlns:a="http://schemas.openxmlformats.org/drawingml/2006/main">
-            <a:off x="952500" y="1981200"/>
-            <a:ext cx="6096000" cy="266700"/>
-          </a:xfrm>
-          <a:prstGeom xmlns:a="http://schemas.openxmlformats.org/drawingml/2006/main" prst="rect">
-            <a:avLst/>
-          </a:prstGeom>
-          <a:noFill xmlns:a="http://schemas.openxmlformats.org/drawingml/2006/main"/>
-          <a:ln xmlns:a="http://schemas.openxmlformats.org/drawingml/2006/main" w="0">
-            <a:noFill/>
-          </a:ln>
-        </p:spPr>
-        <p:txBody>
-          <a:bodyPr xmlns:a="http://schemas.openxmlformats.org/drawingml/2006/main" wrap="square" lIns="0" tIns="0" rIns="0" bIns="0" anchor="t"/>
-          <a:lstStyle xmlns:a="http://schemas.openxmlformats.org/drawingml/2006/main"/>
-          <a:p xmlns:a="http://schemas.openxmlformats.org/drawingml/2006/main">
-            <a:r>
-              <a:rPr lang="en-US" sz="1350">
-                <a:solidFill>
-                  <a:srgbClr val="898989"/>
-                </a:solidFill>
-                <a:latin typeface="Tahoma"/>
-                <a:ea typeface="Tahoma"/>
-              </a:rPr>
-              <a:t>Scale, crop, and color invite attention without hiding the evidence.</a:t>
-            </a:r>
-            <a:endParaRPr lang="en-US"/>
-          </a:p>
-        </p:txBody>
-      </p:sp>
-      <p:sp>
-        <p:nvSpPr>
-          <p:cNvPr id="7" name="argument-rule"/>
-          <p:cNvSpPr/>
-          <p:nvPr/>
-        </p:nvSpPr>
-        <p:spPr>
-          <a:xfrm xmlns:a="http://schemas.openxmlformats.org/drawingml/2006/main">
-            <a:off x="914400" y="2457450"/>
-            <a:ext cx="13411200" cy="0"/>
-          </a:xfrm>
-          <a:prstGeom xmlns:a="http://schemas.openxmlformats.org/drawingml/2006/main" prst="line">
-            <a:avLst/>
-          </a:prstGeom>
-          <a:noFill xmlns:a="http://schemas.openxmlformats.org/drawingml/2006/main"/>
-          <a:ln xmlns:a="http://schemas.openxmlformats.org/drawingml/2006/main" w="25400">
-            <a:solidFill>
-              <a:srgbClr val="898989"/>
-            </a:solidFill>
-            <a:prstDash val="solid"/>
-          </a:ln>
-        </p:spPr>
-        <p:txBody>
-          <a:bodyPr xmlns:a="http://schemas.openxmlformats.org/drawingml/2006/main" wrap="square" lIns="0" tIns="0" rIns="0" bIns="0" anchor="t"/>
-          <a:lstStyle xmlns:a="http://schemas.openxmlformats.org/drawingml/2006/main"/>
-          <a:p xmlns:a="http://schemas.openxmlformats.org/drawingml/2006/main">
-            <a:r>
-              <a:rPr lang="en-US"/>
-              <a:t/>
-            </a:r>
-            <a:endParaRPr lang="en-US"/>
-          </a:p>
-        </p:txBody>
-      </p:sp>
-      <p:sp>
-        <p:nvSpPr>
-          <p:cNvPr id="8" name="promotion-kicker"/>
-          <p:cNvSpPr txBox="1"/>
-          <p:nvPr/>
-        </p:nvSpPr>
-        <p:spPr>
-          <a:xfrm xmlns:a="http://schemas.openxmlformats.org/drawingml/2006/main">
-            <a:off x="1104900" y="3352800"/>
-            <a:ext cx="2857500" cy="228600"/>
-          </a:xfrm>
-          <a:prstGeom xmlns:a="http://schemas.openxmlformats.org/drawingml/2006/main" prst="rect">
-            <a:avLst/>
-          </a:prstGeom>
-          <a:noFill xmlns:a="http://schemas.openxmlformats.org/drawingml/2006/main"/>
-          <a:ln xmlns:a="http://schemas.openxmlformats.org/drawingml/2006/main" w="0">
-            <a:noFill/>
-          </a:ln>
-        </p:spPr>
-        <p:txBody>
-          <a:bodyPr xmlns:a="http://schemas.openxmlformats.org/drawingml/2006/main" wrap="square" lIns="0" tIns="0" rIns="0" bIns="0" anchor="t"/>
-          <a:lstStyle xmlns:a="http://schemas.openxmlformats.org/drawingml/2006/main"/>
-          <a:p xmlns:a="http://schemas.openxmlformats.org/drawingml/2006/main">
-            <a:r>
-              <a:rPr lang="en-US" sz="1125" b="1">
-                <a:solidFill>
-                  <a:srgbClr val="9A6B45"/>
-                </a:solidFill>
-                <a:latin typeface="Tahoma"/>
-                <a:ea typeface="Tahoma"/>
-              </a:rPr>
-              <a:t>ONE PROPOSITION</a:t>
-            </a:r>
-            <a:endParaRPr lang="en-US"/>
-          </a:p>
-        </p:txBody>
-      </p:sp>
-      <p:sp>
-        <p:nvSpPr>
-          <p:cNvPr id="9" name="promotion-headline"/>
-          <p:cNvSpPr txBox="1"/>
-          <p:nvPr/>
-        </p:nvSpPr>
-        <p:spPr>
-          <a:xfrm xmlns:a="http://schemas.openxmlformats.org/drawingml/2006/main">
-            <a:off x="1104900" y="3790950"/>
-            <a:ext cx="6477000" cy="723900"/>
-          </a:xfrm>
-          <a:prstGeom xmlns:a="http://schemas.openxmlformats.org/drawingml/2006/main" prst="rect">
-            <a:avLst/>
-          </a:prstGeom>
-          <a:noFill xmlns:a="http://schemas.openxmlformats.org/drawingml/2006/main"/>
-          <a:ln xmlns:a="http://schemas.openxmlformats.org/drawingml/2006/main" w="0">
-            <a:noFill/>
-          </a:ln>
-        </p:spPr>
-        <p:txBody>
-          <a:bodyPr xmlns:a="http://schemas.openxmlformats.org/drawingml/2006/main" wrap="square" lIns="0" tIns="0" rIns="0" bIns="0" anchor="t"/>
-          <a:lstStyle xmlns:a="http://schemas.openxmlformats.org/drawingml/2006/main"/>
-          <a:p xmlns:a="http://schemas.openxmlformats.org/drawingml/2006/main">
-            <a:r>
-              <a:rPr lang="en-US" sz="2625" b="1">
+              <a:t>The signal grows when the invitation</a:t>
+            </a:r>
+            <a:endParaRPr lang="en-US"/>
+          </a:p>
+          <a:p xmlns:a="http://schemas.openxmlformats.org/drawingml/2006/main">
+            <a:r>
+              <a:rPr lang="en-US" sz="2550" b="1">
                 <a:solidFill>
                   <a:srgbClr val="171717"/>
                 </a:solidFill>
                 <a:latin typeface="Tahoma"/>
                 <a:ea typeface="Tahoma"/>
               </a:rPr>
-              <a:t>Make the next action visible.</a:t>
-            </a:r>
-            <a:endParaRPr lang="en-US"/>
-          </a:p>
-        </p:txBody>
-      </p:sp>
-      <p:sp>
-        <p:nvSpPr>
-          <p:cNvPr id="10" name="promotion-body"/>
-          <p:cNvSpPr txBox="1"/>
-          <p:nvPr/>
-        </p:nvSpPr>
-        <p:spPr>
-          <a:xfrm xmlns:a="http://schemas.openxmlformats.org/drawingml/2006/main">
-            <a:off x="1104900" y="4762500"/>
-            <a:ext cx="6191250" cy="457200"/>
-          </a:xfrm>
-          <a:prstGeom xmlns:a="http://schemas.openxmlformats.org/drawingml/2006/main" prst="rect">
-            <a:avLst/>
-          </a:prstGeom>
-          <a:noFill xmlns:a="http://schemas.openxmlformats.org/drawingml/2006/main"/>
-          <a:ln xmlns:a="http://schemas.openxmlformats.org/drawingml/2006/main" w="0">
-            <a:noFill/>
-          </a:ln>
-        </p:spPr>
-        <p:txBody>
-          <a:bodyPr xmlns:a="http://schemas.openxmlformats.org/drawingml/2006/main" wrap="square" lIns="0" tIns="0" rIns="0" bIns="0" anchor="t"/>
-          <a:lstStyle xmlns:a="http://schemas.openxmlformats.org/drawingml/2006/main"/>
-          <a:p xmlns:a="http://schemas.openxmlformats.org/drawingml/2006/main">
-            <a:r>
-              <a:rPr lang="en-US" sz="1575">
-                <a:solidFill>
-                  <a:srgbClr val="171717"/>
-                </a:solidFill>
-                <a:latin typeface="Tahoma"/>
-                <a:ea typeface="Tahoma"/>
-              </a:rPr>
-              <a:t>A clear invitation earns attention when evidence and access arrive together.</a:t>
-            </a:r>
-            <a:endParaRPr lang="en-US"/>
-          </a:p>
-        </p:txBody>
-      </p:sp>
-      <p:pic>
-        <p:nvPicPr>
-          <p:cNvPr id="11" name="promotion-hero-frame">
-            <a:extLst xmlns:a="http://schemas.openxmlformats.org/drawingml/2006/main">
-              <a:ext uri="{C183D7F6-B498-43B3-948B-1728B52AA6E4}">
-                <adec:decorative xmlns:adec="http://schemas.microsoft.com/office/drawing/2017/decorative" val="1"/>
-              </a:ext>
-            </a:extLst>
-          </p:cNvPr>
-          <p:cNvPicPr/>
-          <p:nvPr/>
-        </p:nvPicPr>
-        <p:blipFill>
-          <a:blip xmlns:r="http://schemas.openxmlformats.org/officeDocument/2006/relationships" xmlns:a="http://schemas.openxmlformats.org/drawingml/2006/main" r:embed="rIdOfficeKitImagec237998db8bee20d_1"/>
-          <a:srcRect xmlns:a="http://schemas.openxmlformats.org/drawingml/2006/main" l="0" t="31908" r="0" b="31908"/>
-          <a:stretch xmlns:a="http://schemas.openxmlformats.org/drawingml/2006/main">
-            <a:fillRect/>
-          </a:stretch>
-        </p:blipFill>
-        <p:spPr>
-          <a:xfrm xmlns:a="http://schemas.openxmlformats.org/drawingml/2006/main">
-            <a:off x="9525000" y="3143250"/>
-            <a:ext cx="4000500" cy="2571750"/>
-          </a:xfrm>
-          <a:prstGeom xmlns:a="http://schemas.openxmlformats.org/drawingml/2006/main" prst="rect">
-            <a:avLst/>
-          </a:prstGeom>
-        </p:spPr>
-      </p:pic>
-      <p:sp>
-        <p:nvSpPr>
-          <p:cNvPr id="12" name="promotion-image-rule"/>
-          <p:cNvSpPr/>
-          <p:nvPr/>
-        </p:nvSpPr>
-        <p:spPr>
-          <a:xfrm xmlns:a="http://schemas.openxmlformats.org/drawingml/2006/main">
-            <a:off x="9525000" y="5905500"/>
-            <a:ext cx="4000500" cy="0"/>
-          </a:xfrm>
-          <a:prstGeom xmlns:a="http://schemas.openxmlformats.org/drawingml/2006/main" prst="line">
-            <a:avLst/>
-          </a:prstGeom>
-          <a:noFill xmlns:a="http://schemas.openxmlformats.org/drawingml/2006/main"/>
-          <a:ln xmlns:a="http://schemas.openxmlformats.org/drawingml/2006/main" w="38100">
-            <a:solidFill>
-              <a:srgbClr val="9A6B45"/>
-            </a:solidFill>
-            <a:prstDash val="solid"/>
-          </a:ln>
-        </p:spPr>
-        <p:txBody>
-          <a:bodyPr xmlns:a="http://schemas.openxmlformats.org/drawingml/2006/main" wrap="square" lIns="0" tIns="0" rIns="0" bIns="0" anchor="t"/>
-          <a:lstStyle xmlns:a="http://schemas.openxmlformats.org/drawingml/2006/main"/>
-          <a:p xmlns:a="http://schemas.openxmlformats.org/drawingml/2006/main">
-            <a:r>
-              <a:rPr lang="en-US"/>
-              <a:t/>
-            </a:r>
-            <a:endParaRPr lang="en-US"/>
-          </a:p>
-        </p:txBody>
-      </p:sp>
-      <p:sp>
-        <p:nvSpPr>
-          <p:cNvPr id="13" name="promotion-image-label"/>
-          <p:cNvSpPr txBox="1"/>
-          <p:nvPr/>
-        </p:nvSpPr>
-        <p:spPr>
-          <a:xfrm xmlns:a="http://schemas.openxmlformats.org/drawingml/2006/main">
-            <a:off x="9525000" y="6153150"/>
-            <a:ext cx="4000500" cy="247650"/>
-          </a:xfrm>
-          <a:prstGeom xmlns:a="http://schemas.openxmlformats.org/drawingml/2006/main" prst="rect">
-            <a:avLst/>
-          </a:prstGeom>
-          <a:noFill xmlns:a="http://schemas.openxmlformats.org/drawingml/2006/main"/>
-          <a:ln xmlns:a="http://schemas.openxmlformats.org/drawingml/2006/main" w="0">
-            <a:noFill/>
-          </a:ln>
-        </p:spPr>
-        <p:txBody>
-          <a:bodyPr xmlns:a="http://schemas.openxmlformats.org/drawingml/2006/main" wrap="square" lIns="0" tIns="0" rIns="0" bIns="0" anchor="t"/>
-          <a:lstStyle xmlns:a="http://schemas.openxmlformats.org/drawingml/2006/main"/>
-          <a:p xmlns:a="http://schemas.openxmlformats.org/drawingml/2006/main">
-            <a:r>
-              <a:rPr lang="en-US" sz="1275" b="1">
-                <a:solidFill>
-                  <a:srgbClr val="9A6B45"/>
-                </a:solidFill>
-                <a:latin typeface="Tahoma"/>
-                <a:ea typeface="Tahoma"/>
-              </a:rPr>
-              <a:t>INVITE · PROVE · MOVE</a:t>
-            </a:r>
-            <a:endParaRPr lang="en-US"/>
-          </a:p>
-        </p:txBody>
-      </p:sp>
-      <p:sp>
-        <p:nvSpPr>
-          <p:cNvPr id="14" name="source"/>
-          <p:cNvSpPr txBox="1"/>
-          <p:nvPr/>
-        </p:nvSpPr>
-        <p:spPr>
-          <a:xfrm xmlns:a="http://schemas.openxmlformats.org/drawingml/2006/main">
-            <a:off x="914400" y="7810500"/>
-            <a:ext cx="10953750" cy="209550"/>
-          </a:xfrm>
-          <a:prstGeom xmlns:a="http://schemas.openxmlformats.org/drawingml/2006/main" prst="rect">
-            <a:avLst/>
-          </a:prstGeom>
-          <a:noFill xmlns:a="http://schemas.openxmlformats.org/drawingml/2006/main"/>
-          <a:ln xmlns:a="http://schemas.openxmlformats.org/drawingml/2006/main" w="0">
-            <a:noFill/>
-          </a:ln>
-        </p:spPr>
-        <p:txBody>
-          <a:bodyPr xmlns:a="http://schemas.openxmlformats.org/drawingml/2006/main" wrap="square" lIns="0" tIns="0" rIns="0" bIns="0" anchor="t"/>
-          <a:lstStyle xmlns:a="http://schemas.openxmlformats.org/drawingml/2006/main"/>
-          <a:p xmlns:a="http://schemas.openxmlformats.org/drawingml/2006/main">
-            <a:r>
-              <a:rPr lang="en-US" sz="1050">
-                <a:solidFill>
-                  <a:srgbClr val="898989"/>
-                </a:solidFill>
-                <a:latin typeface="Tahoma"/>
-                <a:ea typeface="Tahoma"/>
-              </a:rPr>
-              <a:t>Source: illustrative calibration brief · every claim is fictional and bounded</a:t>
-            </a:r>
-            <a:endParaRPr lang="en-US"/>
-          </a:p>
-        </p:txBody>
-      </p:sp>
-      <p:sp>
-        <p:nvSpPr>
-          <p:cNvPr id="15" name="page-number"/>
-          <p:cNvSpPr txBox="1"/>
-          <p:nvPr/>
-        </p:nvSpPr>
-        <p:spPr>
-          <a:xfrm xmlns:a="http://schemas.openxmlformats.org/drawingml/2006/main">
-            <a:off x="13335000" y="7810500"/>
-            <a:ext cx="952500" cy="209550"/>
-          </a:xfrm>
-          <a:prstGeom xmlns:a="http://schemas.openxmlformats.org/drawingml/2006/main" prst="rect">
-            <a:avLst/>
-          </a:prstGeom>
-          <a:noFill xmlns:a="http://schemas.openxmlformats.org/drawingml/2006/main"/>
-          <a:ln xmlns:a="http://schemas.openxmlformats.org/drawingml/2006/main" w="0">
-            <a:noFill/>
-          </a:ln>
-        </p:spPr>
-        <p:txBody>
-          <a:bodyPr xmlns:a="http://schemas.openxmlformats.org/drawingml/2006/main" wrap="square" lIns="0" tIns="0" rIns="0" bIns="0" anchor="t"/>
-          <a:lstStyle xmlns:a="http://schemas.openxmlformats.org/drawingml/2006/main"/>
-          <a:p xmlns:a="http://schemas.openxmlformats.org/drawingml/2006/main">
-            <a:pPr algn="r"/>
-            <a:r>
-              <a:rPr lang="en-US" sz="1050">
-                <a:solidFill>
-                  <a:srgbClr val="898989"/>
-                </a:solidFill>
-                <a:latin typeface="Tahoma"/>
-                <a:ea typeface="Tahoma"/>
-              </a:rPr>
-              <a:t>2 / 6</a:t>
-            </a:r>
-            <a:endParaRPr lang="en-US"/>
-          </a:p>
-        </p:txBody>
-      </p:sp>
-    </p:spTree>
-  </p:cSld>
-  <p:clrMapOvr>
-    <a:masterClrMapping xmlns:a="http://schemas.openxmlformats.org/drawingml/2006/main"/>
-  </p:clrMapOvr>
-</p:sld>
-</file>
-
-<file path=ppt/slides/slide3.xml><?xml version="1.0" encoding="utf-8"?>
-<p:sld xmlns:p="http://schemas.openxmlformats.org/presentationml/2006/main">
-  <p:cSld name="Evidence">
-    <p:bg>
-      <p:bgPr>
-        <a:blipFill xmlns:a="http://schemas.openxmlformats.org/drawingml/2006/main">
-          <a:blip xmlns:r="http://schemas.openxmlformats.org/officeDocument/2006/relationships" r:embed="rIdOfficeKitImage31956823b229fb66_1"/>
-          <a:stretch>
-            <a:fillRect/>
-          </a:stretch>
-        </a:blipFill>
-      </p:bgPr>
-    </p:bg>
-    <p:spTree>
-      <p:nvGrpSpPr>
-        <p:cNvPr id="1" name=""/>
-        <p:cNvGrpSpPr/>
-        <p:nvPr/>
-      </p:nvGrpSpPr>
-      <p:grpSpPr>
-        <a:xfrm xmlns:a="http://schemas.openxmlformats.org/drawingml/2006/main">
-          <a:off x="0" y="0"/>
-          <a:ext cx="0" cy="0"/>
-          <a:chOff x="0" y="0"/>
-          <a:chExt cx="0" cy="0"/>
-        </a:xfrm>
-      </p:grpSpPr>
-      <p:sp>
-        <p:nvSpPr>
-          <p:cNvPr id="2" name="evidence-paper-scrim"/>
-          <p:cNvSpPr/>
-          <p:nvPr/>
-        </p:nvSpPr>
-        <p:spPr>
-          <a:xfrm xmlns:a="http://schemas.openxmlformats.org/drawingml/2006/main">
-            <a:off x="0" y="0"/>
-            <a:ext cx="7429500" cy="8572500"/>
-          </a:xfrm>
-          <a:prstGeom xmlns:a="http://schemas.openxmlformats.org/drawingml/2006/main" prst="rect">
-            <a:avLst/>
-          </a:prstGeom>
-          <a:solidFill xmlns:a="http://schemas.openxmlformats.org/drawingml/2006/main">
-            <a:srgbClr val="F2F3F3">
-              <a:alpha val="96000"/>
-            </a:srgbClr>
-          </a:solidFill>
-          <a:ln xmlns:a="http://schemas.openxmlformats.org/drawingml/2006/main" w="0">
-            <a:solidFill>
-              <a:srgbClr val="F2F3F3"/>
-            </a:solidFill>
-            <a:prstDash val="solid"/>
-          </a:ln>
-        </p:spPr>
-        <p:txBody>
-          <a:bodyPr xmlns:a="http://schemas.openxmlformats.org/drawingml/2006/main" wrap="square" lIns="0" tIns="0" rIns="0" bIns="0" anchor="t"/>
-          <a:lstStyle xmlns:a="http://schemas.openxmlformats.org/drawingml/2006/main"/>
-          <a:p xmlns:a="http://schemas.openxmlformats.org/drawingml/2006/main">
-            <a:r>
-              <a:rPr lang="en-US"/>
-              <a:t/>
-            </a:r>
-            <a:endParaRPr lang="en-US"/>
-          </a:p>
-        </p:txBody>
-      </p:sp>
-      <p:sp>
-        <p:nvSpPr>
-          <p:cNvPr id="3" name="evidence-top-rule"/>
-          <p:cNvSpPr/>
-          <p:nvPr/>
-        </p:nvSpPr>
-        <p:spPr>
-          <a:xfrm xmlns:a="http://schemas.openxmlformats.org/drawingml/2006/main">
-            <a:off x="838200" y="666750"/>
-            <a:ext cx="13563600" cy="0"/>
-          </a:xfrm>
-          <a:prstGeom xmlns:a="http://schemas.openxmlformats.org/drawingml/2006/main" prst="line">
-            <a:avLst/>
-          </a:prstGeom>
-          <a:noFill xmlns:a="http://schemas.openxmlformats.org/drawingml/2006/main"/>
-          <a:ln xmlns:a="http://schemas.openxmlformats.org/drawingml/2006/main" w="38100">
-            <a:solidFill>
-              <a:srgbClr val="9A6B45"/>
-            </a:solidFill>
-            <a:prstDash val="solid"/>
-          </a:ln>
-        </p:spPr>
-        <p:txBody>
-          <a:bodyPr xmlns:a="http://schemas.openxmlformats.org/drawingml/2006/main" wrap="square" lIns="0" tIns="0" rIns="0" bIns="0" anchor="t"/>
-          <a:lstStyle xmlns:a="http://schemas.openxmlformats.org/drawingml/2006/main"/>
-          <a:p xmlns:a="http://schemas.openxmlformats.org/drawingml/2006/main">
-            <a:r>
-              <a:rPr lang="en-US"/>
-              <a:t/>
-            </a:r>
-            <a:endParaRPr lang="en-US"/>
-          </a:p>
-        </p:txBody>
-      </p:sp>
-      <p:sp>
-        <p:nvSpPr>
-          <p:cNvPr id="4" name="SILVER ATELIER · EVIDENCE"/>
-          <p:cNvSpPr txBox="1"/>
-          <p:nvPr/>
-        </p:nvSpPr>
-        <p:spPr>
-          <a:xfrm xmlns:a="http://schemas.openxmlformats.org/drawingml/2006/main">
-            <a:off x="914400" y="895350"/>
-            <a:ext cx="7239000" cy="228600"/>
-          </a:xfrm>
-          <a:prstGeom xmlns:a="http://schemas.openxmlformats.org/drawingml/2006/main" prst="rect">
-            <a:avLst/>
-          </a:prstGeom>
-          <a:noFill xmlns:a="http://schemas.openxmlformats.org/drawingml/2006/main"/>
-          <a:ln xmlns:a="http://schemas.openxmlformats.org/drawingml/2006/main" w="0">
-            <a:noFill/>
-          </a:ln>
-        </p:spPr>
-        <p:txBody>
-          <a:bodyPr xmlns:a="http://schemas.openxmlformats.org/drawingml/2006/main" wrap="square" lIns="0" tIns="0" rIns="0" bIns="0" anchor="t"/>
-          <a:lstStyle xmlns:a="http://schemas.openxmlformats.org/drawingml/2006/main"/>
-          <a:p xmlns:a="http://schemas.openxmlformats.org/drawingml/2006/main">
-            <a:r>
-              <a:rPr lang="en-US" sz="1200" b="1">
-                <a:solidFill>
-                  <a:srgbClr val="9A6B45"/>
-                </a:solidFill>
-                <a:latin typeface="Tahoma"/>
-                <a:ea typeface="Tahoma"/>
-              </a:rPr>
-              <a:t>SILVER ATELIER · EVIDENCE</a:t>
-            </a:r>
-            <a:endParaRPr lang="en-US"/>
-          </a:p>
-        </p:txBody>
-      </p:sp>
-      <p:sp>
-        <p:nvSpPr>
-          <p:cNvPr id="5" name="evidence-title"/>
-          <p:cNvSpPr txBox="1"/>
-          <p:nvPr/>
-        </p:nvSpPr>
-        <p:spPr>
-          <a:xfrm xmlns:a="http://schemas.openxmlformats.org/drawingml/2006/main">
-            <a:off x="914400" y="1314450"/>
-            <a:ext cx="6286500" cy="552450"/>
-          </a:xfrm>
-          <a:prstGeom xmlns:a="http://schemas.openxmlformats.org/drawingml/2006/main" prst="rect">
-            <a:avLst/>
-          </a:prstGeom>
-          <a:noFill xmlns:a="http://schemas.openxmlformats.org/drawingml/2006/main"/>
-          <a:ln xmlns:a="http://schemas.openxmlformats.org/drawingml/2006/main" w="0">
-            <a:noFill/>
-          </a:ln>
-        </p:spPr>
-        <p:txBody>
-          <a:bodyPr xmlns:a="http://schemas.openxmlformats.org/drawingml/2006/main" wrap="square" lIns="0" tIns="0" rIns="0" bIns="0" anchor="t"/>
-          <a:lstStyle xmlns:a="http://schemas.openxmlformats.org/drawingml/2006/main"/>
-          <a:p xmlns:a="http://schemas.openxmlformats.org/drawingml/2006/main">
-            <a:r>
-              <a:rPr lang="en-US" sz="2850" b="1">
-                <a:solidFill>
-                  <a:srgbClr val="171717"/>
-                </a:solidFill>
-                <a:latin typeface="Tahoma"/>
-                <a:ea typeface="Tahoma"/>
-              </a:rPr>
-              <a:t>The signal grows when the invitation stays measurable</a:t>
+              <a:t>stays measurable</a:t>
             </a:r>
             <a:endParaRPr lang="en-US"/>
           </a:p>
@@ -1400,7 +1445,7 @@
         </p:nvSpPr>
         <p:spPr>
           <a:xfrm xmlns:a="http://schemas.openxmlformats.org/drawingml/2006/main">
-            <a:off x="952500" y="1981200"/>
+            <a:off x="952500" y="2190750"/>
             <a:ext cx="6096000" cy="266700"/>
           </a:xfrm>
           <a:prstGeom xmlns:a="http://schemas.openxmlformats.org/drawingml/2006/main" prst="rect">
@@ -1477,7 +1522,7 @@
         </p:xfrm>
         <a:graphic xmlns:a="http://schemas.openxmlformats.org/drawingml/2006/main">
           <a:graphicData uri="http://schemas.openxmlformats.org/drawingml/2006/chart">
-            <c:chart xmlns:r="http://schemas.openxmlformats.org/officeDocument/2006/relationships" xmlns:c="http://schemas.openxmlformats.org/drawingml/2006/chart" r:id="R0eb11adf5d9f4ffd"/>
+            <c:chart xmlns:r="http://schemas.openxmlformats.org/officeDocument/2006/relationships" xmlns:c="http://schemas.openxmlformats.org/drawingml/2006/chart" r:id="R1e287dfa94d2469b"/>
           </a:graphicData>
         </a:graphic>
       </p:graphicFrame>
@@ -1613,14 +1658,40 @@
           <a:lstStyle xmlns:a="http://schemas.openxmlformats.org/drawingml/2006/main"/>
           <a:p xmlns:a="http://schemas.openxmlformats.org/drawingml/2006/main">
             <a:r>
-              <a:rPr lang="en-US" sz="1650" b="1">
+              <a:rPr lang="en-US" sz="1350" b="1">
                 <a:solidFill>
                   <a:srgbClr val="171717"/>
                 </a:solidFill>
                 <a:latin typeface="Tahoma"/>
                 <a:ea typeface="Tahoma"/>
               </a:rPr>
-              <a:t>Reach is useful only when the audience can see and take the next step.</a:t>
+              <a:t>Reach is useful only when the</a:t>
+            </a:r>
+            <a:endParaRPr lang="en-US"/>
+          </a:p>
+          <a:p xmlns:a="http://schemas.openxmlformats.org/drawingml/2006/main">
+            <a:r>
+              <a:rPr lang="en-US" sz="1350" b="1">
+                <a:solidFill>
+                  <a:srgbClr val="171717"/>
+                </a:solidFill>
+                <a:latin typeface="Tahoma"/>
+                <a:ea typeface="Tahoma"/>
+              </a:rPr>
+              <a:t>audience can see and take the</a:t>
+            </a:r>
+            <a:endParaRPr lang="en-US"/>
+          </a:p>
+          <a:p xmlns:a="http://schemas.openxmlformats.org/drawingml/2006/main">
+            <a:r>
+              <a:rPr lang="en-US" sz="1350" b="1">
+                <a:solidFill>
+                  <a:srgbClr val="171717"/>
+                </a:solidFill>
+                <a:latin typeface="Tahoma"/>
+                <a:ea typeface="Tahoma"/>
+              </a:rPr>
+              <a:t>next step.</a:t>
             </a:r>
             <a:endParaRPr lang="en-US"/>
           </a:p>
@@ -1930,7 +2001,7 @@
           <a:lstStyle xmlns:a="http://schemas.openxmlformats.org/drawingml/2006/main"/>
           <a:p xmlns:a="http://schemas.openxmlformats.org/drawingml/2006/main">
             <a:r>
-              <a:rPr lang="en-US" sz="2850" b="1">
+              <a:rPr lang="en-US" sz="2550" b="1">
                 <a:solidFill>
                   <a:srgbClr val="171717"/>
                 </a:solidFill>
@@ -2942,7 +3013,7 @@
     <p:bg>
       <p:bgPr>
         <a:blipFill xmlns:a="http://schemas.openxmlformats.org/drawingml/2006/main">
-          <a:blip xmlns:r="http://schemas.openxmlformats.org/officeDocument/2006/relationships" r:embed="rIdOfficeKitImagec7b73f8fac405495_1"/>
+          <a:blip xmlns:r="http://schemas.openxmlformats.org/officeDocument/2006/relationships" r:embed="rIdOfficeKitImage8fbc298f8d1b7a3c_1"/>
           <a:stretch>
             <a:fillRect/>
           </a:stretch>
@@ -3272,7 +3343,7 @@
     <p:bg>
       <p:bgPr>
         <a:blipFill xmlns:a="http://schemas.openxmlformats.org/drawingml/2006/main">
-          <a:blip xmlns:r="http://schemas.openxmlformats.org/officeDocument/2006/relationships" r:embed="rIdOfficeKitImageaeb6f74d36d260d0_1"/>
+          <a:blip xmlns:r="http://schemas.openxmlformats.org/officeDocument/2006/relationships" r:embed="rIdOfficeKitImage6af8c9b5dff6e3a3_1"/>
           <a:stretch>
             <a:fillRect/>
           </a:stretch>
@@ -3411,29 +3482,42 @@
         <p:spPr>
           <a:xfrm xmlns:a="http://schemas.openxmlformats.org/drawingml/2006/main">
             <a:off x="914400" y="1314450"/>
-            <a:ext cx="6286500" cy="552450"/>
-          </a:xfrm>
-          <a:prstGeom xmlns:a="http://schemas.openxmlformats.org/drawingml/2006/main" prst="rect">
-            <a:avLst/>
-          </a:prstGeom>
-          <a:noFill xmlns:a="http://schemas.openxmlformats.org/drawingml/2006/main"/>
-          <a:ln xmlns:a="http://schemas.openxmlformats.org/drawingml/2006/main" w="0">
-            <a:noFill/>
-          </a:ln>
-        </p:spPr>
-        <p:txBody>
-          <a:bodyPr xmlns:a="http://schemas.openxmlformats.org/drawingml/2006/main" wrap="square" lIns="0" tIns="0" rIns="0" bIns="0" anchor="t"/>
-          <a:lstStyle xmlns:a="http://schemas.openxmlformats.org/drawingml/2006/main"/>
-          <a:p xmlns:a="http://schemas.openxmlformats.org/drawingml/2006/main">
-            <a:r>
-              <a:rPr lang="en-US" sz="2850" b="1">
+            <a:ext cx="6286500" cy="914400"/>
+          </a:xfrm>
+          <a:prstGeom xmlns:a="http://schemas.openxmlformats.org/drawingml/2006/main" prst="rect">
+            <a:avLst/>
+          </a:prstGeom>
+          <a:noFill xmlns:a="http://schemas.openxmlformats.org/drawingml/2006/main"/>
+          <a:ln xmlns:a="http://schemas.openxmlformats.org/drawingml/2006/main" w="0">
+            <a:noFill/>
+          </a:ln>
+        </p:spPr>
+        <p:txBody>
+          <a:bodyPr xmlns:a="http://schemas.openxmlformats.org/drawingml/2006/main" wrap="square" lIns="0" tIns="0" rIns="0" bIns="0" anchor="t"/>
+          <a:lstStyle xmlns:a="http://schemas.openxmlformats.org/drawingml/2006/main"/>
+          <a:p xmlns:a="http://schemas.openxmlformats.org/drawingml/2006/main">
+            <a:r>
+              <a:rPr lang="en-US" sz="2550" b="1">
                 <a:solidFill>
                   <a:srgbClr val="171717"/>
                 </a:solidFill>
                 <a:latin typeface="Tahoma"/>
                 <a:ea typeface="Tahoma"/>
               </a:rPr>
-              <a:t>Turn the shared invitation into an action plan</a:t>
+              <a:t>Turn the shared invitation into an</a:t>
+            </a:r>
+            <a:endParaRPr lang="en-US"/>
+          </a:p>
+          <a:p xmlns:a="http://schemas.openxmlformats.org/drawingml/2006/main">
+            <a:r>
+              <a:rPr lang="en-US" sz="2550" b="1">
+                <a:solidFill>
+                  <a:srgbClr val="171717"/>
+                </a:solidFill>
+                <a:latin typeface="Tahoma"/>
+                <a:ea typeface="Tahoma"/>
+              </a:rPr>
+              <a:t>action plan</a:t>
             </a:r>
             <a:endParaRPr lang="en-US"/>
           </a:p>
@@ -3447,7 +3531,7 @@
         </p:nvSpPr>
         <p:spPr>
           <a:xfrm xmlns:a="http://schemas.openxmlformats.org/drawingml/2006/main">
-            <a:off x="952500" y="1981200"/>
+            <a:off x="952500" y="2190750"/>
             <a:ext cx="6096000" cy="266700"/>
           </a:xfrm>
           <a:prstGeom xmlns:a="http://schemas.openxmlformats.org/drawingml/2006/main" prst="rect">

--- a/skills/presentation-template-library/skills/artifact-template-silver-atelier/assets/reference.pptx
+++ b/skills/presentation-template-library/skills/artifact-template-silver-atelier/assets/reference.pptx
@@ -354,359 +354,10 @@
 <file path=ppt/slides/slide1.xml><?xml version="1.0" encoding="utf-8"?>
 <p:sld xmlns:p="http://schemas.openxmlformats.org/presentationml/2006/main">
   <p:cSld name="Opening claim">
-    <p:spTree>
-      <p:nvGrpSpPr>
-        <p:cNvPr id="1" name=""/>
-        <p:cNvGrpSpPr/>
-        <p:nvPr/>
-      </p:nvGrpSpPr>
-      <p:grpSpPr>
-        <a:xfrm xmlns:a="http://schemas.openxmlformats.org/drawingml/2006/main">
-          <a:off x="0" y="0"/>
-          <a:ext cx="0" cy="0"/>
-          <a:chOff x="0" y="0"/>
-          <a:chExt cx="0" cy="0"/>
-        </a:xfrm>
-      </p:grpSpPr>
-      <p:pic>
-        <p:nvPicPr>
-          <p:cNvPr id="2" name="cover-visual-field">
-            <a:extLst xmlns:a="http://schemas.openxmlformats.org/drawingml/2006/main">
-              <a:ext uri="{C183D7F6-B498-43B3-948B-1728B52AA6E4}">
-                <adec:decorative xmlns:adec="http://schemas.microsoft.com/office/drawing/2017/decorative" val="1"/>
-              </a:ext>
-            </a:extLst>
-          </p:cNvPr>
-          <p:cNvPicPr/>
-          <p:nvPr/>
-        </p:nvPicPr>
-        <p:blipFill>
-          <a:blip xmlns:r="http://schemas.openxmlformats.org/officeDocument/2006/relationships" xmlns:a="http://schemas.openxmlformats.org/drawingml/2006/main" r:embed="rIdOfficeKitImage13db13f70d7843cc_1"/>
-          <a:srcRect xmlns:a="http://schemas.openxmlformats.org/drawingml/2006/main" l="0" t="34180" r="0" b="34180"/>
-          <a:stretch xmlns:a="http://schemas.openxmlformats.org/drawingml/2006/main">
-            <a:fillRect/>
-          </a:stretch>
-        </p:blipFill>
-        <p:spPr>
-          <a:xfrm xmlns:a="http://schemas.openxmlformats.org/drawingml/2006/main" flipH="1">
-            <a:off x="0" y="0"/>
-            <a:ext cx="15240000" cy="8572500"/>
-          </a:xfrm>
-          <a:prstGeom xmlns:a="http://schemas.openxmlformats.org/drawingml/2006/main" prst="rect">
-            <a:avLst/>
-          </a:prstGeom>
-        </p:spPr>
-      </p:pic>
-      <p:sp>
-        <p:nvSpPr>
-          <p:cNvPr id="3" name="editorial-cover-scrim"/>
-          <p:cNvSpPr/>
-          <p:nvPr/>
-        </p:nvSpPr>
-        <p:spPr>
-          <a:xfrm xmlns:a="http://schemas.openxmlformats.org/drawingml/2006/main">
-            <a:off x="0" y="0"/>
-            <a:ext cx="7239000" cy="8572500"/>
-          </a:xfrm>
-          <a:prstGeom xmlns:a="http://schemas.openxmlformats.org/drawingml/2006/main" prst="rect">
-            <a:avLst/>
-          </a:prstGeom>
-          <a:solidFill xmlns:a="http://schemas.openxmlformats.org/drawingml/2006/main">
-            <a:srgbClr val="171717">
-              <a:alpha val="84000"/>
-            </a:srgbClr>
-          </a:solidFill>
-          <a:ln xmlns:a="http://schemas.openxmlformats.org/drawingml/2006/main" w="0">
-            <a:solidFill>
-              <a:srgbClr val="171717"/>
-            </a:solidFill>
-            <a:prstDash val="solid"/>
-          </a:ln>
-        </p:spPr>
-        <p:txBody>
-          <a:bodyPr xmlns:a="http://schemas.openxmlformats.org/drawingml/2006/main" wrap="square" lIns="0" tIns="0" rIns="0" bIns="0" anchor="t"/>
-          <a:lstStyle xmlns:a="http://schemas.openxmlformats.org/drawingml/2006/main"/>
-          <a:p xmlns:a="http://schemas.openxmlformats.org/drawingml/2006/main">
-            <a:r>
-              <a:rPr lang="en-US"/>
-              <a:t/>
-            </a:r>
-            <a:endParaRPr lang="en-US"/>
-          </a:p>
-        </p:txBody>
-      </p:sp>
-      <p:sp>
-        <p:nvSpPr>
-          <p:cNvPr id="4" name="eyebrow"/>
-          <p:cNvSpPr txBox="1"/>
-          <p:nvPr/>
-        </p:nvSpPr>
-        <p:spPr>
-          <a:xfrm xmlns:a="http://schemas.openxmlformats.org/drawingml/2006/main">
-            <a:off x="914400" y="800100"/>
-            <a:ext cx="7048500" cy="228600"/>
-          </a:xfrm>
-          <a:prstGeom xmlns:a="http://schemas.openxmlformats.org/drawingml/2006/main" prst="rect">
-            <a:avLst/>
-          </a:prstGeom>
-          <a:noFill xmlns:a="http://schemas.openxmlformats.org/drawingml/2006/main"/>
-          <a:ln xmlns:a="http://schemas.openxmlformats.org/drawingml/2006/main" w="0">
-            <a:noFill/>
-          </a:ln>
-        </p:spPr>
-        <p:txBody>
-          <a:bodyPr xmlns:a="http://schemas.openxmlformats.org/drawingml/2006/main" wrap="square" lIns="0" tIns="0" rIns="0" bIns="0" anchor="t"/>
-          <a:lstStyle xmlns:a="http://schemas.openxmlformats.org/drawingml/2006/main"/>
-          <a:p xmlns:a="http://schemas.openxmlformats.org/drawingml/2006/main">
-            <a:r>
-              <a:rPr lang="en-US" sz="1125" b="1">
-                <a:solidFill>
-                  <a:srgbClr val="9A6B45"/>
-                </a:solidFill>
-                <a:latin typeface="Tahoma"/>
-                <a:ea typeface="Tahoma"/>
-              </a:rPr>
-              <a:t>PROMOTION · OFFICEKIT CALIBRATION</a:t>
-            </a:r>
-            <a:endParaRPr lang="en-US"/>
-          </a:p>
-        </p:txBody>
-      </p:sp>
-      <p:sp>
-        <p:nvSpPr>
-          <p:cNvPr id="5" name="cover-title"/>
-          <p:cNvSpPr txBox="1"/>
-          <p:nvPr/>
-        </p:nvSpPr>
-        <p:spPr>
-          <a:xfrm xmlns:a="http://schemas.openxmlformats.org/drawingml/2006/main">
-            <a:off x="914400" y="1962150"/>
-            <a:ext cx="5810250" cy="1333500"/>
-          </a:xfrm>
-          <a:prstGeom xmlns:a="http://schemas.openxmlformats.org/drawingml/2006/main" prst="rect">
-            <a:avLst/>
-          </a:prstGeom>
-          <a:noFill xmlns:a="http://schemas.openxmlformats.org/drawingml/2006/main"/>
-          <a:ln xmlns:a="http://schemas.openxmlformats.org/drawingml/2006/main" w="0">
-            <a:noFill/>
-          </a:ln>
-        </p:spPr>
-        <p:txBody>
-          <a:bodyPr xmlns:a="http://schemas.openxmlformats.org/drawingml/2006/main" wrap="square" lIns="0" tIns="0" rIns="0" bIns="0" anchor="t"/>
-          <a:lstStyle xmlns:a="http://schemas.openxmlformats.org/drawingml/2006/main"/>
-          <a:p xmlns:a="http://schemas.openxmlformats.org/drawingml/2006/main">
-            <a:r>
-              <a:rPr lang="en-US" sz="3900" b="1">
-                <a:solidFill>
-                  <a:srgbClr val="FFFFFF"/>
-                </a:solidFill>
-                <a:latin typeface="Tahoma"/>
-                <a:ea typeface="Tahoma"/>
-              </a:rPr>
-              <a:t>Silver Atelier: a claim worth testing</a:t>
-            </a:r>
-            <a:endParaRPr lang="en-US"/>
-          </a:p>
-        </p:txBody>
-      </p:sp>
-      <p:sp>
-        <p:nvSpPr>
-          <p:cNvPr id="6" name="cover-subtitle"/>
-          <p:cNvSpPr txBox="1"/>
-          <p:nvPr/>
-        </p:nvSpPr>
-        <p:spPr>
-          <a:xfrm xmlns:a="http://schemas.openxmlformats.org/drawingml/2006/main">
-            <a:off x="952500" y="3638550"/>
-            <a:ext cx="5334000" cy="323850"/>
-          </a:xfrm>
-          <a:prstGeom xmlns:a="http://schemas.openxmlformats.org/drawingml/2006/main" prst="rect">
-            <a:avLst/>
-          </a:prstGeom>
-          <a:noFill xmlns:a="http://schemas.openxmlformats.org/drawingml/2006/main"/>
-          <a:ln xmlns:a="http://schemas.openxmlformats.org/drawingml/2006/main" w="0">
-            <a:noFill/>
-          </a:ln>
-        </p:spPr>
-        <p:txBody>
-          <a:bodyPr xmlns:a="http://schemas.openxmlformats.org/drawingml/2006/main" wrap="square" lIns="0" tIns="0" rIns="0" bIns="0" anchor="t"/>
-          <a:lstStyle xmlns:a="http://schemas.openxmlformats.org/drawingml/2006/main"/>
-          <a:p xmlns:a="http://schemas.openxmlformats.org/drawingml/2006/main">
-            <a:r>
-              <a:rPr lang="en-US" sz="1650">
-                <a:solidFill>
-                  <a:srgbClr val="F0F2F2"/>
-                </a:solidFill>
-                <a:latin typeface="Tahoma"/>
-                <a:ea typeface="Tahoma"/>
-              </a:rPr>
-              <a:t>A clean-room reference for a visual proposition.</a:t>
-            </a:r>
-            <a:endParaRPr lang="en-US"/>
-          </a:p>
-        </p:txBody>
-      </p:sp>
-      <p:sp>
-        <p:nvSpPr>
-          <p:cNvPr id="7" name="cover-photo-rule"/>
-          <p:cNvSpPr/>
-          <p:nvPr/>
-        </p:nvSpPr>
-        <p:spPr>
-          <a:xfrm xmlns:a="http://schemas.openxmlformats.org/drawingml/2006/main">
-            <a:off x="914400" y="4533900"/>
-            <a:ext cx="4895850" cy="0"/>
-          </a:xfrm>
-          <a:prstGeom xmlns:a="http://schemas.openxmlformats.org/drawingml/2006/main" prst="line">
-            <a:avLst/>
-          </a:prstGeom>
-          <a:noFill xmlns:a="http://schemas.openxmlformats.org/drawingml/2006/main"/>
-          <a:ln xmlns:a="http://schemas.openxmlformats.org/drawingml/2006/main" w="38100">
-            <a:solidFill>
-              <a:srgbClr val="9A6B45"/>
-            </a:solidFill>
-            <a:prstDash val="solid"/>
-          </a:ln>
-        </p:spPr>
-        <p:txBody>
-          <a:bodyPr xmlns:a="http://schemas.openxmlformats.org/drawingml/2006/main" wrap="square" lIns="0" tIns="0" rIns="0" bIns="0" anchor="t"/>
-          <a:lstStyle xmlns:a="http://schemas.openxmlformats.org/drawingml/2006/main"/>
-          <a:p xmlns:a="http://schemas.openxmlformats.org/drawingml/2006/main">
-            <a:r>
-              <a:rPr lang="en-US"/>
-              <a:t/>
-            </a:r>
-            <a:endParaRPr lang="en-US"/>
-          </a:p>
-        </p:txBody>
-      </p:sp>
-      <p:sp>
-        <p:nvSpPr>
-          <p:cNvPr id="8" name="cover-thesis"/>
-          <p:cNvSpPr txBox="1"/>
-          <p:nvPr/>
-        </p:nvSpPr>
-        <p:spPr>
-          <a:xfrm xmlns:a="http://schemas.openxmlformats.org/drawingml/2006/main">
-            <a:off x="952500" y="4895850"/>
-            <a:ext cx="5715000" cy="647700"/>
-          </a:xfrm>
-          <a:prstGeom xmlns:a="http://schemas.openxmlformats.org/drawingml/2006/main" prst="rect">
-            <a:avLst/>
-          </a:prstGeom>
-          <a:noFill xmlns:a="http://schemas.openxmlformats.org/drawingml/2006/main"/>
-          <a:ln xmlns:a="http://schemas.openxmlformats.org/drawingml/2006/main" w="0">
-            <a:noFill/>
-          </a:ln>
-        </p:spPr>
-        <p:txBody>
-          <a:bodyPr xmlns:a="http://schemas.openxmlformats.org/drawingml/2006/main" wrap="square" lIns="0" tIns="0" rIns="0" bIns="0" anchor="t"/>
-          <a:lstStyle xmlns:a="http://schemas.openxmlformats.org/drawingml/2006/main"/>
-          <a:p xmlns:a="http://schemas.openxmlformats.org/drawingml/2006/main">
-            <a:r>
-              <a:rPr lang="en-US" sz="1950" b="1">
-                <a:solidFill>
-                  <a:srgbClr val="FFFFFF"/>
-                </a:solidFill>
-                <a:latin typeface="Tahoma"/>
-                <a:ea typeface="Tahoma"/>
-              </a:rPr>
-              <a:t>A proposition earns attention when it gives a next move.</a:t>
-            </a:r>
-            <a:endParaRPr lang="en-US"/>
-          </a:p>
-        </p:txBody>
-      </p:sp>
-      <p:sp>
-        <p:nvSpPr>
-          <p:cNvPr id="9" name="cover-source"/>
-          <p:cNvSpPr txBox="1"/>
-          <p:nvPr/>
-        </p:nvSpPr>
-        <p:spPr>
-          <a:xfrm xmlns:a="http://schemas.openxmlformats.org/drawingml/2006/main">
-            <a:off x="952500" y="7334250"/>
-            <a:ext cx="9048750" cy="228600"/>
-          </a:xfrm>
-          <a:prstGeom xmlns:a="http://schemas.openxmlformats.org/drawingml/2006/main" prst="rect">
-            <a:avLst/>
-          </a:prstGeom>
-          <a:noFill xmlns:a="http://schemas.openxmlformats.org/drawingml/2006/main"/>
-          <a:ln xmlns:a="http://schemas.openxmlformats.org/drawingml/2006/main" w="0">
-            <a:noFill/>
-          </a:ln>
-        </p:spPr>
-        <p:txBody>
-          <a:bodyPr xmlns:a="http://schemas.openxmlformats.org/drawingml/2006/main" wrap="square" lIns="0" tIns="0" rIns="0" bIns="0" anchor="t"/>
-          <a:lstStyle xmlns:a="http://schemas.openxmlformats.org/drawingml/2006/main"/>
-          <a:p xmlns:a="http://schemas.openxmlformats.org/drawingml/2006/main">
-            <a:r>
-              <a:rPr lang="en-US" sz="1050">
-                <a:solidFill>
-                  <a:srgbClr val="F0F2F2"/>
-                </a:solidFill>
-                <a:latin typeface="Tahoma"/>
-                <a:ea typeface="Tahoma"/>
-              </a:rPr>
-              <a:t>OfficeKit original clean-room calibration · fictional content · 2026-08-29</a:t>
-            </a:r>
-            <a:endParaRPr lang="en-US"/>
-          </a:p>
-        </p:txBody>
-      </p:sp>
-      <p:sp>
-        <p:nvSpPr>
-          <p:cNvPr id="10" name="page-number"/>
-          <p:cNvSpPr txBox="1"/>
-          <p:nvPr/>
-        </p:nvSpPr>
-        <p:spPr>
-          <a:xfrm xmlns:a="http://schemas.openxmlformats.org/drawingml/2006/main">
-            <a:off x="13335000" y="7810500"/>
-            <a:ext cx="952500" cy="209550"/>
-          </a:xfrm>
-          <a:prstGeom xmlns:a="http://schemas.openxmlformats.org/drawingml/2006/main" prst="rect">
-            <a:avLst/>
-          </a:prstGeom>
-          <a:noFill xmlns:a="http://schemas.openxmlformats.org/drawingml/2006/main"/>
-          <a:ln xmlns:a="http://schemas.openxmlformats.org/drawingml/2006/main" w="0">
-            <a:noFill/>
-          </a:ln>
-        </p:spPr>
-        <p:txBody>
-          <a:bodyPr xmlns:a="http://schemas.openxmlformats.org/drawingml/2006/main" wrap="square" lIns="0" tIns="0" rIns="0" bIns="0" anchor="t"/>
-          <a:lstStyle xmlns:a="http://schemas.openxmlformats.org/drawingml/2006/main"/>
-          <a:p xmlns:a="http://schemas.openxmlformats.org/drawingml/2006/main">
-            <a:pPr algn="r"/>
-            <a:r>
-              <a:rPr lang="en-US" sz="1050">
-                <a:solidFill>
-                  <a:srgbClr val="F0F2F2"/>
-                </a:solidFill>
-                <a:latin typeface="Tahoma"/>
-                <a:ea typeface="Tahoma"/>
-              </a:rPr>
-              <a:t>1 / 6</a:t>
-            </a:r>
-            <a:endParaRPr lang="en-US"/>
-          </a:p>
-        </p:txBody>
-      </p:sp>
-    </p:spTree>
-  </p:cSld>
-  <p:clrMapOvr>
-    <a:masterClrMapping xmlns:a="http://schemas.openxmlformats.org/drawingml/2006/main"/>
-  </p:clrMapOvr>
-</p:sld>
-</file>
-
-<file path=ppt/slides/slide2.xml><?xml version="1.0" encoding="utf-8"?>
-<p:sld xmlns:p="http://schemas.openxmlformats.org/presentationml/2006/main">
-  <p:cSld name="Argument">
     <p:bg>
       <p:bgPr>
         <a:blipFill xmlns:a="http://schemas.openxmlformats.org/drawingml/2006/main">
-          <a:blip xmlns:r="http://schemas.openxmlformats.org/officeDocument/2006/relationships" r:embed="rIdOfficeKitImage7790b68b5d8fcd92_1"/>
+          <a:blip xmlns:r="http://schemas.openxmlformats.org/officeDocument/2006/relationships" r:embed="rIdOfficeKitImagec7b73f8fac405495_1"/>
           <a:stretch>
             <a:fillRect/>
           </a:stretch>
@@ -729,26 +380,26 @@
       </p:grpSpPr>
       <p:sp>
         <p:nvSpPr>
-          <p:cNvPr id="2" name="argument-paper-scrim"/>
+          <p:cNvPr id="2" name="editorial-cover-scrim"/>
           <p:cNvSpPr/>
           <p:nvPr/>
         </p:nvSpPr>
         <p:spPr>
           <a:xfrm xmlns:a="http://schemas.openxmlformats.org/drawingml/2006/main">
             <a:off x="0" y="0"/>
-            <a:ext cx="7429500" cy="8572500"/>
+            <a:ext cx="7239000" cy="8572500"/>
           </a:xfrm>
           <a:prstGeom xmlns:a="http://schemas.openxmlformats.org/drawingml/2006/main" prst="rect">
             <a:avLst/>
           </a:prstGeom>
           <a:solidFill xmlns:a="http://schemas.openxmlformats.org/drawingml/2006/main">
-            <a:srgbClr val="F2F3F3">
-              <a:alpha val="96000"/>
+            <a:srgbClr val="171717">
+              <a:alpha val="84000"/>
             </a:srgbClr>
           </a:solidFill>
           <a:ln xmlns:a="http://schemas.openxmlformats.org/drawingml/2006/main" w="0">
             <a:solidFill>
-              <a:srgbClr val="F2F3F3"/>
+              <a:srgbClr val="171717"/>
             </a:solidFill>
             <a:prstDash val="solid"/>
           </a:ln>
@@ -767,14 +418,125 @@
       </p:sp>
       <p:sp>
         <p:nvSpPr>
-          <p:cNvPr id="3" name="argument-top-rule"/>
+          <p:cNvPr id="3" name="eyebrow"/>
+          <p:cNvSpPr txBox="1"/>
+          <p:nvPr/>
+        </p:nvSpPr>
+        <p:spPr>
+          <a:xfrm xmlns:a="http://schemas.openxmlformats.org/drawingml/2006/main">
+            <a:off x="914400" y="800100"/>
+            <a:ext cx="7048500" cy="228600"/>
+          </a:xfrm>
+          <a:prstGeom xmlns:a="http://schemas.openxmlformats.org/drawingml/2006/main" prst="rect">
+            <a:avLst/>
+          </a:prstGeom>
+          <a:noFill xmlns:a="http://schemas.openxmlformats.org/drawingml/2006/main"/>
+          <a:ln xmlns:a="http://schemas.openxmlformats.org/drawingml/2006/main" w="0">
+            <a:noFill/>
+          </a:ln>
+        </p:spPr>
+        <p:txBody>
+          <a:bodyPr xmlns:a="http://schemas.openxmlformats.org/drawingml/2006/main" wrap="square" lIns="0" tIns="0" rIns="0" bIns="0" anchor="t"/>
+          <a:lstStyle xmlns:a="http://schemas.openxmlformats.org/drawingml/2006/main"/>
+          <a:p xmlns:a="http://schemas.openxmlformats.org/drawingml/2006/main">
+            <a:r>
+              <a:rPr lang="en-US" sz="1125" b="1">
+                <a:solidFill>
+                  <a:srgbClr val="9A6B45"/>
+                </a:solidFill>
+                <a:latin typeface="Tahoma"/>
+                <a:ea typeface="Tahoma"/>
+              </a:rPr>
+              <a:t>PROMOTION · OFFICEKIT CALIBRATION</a:t>
+            </a:r>
+            <a:endParaRPr lang="en-US"/>
+          </a:p>
+        </p:txBody>
+      </p:sp>
+      <p:sp>
+        <p:nvSpPr>
+          <p:cNvPr id="4" name="cover-title"/>
+          <p:cNvSpPr txBox="1"/>
+          <p:nvPr/>
+        </p:nvSpPr>
+        <p:spPr>
+          <a:xfrm xmlns:a="http://schemas.openxmlformats.org/drawingml/2006/main">
+            <a:off x="914400" y="1962150"/>
+            <a:ext cx="5810250" cy="1333500"/>
+          </a:xfrm>
+          <a:prstGeom xmlns:a="http://schemas.openxmlformats.org/drawingml/2006/main" prst="rect">
+            <a:avLst/>
+          </a:prstGeom>
+          <a:noFill xmlns:a="http://schemas.openxmlformats.org/drawingml/2006/main"/>
+          <a:ln xmlns:a="http://schemas.openxmlformats.org/drawingml/2006/main" w="0">
+            <a:noFill/>
+          </a:ln>
+        </p:spPr>
+        <p:txBody>
+          <a:bodyPr xmlns:a="http://schemas.openxmlformats.org/drawingml/2006/main" wrap="square" lIns="0" tIns="0" rIns="0" bIns="0" anchor="t"/>
+          <a:lstStyle xmlns:a="http://schemas.openxmlformats.org/drawingml/2006/main"/>
+          <a:p xmlns:a="http://schemas.openxmlformats.org/drawingml/2006/main">
+            <a:r>
+              <a:rPr lang="en-US" sz="3900" b="1">
+                <a:solidFill>
+                  <a:srgbClr val="FFFFFF"/>
+                </a:solidFill>
+                <a:latin typeface="Tahoma"/>
+                <a:ea typeface="Tahoma"/>
+              </a:rPr>
+              <a:t>Silver Atelier: a claim worth testing</a:t>
+            </a:r>
+            <a:endParaRPr lang="en-US"/>
+          </a:p>
+        </p:txBody>
+      </p:sp>
+      <p:sp>
+        <p:nvSpPr>
+          <p:cNvPr id="5" name="cover-subtitle"/>
+          <p:cNvSpPr txBox="1"/>
+          <p:nvPr/>
+        </p:nvSpPr>
+        <p:spPr>
+          <a:xfrm xmlns:a="http://schemas.openxmlformats.org/drawingml/2006/main">
+            <a:off x="952500" y="3638550"/>
+            <a:ext cx="5334000" cy="323850"/>
+          </a:xfrm>
+          <a:prstGeom xmlns:a="http://schemas.openxmlformats.org/drawingml/2006/main" prst="rect">
+            <a:avLst/>
+          </a:prstGeom>
+          <a:noFill xmlns:a="http://schemas.openxmlformats.org/drawingml/2006/main"/>
+          <a:ln xmlns:a="http://schemas.openxmlformats.org/drawingml/2006/main" w="0">
+            <a:noFill/>
+          </a:ln>
+        </p:spPr>
+        <p:txBody>
+          <a:bodyPr xmlns:a="http://schemas.openxmlformats.org/drawingml/2006/main" wrap="square" lIns="0" tIns="0" rIns="0" bIns="0" anchor="t"/>
+          <a:lstStyle xmlns:a="http://schemas.openxmlformats.org/drawingml/2006/main"/>
+          <a:p xmlns:a="http://schemas.openxmlformats.org/drawingml/2006/main">
+            <a:r>
+              <a:rPr lang="en-US" sz="1650">
+                <a:solidFill>
+                  <a:srgbClr val="F0F2F2"/>
+                </a:solidFill>
+                <a:latin typeface="Tahoma"/>
+                <a:ea typeface="Tahoma"/>
+              </a:rPr>
+              <a:t>A clean-room reference for a visual proposition.</a:t>
+            </a:r>
+            <a:endParaRPr lang="en-US"/>
+          </a:p>
+        </p:txBody>
+      </p:sp>
+      <p:sp>
+        <p:nvSpPr>
+          <p:cNvPr id="6" name="cover-photo-rule"/>
           <p:cNvSpPr/>
           <p:nvPr/>
         </p:nvSpPr>
         <p:spPr>
           <a:xfrm xmlns:a="http://schemas.openxmlformats.org/drawingml/2006/main">
-            <a:off x="838200" y="666750"/>
-            <a:ext cx="13563600" cy="0"/>
+            <a:off x="914400" y="4533900"/>
+            <a:ext cx="4895850" cy="0"/>
           </a:xfrm>
           <a:prstGeom xmlns:a="http://schemas.openxmlformats.org/drawingml/2006/main" prst="line">
             <a:avLst/>
@@ -801,383 +563,51 @@
       </p:sp>
       <p:sp>
         <p:nvSpPr>
-          <p:cNvPr id="4" name="SILVER ATELIER · ARGUMENT"/>
-          <p:cNvSpPr txBox="1"/>
-          <p:nvPr/>
-        </p:nvSpPr>
-        <p:spPr>
-          <a:xfrm xmlns:a="http://schemas.openxmlformats.org/drawingml/2006/main">
-            <a:off x="914400" y="895350"/>
-            <a:ext cx="7239000" cy="228600"/>
-          </a:xfrm>
-          <a:prstGeom xmlns:a="http://schemas.openxmlformats.org/drawingml/2006/main" prst="rect">
-            <a:avLst/>
-          </a:prstGeom>
-          <a:noFill xmlns:a="http://schemas.openxmlformats.org/drawingml/2006/main"/>
-          <a:ln xmlns:a="http://schemas.openxmlformats.org/drawingml/2006/main" w="0">
-            <a:noFill/>
-          </a:ln>
-        </p:spPr>
-        <p:txBody>
-          <a:bodyPr xmlns:a="http://schemas.openxmlformats.org/drawingml/2006/main" wrap="square" lIns="0" tIns="0" rIns="0" bIns="0" anchor="t"/>
-          <a:lstStyle xmlns:a="http://schemas.openxmlformats.org/drawingml/2006/main"/>
-          <a:p xmlns:a="http://schemas.openxmlformats.org/drawingml/2006/main">
-            <a:r>
-              <a:rPr lang="en-US" sz="1200" b="1">
-                <a:solidFill>
-                  <a:srgbClr val="9A6B45"/>
-                </a:solidFill>
-                <a:latin typeface="Tahoma"/>
-                <a:ea typeface="Tahoma"/>
-              </a:rPr>
-              <a:t>SILVER ATELIER · ARGUMENT</a:t>
-            </a:r>
-            <a:endParaRPr lang="en-US"/>
-          </a:p>
-        </p:txBody>
-      </p:sp>
-      <p:sp>
-        <p:nvSpPr>
-          <p:cNvPr id="5" name="argument-title"/>
-          <p:cNvSpPr txBox="1"/>
-          <p:nvPr/>
-        </p:nvSpPr>
-        <p:spPr>
-          <a:xfrm xmlns:a="http://schemas.openxmlformats.org/drawingml/2006/main">
-            <a:off x="914400" y="1314450"/>
-            <a:ext cx="6286500" cy="914400"/>
-          </a:xfrm>
-          <a:prstGeom xmlns:a="http://schemas.openxmlformats.org/drawingml/2006/main" prst="rect">
-            <a:avLst/>
-          </a:prstGeom>
-          <a:noFill xmlns:a="http://schemas.openxmlformats.org/drawingml/2006/main"/>
-          <a:ln xmlns:a="http://schemas.openxmlformats.org/drawingml/2006/main" w="0">
-            <a:noFill/>
-          </a:ln>
-        </p:spPr>
-        <p:txBody>
-          <a:bodyPr xmlns:a="http://schemas.openxmlformats.org/drawingml/2006/main" wrap="square" lIns="0" tIns="0" rIns="0" bIns="0" anchor="t"/>
-          <a:lstStyle xmlns:a="http://schemas.openxmlformats.org/drawingml/2006/main"/>
-          <a:p xmlns:a="http://schemas.openxmlformats.org/drawingml/2006/main">
-            <a:r>
-              <a:rPr lang="en-US" sz="2550" b="1">
-                <a:solidFill>
-                  <a:srgbClr val="171717"/>
-                </a:solidFill>
-                <a:latin typeface="Tahoma"/>
-                <a:ea typeface="Tahoma"/>
-              </a:rPr>
-              <a:t>The proposition is the page's visual</a:t>
-            </a:r>
-            <a:endParaRPr lang="en-US"/>
-          </a:p>
-          <a:p xmlns:a="http://schemas.openxmlformats.org/drawingml/2006/main">
-            <a:r>
-              <a:rPr lang="en-US" sz="2550" b="1">
-                <a:solidFill>
-                  <a:srgbClr val="171717"/>
-                </a:solidFill>
-                <a:latin typeface="Tahoma"/>
-                <a:ea typeface="Tahoma"/>
-              </a:rPr>
-              <a:t>center</a:t>
-            </a:r>
-            <a:endParaRPr lang="en-US"/>
-          </a:p>
-        </p:txBody>
-      </p:sp>
-      <p:sp>
-        <p:nvSpPr>
-          <p:cNvPr id="6" name="argument-basis"/>
-          <p:cNvSpPr txBox="1"/>
-          <p:nvPr/>
-        </p:nvSpPr>
-        <p:spPr>
-          <a:xfrm xmlns:a="http://schemas.openxmlformats.org/drawingml/2006/main">
-            <a:off x="952500" y="2190750"/>
-            <a:ext cx="6096000" cy="266700"/>
-          </a:xfrm>
-          <a:prstGeom xmlns:a="http://schemas.openxmlformats.org/drawingml/2006/main" prst="rect">
-            <a:avLst/>
-          </a:prstGeom>
-          <a:noFill xmlns:a="http://schemas.openxmlformats.org/drawingml/2006/main"/>
-          <a:ln xmlns:a="http://schemas.openxmlformats.org/drawingml/2006/main" w="0">
-            <a:noFill/>
-          </a:ln>
-        </p:spPr>
-        <p:txBody>
-          <a:bodyPr xmlns:a="http://schemas.openxmlformats.org/drawingml/2006/main" wrap="square" lIns="0" tIns="0" rIns="0" bIns="0" anchor="t"/>
-          <a:lstStyle xmlns:a="http://schemas.openxmlformats.org/drawingml/2006/main"/>
-          <a:p xmlns:a="http://schemas.openxmlformats.org/drawingml/2006/main">
-            <a:r>
-              <a:rPr lang="en-US" sz="1350">
-                <a:solidFill>
-                  <a:srgbClr val="898989"/>
-                </a:solidFill>
-                <a:latin typeface="Tahoma"/>
-                <a:ea typeface="Tahoma"/>
-              </a:rPr>
-              <a:t>Scale, crop, and color invite attention without hiding the evidence.</a:t>
-            </a:r>
-            <a:endParaRPr lang="en-US"/>
-          </a:p>
-        </p:txBody>
-      </p:sp>
-      <p:sp>
-        <p:nvSpPr>
-          <p:cNvPr id="7" name="argument-rule"/>
-          <p:cNvSpPr/>
-          <p:nvPr/>
-        </p:nvSpPr>
-        <p:spPr>
-          <a:xfrm xmlns:a="http://schemas.openxmlformats.org/drawingml/2006/main">
-            <a:off x="914400" y="2457450"/>
-            <a:ext cx="13411200" cy="0"/>
-          </a:xfrm>
-          <a:prstGeom xmlns:a="http://schemas.openxmlformats.org/drawingml/2006/main" prst="line">
-            <a:avLst/>
-          </a:prstGeom>
-          <a:noFill xmlns:a="http://schemas.openxmlformats.org/drawingml/2006/main"/>
-          <a:ln xmlns:a="http://schemas.openxmlformats.org/drawingml/2006/main" w="25400">
-            <a:solidFill>
-              <a:srgbClr val="898989"/>
-            </a:solidFill>
-            <a:prstDash val="solid"/>
-          </a:ln>
-        </p:spPr>
-        <p:txBody>
-          <a:bodyPr xmlns:a="http://schemas.openxmlformats.org/drawingml/2006/main" wrap="square" lIns="0" tIns="0" rIns="0" bIns="0" anchor="t"/>
-          <a:lstStyle xmlns:a="http://schemas.openxmlformats.org/drawingml/2006/main"/>
-          <a:p xmlns:a="http://schemas.openxmlformats.org/drawingml/2006/main">
-            <a:r>
-              <a:rPr lang="en-US"/>
-              <a:t/>
-            </a:r>
-            <a:endParaRPr lang="en-US"/>
-          </a:p>
-        </p:txBody>
-      </p:sp>
-      <p:sp>
-        <p:nvSpPr>
-          <p:cNvPr id="8" name="promotion-kicker"/>
-          <p:cNvSpPr txBox="1"/>
-          <p:nvPr/>
-        </p:nvSpPr>
-        <p:spPr>
-          <a:xfrm xmlns:a="http://schemas.openxmlformats.org/drawingml/2006/main">
-            <a:off x="1104900" y="3352800"/>
-            <a:ext cx="2857500" cy="228600"/>
-          </a:xfrm>
-          <a:prstGeom xmlns:a="http://schemas.openxmlformats.org/drawingml/2006/main" prst="rect">
-            <a:avLst/>
-          </a:prstGeom>
-          <a:noFill xmlns:a="http://schemas.openxmlformats.org/drawingml/2006/main"/>
-          <a:ln xmlns:a="http://schemas.openxmlformats.org/drawingml/2006/main" w="0">
-            <a:noFill/>
-          </a:ln>
-        </p:spPr>
-        <p:txBody>
-          <a:bodyPr xmlns:a="http://schemas.openxmlformats.org/drawingml/2006/main" wrap="square" lIns="0" tIns="0" rIns="0" bIns="0" anchor="t"/>
-          <a:lstStyle xmlns:a="http://schemas.openxmlformats.org/drawingml/2006/main"/>
-          <a:p xmlns:a="http://schemas.openxmlformats.org/drawingml/2006/main">
-            <a:r>
-              <a:rPr lang="en-US" sz="1125" b="1">
-                <a:solidFill>
-                  <a:srgbClr val="9A6B45"/>
-                </a:solidFill>
-                <a:latin typeface="Tahoma"/>
-                <a:ea typeface="Tahoma"/>
-              </a:rPr>
-              <a:t>ONE PROPOSITION</a:t>
-            </a:r>
-            <a:endParaRPr lang="en-US"/>
-          </a:p>
-        </p:txBody>
-      </p:sp>
-      <p:sp>
-        <p:nvSpPr>
-          <p:cNvPr id="9" name="promotion-headline"/>
-          <p:cNvSpPr txBox="1"/>
-          <p:nvPr/>
-        </p:nvSpPr>
-        <p:spPr>
-          <a:xfrm xmlns:a="http://schemas.openxmlformats.org/drawingml/2006/main">
-            <a:off x="1104900" y="3790950"/>
-            <a:ext cx="6477000" cy="723900"/>
-          </a:xfrm>
-          <a:prstGeom xmlns:a="http://schemas.openxmlformats.org/drawingml/2006/main" prst="rect">
-            <a:avLst/>
-          </a:prstGeom>
-          <a:noFill xmlns:a="http://schemas.openxmlformats.org/drawingml/2006/main"/>
-          <a:ln xmlns:a="http://schemas.openxmlformats.org/drawingml/2006/main" w="0">
-            <a:noFill/>
-          </a:ln>
-        </p:spPr>
-        <p:txBody>
-          <a:bodyPr xmlns:a="http://schemas.openxmlformats.org/drawingml/2006/main" wrap="square" lIns="0" tIns="0" rIns="0" bIns="0" anchor="t"/>
-          <a:lstStyle xmlns:a="http://schemas.openxmlformats.org/drawingml/2006/main"/>
-          <a:p xmlns:a="http://schemas.openxmlformats.org/drawingml/2006/main">
-            <a:r>
-              <a:rPr lang="en-US" sz="2625" b="1">
-                <a:solidFill>
-                  <a:srgbClr val="171717"/>
-                </a:solidFill>
-                <a:latin typeface="Tahoma"/>
-                <a:ea typeface="Tahoma"/>
-              </a:rPr>
-              <a:t>Make the next action visible.</a:t>
-            </a:r>
-            <a:endParaRPr lang="en-US"/>
-          </a:p>
-        </p:txBody>
-      </p:sp>
-      <p:sp>
-        <p:nvSpPr>
-          <p:cNvPr id="10" name="promotion-body"/>
-          <p:cNvSpPr txBox="1"/>
-          <p:nvPr/>
-        </p:nvSpPr>
-        <p:spPr>
-          <a:xfrm xmlns:a="http://schemas.openxmlformats.org/drawingml/2006/main">
-            <a:off x="1104900" y="4762500"/>
-            <a:ext cx="6191250" cy="457200"/>
-          </a:xfrm>
-          <a:prstGeom xmlns:a="http://schemas.openxmlformats.org/drawingml/2006/main" prst="rect">
-            <a:avLst/>
-          </a:prstGeom>
-          <a:noFill xmlns:a="http://schemas.openxmlformats.org/drawingml/2006/main"/>
-          <a:ln xmlns:a="http://schemas.openxmlformats.org/drawingml/2006/main" w="0">
-            <a:noFill/>
-          </a:ln>
-        </p:spPr>
-        <p:txBody>
-          <a:bodyPr xmlns:a="http://schemas.openxmlformats.org/drawingml/2006/main" wrap="square" lIns="0" tIns="0" rIns="0" bIns="0" anchor="t"/>
-          <a:lstStyle xmlns:a="http://schemas.openxmlformats.org/drawingml/2006/main"/>
-          <a:p xmlns:a="http://schemas.openxmlformats.org/drawingml/2006/main">
-            <a:r>
-              <a:rPr lang="en-US" sz="1575">
-                <a:solidFill>
-                  <a:srgbClr val="171717"/>
-                </a:solidFill>
-                <a:latin typeface="Tahoma"/>
-                <a:ea typeface="Tahoma"/>
-              </a:rPr>
-              <a:t>A clear invitation earns attention when evidence and access arrive together.</a:t>
-            </a:r>
-            <a:endParaRPr lang="en-US"/>
-          </a:p>
-        </p:txBody>
-      </p:sp>
-      <p:pic>
-        <p:nvPicPr>
-          <p:cNvPr id="11" name="promotion-hero-frame">
-            <a:extLst xmlns:a="http://schemas.openxmlformats.org/drawingml/2006/main">
-              <a:ext uri="{C183D7F6-B498-43B3-948B-1728B52AA6E4}">
-                <adec:decorative xmlns:adec="http://schemas.microsoft.com/office/drawing/2017/decorative" val="1"/>
-              </a:ext>
-            </a:extLst>
-          </p:cNvPr>
-          <p:cNvPicPr/>
-          <p:nvPr/>
-        </p:nvPicPr>
-        <p:blipFill>
-          <a:blip xmlns:r="http://schemas.openxmlformats.org/officeDocument/2006/relationships" xmlns:a="http://schemas.openxmlformats.org/drawingml/2006/main" r:embed="rIdOfficeKitImagec237998db8bee20d_1"/>
-          <a:srcRect xmlns:a="http://schemas.openxmlformats.org/drawingml/2006/main" l="0" t="31908" r="0" b="31908"/>
-          <a:stretch xmlns:a="http://schemas.openxmlformats.org/drawingml/2006/main">
-            <a:fillRect/>
-          </a:stretch>
-        </p:blipFill>
-        <p:spPr>
-          <a:xfrm xmlns:a="http://schemas.openxmlformats.org/drawingml/2006/main">
-            <a:off x="9525000" y="3143250"/>
-            <a:ext cx="4000500" cy="2571750"/>
-          </a:xfrm>
-          <a:prstGeom xmlns:a="http://schemas.openxmlformats.org/drawingml/2006/main" prst="rect">
-            <a:avLst/>
-          </a:prstGeom>
-        </p:spPr>
-      </p:pic>
-      <p:sp>
-        <p:nvSpPr>
-          <p:cNvPr id="12" name="promotion-image-rule"/>
-          <p:cNvSpPr/>
-          <p:nvPr/>
-        </p:nvSpPr>
-        <p:spPr>
-          <a:xfrm xmlns:a="http://schemas.openxmlformats.org/drawingml/2006/main">
-            <a:off x="9525000" y="5905500"/>
-            <a:ext cx="4000500" cy="0"/>
-          </a:xfrm>
-          <a:prstGeom xmlns:a="http://schemas.openxmlformats.org/drawingml/2006/main" prst="line">
-            <a:avLst/>
-          </a:prstGeom>
-          <a:noFill xmlns:a="http://schemas.openxmlformats.org/drawingml/2006/main"/>
-          <a:ln xmlns:a="http://schemas.openxmlformats.org/drawingml/2006/main" w="38100">
-            <a:solidFill>
-              <a:srgbClr val="9A6B45"/>
-            </a:solidFill>
-            <a:prstDash val="solid"/>
-          </a:ln>
-        </p:spPr>
-        <p:txBody>
-          <a:bodyPr xmlns:a="http://schemas.openxmlformats.org/drawingml/2006/main" wrap="square" lIns="0" tIns="0" rIns="0" bIns="0" anchor="t"/>
-          <a:lstStyle xmlns:a="http://schemas.openxmlformats.org/drawingml/2006/main"/>
-          <a:p xmlns:a="http://schemas.openxmlformats.org/drawingml/2006/main">
-            <a:r>
-              <a:rPr lang="en-US"/>
-              <a:t/>
-            </a:r>
-            <a:endParaRPr lang="en-US"/>
-          </a:p>
-        </p:txBody>
-      </p:sp>
-      <p:sp>
-        <p:nvSpPr>
-          <p:cNvPr id="13" name="promotion-image-label"/>
-          <p:cNvSpPr txBox="1"/>
-          <p:nvPr/>
-        </p:nvSpPr>
-        <p:spPr>
-          <a:xfrm xmlns:a="http://schemas.openxmlformats.org/drawingml/2006/main">
-            <a:off x="9525000" y="6153150"/>
-            <a:ext cx="4000500" cy="247650"/>
-          </a:xfrm>
-          <a:prstGeom xmlns:a="http://schemas.openxmlformats.org/drawingml/2006/main" prst="rect">
-            <a:avLst/>
-          </a:prstGeom>
-          <a:noFill xmlns:a="http://schemas.openxmlformats.org/drawingml/2006/main"/>
-          <a:ln xmlns:a="http://schemas.openxmlformats.org/drawingml/2006/main" w="0">
-            <a:noFill/>
-          </a:ln>
-        </p:spPr>
-        <p:txBody>
-          <a:bodyPr xmlns:a="http://schemas.openxmlformats.org/drawingml/2006/main" wrap="square" lIns="0" tIns="0" rIns="0" bIns="0" anchor="t"/>
-          <a:lstStyle xmlns:a="http://schemas.openxmlformats.org/drawingml/2006/main"/>
-          <a:p xmlns:a="http://schemas.openxmlformats.org/drawingml/2006/main">
-            <a:r>
-              <a:rPr lang="en-US" sz="1275" b="1">
-                <a:solidFill>
-                  <a:srgbClr val="9A6B45"/>
-                </a:solidFill>
-                <a:latin typeface="Tahoma"/>
-                <a:ea typeface="Tahoma"/>
-              </a:rPr>
-              <a:t>INVITE · PROVE · MOVE</a:t>
-            </a:r>
-            <a:endParaRPr lang="en-US"/>
-          </a:p>
-        </p:txBody>
-      </p:sp>
-      <p:sp>
-        <p:nvSpPr>
-          <p:cNvPr id="14" name="source"/>
-          <p:cNvSpPr txBox="1"/>
-          <p:nvPr/>
-        </p:nvSpPr>
-        <p:spPr>
-          <a:xfrm xmlns:a="http://schemas.openxmlformats.org/drawingml/2006/main">
-            <a:off x="914400" y="7810500"/>
-            <a:ext cx="10953750" cy="209550"/>
+          <p:cNvPr id="7" name="cover-thesis"/>
+          <p:cNvSpPr txBox="1"/>
+          <p:nvPr/>
+        </p:nvSpPr>
+        <p:spPr>
+          <a:xfrm xmlns:a="http://schemas.openxmlformats.org/drawingml/2006/main">
+            <a:off x="952500" y="4895850"/>
+            <a:ext cx="5715000" cy="647700"/>
+          </a:xfrm>
+          <a:prstGeom xmlns:a="http://schemas.openxmlformats.org/drawingml/2006/main" prst="rect">
+            <a:avLst/>
+          </a:prstGeom>
+          <a:noFill xmlns:a="http://schemas.openxmlformats.org/drawingml/2006/main"/>
+          <a:ln xmlns:a="http://schemas.openxmlformats.org/drawingml/2006/main" w="0">
+            <a:noFill/>
+          </a:ln>
+        </p:spPr>
+        <p:txBody>
+          <a:bodyPr xmlns:a="http://schemas.openxmlformats.org/drawingml/2006/main" wrap="square" lIns="0" tIns="0" rIns="0" bIns="0" anchor="t"/>
+          <a:lstStyle xmlns:a="http://schemas.openxmlformats.org/drawingml/2006/main"/>
+          <a:p xmlns:a="http://schemas.openxmlformats.org/drawingml/2006/main">
+            <a:r>
+              <a:rPr lang="en-US" sz="1950" b="1">
+                <a:solidFill>
+                  <a:srgbClr val="FFFFFF"/>
+                </a:solidFill>
+                <a:latin typeface="Tahoma"/>
+                <a:ea typeface="Tahoma"/>
+              </a:rPr>
+              <a:t>A proposition earns attention when it gives a next move.</a:t>
+            </a:r>
+            <a:endParaRPr lang="en-US"/>
+          </a:p>
+        </p:txBody>
+      </p:sp>
+      <p:sp>
+        <p:nvSpPr>
+          <p:cNvPr id="8" name="cover-source"/>
+          <p:cNvSpPr txBox="1"/>
+          <p:nvPr/>
+        </p:nvSpPr>
+        <p:spPr>
+          <a:xfrm xmlns:a="http://schemas.openxmlformats.org/drawingml/2006/main">
+            <a:off x="952500" y="7334250"/>
+            <a:ext cx="9048750" cy="228600"/>
           </a:xfrm>
           <a:prstGeom xmlns:a="http://schemas.openxmlformats.org/drawingml/2006/main" prst="rect">
             <a:avLst/>
@@ -1194,20 +624,20 @@
             <a:r>
               <a:rPr lang="en-US" sz="1050">
                 <a:solidFill>
-                  <a:srgbClr val="898989"/>
-                </a:solidFill>
-                <a:latin typeface="Tahoma"/>
-                <a:ea typeface="Tahoma"/>
-              </a:rPr>
-              <a:t>Source: illustrative calibration brief · every claim is fictional and bounded</a:t>
-            </a:r>
-            <a:endParaRPr lang="en-US"/>
-          </a:p>
-        </p:txBody>
-      </p:sp>
-      <p:sp>
-        <p:nvSpPr>
-          <p:cNvPr id="15" name="page-number"/>
+                  <a:srgbClr val="F0F2F2"/>
+                </a:solidFill>
+                <a:latin typeface="Tahoma"/>
+                <a:ea typeface="Tahoma"/>
+              </a:rPr>
+              <a:t>OfficeKit original clean-room calibration · fictional content · 2026-08-29</a:t>
+            </a:r>
+            <a:endParaRPr lang="en-US"/>
+          </a:p>
+        </p:txBody>
+      </p:sp>
+      <p:sp>
+        <p:nvSpPr>
+          <p:cNvPr id="9" name="page-number"/>
           <p:cNvSpPr txBox="1"/>
           <p:nvPr/>
         </p:nvSpPr>
@@ -1232,12 +662,12 @@
             <a:r>
               <a:rPr lang="en-US" sz="1050">
                 <a:solidFill>
-                  <a:srgbClr val="898989"/>
-                </a:solidFill>
-                <a:latin typeface="Tahoma"/>
-                <a:ea typeface="Tahoma"/>
-              </a:rPr>
-              <a:t>2 / 6</a:t>
+                  <a:srgbClr val="F0F2F2"/>
+                </a:solidFill>
+                <a:latin typeface="Tahoma"/>
+                <a:ea typeface="Tahoma"/>
+              </a:rPr>
+              <a:t>1 / 6</a:t>
             </a:r>
             <a:endParaRPr lang="en-US"/>
           </a:p>
@@ -1251,13 +681,13 @@
 </p:sld>
 </file>
 
-<file path=ppt/slides/slide3.xml><?xml version="1.0" encoding="utf-8"?>
+<file path=ppt/slides/slide2.xml><?xml version="1.0" encoding="utf-8"?>
 <p:sld xmlns:p="http://schemas.openxmlformats.org/presentationml/2006/main">
-  <p:cSld name="Evidence">
+  <p:cSld name="Argument">
     <p:bg>
       <p:bgPr>
         <a:blipFill xmlns:a="http://schemas.openxmlformats.org/drawingml/2006/main">
-          <a:blip xmlns:r="http://schemas.openxmlformats.org/officeDocument/2006/relationships" r:embed="rIdOfficeKitImaged71bfa074cda59bb_1"/>
+          <a:blip xmlns:r="http://schemas.openxmlformats.org/officeDocument/2006/relationships" r:embed="rIdOfficeKitImagec237998db8bee20d_1"/>
           <a:stretch>
             <a:fillRect/>
           </a:stretch>
@@ -1280,6 +710,557 @@
       </p:grpSpPr>
       <p:sp>
         <p:nvSpPr>
+          <p:cNvPr id="2" name="argument-paper-scrim"/>
+          <p:cNvSpPr/>
+          <p:nvPr/>
+        </p:nvSpPr>
+        <p:spPr>
+          <a:xfrm xmlns:a="http://schemas.openxmlformats.org/drawingml/2006/main">
+            <a:off x="0" y="0"/>
+            <a:ext cx="7429500" cy="8572500"/>
+          </a:xfrm>
+          <a:prstGeom xmlns:a="http://schemas.openxmlformats.org/drawingml/2006/main" prst="rect">
+            <a:avLst/>
+          </a:prstGeom>
+          <a:solidFill xmlns:a="http://schemas.openxmlformats.org/drawingml/2006/main">
+            <a:srgbClr val="F2F3F3">
+              <a:alpha val="96000"/>
+            </a:srgbClr>
+          </a:solidFill>
+          <a:ln xmlns:a="http://schemas.openxmlformats.org/drawingml/2006/main" w="0">
+            <a:solidFill>
+              <a:srgbClr val="F2F3F3"/>
+            </a:solidFill>
+            <a:prstDash val="solid"/>
+          </a:ln>
+        </p:spPr>
+        <p:txBody>
+          <a:bodyPr xmlns:a="http://schemas.openxmlformats.org/drawingml/2006/main" wrap="square" lIns="0" tIns="0" rIns="0" bIns="0" anchor="t"/>
+          <a:lstStyle xmlns:a="http://schemas.openxmlformats.org/drawingml/2006/main"/>
+          <a:p xmlns:a="http://schemas.openxmlformats.org/drawingml/2006/main">
+            <a:r>
+              <a:rPr lang="en-US"/>
+              <a:t/>
+            </a:r>
+            <a:endParaRPr lang="en-US"/>
+          </a:p>
+        </p:txBody>
+      </p:sp>
+      <p:sp>
+        <p:nvSpPr>
+          <p:cNvPr id="3" name="argument-top-rule"/>
+          <p:cNvSpPr/>
+          <p:nvPr/>
+        </p:nvSpPr>
+        <p:spPr>
+          <a:xfrm xmlns:a="http://schemas.openxmlformats.org/drawingml/2006/main">
+            <a:off x="838200" y="666750"/>
+            <a:ext cx="13563600" cy="0"/>
+          </a:xfrm>
+          <a:prstGeom xmlns:a="http://schemas.openxmlformats.org/drawingml/2006/main" prst="line">
+            <a:avLst/>
+          </a:prstGeom>
+          <a:noFill xmlns:a="http://schemas.openxmlformats.org/drawingml/2006/main"/>
+          <a:ln xmlns:a="http://schemas.openxmlformats.org/drawingml/2006/main" w="38100">
+            <a:solidFill>
+              <a:srgbClr val="9A6B45"/>
+            </a:solidFill>
+            <a:prstDash val="solid"/>
+          </a:ln>
+        </p:spPr>
+        <p:txBody>
+          <a:bodyPr xmlns:a="http://schemas.openxmlformats.org/drawingml/2006/main" wrap="square" lIns="0" tIns="0" rIns="0" bIns="0" anchor="t"/>
+          <a:lstStyle xmlns:a="http://schemas.openxmlformats.org/drawingml/2006/main"/>
+          <a:p xmlns:a="http://schemas.openxmlformats.org/drawingml/2006/main">
+            <a:r>
+              <a:rPr lang="en-US"/>
+              <a:t/>
+            </a:r>
+            <a:endParaRPr lang="en-US"/>
+          </a:p>
+        </p:txBody>
+      </p:sp>
+      <p:sp>
+        <p:nvSpPr>
+          <p:cNvPr id="4" name="SILVER ATELIER · ARGUMENT"/>
+          <p:cNvSpPr txBox="1"/>
+          <p:nvPr/>
+        </p:nvSpPr>
+        <p:spPr>
+          <a:xfrm xmlns:a="http://schemas.openxmlformats.org/drawingml/2006/main">
+            <a:off x="914400" y="895350"/>
+            <a:ext cx="7239000" cy="228600"/>
+          </a:xfrm>
+          <a:prstGeom xmlns:a="http://schemas.openxmlformats.org/drawingml/2006/main" prst="rect">
+            <a:avLst/>
+          </a:prstGeom>
+          <a:noFill xmlns:a="http://schemas.openxmlformats.org/drawingml/2006/main"/>
+          <a:ln xmlns:a="http://schemas.openxmlformats.org/drawingml/2006/main" w="0">
+            <a:noFill/>
+          </a:ln>
+        </p:spPr>
+        <p:txBody>
+          <a:bodyPr xmlns:a="http://schemas.openxmlformats.org/drawingml/2006/main" wrap="square" lIns="0" tIns="0" rIns="0" bIns="0" anchor="t"/>
+          <a:lstStyle xmlns:a="http://schemas.openxmlformats.org/drawingml/2006/main"/>
+          <a:p xmlns:a="http://schemas.openxmlformats.org/drawingml/2006/main">
+            <a:r>
+              <a:rPr lang="en-US" sz="1200" b="1">
+                <a:solidFill>
+                  <a:srgbClr val="9A6B45"/>
+                </a:solidFill>
+                <a:latin typeface="Tahoma"/>
+                <a:ea typeface="Tahoma"/>
+              </a:rPr>
+              <a:t>SILVER ATELIER · ARGUMENT</a:t>
+            </a:r>
+            <a:endParaRPr lang="en-US"/>
+          </a:p>
+        </p:txBody>
+      </p:sp>
+      <p:sp>
+        <p:nvSpPr>
+          <p:cNvPr id="5" name="argument-title"/>
+          <p:cNvSpPr txBox="1"/>
+          <p:nvPr/>
+        </p:nvSpPr>
+        <p:spPr>
+          <a:xfrm xmlns:a="http://schemas.openxmlformats.org/drawingml/2006/main">
+            <a:off x="914400" y="1314450"/>
+            <a:ext cx="6286500" cy="914400"/>
+          </a:xfrm>
+          <a:prstGeom xmlns:a="http://schemas.openxmlformats.org/drawingml/2006/main" prst="rect">
+            <a:avLst/>
+          </a:prstGeom>
+          <a:noFill xmlns:a="http://schemas.openxmlformats.org/drawingml/2006/main"/>
+          <a:ln xmlns:a="http://schemas.openxmlformats.org/drawingml/2006/main" w="0">
+            <a:noFill/>
+          </a:ln>
+        </p:spPr>
+        <p:txBody>
+          <a:bodyPr xmlns:a="http://schemas.openxmlformats.org/drawingml/2006/main" wrap="square" lIns="0" tIns="0" rIns="0" bIns="0" anchor="t"/>
+          <a:lstStyle xmlns:a="http://schemas.openxmlformats.org/drawingml/2006/main"/>
+          <a:p xmlns:a="http://schemas.openxmlformats.org/drawingml/2006/main">
+            <a:r>
+              <a:rPr lang="en-US" sz="2550" b="1">
+                <a:solidFill>
+                  <a:srgbClr val="171717"/>
+                </a:solidFill>
+                <a:latin typeface="Tahoma"/>
+                <a:ea typeface="Tahoma"/>
+              </a:rPr>
+              <a:t>The proposition is the page's visual</a:t>
+            </a:r>
+            <a:endParaRPr lang="en-US"/>
+          </a:p>
+          <a:p xmlns:a="http://schemas.openxmlformats.org/drawingml/2006/main">
+            <a:r>
+              <a:rPr lang="en-US" sz="2550" b="1">
+                <a:solidFill>
+                  <a:srgbClr val="171717"/>
+                </a:solidFill>
+                <a:latin typeface="Tahoma"/>
+                <a:ea typeface="Tahoma"/>
+              </a:rPr>
+              <a:t>center</a:t>
+            </a:r>
+            <a:endParaRPr lang="en-US"/>
+          </a:p>
+        </p:txBody>
+      </p:sp>
+      <p:sp>
+        <p:nvSpPr>
+          <p:cNvPr id="6" name="argument-basis"/>
+          <p:cNvSpPr txBox="1"/>
+          <p:nvPr/>
+        </p:nvSpPr>
+        <p:spPr>
+          <a:xfrm xmlns:a="http://schemas.openxmlformats.org/drawingml/2006/main">
+            <a:off x="952500" y="2190750"/>
+            <a:ext cx="6096000" cy="266700"/>
+          </a:xfrm>
+          <a:prstGeom xmlns:a="http://schemas.openxmlformats.org/drawingml/2006/main" prst="rect">
+            <a:avLst/>
+          </a:prstGeom>
+          <a:noFill xmlns:a="http://schemas.openxmlformats.org/drawingml/2006/main"/>
+          <a:ln xmlns:a="http://schemas.openxmlformats.org/drawingml/2006/main" w="0">
+            <a:noFill/>
+          </a:ln>
+        </p:spPr>
+        <p:txBody>
+          <a:bodyPr xmlns:a="http://schemas.openxmlformats.org/drawingml/2006/main" wrap="square" lIns="0" tIns="0" rIns="0" bIns="0" anchor="t"/>
+          <a:lstStyle xmlns:a="http://schemas.openxmlformats.org/drawingml/2006/main"/>
+          <a:p xmlns:a="http://schemas.openxmlformats.org/drawingml/2006/main">
+            <a:r>
+              <a:rPr lang="en-US" sz="1350">
+                <a:solidFill>
+                  <a:srgbClr val="898989"/>
+                </a:solidFill>
+                <a:latin typeface="Tahoma"/>
+                <a:ea typeface="Tahoma"/>
+              </a:rPr>
+              <a:t>Scale, crop, and color invite attention without hiding the evidence.</a:t>
+            </a:r>
+            <a:endParaRPr lang="en-US"/>
+          </a:p>
+        </p:txBody>
+      </p:sp>
+      <p:sp>
+        <p:nvSpPr>
+          <p:cNvPr id="7" name="argument-rule"/>
+          <p:cNvSpPr/>
+          <p:nvPr/>
+        </p:nvSpPr>
+        <p:spPr>
+          <a:xfrm xmlns:a="http://schemas.openxmlformats.org/drawingml/2006/main">
+            <a:off x="914400" y="2457450"/>
+            <a:ext cx="13411200" cy="0"/>
+          </a:xfrm>
+          <a:prstGeom xmlns:a="http://schemas.openxmlformats.org/drawingml/2006/main" prst="line">
+            <a:avLst/>
+          </a:prstGeom>
+          <a:noFill xmlns:a="http://schemas.openxmlformats.org/drawingml/2006/main"/>
+          <a:ln xmlns:a="http://schemas.openxmlformats.org/drawingml/2006/main" w="25400">
+            <a:solidFill>
+              <a:srgbClr val="898989"/>
+            </a:solidFill>
+            <a:prstDash val="solid"/>
+          </a:ln>
+        </p:spPr>
+        <p:txBody>
+          <a:bodyPr xmlns:a="http://schemas.openxmlformats.org/drawingml/2006/main" wrap="square" lIns="0" tIns="0" rIns="0" bIns="0" anchor="t"/>
+          <a:lstStyle xmlns:a="http://schemas.openxmlformats.org/drawingml/2006/main"/>
+          <a:p xmlns:a="http://schemas.openxmlformats.org/drawingml/2006/main">
+            <a:r>
+              <a:rPr lang="en-US"/>
+              <a:t/>
+            </a:r>
+            <a:endParaRPr lang="en-US"/>
+          </a:p>
+        </p:txBody>
+      </p:sp>
+      <p:sp>
+        <p:nvSpPr>
+          <p:cNvPr id="8" name="promotion-kicker"/>
+          <p:cNvSpPr txBox="1"/>
+          <p:nvPr/>
+        </p:nvSpPr>
+        <p:spPr>
+          <a:xfrm xmlns:a="http://schemas.openxmlformats.org/drawingml/2006/main">
+            <a:off x="1104900" y="3352800"/>
+            <a:ext cx="2857500" cy="228600"/>
+          </a:xfrm>
+          <a:prstGeom xmlns:a="http://schemas.openxmlformats.org/drawingml/2006/main" prst="rect">
+            <a:avLst/>
+          </a:prstGeom>
+          <a:noFill xmlns:a="http://schemas.openxmlformats.org/drawingml/2006/main"/>
+          <a:ln xmlns:a="http://schemas.openxmlformats.org/drawingml/2006/main" w="0">
+            <a:noFill/>
+          </a:ln>
+        </p:spPr>
+        <p:txBody>
+          <a:bodyPr xmlns:a="http://schemas.openxmlformats.org/drawingml/2006/main" wrap="square" lIns="0" tIns="0" rIns="0" bIns="0" anchor="t"/>
+          <a:lstStyle xmlns:a="http://schemas.openxmlformats.org/drawingml/2006/main"/>
+          <a:p xmlns:a="http://schemas.openxmlformats.org/drawingml/2006/main">
+            <a:r>
+              <a:rPr lang="en-US" sz="1125" b="1">
+                <a:solidFill>
+                  <a:srgbClr val="9A6B45"/>
+                </a:solidFill>
+                <a:latin typeface="Tahoma"/>
+                <a:ea typeface="Tahoma"/>
+              </a:rPr>
+              <a:t>ONE PROPOSITION</a:t>
+            </a:r>
+            <a:endParaRPr lang="en-US"/>
+          </a:p>
+        </p:txBody>
+      </p:sp>
+      <p:sp>
+        <p:nvSpPr>
+          <p:cNvPr id="9" name="promotion-headline"/>
+          <p:cNvSpPr txBox="1"/>
+          <p:nvPr/>
+        </p:nvSpPr>
+        <p:spPr>
+          <a:xfrm xmlns:a="http://schemas.openxmlformats.org/drawingml/2006/main">
+            <a:off x="1104900" y="3790950"/>
+            <a:ext cx="6477000" cy="723900"/>
+          </a:xfrm>
+          <a:prstGeom xmlns:a="http://schemas.openxmlformats.org/drawingml/2006/main" prst="rect">
+            <a:avLst/>
+          </a:prstGeom>
+          <a:noFill xmlns:a="http://schemas.openxmlformats.org/drawingml/2006/main"/>
+          <a:ln xmlns:a="http://schemas.openxmlformats.org/drawingml/2006/main" w="0">
+            <a:noFill/>
+          </a:ln>
+        </p:spPr>
+        <p:txBody>
+          <a:bodyPr xmlns:a="http://schemas.openxmlformats.org/drawingml/2006/main" wrap="square" lIns="0" tIns="0" rIns="0" bIns="0" anchor="t"/>
+          <a:lstStyle xmlns:a="http://schemas.openxmlformats.org/drawingml/2006/main"/>
+          <a:p xmlns:a="http://schemas.openxmlformats.org/drawingml/2006/main">
+            <a:r>
+              <a:rPr lang="en-US" sz="2625" b="1">
+                <a:solidFill>
+                  <a:srgbClr val="171717"/>
+                </a:solidFill>
+                <a:latin typeface="Tahoma"/>
+                <a:ea typeface="Tahoma"/>
+              </a:rPr>
+              <a:t>Make the next action visible.</a:t>
+            </a:r>
+            <a:endParaRPr lang="en-US"/>
+          </a:p>
+        </p:txBody>
+      </p:sp>
+      <p:sp>
+        <p:nvSpPr>
+          <p:cNvPr id="10" name="promotion-body"/>
+          <p:cNvSpPr txBox="1"/>
+          <p:nvPr/>
+        </p:nvSpPr>
+        <p:spPr>
+          <a:xfrm xmlns:a="http://schemas.openxmlformats.org/drawingml/2006/main">
+            <a:off x="1104900" y="4762500"/>
+            <a:ext cx="6191250" cy="457200"/>
+          </a:xfrm>
+          <a:prstGeom xmlns:a="http://schemas.openxmlformats.org/drawingml/2006/main" prst="rect">
+            <a:avLst/>
+          </a:prstGeom>
+          <a:noFill xmlns:a="http://schemas.openxmlformats.org/drawingml/2006/main"/>
+          <a:ln xmlns:a="http://schemas.openxmlformats.org/drawingml/2006/main" w="0">
+            <a:noFill/>
+          </a:ln>
+        </p:spPr>
+        <p:txBody>
+          <a:bodyPr xmlns:a="http://schemas.openxmlformats.org/drawingml/2006/main" wrap="square" lIns="0" tIns="0" rIns="0" bIns="0" anchor="t"/>
+          <a:lstStyle xmlns:a="http://schemas.openxmlformats.org/drawingml/2006/main"/>
+          <a:p xmlns:a="http://schemas.openxmlformats.org/drawingml/2006/main">
+            <a:r>
+              <a:rPr lang="en-US" sz="1575">
+                <a:solidFill>
+                  <a:srgbClr val="171717"/>
+                </a:solidFill>
+                <a:latin typeface="Tahoma"/>
+                <a:ea typeface="Tahoma"/>
+              </a:rPr>
+              <a:t>A clear invitation earns attention when evidence and access arrive together.</a:t>
+            </a:r>
+            <a:endParaRPr lang="en-US"/>
+          </a:p>
+        </p:txBody>
+      </p:sp>
+      <p:pic>
+        <p:nvPicPr>
+          <p:cNvPr id="11" name="promotion-hero-frame">
+            <a:extLst xmlns:a="http://schemas.openxmlformats.org/drawingml/2006/main">
+              <a:ext uri="{C183D7F6-B498-43B3-948B-1728B52AA6E4}">
+                <adec:decorative xmlns:adec="http://schemas.microsoft.com/office/drawing/2017/decorative" val="1"/>
+              </a:ext>
+            </a:extLst>
+          </p:cNvPr>
+          <p:cNvPicPr/>
+          <p:nvPr/>
+        </p:nvPicPr>
+        <p:blipFill>
+          <a:blip xmlns:r="http://schemas.openxmlformats.org/officeDocument/2006/relationships" xmlns:a="http://schemas.openxmlformats.org/drawingml/2006/main" r:embed="rIdOfficeKitImage31956823b229fb66_1"/>
+          <a:srcRect xmlns:a="http://schemas.openxmlformats.org/drawingml/2006/main" l="0" t="31910" r="0" b="31910"/>
+          <a:stretch xmlns:a="http://schemas.openxmlformats.org/drawingml/2006/main">
+            <a:fillRect/>
+          </a:stretch>
+        </p:blipFill>
+        <p:spPr>
+          <a:xfrm xmlns:a="http://schemas.openxmlformats.org/drawingml/2006/main">
+            <a:off x="9525000" y="3143250"/>
+            <a:ext cx="4000500" cy="2571750"/>
+          </a:xfrm>
+          <a:prstGeom xmlns:a="http://schemas.openxmlformats.org/drawingml/2006/main" prst="rect">
+            <a:avLst/>
+          </a:prstGeom>
+        </p:spPr>
+      </p:pic>
+      <p:sp>
+        <p:nvSpPr>
+          <p:cNvPr id="12" name="promotion-image-rule"/>
+          <p:cNvSpPr/>
+          <p:nvPr/>
+        </p:nvSpPr>
+        <p:spPr>
+          <a:xfrm xmlns:a="http://schemas.openxmlformats.org/drawingml/2006/main">
+            <a:off x="9525000" y="5905500"/>
+            <a:ext cx="4000500" cy="0"/>
+          </a:xfrm>
+          <a:prstGeom xmlns:a="http://schemas.openxmlformats.org/drawingml/2006/main" prst="line">
+            <a:avLst/>
+          </a:prstGeom>
+          <a:noFill xmlns:a="http://schemas.openxmlformats.org/drawingml/2006/main"/>
+          <a:ln xmlns:a="http://schemas.openxmlformats.org/drawingml/2006/main" w="38100">
+            <a:solidFill>
+              <a:srgbClr val="9A6B45"/>
+            </a:solidFill>
+            <a:prstDash val="solid"/>
+          </a:ln>
+        </p:spPr>
+        <p:txBody>
+          <a:bodyPr xmlns:a="http://schemas.openxmlformats.org/drawingml/2006/main" wrap="square" lIns="0" tIns="0" rIns="0" bIns="0" anchor="t"/>
+          <a:lstStyle xmlns:a="http://schemas.openxmlformats.org/drawingml/2006/main"/>
+          <a:p xmlns:a="http://schemas.openxmlformats.org/drawingml/2006/main">
+            <a:r>
+              <a:rPr lang="en-US"/>
+              <a:t/>
+            </a:r>
+            <a:endParaRPr lang="en-US"/>
+          </a:p>
+        </p:txBody>
+      </p:sp>
+      <p:sp>
+        <p:nvSpPr>
+          <p:cNvPr id="13" name="promotion-image-label"/>
+          <p:cNvSpPr txBox="1"/>
+          <p:nvPr/>
+        </p:nvSpPr>
+        <p:spPr>
+          <a:xfrm xmlns:a="http://schemas.openxmlformats.org/drawingml/2006/main">
+            <a:off x="9525000" y="6153150"/>
+            <a:ext cx="4000500" cy="247650"/>
+          </a:xfrm>
+          <a:prstGeom xmlns:a="http://schemas.openxmlformats.org/drawingml/2006/main" prst="rect">
+            <a:avLst/>
+          </a:prstGeom>
+          <a:noFill xmlns:a="http://schemas.openxmlformats.org/drawingml/2006/main"/>
+          <a:ln xmlns:a="http://schemas.openxmlformats.org/drawingml/2006/main" w="0">
+            <a:noFill/>
+          </a:ln>
+        </p:spPr>
+        <p:txBody>
+          <a:bodyPr xmlns:a="http://schemas.openxmlformats.org/drawingml/2006/main" wrap="square" lIns="0" tIns="0" rIns="0" bIns="0" anchor="t"/>
+          <a:lstStyle xmlns:a="http://schemas.openxmlformats.org/drawingml/2006/main"/>
+          <a:p xmlns:a="http://schemas.openxmlformats.org/drawingml/2006/main">
+            <a:r>
+              <a:rPr lang="en-US" sz="1275" b="1">
+                <a:solidFill>
+                  <a:srgbClr val="9A6B45"/>
+                </a:solidFill>
+                <a:latin typeface="Tahoma"/>
+                <a:ea typeface="Tahoma"/>
+              </a:rPr>
+              <a:t>INVITE · PROVE · MOVE</a:t>
+            </a:r>
+            <a:endParaRPr lang="en-US"/>
+          </a:p>
+        </p:txBody>
+      </p:sp>
+      <p:sp>
+        <p:nvSpPr>
+          <p:cNvPr id="14" name="source"/>
+          <p:cNvSpPr txBox="1"/>
+          <p:nvPr/>
+        </p:nvSpPr>
+        <p:spPr>
+          <a:xfrm xmlns:a="http://schemas.openxmlformats.org/drawingml/2006/main">
+            <a:off x="914400" y="7810500"/>
+            <a:ext cx="10953750" cy="209550"/>
+          </a:xfrm>
+          <a:prstGeom xmlns:a="http://schemas.openxmlformats.org/drawingml/2006/main" prst="rect">
+            <a:avLst/>
+          </a:prstGeom>
+          <a:noFill xmlns:a="http://schemas.openxmlformats.org/drawingml/2006/main"/>
+          <a:ln xmlns:a="http://schemas.openxmlformats.org/drawingml/2006/main" w="0">
+            <a:noFill/>
+          </a:ln>
+        </p:spPr>
+        <p:txBody>
+          <a:bodyPr xmlns:a="http://schemas.openxmlformats.org/drawingml/2006/main" wrap="square" lIns="0" tIns="0" rIns="0" bIns="0" anchor="t"/>
+          <a:lstStyle xmlns:a="http://schemas.openxmlformats.org/drawingml/2006/main"/>
+          <a:p xmlns:a="http://schemas.openxmlformats.org/drawingml/2006/main">
+            <a:r>
+              <a:rPr lang="en-US" sz="1050">
+                <a:solidFill>
+                  <a:srgbClr val="898989"/>
+                </a:solidFill>
+                <a:latin typeface="Tahoma"/>
+                <a:ea typeface="Tahoma"/>
+              </a:rPr>
+              <a:t>Source: illustrative calibration brief · every claim is fictional and bounded</a:t>
+            </a:r>
+            <a:endParaRPr lang="en-US"/>
+          </a:p>
+        </p:txBody>
+      </p:sp>
+      <p:sp>
+        <p:nvSpPr>
+          <p:cNvPr id="15" name="page-number"/>
+          <p:cNvSpPr txBox="1"/>
+          <p:nvPr/>
+        </p:nvSpPr>
+        <p:spPr>
+          <a:xfrm xmlns:a="http://schemas.openxmlformats.org/drawingml/2006/main">
+            <a:off x="13335000" y="7810500"/>
+            <a:ext cx="952500" cy="209550"/>
+          </a:xfrm>
+          <a:prstGeom xmlns:a="http://schemas.openxmlformats.org/drawingml/2006/main" prst="rect">
+            <a:avLst/>
+          </a:prstGeom>
+          <a:noFill xmlns:a="http://schemas.openxmlformats.org/drawingml/2006/main"/>
+          <a:ln xmlns:a="http://schemas.openxmlformats.org/drawingml/2006/main" w="0">
+            <a:noFill/>
+          </a:ln>
+        </p:spPr>
+        <p:txBody>
+          <a:bodyPr xmlns:a="http://schemas.openxmlformats.org/drawingml/2006/main" wrap="square" lIns="0" tIns="0" rIns="0" bIns="0" anchor="t"/>
+          <a:lstStyle xmlns:a="http://schemas.openxmlformats.org/drawingml/2006/main"/>
+          <a:p xmlns:a="http://schemas.openxmlformats.org/drawingml/2006/main">
+            <a:pPr algn="r"/>
+            <a:r>
+              <a:rPr lang="en-US" sz="1050">
+                <a:solidFill>
+                  <a:srgbClr val="898989"/>
+                </a:solidFill>
+                <a:latin typeface="Tahoma"/>
+                <a:ea typeface="Tahoma"/>
+              </a:rPr>
+              <a:t>2 / 6</a:t>
+            </a:r>
+            <a:endParaRPr lang="en-US"/>
+          </a:p>
+        </p:txBody>
+      </p:sp>
+    </p:spTree>
+  </p:cSld>
+  <p:clrMapOvr>
+    <a:masterClrMapping xmlns:a="http://schemas.openxmlformats.org/drawingml/2006/main"/>
+  </p:clrMapOvr>
+</p:sld>
+</file>
+
+<file path=ppt/slides/slide3.xml><?xml version="1.0" encoding="utf-8"?>
+<p:sld xmlns:p="http://schemas.openxmlformats.org/presentationml/2006/main">
+  <p:cSld name="Evidence">
+    <p:bg>
+      <p:bgPr>
+        <a:blipFill xmlns:a="http://schemas.openxmlformats.org/drawingml/2006/main">
+          <a:blip xmlns:r="http://schemas.openxmlformats.org/officeDocument/2006/relationships" r:embed="rIdOfficeKitImage026be3a43029630d_1"/>
+          <a:stretch>
+            <a:fillRect/>
+          </a:stretch>
+        </a:blipFill>
+      </p:bgPr>
+    </p:bg>
+    <p:spTree>
+      <p:nvGrpSpPr>
+        <p:cNvPr id="1" name=""/>
+        <p:cNvGrpSpPr/>
+        <p:nvPr/>
+      </p:nvGrpSpPr>
+      <p:grpSpPr>
+        <a:xfrm xmlns:a="http://schemas.openxmlformats.org/drawingml/2006/main">
+          <a:off x="0" y="0"/>
+          <a:ext cx="0" cy="0"/>
+          <a:chOff x="0" y="0"/>
+          <a:chExt cx="0" cy="0"/>
+        </a:xfrm>
+      </p:grpSpPr>
+      <p:sp>
+        <p:nvSpPr>
           <p:cNvPr id="2" name="evidence-paper-scrim"/>
           <p:cNvSpPr/>
           <p:nvPr/>
@@ -1522,7 +1503,7 @@
         </p:xfrm>
         <a:graphic xmlns:a="http://schemas.openxmlformats.org/drawingml/2006/main">
           <a:graphicData uri="http://schemas.openxmlformats.org/drawingml/2006/chart">
-            <c:chart xmlns:r="http://schemas.openxmlformats.org/officeDocument/2006/relationships" xmlns:c="http://schemas.openxmlformats.org/drawingml/2006/chart" r:id="R1e287dfa94d2469b"/>
+            <c:chart xmlns:r="http://schemas.openxmlformats.org/officeDocument/2006/relationships" xmlns:c="http://schemas.openxmlformats.org/drawingml/2006/chart" r:id="R2a1040ddbcd34005"/>
           </a:graphicData>
         </a:graphic>
       </p:graphicFrame>
@@ -3013,7 +2994,7 @@
     <p:bg>
       <p:bgPr>
         <a:blipFill xmlns:a="http://schemas.openxmlformats.org/drawingml/2006/main">
-          <a:blip xmlns:r="http://schemas.openxmlformats.org/officeDocument/2006/relationships" r:embed="rIdOfficeKitImage8fbc298f8d1b7a3c_1"/>
+          <a:blip xmlns:r="http://schemas.openxmlformats.org/officeDocument/2006/relationships" r:embed="rIdOfficeKitImagec7b73f8fac405495_1"/>
           <a:stretch>
             <a:fillRect/>
           </a:stretch>
@@ -3343,7 +3324,7 @@
     <p:bg>
       <p:bgPr>
         <a:blipFill xmlns:a="http://schemas.openxmlformats.org/drawingml/2006/main">
-          <a:blip xmlns:r="http://schemas.openxmlformats.org/officeDocument/2006/relationships" r:embed="rIdOfficeKitImage6af8c9b5dff6e3a3_1"/>
+          <a:blip xmlns:r="http://schemas.openxmlformats.org/officeDocument/2006/relationships" r:embed="rIdOfficeKitImagec237998db8bee20d_1"/>
           <a:stretch>
             <a:fillRect/>
           </a:stretch>

--- a/skills/presentation-template-library/skills/artifact-template-silver-atelier/assets/reference.pptx
+++ b/skills/presentation-template-library/skills/artifact-template-silver-atelier/assets/reference.pptx
@@ -1503,7 +1503,7 @@
         </p:xfrm>
         <a:graphic xmlns:a="http://schemas.openxmlformats.org/drawingml/2006/main">
           <a:graphicData uri="http://schemas.openxmlformats.org/drawingml/2006/chart">
-            <c:chart xmlns:r="http://schemas.openxmlformats.org/officeDocument/2006/relationships" xmlns:c="http://schemas.openxmlformats.org/drawingml/2006/chart" r:id="R2a1040ddbcd34005"/>
+            <c:chart xmlns:r="http://schemas.openxmlformats.org/officeDocument/2006/relationships" xmlns:c="http://schemas.openxmlformats.org/drawingml/2006/chart" r:id="R1a45f41ca28c4e43"/>
           </a:graphicData>
         </a:graphic>
       </p:graphicFrame>

--- a/skills/presentation-template-library/skills/artifact-template-silver-atelier/assets/reference.pptx
+++ b/skills/presentation-template-library/skills/artifact-template-silver-atelier/assets/reference.pptx
@@ -1503,7 +1503,7 @@
         </p:xfrm>
         <a:graphic xmlns:a="http://schemas.openxmlformats.org/drawingml/2006/main">
           <a:graphicData uri="http://schemas.openxmlformats.org/drawingml/2006/chart">
-            <c:chart xmlns:r="http://schemas.openxmlformats.org/officeDocument/2006/relationships" xmlns:c="http://schemas.openxmlformats.org/drawingml/2006/chart" r:id="R1a45f41ca28c4e43"/>
+            <c:chart xmlns:r="http://schemas.openxmlformats.org/officeDocument/2006/relationships" xmlns:c="http://schemas.openxmlformats.org/drawingml/2006/chart" r:id="R8a11cfebf25a4b8c"/>
           </a:graphicData>
         </a:graphic>
       </p:graphicFrame>
@@ -2994,6 +2994,336 @@
     <p:bg>
       <p:bgPr>
         <a:blipFill xmlns:a="http://schemas.openxmlformats.org/drawingml/2006/main">
+          <a:blip xmlns:r="http://schemas.openxmlformats.org/officeDocument/2006/relationships" r:embed="rIdOfficeKitImagef72f8e2736f81baf_1"/>
+          <a:stretch>
+            <a:fillRect/>
+          </a:stretch>
+        </a:blipFill>
+      </p:bgPr>
+    </p:bg>
+    <p:spTree>
+      <p:nvGrpSpPr>
+        <p:cNvPr id="1" name=""/>
+        <p:cNvGrpSpPr/>
+        <p:nvPr/>
+      </p:nvGrpSpPr>
+      <p:grpSpPr>
+        <a:xfrm xmlns:a="http://schemas.openxmlformats.org/drawingml/2006/main">
+          <a:off x="0" y="0"/>
+          <a:ext cx="0" cy="0"/>
+          <a:chOff x="0" y="0"/>
+          <a:chExt cx="0" cy="0"/>
+        </a:xfrm>
+      </p:grpSpPr>
+      <p:sp>
+        <p:nvSpPr>
+          <p:cNvPr id="2" name="visual-scrim"/>
+          <p:cNvSpPr/>
+          <p:nvPr/>
+        </p:nvSpPr>
+        <p:spPr>
+          <a:xfrm xmlns:a="http://schemas.openxmlformats.org/drawingml/2006/main">
+            <a:off x="0" y="0"/>
+            <a:ext cx="6858000" cy="8572500"/>
+          </a:xfrm>
+          <a:prstGeom xmlns:a="http://schemas.openxmlformats.org/drawingml/2006/main" prst="rect">
+            <a:avLst/>
+          </a:prstGeom>
+          <a:solidFill xmlns:a="http://schemas.openxmlformats.org/drawingml/2006/main">
+            <a:srgbClr val="F2F3F3">
+              <a:alpha val="94000"/>
+            </a:srgbClr>
+          </a:solidFill>
+          <a:ln xmlns:a="http://schemas.openxmlformats.org/drawingml/2006/main" w="0">
+            <a:solidFill>
+              <a:srgbClr val="F2F3F3"/>
+            </a:solidFill>
+            <a:prstDash val="solid"/>
+          </a:ln>
+        </p:spPr>
+        <p:txBody>
+          <a:bodyPr xmlns:a="http://schemas.openxmlformats.org/drawingml/2006/main" wrap="square" lIns="0" tIns="0" rIns="0" bIns="0" anchor="t"/>
+          <a:lstStyle xmlns:a="http://schemas.openxmlformats.org/drawingml/2006/main"/>
+          <a:p xmlns:a="http://schemas.openxmlformats.org/drawingml/2006/main">
+            <a:r>
+              <a:rPr lang="en-US"/>
+              <a:t/>
+            </a:r>
+            <a:endParaRPr lang="en-US"/>
+          </a:p>
+        </p:txBody>
+      </p:sp>
+      <p:sp>
+        <p:nvSpPr>
+          <p:cNvPr id="3" name="visual-eyebrow"/>
+          <p:cNvSpPr txBox="1"/>
+          <p:nvPr/>
+        </p:nvSpPr>
+        <p:spPr>
+          <a:xfrm xmlns:a="http://schemas.openxmlformats.org/drawingml/2006/main">
+            <a:off x="914400" y="895350"/>
+            <a:ext cx="6667500" cy="228600"/>
+          </a:xfrm>
+          <a:prstGeom xmlns:a="http://schemas.openxmlformats.org/drawingml/2006/main" prst="rect">
+            <a:avLst/>
+          </a:prstGeom>
+          <a:noFill xmlns:a="http://schemas.openxmlformats.org/drawingml/2006/main"/>
+          <a:ln xmlns:a="http://schemas.openxmlformats.org/drawingml/2006/main" w="0">
+            <a:noFill/>
+          </a:ln>
+        </p:spPr>
+        <p:txBody>
+          <a:bodyPr xmlns:a="http://schemas.openxmlformats.org/drawingml/2006/main" wrap="square" lIns="0" tIns="0" rIns="0" bIns="0" anchor="t"/>
+          <a:lstStyle xmlns:a="http://schemas.openxmlformats.org/drawingml/2006/main"/>
+          <a:p xmlns:a="http://schemas.openxmlformats.org/drawingml/2006/main">
+            <a:r>
+              <a:rPr lang="en-US" sz="1200" b="1">
+                <a:solidFill>
+                  <a:srgbClr val="9A6B45"/>
+                </a:solidFill>
+                <a:latin typeface="Tahoma"/>
+                <a:ea typeface="Tahoma"/>
+              </a:rPr>
+              <a:t>SILVER ATELIER · VISUAL CARRIER</a:t>
+            </a:r>
+            <a:endParaRPr lang="en-US"/>
+          </a:p>
+        </p:txBody>
+      </p:sp>
+      <p:sp>
+        <p:nvSpPr>
+          <p:cNvPr id="4" name="visual-title"/>
+          <p:cNvSpPr txBox="1"/>
+          <p:nvPr/>
+        </p:nvSpPr>
+        <p:spPr>
+          <a:xfrm xmlns:a="http://schemas.openxmlformats.org/drawingml/2006/main">
+            <a:off x="914400" y="1638300"/>
+            <a:ext cx="5334000" cy="1143000"/>
+          </a:xfrm>
+          <a:prstGeom xmlns:a="http://schemas.openxmlformats.org/drawingml/2006/main" prst="rect">
+            <a:avLst/>
+          </a:prstGeom>
+          <a:noFill xmlns:a="http://schemas.openxmlformats.org/drawingml/2006/main"/>
+          <a:ln xmlns:a="http://schemas.openxmlformats.org/drawingml/2006/main" w="0">
+            <a:noFill/>
+          </a:ln>
+        </p:spPr>
+        <p:txBody>
+          <a:bodyPr xmlns:a="http://schemas.openxmlformats.org/drawingml/2006/main" wrap="square" lIns="0" tIns="0" rIns="0" bIns="0" anchor="t"/>
+          <a:lstStyle xmlns:a="http://schemas.openxmlformats.org/drawingml/2006/main"/>
+          <a:p xmlns:a="http://schemas.openxmlformats.org/drawingml/2006/main">
+            <a:r>
+              <a:rPr lang="en-US" sz="3300" b="1">
+                <a:solidFill>
+                  <a:srgbClr val="171717"/>
+                </a:solidFill>
+                <a:latin typeface="Tahoma"/>
+                <a:ea typeface="Tahoma"/>
+              </a:rPr>
+              <a:t>Let the subject do the work</a:t>
+            </a:r>
+            <a:endParaRPr lang="en-US"/>
+          </a:p>
+        </p:txBody>
+      </p:sp>
+      <p:sp>
+        <p:nvSpPr>
+          <p:cNvPr id="5" name="visual-body"/>
+          <p:cNvSpPr txBox="1"/>
+          <p:nvPr/>
+        </p:nvSpPr>
+        <p:spPr>
+          <a:xfrm xmlns:a="http://schemas.openxmlformats.org/drawingml/2006/main">
+            <a:off x="914400" y="3219450"/>
+            <a:ext cx="4762500" cy="685800"/>
+          </a:xfrm>
+          <a:prstGeom xmlns:a="http://schemas.openxmlformats.org/drawingml/2006/main" prst="rect">
+            <a:avLst/>
+          </a:prstGeom>
+          <a:noFill xmlns:a="http://schemas.openxmlformats.org/drawingml/2006/main"/>
+          <a:ln xmlns:a="http://schemas.openxmlformats.org/drawingml/2006/main" w="0">
+            <a:noFill/>
+          </a:ln>
+        </p:spPr>
+        <p:txBody>
+          <a:bodyPr xmlns:a="http://schemas.openxmlformats.org/drawingml/2006/main" wrap="square" lIns="0" tIns="0" rIns="0" bIns="0" anchor="t"/>
+          <a:lstStyle xmlns:a="http://schemas.openxmlformats.org/drawingml/2006/main"/>
+          <a:p xmlns:a="http://schemas.openxmlformats.org/drawingml/2006/main">
+            <a:r>
+              <a:rPr lang="en-US" sz="1800">
+                <a:solidFill>
+                  <a:srgbClr val="171717"/>
+                </a:solidFill>
+                <a:latin typeface="Tahoma"/>
+                <a:ea typeface="Tahoma"/>
+              </a:rPr>
+              <a:t>A strong crop gives the proposition a place to live.</a:t>
+            </a:r>
+            <a:endParaRPr lang="en-US"/>
+          </a:p>
+        </p:txBody>
+      </p:sp>
+      <p:sp>
+        <p:nvSpPr>
+          <p:cNvPr id="6" name="visual-rule"/>
+          <p:cNvSpPr/>
+          <p:nvPr/>
+        </p:nvSpPr>
+        <p:spPr>
+          <a:xfrm xmlns:a="http://schemas.openxmlformats.org/drawingml/2006/main">
+            <a:off x="914400" y="4476750"/>
+            <a:ext cx="4419600" cy="0"/>
+          </a:xfrm>
+          <a:prstGeom xmlns:a="http://schemas.openxmlformats.org/drawingml/2006/main" prst="line">
+            <a:avLst/>
+          </a:prstGeom>
+          <a:noFill xmlns:a="http://schemas.openxmlformats.org/drawingml/2006/main"/>
+          <a:ln xmlns:a="http://schemas.openxmlformats.org/drawingml/2006/main" w="38100">
+            <a:solidFill>
+              <a:srgbClr val="9A6B45"/>
+            </a:solidFill>
+            <a:prstDash val="solid"/>
+          </a:ln>
+        </p:spPr>
+        <p:txBody>
+          <a:bodyPr xmlns:a="http://schemas.openxmlformats.org/drawingml/2006/main" wrap="square" lIns="0" tIns="0" rIns="0" bIns="0" anchor="t"/>
+          <a:lstStyle xmlns:a="http://schemas.openxmlformats.org/drawingml/2006/main"/>
+          <a:p xmlns:a="http://schemas.openxmlformats.org/drawingml/2006/main">
+            <a:r>
+              <a:rPr lang="en-US"/>
+              <a:t/>
+            </a:r>
+            <a:endParaRPr lang="en-US"/>
+          </a:p>
+        </p:txBody>
+      </p:sp>
+      <p:sp>
+        <p:nvSpPr>
+          <p:cNvPr id="7" name="visual-label"/>
+          <p:cNvSpPr txBox="1"/>
+          <p:nvPr/>
+        </p:nvSpPr>
+        <p:spPr>
+          <a:xfrm xmlns:a="http://schemas.openxmlformats.org/drawingml/2006/main">
+            <a:off x="914400" y="4819650"/>
+            <a:ext cx="4953000" cy="228600"/>
+          </a:xfrm>
+          <a:prstGeom xmlns:a="http://schemas.openxmlformats.org/drawingml/2006/main" prst="rect">
+            <a:avLst/>
+          </a:prstGeom>
+          <a:noFill xmlns:a="http://schemas.openxmlformats.org/drawingml/2006/main"/>
+          <a:ln xmlns:a="http://schemas.openxmlformats.org/drawingml/2006/main" w="0">
+            <a:noFill/>
+          </a:ln>
+        </p:spPr>
+        <p:txBody>
+          <a:bodyPr xmlns:a="http://schemas.openxmlformats.org/drawingml/2006/main" wrap="square" lIns="0" tIns="0" rIns="0" bIns="0" anchor="t"/>
+          <a:lstStyle xmlns:a="http://schemas.openxmlformats.org/drawingml/2006/main"/>
+          <a:p xmlns:a="http://schemas.openxmlformats.org/drawingml/2006/main">
+            <a:r>
+              <a:rPr lang="en-US" sz="1200" b="1">
+                <a:solidFill>
+                  <a:srgbClr val="9A6B45"/>
+                </a:solidFill>
+                <a:latin typeface="Tahoma"/>
+                <a:ea typeface="Tahoma"/>
+              </a:rPr>
+              <a:t>THE IMAGE IS EVIDENCE, NOT FILL</a:t>
+            </a:r>
+            <a:endParaRPr lang="en-US"/>
+          </a:p>
+        </p:txBody>
+      </p:sp>
+      <p:sp>
+        <p:nvSpPr>
+          <p:cNvPr id="8" name="source"/>
+          <p:cNvSpPr txBox="1"/>
+          <p:nvPr/>
+        </p:nvSpPr>
+        <p:spPr>
+          <a:xfrm xmlns:a="http://schemas.openxmlformats.org/drawingml/2006/main">
+            <a:off x="914400" y="7829550"/>
+            <a:ext cx="10953750" cy="209550"/>
+          </a:xfrm>
+          <a:prstGeom xmlns:a="http://schemas.openxmlformats.org/drawingml/2006/main" prst="rect">
+            <a:avLst/>
+          </a:prstGeom>
+          <a:noFill xmlns:a="http://schemas.openxmlformats.org/drawingml/2006/main"/>
+          <a:ln xmlns:a="http://schemas.openxmlformats.org/drawingml/2006/main" w="0">
+            <a:noFill/>
+          </a:ln>
+        </p:spPr>
+        <p:txBody>
+          <a:bodyPr xmlns:a="http://schemas.openxmlformats.org/drawingml/2006/main" wrap="square" lIns="0" tIns="0" rIns="0" bIns="0" anchor="t"/>
+          <a:lstStyle xmlns:a="http://schemas.openxmlformats.org/drawingml/2006/main"/>
+          <a:p xmlns:a="http://schemas.openxmlformats.org/drawingml/2006/main">
+            <a:r>
+              <a:rPr lang="en-US" sz="1050">
+                <a:solidFill>
+                  <a:srgbClr val="898989"/>
+                </a:solidFill>
+                <a:latin typeface="Tahoma"/>
+                <a:ea typeface="Tahoma"/>
+              </a:rPr>
+              <a:t>OfficeKit original clean-room visual field · fictional content</a:t>
+            </a:r>
+            <a:endParaRPr lang="en-US"/>
+          </a:p>
+        </p:txBody>
+      </p:sp>
+      <p:sp>
+        <p:nvSpPr>
+          <p:cNvPr id="9" name="page-number"/>
+          <p:cNvSpPr txBox="1"/>
+          <p:nvPr/>
+        </p:nvSpPr>
+        <p:spPr>
+          <a:xfrm xmlns:a="http://schemas.openxmlformats.org/drawingml/2006/main">
+            <a:off x="13335000" y="7829550"/>
+            <a:ext cx="952500" cy="209550"/>
+          </a:xfrm>
+          <a:prstGeom xmlns:a="http://schemas.openxmlformats.org/drawingml/2006/main" prst="rect">
+            <a:avLst/>
+          </a:prstGeom>
+          <a:noFill xmlns:a="http://schemas.openxmlformats.org/drawingml/2006/main"/>
+          <a:ln xmlns:a="http://schemas.openxmlformats.org/drawingml/2006/main" w="0">
+            <a:noFill/>
+          </a:ln>
+        </p:spPr>
+        <p:txBody>
+          <a:bodyPr xmlns:a="http://schemas.openxmlformats.org/drawingml/2006/main" wrap="square" lIns="0" tIns="0" rIns="0" bIns="0" anchor="t"/>
+          <a:lstStyle xmlns:a="http://schemas.openxmlformats.org/drawingml/2006/main"/>
+          <a:p xmlns:a="http://schemas.openxmlformats.org/drawingml/2006/main">
+            <a:pPr algn="r"/>
+            <a:r>
+              <a:rPr lang="en-US" sz="1050">
+                <a:solidFill>
+                  <a:srgbClr val="898989"/>
+                </a:solidFill>
+                <a:latin typeface="Tahoma"/>
+                <a:ea typeface="Tahoma"/>
+              </a:rPr>
+              <a:t>5 / 6</a:t>
+            </a:r>
+            <a:endParaRPr lang="en-US"/>
+          </a:p>
+        </p:txBody>
+      </p:sp>
+    </p:spTree>
+  </p:cSld>
+  <p:clrMapOvr>
+    <a:masterClrMapping xmlns:a="http://schemas.openxmlformats.org/drawingml/2006/main"/>
+  </p:clrMapOvr>
+</p:sld>
+</file>
+
+<file path=ppt/slides/slide6.xml><?xml version="1.0" encoding="utf-8"?>
+<p:sld xmlns:p="http://schemas.openxmlformats.org/presentationml/2006/main">
+  <p:cSld name="Decision close">
+    <p:bg>
+      <p:bgPr>
+        <a:blipFill xmlns:a="http://schemas.openxmlformats.org/drawingml/2006/main">
           <a:blip xmlns:r="http://schemas.openxmlformats.org/officeDocument/2006/relationships" r:embed="rIdOfficeKitImagec7b73f8fac405495_1"/>
           <a:stretch>
             <a:fillRect/>
@@ -3017,336 +3347,6 @@
       </p:grpSpPr>
       <p:sp>
         <p:nvSpPr>
-          <p:cNvPr id="2" name="visual-scrim"/>
-          <p:cNvSpPr/>
-          <p:nvPr/>
-        </p:nvSpPr>
-        <p:spPr>
-          <a:xfrm xmlns:a="http://schemas.openxmlformats.org/drawingml/2006/main">
-            <a:off x="0" y="0"/>
-            <a:ext cx="6858000" cy="8572500"/>
-          </a:xfrm>
-          <a:prstGeom xmlns:a="http://schemas.openxmlformats.org/drawingml/2006/main" prst="rect">
-            <a:avLst/>
-          </a:prstGeom>
-          <a:solidFill xmlns:a="http://schemas.openxmlformats.org/drawingml/2006/main">
-            <a:srgbClr val="F2F3F3">
-              <a:alpha val="94000"/>
-            </a:srgbClr>
-          </a:solidFill>
-          <a:ln xmlns:a="http://schemas.openxmlformats.org/drawingml/2006/main" w="0">
-            <a:solidFill>
-              <a:srgbClr val="F2F3F3"/>
-            </a:solidFill>
-            <a:prstDash val="solid"/>
-          </a:ln>
-        </p:spPr>
-        <p:txBody>
-          <a:bodyPr xmlns:a="http://schemas.openxmlformats.org/drawingml/2006/main" wrap="square" lIns="0" tIns="0" rIns="0" bIns="0" anchor="t"/>
-          <a:lstStyle xmlns:a="http://schemas.openxmlformats.org/drawingml/2006/main"/>
-          <a:p xmlns:a="http://schemas.openxmlformats.org/drawingml/2006/main">
-            <a:r>
-              <a:rPr lang="en-US"/>
-              <a:t/>
-            </a:r>
-            <a:endParaRPr lang="en-US"/>
-          </a:p>
-        </p:txBody>
-      </p:sp>
-      <p:sp>
-        <p:nvSpPr>
-          <p:cNvPr id="3" name="visual-eyebrow"/>
-          <p:cNvSpPr txBox="1"/>
-          <p:nvPr/>
-        </p:nvSpPr>
-        <p:spPr>
-          <a:xfrm xmlns:a="http://schemas.openxmlformats.org/drawingml/2006/main">
-            <a:off x="914400" y="895350"/>
-            <a:ext cx="6667500" cy="228600"/>
-          </a:xfrm>
-          <a:prstGeom xmlns:a="http://schemas.openxmlformats.org/drawingml/2006/main" prst="rect">
-            <a:avLst/>
-          </a:prstGeom>
-          <a:noFill xmlns:a="http://schemas.openxmlformats.org/drawingml/2006/main"/>
-          <a:ln xmlns:a="http://schemas.openxmlformats.org/drawingml/2006/main" w="0">
-            <a:noFill/>
-          </a:ln>
-        </p:spPr>
-        <p:txBody>
-          <a:bodyPr xmlns:a="http://schemas.openxmlformats.org/drawingml/2006/main" wrap="square" lIns="0" tIns="0" rIns="0" bIns="0" anchor="t"/>
-          <a:lstStyle xmlns:a="http://schemas.openxmlformats.org/drawingml/2006/main"/>
-          <a:p xmlns:a="http://schemas.openxmlformats.org/drawingml/2006/main">
-            <a:r>
-              <a:rPr lang="en-US" sz="1200" b="1">
-                <a:solidFill>
-                  <a:srgbClr val="9A6B45"/>
-                </a:solidFill>
-                <a:latin typeface="Tahoma"/>
-                <a:ea typeface="Tahoma"/>
-              </a:rPr>
-              <a:t>SILVER ATELIER · VISUAL CARRIER</a:t>
-            </a:r>
-            <a:endParaRPr lang="en-US"/>
-          </a:p>
-        </p:txBody>
-      </p:sp>
-      <p:sp>
-        <p:nvSpPr>
-          <p:cNvPr id="4" name="visual-title"/>
-          <p:cNvSpPr txBox="1"/>
-          <p:nvPr/>
-        </p:nvSpPr>
-        <p:spPr>
-          <a:xfrm xmlns:a="http://schemas.openxmlformats.org/drawingml/2006/main">
-            <a:off x="914400" y="1638300"/>
-            <a:ext cx="5334000" cy="1143000"/>
-          </a:xfrm>
-          <a:prstGeom xmlns:a="http://schemas.openxmlformats.org/drawingml/2006/main" prst="rect">
-            <a:avLst/>
-          </a:prstGeom>
-          <a:noFill xmlns:a="http://schemas.openxmlformats.org/drawingml/2006/main"/>
-          <a:ln xmlns:a="http://schemas.openxmlformats.org/drawingml/2006/main" w="0">
-            <a:noFill/>
-          </a:ln>
-        </p:spPr>
-        <p:txBody>
-          <a:bodyPr xmlns:a="http://schemas.openxmlformats.org/drawingml/2006/main" wrap="square" lIns="0" tIns="0" rIns="0" bIns="0" anchor="t"/>
-          <a:lstStyle xmlns:a="http://schemas.openxmlformats.org/drawingml/2006/main"/>
-          <a:p xmlns:a="http://schemas.openxmlformats.org/drawingml/2006/main">
-            <a:r>
-              <a:rPr lang="en-US" sz="3300" b="1">
-                <a:solidFill>
-                  <a:srgbClr val="171717"/>
-                </a:solidFill>
-                <a:latin typeface="Tahoma"/>
-                <a:ea typeface="Tahoma"/>
-              </a:rPr>
-              <a:t>Let the subject do the work</a:t>
-            </a:r>
-            <a:endParaRPr lang="en-US"/>
-          </a:p>
-        </p:txBody>
-      </p:sp>
-      <p:sp>
-        <p:nvSpPr>
-          <p:cNvPr id="5" name="visual-body"/>
-          <p:cNvSpPr txBox="1"/>
-          <p:nvPr/>
-        </p:nvSpPr>
-        <p:spPr>
-          <a:xfrm xmlns:a="http://schemas.openxmlformats.org/drawingml/2006/main">
-            <a:off x="914400" y="3219450"/>
-            <a:ext cx="4762500" cy="685800"/>
-          </a:xfrm>
-          <a:prstGeom xmlns:a="http://schemas.openxmlformats.org/drawingml/2006/main" prst="rect">
-            <a:avLst/>
-          </a:prstGeom>
-          <a:noFill xmlns:a="http://schemas.openxmlformats.org/drawingml/2006/main"/>
-          <a:ln xmlns:a="http://schemas.openxmlformats.org/drawingml/2006/main" w="0">
-            <a:noFill/>
-          </a:ln>
-        </p:spPr>
-        <p:txBody>
-          <a:bodyPr xmlns:a="http://schemas.openxmlformats.org/drawingml/2006/main" wrap="square" lIns="0" tIns="0" rIns="0" bIns="0" anchor="t"/>
-          <a:lstStyle xmlns:a="http://schemas.openxmlformats.org/drawingml/2006/main"/>
-          <a:p xmlns:a="http://schemas.openxmlformats.org/drawingml/2006/main">
-            <a:r>
-              <a:rPr lang="en-US" sz="1800">
-                <a:solidFill>
-                  <a:srgbClr val="171717"/>
-                </a:solidFill>
-                <a:latin typeface="Tahoma"/>
-                <a:ea typeface="Tahoma"/>
-              </a:rPr>
-              <a:t>A strong crop gives the proposition a place to live.</a:t>
-            </a:r>
-            <a:endParaRPr lang="en-US"/>
-          </a:p>
-        </p:txBody>
-      </p:sp>
-      <p:sp>
-        <p:nvSpPr>
-          <p:cNvPr id="6" name="visual-rule"/>
-          <p:cNvSpPr/>
-          <p:nvPr/>
-        </p:nvSpPr>
-        <p:spPr>
-          <a:xfrm xmlns:a="http://schemas.openxmlformats.org/drawingml/2006/main">
-            <a:off x="914400" y="4476750"/>
-            <a:ext cx="4419600" cy="0"/>
-          </a:xfrm>
-          <a:prstGeom xmlns:a="http://schemas.openxmlformats.org/drawingml/2006/main" prst="line">
-            <a:avLst/>
-          </a:prstGeom>
-          <a:noFill xmlns:a="http://schemas.openxmlformats.org/drawingml/2006/main"/>
-          <a:ln xmlns:a="http://schemas.openxmlformats.org/drawingml/2006/main" w="38100">
-            <a:solidFill>
-              <a:srgbClr val="9A6B45"/>
-            </a:solidFill>
-            <a:prstDash val="solid"/>
-          </a:ln>
-        </p:spPr>
-        <p:txBody>
-          <a:bodyPr xmlns:a="http://schemas.openxmlformats.org/drawingml/2006/main" wrap="square" lIns="0" tIns="0" rIns="0" bIns="0" anchor="t"/>
-          <a:lstStyle xmlns:a="http://schemas.openxmlformats.org/drawingml/2006/main"/>
-          <a:p xmlns:a="http://schemas.openxmlformats.org/drawingml/2006/main">
-            <a:r>
-              <a:rPr lang="en-US"/>
-              <a:t/>
-            </a:r>
-            <a:endParaRPr lang="en-US"/>
-          </a:p>
-        </p:txBody>
-      </p:sp>
-      <p:sp>
-        <p:nvSpPr>
-          <p:cNvPr id="7" name="visual-label"/>
-          <p:cNvSpPr txBox="1"/>
-          <p:nvPr/>
-        </p:nvSpPr>
-        <p:spPr>
-          <a:xfrm xmlns:a="http://schemas.openxmlformats.org/drawingml/2006/main">
-            <a:off x="914400" y="4819650"/>
-            <a:ext cx="4953000" cy="228600"/>
-          </a:xfrm>
-          <a:prstGeom xmlns:a="http://schemas.openxmlformats.org/drawingml/2006/main" prst="rect">
-            <a:avLst/>
-          </a:prstGeom>
-          <a:noFill xmlns:a="http://schemas.openxmlformats.org/drawingml/2006/main"/>
-          <a:ln xmlns:a="http://schemas.openxmlformats.org/drawingml/2006/main" w="0">
-            <a:noFill/>
-          </a:ln>
-        </p:spPr>
-        <p:txBody>
-          <a:bodyPr xmlns:a="http://schemas.openxmlformats.org/drawingml/2006/main" wrap="square" lIns="0" tIns="0" rIns="0" bIns="0" anchor="t"/>
-          <a:lstStyle xmlns:a="http://schemas.openxmlformats.org/drawingml/2006/main"/>
-          <a:p xmlns:a="http://schemas.openxmlformats.org/drawingml/2006/main">
-            <a:r>
-              <a:rPr lang="en-US" sz="1200" b="1">
-                <a:solidFill>
-                  <a:srgbClr val="9A6B45"/>
-                </a:solidFill>
-                <a:latin typeface="Tahoma"/>
-                <a:ea typeface="Tahoma"/>
-              </a:rPr>
-              <a:t>THE IMAGE IS EVIDENCE, NOT FILL</a:t>
-            </a:r>
-            <a:endParaRPr lang="en-US"/>
-          </a:p>
-        </p:txBody>
-      </p:sp>
-      <p:sp>
-        <p:nvSpPr>
-          <p:cNvPr id="8" name="source"/>
-          <p:cNvSpPr txBox="1"/>
-          <p:nvPr/>
-        </p:nvSpPr>
-        <p:spPr>
-          <a:xfrm xmlns:a="http://schemas.openxmlformats.org/drawingml/2006/main">
-            <a:off x="914400" y="7829550"/>
-            <a:ext cx="10953750" cy="209550"/>
-          </a:xfrm>
-          <a:prstGeom xmlns:a="http://schemas.openxmlformats.org/drawingml/2006/main" prst="rect">
-            <a:avLst/>
-          </a:prstGeom>
-          <a:noFill xmlns:a="http://schemas.openxmlformats.org/drawingml/2006/main"/>
-          <a:ln xmlns:a="http://schemas.openxmlformats.org/drawingml/2006/main" w="0">
-            <a:noFill/>
-          </a:ln>
-        </p:spPr>
-        <p:txBody>
-          <a:bodyPr xmlns:a="http://schemas.openxmlformats.org/drawingml/2006/main" wrap="square" lIns="0" tIns="0" rIns="0" bIns="0" anchor="t"/>
-          <a:lstStyle xmlns:a="http://schemas.openxmlformats.org/drawingml/2006/main"/>
-          <a:p xmlns:a="http://schemas.openxmlformats.org/drawingml/2006/main">
-            <a:r>
-              <a:rPr lang="en-US" sz="1050">
-                <a:solidFill>
-                  <a:srgbClr val="898989"/>
-                </a:solidFill>
-                <a:latin typeface="Tahoma"/>
-                <a:ea typeface="Tahoma"/>
-              </a:rPr>
-              <a:t>OfficeKit original clean-room visual field · fictional content</a:t>
-            </a:r>
-            <a:endParaRPr lang="en-US"/>
-          </a:p>
-        </p:txBody>
-      </p:sp>
-      <p:sp>
-        <p:nvSpPr>
-          <p:cNvPr id="9" name="page-number"/>
-          <p:cNvSpPr txBox="1"/>
-          <p:nvPr/>
-        </p:nvSpPr>
-        <p:spPr>
-          <a:xfrm xmlns:a="http://schemas.openxmlformats.org/drawingml/2006/main">
-            <a:off x="13335000" y="7829550"/>
-            <a:ext cx="952500" cy="209550"/>
-          </a:xfrm>
-          <a:prstGeom xmlns:a="http://schemas.openxmlformats.org/drawingml/2006/main" prst="rect">
-            <a:avLst/>
-          </a:prstGeom>
-          <a:noFill xmlns:a="http://schemas.openxmlformats.org/drawingml/2006/main"/>
-          <a:ln xmlns:a="http://schemas.openxmlformats.org/drawingml/2006/main" w="0">
-            <a:noFill/>
-          </a:ln>
-        </p:spPr>
-        <p:txBody>
-          <a:bodyPr xmlns:a="http://schemas.openxmlformats.org/drawingml/2006/main" wrap="square" lIns="0" tIns="0" rIns="0" bIns="0" anchor="t"/>
-          <a:lstStyle xmlns:a="http://schemas.openxmlformats.org/drawingml/2006/main"/>
-          <a:p xmlns:a="http://schemas.openxmlformats.org/drawingml/2006/main">
-            <a:pPr algn="r"/>
-            <a:r>
-              <a:rPr lang="en-US" sz="1050">
-                <a:solidFill>
-                  <a:srgbClr val="898989"/>
-                </a:solidFill>
-                <a:latin typeface="Tahoma"/>
-                <a:ea typeface="Tahoma"/>
-              </a:rPr>
-              <a:t>5 / 6</a:t>
-            </a:r>
-            <a:endParaRPr lang="en-US"/>
-          </a:p>
-        </p:txBody>
-      </p:sp>
-    </p:spTree>
-  </p:cSld>
-  <p:clrMapOvr>
-    <a:masterClrMapping xmlns:a="http://schemas.openxmlformats.org/drawingml/2006/main"/>
-  </p:clrMapOvr>
-</p:sld>
-</file>
-
-<file path=ppt/slides/slide6.xml><?xml version="1.0" encoding="utf-8"?>
-<p:sld xmlns:p="http://schemas.openxmlformats.org/presentationml/2006/main">
-  <p:cSld name="Decision close">
-    <p:bg>
-      <p:bgPr>
-        <a:blipFill xmlns:a="http://schemas.openxmlformats.org/drawingml/2006/main">
-          <a:blip xmlns:r="http://schemas.openxmlformats.org/officeDocument/2006/relationships" r:embed="rIdOfficeKitImagec237998db8bee20d_1"/>
-          <a:stretch>
-            <a:fillRect/>
-          </a:stretch>
-        </a:blipFill>
-      </p:bgPr>
-    </p:bg>
-    <p:spTree>
-      <p:nvGrpSpPr>
-        <p:cNvPr id="1" name=""/>
-        <p:cNvGrpSpPr/>
-        <p:nvPr/>
-      </p:nvGrpSpPr>
-      <p:grpSpPr>
-        <a:xfrm xmlns:a="http://schemas.openxmlformats.org/drawingml/2006/main">
-          <a:off x="0" y="0"/>
-          <a:ext cx="0" cy="0"/>
-          <a:chOff x="0" y="0"/>
-          <a:chExt cx="0" cy="0"/>
-        </a:xfrm>
-      </p:grpSpPr>
-      <p:sp>
-        <p:nvSpPr>
           <p:cNvPr id="2" name="close-paper-scrim"/>
           <p:cNvSpPr/>
           <p:nvPr/>

--- a/skills/presentation-template-library/skills/artifact-template-silver-atelier/assets/reference.pptx
+++ b/skills/presentation-template-library/skills/artifact-template-silver-atelier/assets/reference.pptx
@@ -357,7 +357,7 @@
     <p:bg>
       <p:bgPr>
         <a:blipFill xmlns:a="http://schemas.openxmlformats.org/drawingml/2006/main">
-          <a:blip xmlns:r="http://schemas.openxmlformats.org/officeDocument/2006/relationships" r:embed="rIdOfficeKitImagec7b73f8fac405495_1"/>
+          <a:blip xmlns:r="http://schemas.openxmlformats.org/officeDocument/2006/relationships" r:embed="rIdOfficeKitImage6785cc6781fd2511_1"/>
           <a:stretch>
             <a:fillRect/>
           </a:stretch>
@@ -687,7 +687,7 @@
     <p:bg>
       <p:bgPr>
         <a:blipFill xmlns:a="http://schemas.openxmlformats.org/drawingml/2006/main">
-          <a:blip xmlns:r="http://schemas.openxmlformats.org/officeDocument/2006/relationships" r:embed="rIdOfficeKitImagec237998db8bee20d_1"/>
+          <a:blip xmlns:r="http://schemas.openxmlformats.org/officeDocument/2006/relationships" r:embed="rIdOfficeKitImagecb4e39f1eccfa545_1"/>
           <a:stretch>
             <a:fillRect/>
           </a:stretch>
@@ -1062,8 +1062,8 @@
           <p:nvPr/>
         </p:nvPicPr>
         <p:blipFill>
-          <a:blip xmlns:r="http://schemas.openxmlformats.org/officeDocument/2006/relationships" xmlns:a="http://schemas.openxmlformats.org/drawingml/2006/main" r:embed="rIdOfficeKitImage31956823b229fb66_1"/>
-          <a:srcRect xmlns:a="http://schemas.openxmlformats.org/drawingml/2006/main" l="0" t="31910" r="0" b="31910"/>
+          <a:blip xmlns:r="http://schemas.openxmlformats.org/officeDocument/2006/relationships" xmlns:a="http://schemas.openxmlformats.org/drawingml/2006/main" r:embed="rIdOfficeKitImagee977612ad933c986_1"/>
+          <a:srcRect xmlns:a="http://schemas.openxmlformats.org/drawingml/2006/main" l="0" t="31906" r="0" b="31906"/>
           <a:stretch xmlns:a="http://schemas.openxmlformats.org/drawingml/2006/main">
             <a:fillRect/>
           </a:stretch>
@@ -1238,7 +1238,7 @@
     <p:bg>
       <p:bgPr>
         <a:blipFill xmlns:a="http://schemas.openxmlformats.org/drawingml/2006/main">
-          <a:blip xmlns:r="http://schemas.openxmlformats.org/officeDocument/2006/relationships" r:embed="rIdOfficeKitImage026be3a43029630d_1"/>
+          <a:blip xmlns:r="http://schemas.openxmlformats.org/officeDocument/2006/relationships" r:embed="rIdOfficeKitImagee930dcb9c6b95953_1"/>
           <a:stretch>
             <a:fillRect/>
           </a:stretch>
@@ -1503,7 +1503,7 @@
         </p:xfrm>
         <a:graphic xmlns:a="http://schemas.openxmlformats.org/drawingml/2006/main">
           <a:graphicData uri="http://schemas.openxmlformats.org/drawingml/2006/chart">
-            <c:chart xmlns:r="http://schemas.openxmlformats.org/officeDocument/2006/relationships" xmlns:c="http://schemas.openxmlformats.org/drawingml/2006/chart" r:id="R8a11cfebf25a4b8c"/>
+            <c:chart xmlns:r="http://schemas.openxmlformats.org/officeDocument/2006/relationships" xmlns:c="http://schemas.openxmlformats.org/drawingml/2006/chart" r:id="R005b53e2442b48e0"/>
           </a:graphicData>
         </a:graphic>
       </p:graphicFrame>
@@ -2994,7 +2994,7 @@
     <p:bg>
       <p:bgPr>
         <a:blipFill xmlns:a="http://schemas.openxmlformats.org/drawingml/2006/main">
-          <a:blip xmlns:r="http://schemas.openxmlformats.org/officeDocument/2006/relationships" r:embed="rIdOfficeKitImagef72f8e2736f81baf_1"/>
+          <a:blip xmlns:r="http://schemas.openxmlformats.org/officeDocument/2006/relationships" r:embed="rIdOfficeKitImage3635f59fd49ef0e6_1"/>
           <a:stretch>
             <a:fillRect/>
           </a:stretch>
@@ -3324,7 +3324,7 @@
     <p:bg>
       <p:bgPr>
         <a:blipFill xmlns:a="http://schemas.openxmlformats.org/drawingml/2006/main">
-          <a:blip xmlns:r="http://schemas.openxmlformats.org/officeDocument/2006/relationships" r:embed="rIdOfficeKitImagec7b73f8fac405495_1"/>
+          <a:blip xmlns:r="http://schemas.openxmlformats.org/officeDocument/2006/relationships" r:embed="rIdOfficeKitImaged96cedd8678b85ac_1"/>
           <a:stretch>
             <a:fillRect/>
           </a:stretch>

--- a/skills/presentation-template-library/skills/artifact-template-silver-atelier/assets/reference.pptx
+++ b/skills/presentation-template-library/skills/artifact-template-silver-atelier/assets/reference.pptx
@@ -194,163 +194,6 @@
 </a:theme>
 </file>
 
-<file path=ppt/slides/charts/chart1.xml><?xml version="1.0" encoding="utf-8"?>
-<c:chartSpace xmlns:c="http://schemas.openxmlformats.org/drawingml/2006/chart" xmlns:a="http://schemas.openxmlformats.org/drawingml/2006/main">
-  <c:chart>
-    <c:title>
-      <c:tx>
-        <c:rich>
-          <a:bodyPr/>
-          <a:lstStyle/>
-          <a:p>
-            <a:r>
-              <a:t>Observed signal by cohort</a:t>
-            </a:r>
-          </a:p>
-        </c:rich>
-      </c:tx>
-      <c:layout/>
-    </c:title>
-    <c:plotArea>
-      <c:layout/>
-      <c:barChart>
-        <c:barDir val="col"/>
-        <c:grouping val="clustered"/>
-        <c:ser>
-          <c:idx val="0"/>
-          <c:order val="0"/>
-          <c:tx>
-            <c:v>Observed</c:v>
-          </c:tx>
-          <c:spPr>
-            <a:solidFill>
-              <a:srgbClr val="9A6B45"/>
-            </a:solidFill>
-          </c:spPr>
-          <c:cat>
-            <c:strLit>
-              <c:ptCount val="5"/>
-              <c:pt idx="0">
-                <c:v>Baseline</c:v>
-              </c:pt>
-              <c:pt idx="1">
-                <c:v>Phase 1</c:v>
-              </c:pt>
-              <c:pt idx="2">
-                <c:v>Phase 2</c:v>
-              </c:pt>
-              <c:pt idx="3">
-                <c:v>Phase 3</c:v>
-              </c:pt>
-              <c:pt idx="4">
-                <c:v>Close</c:v>
-              </c:pt>
-            </c:strLit>
-          </c:cat>
-          <c:val>
-            <c:numLit>
-              <c:formatCode>General</c:formatCode>
-              <c:ptCount val="5"/>
-              <c:pt idx="0">
-                <c:v>42</c:v>
-              </c:pt>
-              <c:pt idx="1">
-                <c:v>51</c:v>
-              </c:pt>
-              <c:pt idx="2">
-                <c:v>58</c:v>
-              </c:pt>
-              <c:pt idx="3">
-                <c:v>64</c:v>
-              </c:pt>
-              <c:pt idx="4">
-                <c:v>68</c:v>
-              </c:pt>
-            </c:numLit>
-          </c:val>
-        </c:ser>
-        <c:ser>
-          <c:idx val="1"/>
-          <c:order val="1"/>
-          <c:tx>
-            <c:v>Reference</c:v>
-          </c:tx>
-          <c:spPr>
-            <a:solidFill>
-              <a:srgbClr val="898989"/>
-            </a:solidFill>
-          </c:spPr>
-          <c:cat>
-            <c:strLit>
-              <c:ptCount val="5"/>
-              <c:pt idx="0">
-                <c:v>Baseline</c:v>
-              </c:pt>
-              <c:pt idx="1">
-                <c:v>Phase 1</c:v>
-              </c:pt>
-              <c:pt idx="2">
-                <c:v>Phase 2</c:v>
-              </c:pt>
-              <c:pt idx="3">
-                <c:v>Phase 3</c:v>
-              </c:pt>
-              <c:pt idx="4">
-                <c:v>Close</c:v>
-              </c:pt>
-            </c:strLit>
-          </c:cat>
-          <c:val>
-            <c:numLit>
-              <c:formatCode>General</c:formatCode>
-              <c:ptCount val="5"/>
-              <c:pt idx="0">
-                <c:v>40</c:v>
-              </c:pt>
-              <c:pt idx="1">
-                <c:v>43</c:v>
-              </c:pt>
-              <c:pt idx="2">
-                <c:v>45</c:v>
-              </c:pt>
-              <c:pt idx="3">
-                <c:v>47</c:v>
-              </c:pt>
-              <c:pt idx="4">
-                <c:v>48</c:v>
-              </c:pt>
-            </c:numLit>
-          </c:val>
-        </c:ser>
-        <c:axId val="1"/>
-        <c:axId val="2"/>
-      </c:barChart>
-      <c:catAx>
-        <c:axId val="1"/>
-        <c:scaling>
-          <c:orientation val="minMax"/>
-        </c:scaling>
-        <c:axPos val="b"/>
-        <c:crossAx val="2"/>
-      </c:catAx>
-      <c:valAx>
-        <c:axId val="2"/>
-        <c:scaling>
-          <c:orientation val="minMax"/>
-        </c:scaling>
-        <c:axPos val="l"/>
-        <c:crossAx val="1"/>
-      </c:valAx>
-    </c:plotArea>
-    <c:legend>
-      <c:legendPos val="r"/>
-      <c:layout/>
-    </c:legend>
-    <c:plotVisOnly val="1"/>
-  </c:chart>
-</c:chartSpace>
-</file>
-
 <file path=ppt/slides/slide1.xml><?xml version="1.0" encoding="utf-8"?>
 <p:sld xmlns:p="http://schemas.openxmlformats.org/presentationml/2006/main">
   <p:cSld name="Opening claim">
@@ -1489,114 +1332,59 @@
           </a:p>
         </p:txBody>
       </p:sp>
-      <p:graphicFrame>
-        <p:nvGraphicFramePr>
-          <p:cNvPr id="8" name="evidence-chart"/>
-          <p:cNvGraphicFramePr>
-            <a:graphicFrameLocks xmlns:a="http://schemas.openxmlformats.org/drawingml/2006/main" noGrp="1"/>
-          </p:cNvGraphicFramePr>
-          <p:nvPr/>
-        </p:nvGraphicFramePr>
-        <p:xfrm>
-          <a:off xmlns:a="http://schemas.openxmlformats.org/drawingml/2006/main" x="1047750" y="3048000"/>
-          <a:ext xmlns:a="http://schemas.openxmlformats.org/drawingml/2006/main" cx="7905750" cy="3000375"/>
-        </p:xfrm>
-        <a:graphic xmlns:a="http://schemas.openxmlformats.org/drawingml/2006/main">
-          <a:graphicData uri="http://schemas.openxmlformats.org/drawingml/2006/chart">
-            <c:chart xmlns:r="http://schemas.openxmlformats.org/officeDocument/2006/relationships" xmlns:c="http://schemas.openxmlformats.org/drawingml/2006/chart" r:id="R005b53e2442b48e0"/>
-          </a:graphicData>
-        </a:graphic>
-      </p:graphicFrame>
-      <p:sp>
-        <p:nvSpPr>
-          <p:cNvPr id="9" name="metric"/>
-          <p:cNvSpPr txBox="1"/>
-          <p:nvPr/>
-        </p:nvSpPr>
-        <p:spPr>
-          <a:xfrm xmlns:a="http://schemas.openxmlformats.org/drawingml/2006/main">
-            <a:off x="9906000" y="3333750"/>
-            <a:ext cx="2667000" cy="781050"/>
-          </a:xfrm>
-          <a:prstGeom xmlns:a="http://schemas.openxmlformats.org/drawingml/2006/main" prst="rect">
-            <a:avLst/>
-          </a:prstGeom>
-          <a:noFill xmlns:a="http://schemas.openxmlformats.org/drawingml/2006/main"/>
-          <a:ln xmlns:a="http://schemas.openxmlformats.org/drawingml/2006/main" w="0">
-            <a:noFill/>
-          </a:ln>
-        </p:spPr>
-        <p:txBody>
-          <a:bodyPr xmlns:a="http://schemas.openxmlformats.org/drawingml/2006/main" wrap="square" lIns="0" tIns="0" rIns="0" bIns="0" anchor="t"/>
-          <a:lstStyle xmlns:a="http://schemas.openxmlformats.org/drawingml/2006/main"/>
-          <a:p xmlns:a="http://schemas.openxmlformats.org/drawingml/2006/main">
-            <a:r>
-              <a:rPr lang="en-US" sz="4800" b="1">
+      <p:sp>
+        <p:nvSpPr>
+          <p:cNvPr id="8" name="timeline-label"/>
+          <p:cNvSpPr txBox="1"/>
+          <p:nvPr/>
+        </p:nvSpPr>
+        <p:spPr>
+          <a:xfrm xmlns:a="http://schemas.openxmlformats.org/drawingml/2006/main">
+            <a:off x="1066800" y="3238500"/>
+            <a:ext cx="4000500" cy="228600"/>
+          </a:xfrm>
+          <a:prstGeom xmlns:a="http://schemas.openxmlformats.org/drawingml/2006/main" prst="rect">
+            <a:avLst/>
+          </a:prstGeom>
+          <a:noFill xmlns:a="http://schemas.openxmlformats.org/drawingml/2006/main"/>
+          <a:ln xmlns:a="http://schemas.openxmlformats.org/drawingml/2006/main" w="0">
+            <a:noFill/>
+          </a:ln>
+        </p:spPr>
+        <p:txBody>
+          <a:bodyPr xmlns:a="http://schemas.openxmlformats.org/drawingml/2006/main" wrap="square" lIns="0" tIns="0" rIns="0" bIns="0" anchor="t"/>
+          <a:lstStyle xmlns:a="http://schemas.openxmlformats.org/drawingml/2006/main"/>
+          <a:p xmlns:a="http://schemas.openxmlformats.org/drawingml/2006/main">
+            <a:r>
+              <a:rPr lang="en-US" sz="1125" b="1">
                 <a:solidFill>
                   <a:srgbClr val="9A6B45"/>
                 </a:solidFill>
                 <a:latin typeface="Tahoma"/>
                 <a:ea typeface="Tahoma"/>
               </a:rPr>
-              <a:t>68</a:t>
-            </a:r>
-            <a:endParaRPr lang="en-US"/>
-          </a:p>
-        </p:txBody>
-      </p:sp>
-      <p:sp>
-        <p:nvSpPr>
-          <p:cNvPr id="10" name="metric-label"/>
-          <p:cNvSpPr txBox="1"/>
-          <p:nvPr/>
-        </p:nvSpPr>
-        <p:spPr>
-          <a:xfrm xmlns:a="http://schemas.openxmlformats.org/drawingml/2006/main">
-            <a:off x="9906000" y="4143375"/>
-            <a:ext cx="3143250" cy="285750"/>
-          </a:xfrm>
-          <a:prstGeom xmlns:a="http://schemas.openxmlformats.org/drawingml/2006/main" prst="rect">
-            <a:avLst/>
-          </a:prstGeom>
-          <a:noFill xmlns:a="http://schemas.openxmlformats.org/drawingml/2006/main"/>
-          <a:ln xmlns:a="http://schemas.openxmlformats.org/drawingml/2006/main" w="0">
-            <a:noFill/>
-          </a:ln>
-        </p:spPr>
-        <p:txBody>
-          <a:bodyPr xmlns:a="http://schemas.openxmlformats.org/drawingml/2006/main" wrap="square" lIns="0" tIns="0" rIns="0" bIns="0" anchor="t"/>
-          <a:lstStyle xmlns:a="http://schemas.openxmlformats.org/drawingml/2006/main"/>
-          <a:p xmlns:a="http://schemas.openxmlformats.org/drawingml/2006/main">
-            <a:r>
-              <a:rPr lang="en-US" sz="1350">
-                <a:solidFill>
-                  <a:srgbClr val="898989"/>
-                </a:solidFill>
-                <a:latin typeface="Tahoma"/>
-                <a:ea typeface="Tahoma"/>
-              </a:rPr>
-              <a:t>qualified response · campaign close</a:t>
-            </a:r>
-            <a:endParaRPr lang="en-US"/>
-          </a:p>
-        </p:txBody>
-      </p:sp>
-      <p:sp>
-        <p:nvSpPr>
-          <p:cNvPr id="11" name="rail-rule"/>
+              <a:t>EVOLUTION / TRANSITION</a:t>
+            </a:r>
+            <a:endParaRPr lang="en-US"/>
+          </a:p>
+        </p:txBody>
+      </p:sp>
+      <p:sp>
+        <p:nvSpPr>
+          <p:cNvPr id="9" name="timeline-axis"/>
           <p:cNvSpPr/>
           <p:nvPr/>
         </p:nvSpPr>
         <p:spPr>
           <a:xfrm xmlns:a="http://schemas.openxmlformats.org/drawingml/2006/main">
-            <a:off x="9906000" y="4810125"/>
-            <a:ext cx="3762375" cy="0"/>
+            <a:off x="1219200" y="4762500"/>
+            <a:ext cx="10287000" cy="0"/>
           </a:xfrm>
           <a:prstGeom xmlns:a="http://schemas.openxmlformats.org/drawingml/2006/main" prst="line">
             <a:avLst/>
           </a:prstGeom>
           <a:noFill xmlns:a="http://schemas.openxmlformats.org/drawingml/2006/main"/>
-          <a:ln xmlns:a="http://schemas.openxmlformats.org/drawingml/2006/main" w="25400">
+          <a:ln xmlns:a="http://schemas.openxmlformats.org/drawingml/2006/main" w="38100">
             <a:solidFill>
               <a:srgbClr val="898989"/>
             </a:solidFill>
@@ -1617,27 +1405,102 @@
       </p:sp>
       <p:sp>
         <p:nvSpPr>
-          <p:cNvPr id="12" name="read-through"/>
-          <p:cNvSpPr txBox="1"/>
-          <p:nvPr/>
-        </p:nvSpPr>
-        <p:spPr>
-          <a:xfrm xmlns:a="http://schemas.openxmlformats.org/drawingml/2006/main">
-            <a:off x="9906000" y="5143500"/>
-            <a:ext cx="3429000" cy="742950"/>
-          </a:xfrm>
-          <a:prstGeom xmlns:a="http://schemas.openxmlformats.org/drawingml/2006/main" prst="rect">
-            <a:avLst/>
-          </a:prstGeom>
-          <a:noFill xmlns:a="http://schemas.openxmlformats.org/drawingml/2006/main"/>
-          <a:ln xmlns:a="http://schemas.openxmlformats.org/drawingml/2006/main" w="0">
-            <a:noFill/>
-          </a:ln>
-        </p:spPr>
-        <p:txBody>
-          <a:bodyPr xmlns:a="http://schemas.openxmlformats.org/drawingml/2006/main" wrap="square" lIns="0" tIns="0" rIns="0" bIns="0" anchor="t"/>
-          <a:lstStyle xmlns:a="http://schemas.openxmlformats.org/drawingml/2006/main"/>
-          <a:p xmlns:a="http://schemas.openxmlformats.org/drawingml/2006/main">
+          <p:cNvPr id="10" name="timeline-node-0"/>
+          <p:cNvSpPr/>
+          <p:nvPr/>
+        </p:nvSpPr>
+        <p:spPr>
+          <a:xfrm xmlns:a="http://schemas.openxmlformats.org/drawingml/2006/main">
+            <a:off x="1066800" y="4610100"/>
+            <a:ext cx="304800" cy="304800"/>
+          </a:xfrm>
+          <a:prstGeom xmlns:a="http://schemas.openxmlformats.org/drawingml/2006/main" prst="ellipse">
+            <a:avLst/>
+          </a:prstGeom>
+          <a:solidFill xmlns:a="http://schemas.openxmlformats.org/drawingml/2006/main">
+            <a:srgbClr val="F2F3F3"/>
+          </a:solidFill>
+          <a:ln xmlns:a="http://schemas.openxmlformats.org/drawingml/2006/main" w="25400">
+            <a:solidFill>
+              <a:srgbClr val="171717"/>
+            </a:solidFill>
+            <a:prstDash val="solid"/>
+          </a:ln>
+        </p:spPr>
+        <p:txBody>
+          <a:bodyPr xmlns:a="http://schemas.openxmlformats.org/drawingml/2006/main" wrap="square" lIns="0" tIns="0" rIns="0" bIns="0" anchor="t"/>
+          <a:lstStyle xmlns:a="http://schemas.openxmlformats.org/drawingml/2006/main"/>
+          <a:p xmlns:a="http://schemas.openxmlformats.org/drawingml/2006/main">
+            <a:r>
+              <a:rPr lang="en-US"/>
+              <a:t/>
+            </a:r>
+            <a:endParaRPr lang="en-US"/>
+          </a:p>
+        </p:txBody>
+      </p:sp>
+      <p:sp>
+        <p:nvSpPr>
+          <p:cNvPr id="11" name="timeline-number-0"/>
+          <p:cNvSpPr txBox="1"/>
+          <p:nvPr/>
+        </p:nvSpPr>
+        <p:spPr>
+          <a:xfrm xmlns:a="http://schemas.openxmlformats.org/drawingml/2006/main">
+            <a:off x="952500" y="4076700"/>
+            <a:ext cx="533400" cy="190500"/>
+          </a:xfrm>
+          <a:prstGeom xmlns:a="http://schemas.openxmlformats.org/drawingml/2006/main" prst="rect">
+            <a:avLst/>
+          </a:prstGeom>
+          <a:noFill xmlns:a="http://schemas.openxmlformats.org/drawingml/2006/main"/>
+          <a:ln xmlns:a="http://schemas.openxmlformats.org/drawingml/2006/main" w="0">
+            <a:noFill/>
+          </a:ln>
+        </p:spPr>
+        <p:txBody>
+          <a:bodyPr xmlns:a="http://schemas.openxmlformats.org/drawingml/2006/main" wrap="square" lIns="0" tIns="0" rIns="0" bIns="0" anchor="t"/>
+          <a:lstStyle xmlns:a="http://schemas.openxmlformats.org/drawingml/2006/main"/>
+          <a:p xmlns:a="http://schemas.openxmlformats.org/drawingml/2006/main">
+            <a:pPr algn="ctr"/>
+            <a:r>
+              <a:rPr lang="en-US" sz="975" b="1">
+                <a:solidFill>
+                  <a:srgbClr val="9A6B45"/>
+                </a:solidFill>
+                <a:latin typeface="Tahoma"/>
+                <a:ea typeface="Tahoma"/>
+              </a:rPr>
+              <a:t>01</a:t>
+            </a:r>
+            <a:endParaRPr lang="en-US"/>
+          </a:p>
+        </p:txBody>
+      </p:sp>
+      <p:sp>
+        <p:nvSpPr>
+          <p:cNvPr id="12" name="timeline-label-0"/>
+          <p:cNvSpPr txBox="1"/>
+          <p:nvPr/>
+        </p:nvSpPr>
+        <p:spPr>
+          <a:xfrm xmlns:a="http://schemas.openxmlformats.org/drawingml/2006/main">
+            <a:off x="533400" y="5086350"/>
+            <a:ext cx="1371600" cy="228600"/>
+          </a:xfrm>
+          <a:prstGeom xmlns:a="http://schemas.openxmlformats.org/drawingml/2006/main" prst="rect">
+            <a:avLst/>
+          </a:prstGeom>
+          <a:noFill xmlns:a="http://schemas.openxmlformats.org/drawingml/2006/main"/>
+          <a:ln xmlns:a="http://schemas.openxmlformats.org/drawingml/2006/main" w="0">
+            <a:noFill/>
+          </a:ln>
+        </p:spPr>
+        <p:txBody>
+          <a:bodyPr xmlns:a="http://schemas.openxmlformats.org/drawingml/2006/main" wrap="square" lIns="0" tIns="0" rIns="0" bIns="0" anchor="t"/>
+          <a:lstStyle xmlns:a="http://schemas.openxmlformats.org/drawingml/2006/main"/>
+          <a:p xmlns:a="http://schemas.openxmlformats.org/drawingml/2006/main">
+            <a:pPr algn="ctr"/>
             <a:r>
               <a:rPr lang="en-US" sz="1350" b="1">
                 <a:solidFill>
@@ -1646,11 +1509,148 @@
                 <a:latin typeface="Tahoma"/>
                 <a:ea typeface="Tahoma"/>
               </a:rPr>
-              <a:t>Reach is useful only when the</a:t>
-            </a:r>
-            <a:endParaRPr lang="en-US"/>
-          </a:p>
-          <a:p xmlns:a="http://schemas.openxmlformats.org/drawingml/2006/main">
+              <a:t>Frame</a:t>
+            </a:r>
+            <a:endParaRPr lang="en-US"/>
+          </a:p>
+        </p:txBody>
+      </p:sp>
+      <p:sp>
+        <p:nvSpPr>
+          <p:cNvPr id="13" name="timeline-text-0"/>
+          <p:cNvSpPr txBox="1"/>
+          <p:nvPr/>
+        </p:nvSpPr>
+        <p:spPr>
+          <a:xfrm xmlns:a="http://schemas.openxmlformats.org/drawingml/2006/main">
+            <a:off x="323850" y="5391150"/>
+            <a:ext cx="1790700" cy="361950"/>
+          </a:xfrm>
+          <a:prstGeom xmlns:a="http://schemas.openxmlformats.org/drawingml/2006/main" prst="rect">
+            <a:avLst/>
+          </a:prstGeom>
+          <a:noFill xmlns:a="http://schemas.openxmlformats.org/drawingml/2006/main"/>
+          <a:ln xmlns:a="http://schemas.openxmlformats.org/drawingml/2006/main" w="0">
+            <a:noFill/>
+          </a:ln>
+        </p:spPr>
+        <p:txBody>
+          <a:bodyPr xmlns:a="http://schemas.openxmlformats.org/drawingml/2006/main" wrap="square" lIns="0" tIns="0" rIns="0" bIns="0" anchor="t"/>
+          <a:lstStyle xmlns:a="http://schemas.openxmlformats.org/drawingml/2006/main"/>
+          <a:p xmlns:a="http://schemas.openxmlformats.org/drawingml/2006/main">
+            <a:pPr algn="ctr"/>
+            <a:r>
+              <a:rPr lang="en-US" sz="1050">
+                <a:solidFill>
+                  <a:srgbClr val="898989"/>
+                </a:solidFill>
+                <a:latin typeface="Tahoma"/>
+                <a:ea typeface="Tahoma"/>
+              </a:rPr>
+              <a:t>Name the question</a:t>
+            </a:r>
+            <a:endParaRPr lang="en-US"/>
+          </a:p>
+        </p:txBody>
+      </p:sp>
+      <p:sp>
+        <p:nvSpPr>
+          <p:cNvPr id="14" name="timeline-node-1"/>
+          <p:cNvSpPr/>
+          <p:nvPr/>
+        </p:nvSpPr>
+        <p:spPr>
+          <a:xfrm xmlns:a="http://schemas.openxmlformats.org/drawingml/2006/main">
+            <a:off x="3638550" y="4610100"/>
+            <a:ext cx="304800" cy="304800"/>
+          </a:xfrm>
+          <a:prstGeom xmlns:a="http://schemas.openxmlformats.org/drawingml/2006/main" prst="ellipse">
+            <a:avLst/>
+          </a:prstGeom>
+          <a:solidFill xmlns:a="http://schemas.openxmlformats.org/drawingml/2006/main">
+            <a:srgbClr val="F2F3F3"/>
+          </a:solidFill>
+          <a:ln xmlns:a="http://schemas.openxmlformats.org/drawingml/2006/main" w="25400">
+            <a:solidFill>
+              <a:srgbClr val="171717"/>
+            </a:solidFill>
+            <a:prstDash val="solid"/>
+          </a:ln>
+        </p:spPr>
+        <p:txBody>
+          <a:bodyPr xmlns:a="http://schemas.openxmlformats.org/drawingml/2006/main" wrap="square" lIns="0" tIns="0" rIns="0" bIns="0" anchor="t"/>
+          <a:lstStyle xmlns:a="http://schemas.openxmlformats.org/drawingml/2006/main"/>
+          <a:p xmlns:a="http://schemas.openxmlformats.org/drawingml/2006/main">
+            <a:r>
+              <a:rPr lang="en-US"/>
+              <a:t/>
+            </a:r>
+            <a:endParaRPr lang="en-US"/>
+          </a:p>
+        </p:txBody>
+      </p:sp>
+      <p:sp>
+        <p:nvSpPr>
+          <p:cNvPr id="15" name="timeline-number-1"/>
+          <p:cNvSpPr txBox="1"/>
+          <p:nvPr/>
+        </p:nvSpPr>
+        <p:spPr>
+          <a:xfrm xmlns:a="http://schemas.openxmlformats.org/drawingml/2006/main">
+            <a:off x="3524250" y="4076700"/>
+            <a:ext cx="533400" cy="190500"/>
+          </a:xfrm>
+          <a:prstGeom xmlns:a="http://schemas.openxmlformats.org/drawingml/2006/main" prst="rect">
+            <a:avLst/>
+          </a:prstGeom>
+          <a:noFill xmlns:a="http://schemas.openxmlformats.org/drawingml/2006/main"/>
+          <a:ln xmlns:a="http://schemas.openxmlformats.org/drawingml/2006/main" w="0">
+            <a:noFill/>
+          </a:ln>
+        </p:spPr>
+        <p:txBody>
+          <a:bodyPr xmlns:a="http://schemas.openxmlformats.org/drawingml/2006/main" wrap="square" lIns="0" tIns="0" rIns="0" bIns="0" anchor="t"/>
+          <a:lstStyle xmlns:a="http://schemas.openxmlformats.org/drawingml/2006/main"/>
+          <a:p xmlns:a="http://schemas.openxmlformats.org/drawingml/2006/main">
+            <a:pPr algn="ctr"/>
+            <a:r>
+              <a:rPr lang="en-US" sz="975" b="1">
+                <a:solidFill>
+                  <a:srgbClr val="9A6B45"/>
+                </a:solidFill>
+                <a:latin typeface="Tahoma"/>
+                <a:ea typeface="Tahoma"/>
+              </a:rPr>
+              <a:t>02</a:t>
+            </a:r>
+            <a:endParaRPr lang="en-US"/>
+          </a:p>
+        </p:txBody>
+      </p:sp>
+      <p:sp>
+        <p:nvSpPr>
+          <p:cNvPr id="16" name="timeline-label-1"/>
+          <p:cNvSpPr txBox="1"/>
+          <p:nvPr/>
+        </p:nvSpPr>
+        <p:spPr>
+          <a:xfrm xmlns:a="http://schemas.openxmlformats.org/drawingml/2006/main">
+            <a:off x="3105150" y="5086350"/>
+            <a:ext cx="1371600" cy="228600"/>
+          </a:xfrm>
+          <a:prstGeom xmlns:a="http://schemas.openxmlformats.org/drawingml/2006/main" prst="rect">
+            <a:avLst/>
+          </a:prstGeom>
+          <a:noFill xmlns:a="http://schemas.openxmlformats.org/drawingml/2006/main"/>
+          <a:ln xmlns:a="http://schemas.openxmlformats.org/drawingml/2006/main" w="0">
+            <a:noFill/>
+          </a:ln>
+        </p:spPr>
+        <p:txBody>
+          <a:bodyPr xmlns:a="http://schemas.openxmlformats.org/drawingml/2006/main" wrap="square" lIns="0" tIns="0" rIns="0" bIns="0" anchor="t"/>
+          <a:lstStyle xmlns:a="http://schemas.openxmlformats.org/drawingml/2006/main"/>
+          <a:p xmlns:a="http://schemas.openxmlformats.org/drawingml/2006/main">
+            <a:pPr algn="ctr"/>
             <a:r>
               <a:rPr lang="en-US" sz="1350" b="1">
                 <a:solidFill>
@@ -1659,11 +1659,148 @@
                 <a:latin typeface="Tahoma"/>
                 <a:ea typeface="Tahoma"/>
               </a:rPr>
-              <a:t>audience can see and take the</a:t>
-            </a:r>
-            <a:endParaRPr lang="en-US"/>
-          </a:p>
-          <a:p xmlns:a="http://schemas.openxmlformats.org/drawingml/2006/main">
+              <a:t>Test</a:t>
+            </a:r>
+            <a:endParaRPr lang="en-US"/>
+          </a:p>
+        </p:txBody>
+      </p:sp>
+      <p:sp>
+        <p:nvSpPr>
+          <p:cNvPr id="17" name="timeline-text-1"/>
+          <p:cNvSpPr txBox="1"/>
+          <p:nvPr/>
+        </p:nvSpPr>
+        <p:spPr>
+          <a:xfrm xmlns:a="http://schemas.openxmlformats.org/drawingml/2006/main">
+            <a:off x="2895600" y="5391150"/>
+            <a:ext cx="1790700" cy="361950"/>
+          </a:xfrm>
+          <a:prstGeom xmlns:a="http://schemas.openxmlformats.org/drawingml/2006/main" prst="rect">
+            <a:avLst/>
+          </a:prstGeom>
+          <a:noFill xmlns:a="http://schemas.openxmlformats.org/drawingml/2006/main"/>
+          <a:ln xmlns:a="http://schemas.openxmlformats.org/drawingml/2006/main" w="0">
+            <a:noFill/>
+          </a:ln>
+        </p:spPr>
+        <p:txBody>
+          <a:bodyPr xmlns:a="http://schemas.openxmlformats.org/drawingml/2006/main" wrap="square" lIns="0" tIns="0" rIns="0" bIns="0" anchor="t"/>
+          <a:lstStyle xmlns:a="http://schemas.openxmlformats.org/drawingml/2006/main"/>
+          <a:p xmlns:a="http://schemas.openxmlformats.org/drawingml/2006/main">
+            <a:pPr algn="ctr"/>
+            <a:r>
+              <a:rPr lang="en-US" sz="1050">
+                <a:solidFill>
+                  <a:srgbClr val="898989"/>
+                </a:solidFill>
+                <a:latin typeface="Tahoma"/>
+                <a:ea typeface="Tahoma"/>
+              </a:rPr>
+              <a:t>Hold the rule</a:t>
+            </a:r>
+            <a:endParaRPr lang="en-US"/>
+          </a:p>
+        </p:txBody>
+      </p:sp>
+      <p:sp>
+        <p:nvSpPr>
+          <p:cNvPr id="18" name="timeline-node-2"/>
+          <p:cNvSpPr/>
+          <p:nvPr/>
+        </p:nvSpPr>
+        <p:spPr>
+          <a:xfrm xmlns:a="http://schemas.openxmlformats.org/drawingml/2006/main">
+            <a:off x="6210300" y="4610100"/>
+            <a:ext cx="304800" cy="304800"/>
+          </a:xfrm>
+          <a:prstGeom xmlns:a="http://schemas.openxmlformats.org/drawingml/2006/main" prst="ellipse">
+            <a:avLst/>
+          </a:prstGeom>
+          <a:solidFill xmlns:a="http://schemas.openxmlformats.org/drawingml/2006/main">
+            <a:srgbClr val="F2F3F3"/>
+          </a:solidFill>
+          <a:ln xmlns:a="http://schemas.openxmlformats.org/drawingml/2006/main" w="25400">
+            <a:solidFill>
+              <a:srgbClr val="171717"/>
+            </a:solidFill>
+            <a:prstDash val="solid"/>
+          </a:ln>
+        </p:spPr>
+        <p:txBody>
+          <a:bodyPr xmlns:a="http://schemas.openxmlformats.org/drawingml/2006/main" wrap="square" lIns="0" tIns="0" rIns="0" bIns="0" anchor="t"/>
+          <a:lstStyle xmlns:a="http://schemas.openxmlformats.org/drawingml/2006/main"/>
+          <a:p xmlns:a="http://schemas.openxmlformats.org/drawingml/2006/main">
+            <a:r>
+              <a:rPr lang="en-US"/>
+              <a:t/>
+            </a:r>
+            <a:endParaRPr lang="en-US"/>
+          </a:p>
+        </p:txBody>
+      </p:sp>
+      <p:sp>
+        <p:nvSpPr>
+          <p:cNvPr id="19" name="timeline-number-2"/>
+          <p:cNvSpPr txBox="1"/>
+          <p:nvPr/>
+        </p:nvSpPr>
+        <p:spPr>
+          <a:xfrm xmlns:a="http://schemas.openxmlformats.org/drawingml/2006/main">
+            <a:off x="6096000" y="4076700"/>
+            <a:ext cx="533400" cy="190500"/>
+          </a:xfrm>
+          <a:prstGeom xmlns:a="http://schemas.openxmlformats.org/drawingml/2006/main" prst="rect">
+            <a:avLst/>
+          </a:prstGeom>
+          <a:noFill xmlns:a="http://schemas.openxmlformats.org/drawingml/2006/main"/>
+          <a:ln xmlns:a="http://schemas.openxmlformats.org/drawingml/2006/main" w="0">
+            <a:noFill/>
+          </a:ln>
+        </p:spPr>
+        <p:txBody>
+          <a:bodyPr xmlns:a="http://schemas.openxmlformats.org/drawingml/2006/main" wrap="square" lIns="0" tIns="0" rIns="0" bIns="0" anchor="t"/>
+          <a:lstStyle xmlns:a="http://schemas.openxmlformats.org/drawingml/2006/main"/>
+          <a:p xmlns:a="http://schemas.openxmlformats.org/drawingml/2006/main">
+            <a:pPr algn="ctr"/>
+            <a:r>
+              <a:rPr lang="en-US" sz="975" b="1">
+                <a:solidFill>
+                  <a:srgbClr val="9A6B45"/>
+                </a:solidFill>
+                <a:latin typeface="Tahoma"/>
+                <a:ea typeface="Tahoma"/>
+              </a:rPr>
+              <a:t>03</a:t>
+            </a:r>
+            <a:endParaRPr lang="en-US"/>
+          </a:p>
+        </p:txBody>
+      </p:sp>
+      <p:sp>
+        <p:nvSpPr>
+          <p:cNvPr id="20" name="timeline-label-2"/>
+          <p:cNvSpPr txBox="1"/>
+          <p:nvPr/>
+        </p:nvSpPr>
+        <p:spPr>
+          <a:xfrm xmlns:a="http://schemas.openxmlformats.org/drawingml/2006/main">
+            <a:off x="5676900" y="5086350"/>
+            <a:ext cx="1371600" cy="228600"/>
+          </a:xfrm>
+          <a:prstGeom xmlns:a="http://schemas.openxmlformats.org/drawingml/2006/main" prst="rect">
+            <a:avLst/>
+          </a:prstGeom>
+          <a:noFill xmlns:a="http://schemas.openxmlformats.org/drawingml/2006/main"/>
+          <a:ln xmlns:a="http://schemas.openxmlformats.org/drawingml/2006/main" w="0">
+            <a:noFill/>
+          </a:ln>
+        </p:spPr>
+        <p:txBody>
+          <a:bodyPr xmlns:a="http://schemas.openxmlformats.org/drawingml/2006/main" wrap="square" lIns="0" tIns="0" rIns="0" bIns="0" anchor="t"/>
+          <a:lstStyle xmlns:a="http://schemas.openxmlformats.org/drawingml/2006/main"/>
+          <a:p xmlns:a="http://schemas.openxmlformats.org/drawingml/2006/main">
+            <a:pPr algn="ctr"/>
             <a:r>
               <a:rPr lang="en-US" sz="1350" b="1">
                 <a:solidFill>
@@ -1672,15 +1809,427 @@
                 <a:latin typeface="Tahoma"/>
                 <a:ea typeface="Tahoma"/>
               </a:rPr>
-              <a:t>next step.</a:t>
-            </a:r>
-            <a:endParaRPr lang="en-US"/>
-          </a:p>
-        </p:txBody>
-      </p:sp>
-      <p:sp>
-        <p:nvSpPr>
-          <p:cNvPr id="13" name="evidence-band"/>
+              <a:t>Read</a:t>
+            </a:r>
+            <a:endParaRPr lang="en-US"/>
+          </a:p>
+        </p:txBody>
+      </p:sp>
+      <p:sp>
+        <p:nvSpPr>
+          <p:cNvPr id="21" name="timeline-text-2"/>
+          <p:cNvSpPr txBox="1"/>
+          <p:nvPr/>
+        </p:nvSpPr>
+        <p:spPr>
+          <a:xfrm xmlns:a="http://schemas.openxmlformats.org/drawingml/2006/main">
+            <a:off x="5467350" y="5391150"/>
+            <a:ext cx="1790700" cy="361950"/>
+          </a:xfrm>
+          <a:prstGeom xmlns:a="http://schemas.openxmlformats.org/drawingml/2006/main" prst="rect">
+            <a:avLst/>
+          </a:prstGeom>
+          <a:noFill xmlns:a="http://schemas.openxmlformats.org/drawingml/2006/main"/>
+          <a:ln xmlns:a="http://schemas.openxmlformats.org/drawingml/2006/main" w="0">
+            <a:noFill/>
+          </a:ln>
+        </p:spPr>
+        <p:txBody>
+          <a:bodyPr xmlns:a="http://schemas.openxmlformats.org/drawingml/2006/main" wrap="square" lIns="0" tIns="0" rIns="0" bIns="0" anchor="t"/>
+          <a:lstStyle xmlns:a="http://schemas.openxmlformats.org/drawingml/2006/main"/>
+          <a:p xmlns:a="http://schemas.openxmlformats.org/drawingml/2006/main">
+            <a:pPr algn="ctr"/>
+            <a:r>
+              <a:rPr lang="en-US" sz="1050">
+                <a:solidFill>
+                  <a:srgbClr val="898989"/>
+                </a:solidFill>
+                <a:latin typeface="Tahoma"/>
+                <a:ea typeface="Tahoma"/>
+              </a:rPr>
+              <a:t>Separate signal</a:t>
+            </a:r>
+            <a:endParaRPr lang="en-US"/>
+          </a:p>
+        </p:txBody>
+      </p:sp>
+      <p:sp>
+        <p:nvSpPr>
+          <p:cNvPr id="22" name="timeline-node-3"/>
+          <p:cNvSpPr/>
+          <p:nvPr/>
+        </p:nvSpPr>
+        <p:spPr>
+          <a:xfrm xmlns:a="http://schemas.openxmlformats.org/drawingml/2006/main">
+            <a:off x="8782050" y="4610100"/>
+            <a:ext cx="304800" cy="304800"/>
+          </a:xfrm>
+          <a:prstGeom xmlns:a="http://schemas.openxmlformats.org/drawingml/2006/main" prst="ellipse">
+            <a:avLst/>
+          </a:prstGeom>
+          <a:solidFill xmlns:a="http://schemas.openxmlformats.org/drawingml/2006/main">
+            <a:srgbClr val="F2F3F3"/>
+          </a:solidFill>
+          <a:ln xmlns:a="http://schemas.openxmlformats.org/drawingml/2006/main" w="25400">
+            <a:solidFill>
+              <a:srgbClr val="171717"/>
+            </a:solidFill>
+            <a:prstDash val="solid"/>
+          </a:ln>
+        </p:spPr>
+        <p:txBody>
+          <a:bodyPr xmlns:a="http://schemas.openxmlformats.org/drawingml/2006/main" wrap="square" lIns="0" tIns="0" rIns="0" bIns="0" anchor="t"/>
+          <a:lstStyle xmlns:a="http://schemas.openxmlformats.org/drawingml/2006/main"/>
+          <a:p xmlns:a="http://schemas.openxmlformats.org/drawingml/2006/main">
+            <a:r>
+              <a:rPr lang="en-US"/>
+              <a:t/>
+            </a:r>
+            <a:endParaRPr lang="en-US"/>
+          </a:p>
+        </p:txBody>
+      </p:sp>
+      <p:sp>
+        <p:nvSpPr>
+          <p:cNvPr id="23" name="timeline-number-3"/>
+          <p:cNvSpPr txBox="1"/>
+          <p:nvPr/>
+        </p:nvSpPr>
+        <p:spPr>
+          <a:xfrm xmlns:a="http://schemas.openxmlformats.org/drawingml/2006/main">
+            <a:off x="8667750" y="4076700"/>
+            <a:ext cx="533400" cy="190500"/>
+          </a:xfrm>
+          <a:prstGeom xmlns:a="http://schemas.openxmlformats.org/drawingml/2006/main" prst="rect">
+            <a:avLst/>
+          </a:prstGeom>
+          <a:noFill xmlns:a="http://schemas.openxmlformats.org/drawingml/2006/main"/>
+          <a:ln xmlns:a="http://schemas.openxmlformats.org/drawingml/2006/main" w="0">
+            <a:noFill/>
+          </a:ln>
+        </p:spPr>
+        <p:txBody>
+          <a:bodyPr xmlns:a="http://schemas.openxmlformats.org/drawingml/2006/main" wrap="square" lIns="0" tIns="0" rIns="0" bIns="0" anchor="t"/>
+          <a:lstStyle xmlns:a="http://schemas.openxmlformats.org/drawingml/2006/main"/>
+          <a:p xmlns:a="http://schemas.openxmlformats.org/drawingml/2006/main">
+            <a:pPr algn="ctr"/>
+            <a:r>
+              <a:rPr lang="en-US" sz="975" b="1">
+                <a:solidFill>
+                  <a:srgbClr val="9A6B45"/>
+                </a:solidFill>
+                <a:latin typeface="Tahoma"/>
+                <a:ea typeface="Tahoma"/>
+              </a:rPr>
+              <a:t>04</a:t>
+            </a:r>
+            <a:endParaRPr lang="en-US"/>
+          </a:p>
+        </p:txBody>
+      </p:sp>
+      <p:sp>
+        <p:nvSpPr>
+          <p:cNvPr id="24" name="timeline-label-3"/>
+          <p:cNvSpPr txBox="1"/>
+          <p:nvPr/>
+        </p:nvSpPr>
+        <p:spPr>
+          <a:xfrm xmlns:a="http://schemas.openxmlformats.org/drawingml/2006/main">
+            <a:off x="8248650" y="5086350"/>
+            <a:ext cx="1371600" cy="228600"/>
+          </a:xfrm>
+          <a:prstGeom xmlns:a="http://schemas.openxmlformats.org/drawingml/2006/main" prst="rect">
+            <a:avLst/>
+          </a:prstGeom>
+          <a:noFill xmlns:a="http://schemas.openxmlformats.org/drawingml/2006/main"/>
+          <a:ln xmlns:a="http://schemas.openxmlformats.org/drawingml/2006/main" w="0">
+            <a:noFill/>
+          </a:ln>
+        </p:spPr>
+        <p:txBody>
+          <a:bodyPr xmlns:a="http://schemas.openxmlformats.org/drawingml/2006/main" wrap="square" lIns="0" tIns="0" rIns="0" bIns="0" anchor="t"/>
+          <a:lstStyle xmlns:a="http://schemas.openxmlformats.org/drawingml/2006/main"/>
+          <a:p xmlns:a="http://schemas.openxmlformats.org/drawingml/2006/main">
+            <a:pPr algn="ctr"/>
+            <a:r>
+              <a:rPr lang="en-US" sz="1350" b="1">
+                <a:solidFill>
+                  <a:srgbClr val="171717"/>
+                </a:solidFill>
+                <a:latin typeface="Tahoma"/>
+                <a:ea typeface="Tahoma"/>
+              </a:rPr>
+              <a:t>Move</a:t>
+            </a:r>
+            <a:endParaRPr lang="en-US"/>
+          </a:p>
+        </p:txBody>
+      </p:sp>
+      <p:sp>
+        <p:nvSpPr>
+          <p:cNvPr id="25" name="timeline-text-3"/>
+          <p:cNvSpPr txBox="1"/>
+          <p:nvPr/>
+        </p:nvSpPr>
+        <p:spPr>
+          <a:xfrm xmlns:a="http://schemas.openxmlformats.org/drawingml/2006/main">
+            <a:off x="8039100" y="5391150"/>
+            <a:ext cx="1790700" cy="361950"/>
+          </a:xfrm>
+          <a:prstGeom xmlns:a="http://schemas.openxmlformats.org/drawingml/2006/main" prst="rect">
+            <a:avLst/>
+          </a:prstGeom>
+          <a:noFill xmlns:a="http://schemas.openxmlformats.org/drawingml/2006/main"/>
+          <a:ln xmlns:a="http://schemas.openxmlformats.org/drawingml/2006/main" w="0">
+            <a:noFill/>
+          </a:ln>
+        </p:spPr>
+        <p:txBody>
+          <a:bodyPr xmlns:a="http://schemas.openxmlformats.org/drawingml/2006/main" wrap="square" lIns="0" tIns="0" rIns="0" bIns="0" anchor="t"/>
+          <a:lstStyle xmlns:a="http://schemas.openxmlformats.org/drawingml/2006/main"/>
+          <a:p xmlns:a="http://schemas.openxmlformats.org/drawingml/2006/main">
+            <a:pPr algn="ctr"/>
+            <a:r>
+              <a:rPr lang="en-US" sz="1050">
+                <a:solidFill>
+                  <a:srgbClr val="898989"/>
+                </a:solidFill>
+                <a:latin typeface="Tahoma"/>
+                <a:ea typeface="Tahoma"/>
+              </a:rPr>
+              <a:t>Set the next gate</a:t>
+            </a:r>
+            <a:endParaRPr lang="en-US"/>
+          </a:p>
+        </p:txBody>
+      </p:sp>
+      <p:sp>
+        <p:nvSpPr>
+          <p:cNvPr id="26" name="timeline-node-4"/>
+          <p:cNvSpPr/>
+          <p:nvPr/>
+        </p:nvSpPr>
+        <p:spPr>
+          <a:xfrm xmlns:a="http://schemas.openxmlformats.org/drawingml/2006/main">
+            <a:off x="11353800" y="4610100"/>
+            <a:ext cx="304800" cy="304800"/>
+          </a:xfrm>
+          <a:prstGeom xmlns:a="http://schemas.openxmlformats.org/drawingml/2006/main" prst="ellipse">
+            <a:avLst/>
+          </a:prstGeom>
+          <a:solidFill xmlns:a="http://schemas.openxmlformats.org/drawingml/2006/main">
+            <a:srgbClr val="9A6B45"/>
+          </a:solidFill>
+          <a:ln xmlns:a="http://schemas.openxmlformats.org/drawingml/2006/main" w="25400">
+            <a:solidFill>
+              <a:srgbClr val="9A6B45"/>
+            </a:solidFill>
+            <a:prstDash val="solid"/>
+          </a:ln>
+        </p:spPr>
+        <p:txBody>
+          <a:bodyPr xmlns:a="http://schemas.openxmlformats.org/drawingml/2006/main" wrap="square" lIns="0" tIns="0" rIns="0" bIns="0" anchor="t"/>
+          <a:lstStyle xmlns:a="http://schemas.openxmlformats.org/drawingml/2006/main"/>
+          <a:p xmlns:a="http://schemas.openxmlformats.org/drawingml/2006/main">
+            <a:r>
+              <a:rPr lang="en-US"/>
+              <a:t/>
+            </a:r>
+            <a:endParaRPr lang="en-US"/>
+          </a:p>
+        </p:txBody>
+      </p:sp>
+      <p:sp>
+        <p:nvSpPr>
+          <p:cNvPr id="27" name="timeline-number-4"/>
+          <p:cNvSpPr txBox="1"/>
+          <p:nvPr/>
+        </p:nvSpPr>
+        <p:spPr>
+          <a:xfrm xmlns:a="http://schemas.openxmlformats.org/drawingml/2006/main">
+            <a:off x="11239500" y="4076700"/>
+            <a:ext cx="533400" cy="190500"/>
+          </a:xfrm>
+          <a:prstGeom xmlns:a="http://schemas.openxmlformats.org/drawingml/2006/main" prst="rect">
+            <a:avLst/>
+          </a:prstGeom>
+          <a:noFill xmlns:a="http://schemas.openxmlformats.org/drawingml/2006/main"/>
+          <a:ln xmlns:a="http://schemas.openxmlformats.org/drawingml/2006/main" w="0">
+            <a:noFill/>
+          </a:ln>
+        </p:spPr>
+        <p:txBody>
+          <a:bodyPr xmlns:a="http://schemas.openxmlformats.org/drawingml/2006/main" wrap="square" lIns="0" tIns="0" rIns="0" bIns="0" anchor="t"/>
+          <a:lstStyle xmlns:a="http://schemas.openxmlformats.org/drawingml/2006/main"/>
+          <a:p xmlns:a="http://schemas.openxmlformats.org/drawingml/2006/main">
+            <a:pPr algn="ctr"/>
+            <a:r>
+              <a:rPr lang="en-US" sz="975" b="1">
+                <a:solidFill>
+                  <a:srgbClr val="9A6B45"/>
+                </a:solidFill>
+                <a:latin typeface="Tahoma"/>
+                <a:ea typeface="Tahoma"/>
+              </a:rPr>
+              <a:t>05</a:t>
+            </a:r>
+            <a:endParaRPr lang="en-US"/>
+          </a:p>
+        </p:txBody>
+      </p:sp>
+      <p:sp>
+        <p:nvSpPr>
+          <p:cNvPr id="28" name="timeline-label-4"/>
+          <p:cNvSpPr txBox="1"/>
+          <p:nvPr/>
+        </p:nvSpPr>
+        <p:spPr>
+          <a:xfrm xmlns:a="http://schemas.openxmlformats.org/drawingml/2006/main">
+            <a:off x="10820400" y="5086350"/>
+            <a:ext cx="1371600" cy="228600"/>
+          </a:xfrm>
+          <a:prstGeom xmlns:a="http://schemas.openxmlformats.org/drawingml/2006/main" prst="rect">
+            <a:avLst/>
+          </a:prstGeom>
+          <a:noFill xmlns:a="http://schemas.openxmlformats.org/drawingml/2006/main"/>
+          <a:ln xmlns:a="http://schemas.openxmlformats.org/drawingml/2006/main" w="0">
+            <a:noFill/>
+          </a:ln>
+        </p:spPr>
+        <p:txBody>
+          <a:bodyPr xmlns:a="http://schemas.openxmlformats.org/drawingml/2006/main" wrap="square" lIns="0" tIns="0" rIns="0" bIns="0" anchor="t"/>
+          <a:lstStyle xmlns:a="http://schemas.openxmlformats.org/drawingml/2006/main"/>
+          <a:p xmlns:a="http://schemas.openxmlformats.org/drawingml/2006/main">
+            <a:pPr algn="ctr"/>
+            <a:r>
+              <a:rPr lang="en-US" sz="1350" b="1">
+                <a:solidFill>
+                  <a:srgbClr val="171717"/>
+                </a:solidFill>
+                <a:latin typeface="Tahoma"/>
+                <a:ea typeface="Tahoma"/>
+              </a:rPr>
+              <a:t>Scale</a:t>
+            </a:r>
+            <a:endParaRPr lang="en-US"/>
+          </a:p>
+        </p:txBody>
+      </p:sp>
+      <p:sp>
+        <p:nvSpPr>
+          <p:cNvPr id="29" name="timeline-text-4"/>
+          <p:cNvSpPr txBox="1"/>
+          <p:nvPr/>
+        </p:nvSpPr>
+        <p:spPr>
+          <a:xfrm xmlns:a="http://schemas.openxmlformats.org/drawingml/2006/main">
+            <a:off x="10610850" y="5391150"/>
+            <a:ext cx="1790700" cy="361950"/>
+          </a:xfrm>
+          <a:prstGeom xmlns:a="http://schemas.openxmlformats.org/drawingml/2006/main" prst="rect">
+            <a:avLst/>
+          </a:prstGeom>
+          <a:noFill xmlns:a="http://schemas.openxmlformats.org/drawingml/2006/main"/>
+          <a:ln xmlns:a="http://schemas.openxmlformats.org/drawingml/2006/main" w="0">
+            <a:noFill/>
+          </a:ln>
+        </p:spPr>
+        <p:txBody>
+          <a:bodyPr xmlns:a="http://schemas.openxmlformats.org/drawingml/2006/main" wrap="square" lIns="0" tIns="0" rIns="0" bIns="0" anchor="t"/>
+          <a:lstStyle xmlns:a="http://schemas.openxmlformats.org/drawingml/2006/main"/>
+          <a:p xmlns:a="http://schemas.openxmlformats.org/drawingml/2006/main">
+            <a:pPr algn="ctr"/>
+            <a:r>
+              <a:rPr lang="en-US" sz="1050">
+                <a:solidFill>
+                  <a:srgbClr val="898989"/>
+                </a:solidFill>
+                <a:latin typeface="Tahoma"/>
+                <a:ea typeface="Tahoma"/>
+              </a:rPr>
+              <a:t>Repeat what held</a:t>
+            </a:r>
+            <a:endParaRPr lang="en-US"/>
+          </a:p>
+        </p:txBody>
+      </p:sp>
+      <p:sp>
+        <p:nvSpPr>
+          <p:cNvPr id="30" name="timeline-read-label"/>
+          <p:cNvSpPr txBox="1"/>
+          <p:nvPr/>
+        </p:nvSpPr>
+        <p:spPr>
+          <a:xfrm xmlns:a="http://schemas.openxmlformats.org/drawingml/2006/main">
+            <a:off x="1066800" y="6667500"/>
+            <a:ext cx="2286000" cy="209550"/>
+          </a:xfrm>
+          <a:prstGeom xmlns:a="http://schemas.openxmlformats.org/drawingml/2006/main" prst="rect">
+            <a:avLst/>
+          </a:prstGeom>
+          <a:noFill xmlns:a="http://schemas.openxmlformats.org/drawingml/2006/main"/>
+          <a:ln xmlns:a="http://schemas.openxmlformats.org/drawingml/2006/main" w="0">
+            <a:noFill/>
+          </a:ln>
+        </p:spPr>
+        <p:txBody>
+          <a:bodyPr xmlns:a="http://schemas.openxmlformats.org/drawingml/2006/main" wrap="square" lIns="0" tIns="0" rIns="0" bIns="0" anchor="t"/>
+          <a:lstStyle xmlns:a="http://schemas.openxmlformats.org/drawingml/2006/main"/>
+          <a:p xmlns:a="http://schemas.openxmlformats.org/drawingml/2006/main">
+            <a:r>
+              <a:rPr lang="en-US" sz="1050" b="1">
+                <a:solidFill>
+                  <a:srgbClr val="9A6B45"/>
+                </a:solidFill>
+                <a:latin typeface="Tahoma"/>
+                <a:ea typeface="Tahoma"/>
+              </a:rPr>
+              <a:t>READ-THROUGH</a:t>
+            </a:r>
+            <a:endParaRPr lang="en-US"/>
+          </a:p>
+        </p:txBody>
+      </p:sp>
+      <p:sp>
+        <p:nvSpPr>
+          <p:cNvPr id="31" name="timeline-read"/>
+          <p:cNvSpPr txBox="1"/>
+          <p:nvPr/>
+        </p:nvSpPr>
+        <p:spPr>
+          <a:xfrm xmlns:a="http://schemas.openxmlformats.org/drawingml/2006/main">
+            <a:off x="3333750" y="6629400"/>
+            <a:ext cx="8191500" cy="266700"/>
+          </a:xfrm>
+          <a:prstGeom xmlns:a="http://schemas.openxmlformats.org/drawingml/2006/main" prst="rect">
+            <a:avLst/>
+          </a:prstGeom>
+          <a:noFill xmlns:a="http://schemas.openxmlformats.org/drawingml/2006/main"/>
+          <a:ln xmlns:a="http://schemas.openxmlformats.org/drawingml/2006/main" w="0">
+            <a:noFill/>
+          </a:ln>
+        </p:spPr>
+        <p:txBody>
+          <a:bodyPr xmlns:a="http://schemas.openxmlformats.org/drawingml/2006/main" wrap="square" lIns="0" tIns="0" rIns="0" bIns="0" anchor="t"/>
+          <a:lstStyle xmlns:a="http://schemas.openxmlformats.org/drawingml/2006/main"/>
+          <a:p xmlns:a="http://schemas.openxmlformats.org/drawingml/2006/main">
+            <a:r>
+              <a:rPr lang="en-US" sz="1425" b="1">
+                <a:solidFill>
+                  <a:srgbClr val="171717"/>
+                </a:solidFill>
+                <a:latin typeface="Tahoma"/>
+                <a:ea typeface="Tahoma"/>
+              </a:rPr>
+              <a:t>A sequence is useful when each handoff changes what can happen next.</a:t>
+            </a:r>
+            <a:endParaRPr lang="en-US"/>
+          </a:p>
+        </p:txBody>
+      </p:sp>
+      <p:sp>
+        <p:nvSpPr>
+          <p:cNvPr id="32" name="evidence-band"/>
           <p:cNvSpPr/>
           <p:nvPr/>
         </p:nvSpPr>
@@ -1716,7 +2265,7 @@
       </p:sp>
       <p:sp>
         <p:nvSpPr>
-          <p:cNvPr id="14" name="evidence-band-text"/>
+          <p:cNvPr id="33" name="evidence-band-text"/>
           <p:cNvSpPr txBox="1"/>
           <p:nvPr/>
         </p:nvSpPr>
@@ -1753,7 +2302,7 @@
       </p:sp>
       <p:sp>
         <p:nvSpPr>
-          <p:cNvPr id="15" name="source"/>
+          <p:cNvPr id="34" name="source"/>
           <p:cNvSpPr txBox="1"/>
           <p:nvPr/>
         </p:nvSpPr>
@@ -1790,7 +2339,7 @@
       </p:sp>
       <p:sp>
         <p:nvSpPr>
-          <p:cNvPr id="16" name="page-number"/>
+          <p:cNvPr id="35" name="page-number"/>
           <p:cNvSpPr txBox="1"/>
           <p:nvPr/>
         </p:nvSpPr>
@@ -2066,848 +2615,291 @@
           </a:p>
         </p:txBody>
       </p:sp>
-      <p:sp>
-        <p:nvSpPr>
-          <p:cNvPr id="8" name="process-axis"/>
-          <p:cNvSpPr/>
-          <p:nvPr/>
-        </p:nvSpPr>
-        <p:spPr>
-          <a:xfrm xmlns:a="http://schemas.openxmlformats.org/drawingml/2006/main">
-            <a:off x="1390650" y="4114800"/>
-            <a:ext cx="8839200" cy="0"/>
-          </a:xfrm>
-          <a:prstGeom xmlns:a="http://schemas.openxmlformats.org/drawingml/2006/main" prst="line">
-            <a:avLst/>
-          </a:prstGeom>
-          <a:noFill xmlns:a="http://schemas.openxmlformats.org/drawingml/2006/main"/>
-          <a:ln xmlns:a="http://schemas.openxmlformats.org/drawingml/2006/main" w="25400">
-            <a:solidFill>
-              <a:srgbClr val="898989"/>
-            </a:solidFill>
-            <a:prstDash val="solid"/>
-          </a:ln>
-        </p:spPr>
-        <p:txBody>
-          <a:bodyPr xmlns:a="http://schemas.openxmlformats.org/drawingml/2006/main" wrap="square" lIns="0" tIns="0" rIns="0" bIns="0" anchor="t"/>
-          <a:lstStyle xmlns:a="http://schemas.openxmlformats.org/drawingml/2006/main"/>
-          <a:p xmlns:a="http://schemas.openxmlformats.org/drawingml/2006/main">
-            <a:r>
-              <a:rPr lang="en-US"/>
-              <a:t/>
-            </a:r>
-            <a:endParaRPr lang="en-US"/>
-          </a:p>
-        </p:txBody>
-      </p:sp>
-      <p:sp>
-        <p:nvSpPr>
-          <p:cNvPr id="9" name="process-node-0"/>
-          <p:cNvSpPr/>
-          <p:nvPr/>
-        </p:nvSpPr>
-        <p:spPr>
-          <a:xfrm xmlns:a="http://schemas.openxmlformats.org/drawingml/2006/main">
-            <a:off x="1219200" y="3943350"/>
-            <a:ext cx="342900" cy="342900"/>
-          </a:xfrm>
-          <a:prstGeom xmlns:a="http://schemas.openxmlformats.org/drawingml/2006/main" prst="ellipse">
-            <a:avLst/>
-          </a:prstGeom>
-          <a:solidFill xmlns:a="http://schemas.openxmlformats.org/drawingml/2006/main">
-            <a:srgbClr val="F2F3F3"/>
-          </a:solidFill>
-          <a:ln xmlns:a="http://schemas.openxmlformats.org/drawingml/2006/main" w="38100">
-            <a:solidFill>
-              <a:srgbClr val="171717"/>
-            </a:solidFill>
-            <a:prstDash val="solid"/>
-          </a:ln>
-        </p:spPr>
-        <p:txBody>
-          <a:bodyPr xmlns:a="http://schemas.openxmlformats.org/drawingml/2006/main" wrap="square" lIns="0" tIns="0" rIns="0" bIns="0" anchor="t"/>
-          <a:lstStyle xmlns:a="http://schemas.openxmlformats.org/drawingml/2006/main"/>
-          <a:p xmlns:a="http://schemas.openxmlformats.org/drawingml/2006/main">
-            <a:r>
-              <a:rPr lang="en-US"/>
-              <a:t/>
-            </a:r>
-            <a:endParaRPr lang="en-US"/>
-          </a:p>
-        </p:txBody>
-      </p:sp>
-      <p:sp>
-        <p:nvSpPr>
-          <p:cNvPr id="10" name="process-number-0"/>
-          <p:cNvSpPr txBox="1"/>
-          <p:nvPr/>
-        </p:nvSpPr>
-        <p:spPr>
-          <a:xfrm xmlns:a="http://schemas.openxmlformats.org/drawingml/2006/main">
-            <a:off x="1200150" y="3486150"/>
-            <a:ext cx="419100" cy="190500"/>
-          </a:xfrm>
-          <a:prstGeom xmlns:a="http://schemas.openxmlformats.org/drawingml/2006/main" prst="rect">
-            <a:avLst/>
-          </a:prstGeom>
-          <a:noFill xmlns:a="http://schemas.openxmlformats.org/drawingml/2006/main"/>
-          <a:ln xmlns:a="http://schemas.openxmlformats.org/drawingml/2006/main" w="0">
-            <a:noFill/>
-          </a:ln>
-        </p:spPr>
-        <p:txBody>
-          <a:bodyPr xmlns:a="http://schemas.openxmlformats.org/drawingml/2006/main" wrap="square" lIns="0" tIns="0" rIns="0" bIns="0" anchor="t"/>
-          <a:lstStyle xmlns:a="http://schemas.openxmlformats.org/drawingml/2006/main"/>
-          <a:p xmlns:a="http://schemas.openxmlformats.org/drawingml/2006/main">
-            <a:pPr algn="ctr"/>
-            <a:r>
-              <a:rPr lang="en-US" sz="975" b="1">
+      <p:pic>
+        <p:nvPicPr>
+          <p:cNvPr id="8" name="image-evidence-0">
+            <a:extLst xmlns:a="http://schemas.openxmlformats.org/drawingml/2006/main">
+              <a:ext uri="{C183D7F6-B498-43B3-948B-1728B52AA6E4}">
+                <adec:decorative xmlns:adec="http://schemas.microsoft.com/office/drawing/2017/decorative" val="1"/>
+              </a:ext>
+            </a:extLst>
+          </p:cNvPr>
+          <p:cNvPicPr/>
+          <p:nvPr/>
+        </p:nvPicPr>
+        <p:blipFill>
+          <a:blip xmlns:r="http://schemas.openxmlformats.org/officeDocument/2006/relationships" xmlns:a="http://schemas.openxmlformats.org/drawingml/2006/main" r:embed="rIdOfficeKitImage3635f59fd49ef0e6_1"/>
+          <a:srcRect xmlns:a="http://schemas.openxmlformats.org/drawingml/2006/main" l="0" t="31957" r="0" b="31957"/>
+          <a:stretch xmlns:a="http://schemas.openxmlformats.org/drawingml/2006/main">
+            <a:fillRect/>
+          </a:stretch>
+        </p:blipFill>
+        <p:spPr>
+          <a:xfrm xmlns:a="http://schemas.openxmlformats.org/drawingml/2006/main">
+            <a:off x="990600" y="3162300"/>
+            <a:ext cx="3714750" cy="2381250"/>
+          </a:xfrm>
+          <a:prstGeom xmlns:a="http://schemas.openxmlformats.org/drawingml/2006/main" prst="rect">
+            <a:avLst/>
+          </a:prstGeom>
+        </p:spPr>
+      </p:pic>
+      <p:pic>
+        <p:nvPicPr>
+          <p:cNvPr id="9" name="image-evidence-1">
+            <a:extLst xmlns:a="http://schemas.openxmlformats.org/drawingml/2006/main">
+              <a:ext uri="{C183D7F6-B498-43B3-948B-1728B52AA6E4}">
+                <adec:decorative xmlns:adec="http://schemas.microsoft.com/office/drawing/2017/decorative" val="1"/>
+              </a:ext>
+            </a:extLst>
+          </p:cNvPr>
+          <p:cNvPicPr/>
+          <p:nvPr/>
+        </p:nvPicPr>
+        <p:blipFill>
+          <a:blip xmlns:r="http://schemas.openxmlformats.org/officeDocument/2006/relationships" xmlns:a="http://schemas.openxmlformats.org/drawingml/2006/main" r:embed="rIdOfficeKitImaged96cedd8678b85ac_1"/>
+          <a:srcRect xmlns:a="http://schemas.openxmlformats.org/drawingml/2006/main" l="0" t="32347" r="0" b="32347"/>
+          <a:stretch xmlns:a="http://schemas.openxmlformats.org/drawingml/2006/main">
+            <a:fillRect/>
+          </a:stretch>
+        </p:blipFill>
+        <p:spPr>
+          <a:xfrm xmlns:a="http://schemas.openxmlformats.org/drawingml/2006/main">
+            <a:off x="4895850" y="3162300"/>
+            <a:ext cx="1790700" cy="1123950"/>
+          </a:xfrm>
+          <a:prstGeom xmlns:a="http://schemas.openxmlformats.org/drawingml/2006/main" prst="rect">
+            <a:avLst/>
+          </a:prstGeom>
+        </p:spPr>
+      </p:pic>
+      <p:pic>
+        <p:nvPicPr>
+          <p:cNvPr id="10" name="image-evidence-2">
+            <a:extLst xmlns:a="http://schemas.openxmlformats.org/drawingml/2006/main">
+              <a:ext uri="{C183D7F6-B498-43B3-948B-1728B52AA6E4}">
+                <adec:decorative xmlns:adec="http://schemas.microsoft.com/office/drawing/2017/decorative" val="1"/>
+              </a:ext>
+            </a:extLst>
+          </p:cNvPr>
+          <p:cNvPicPr/>
+          <p:nvPr/>
+        </p:nvPicPr>
+        <p:blipFill>
+          <a:blip xmlns:r="http://schemas.openxmlformats.org/officeDocument/2006/relationships" xmlns:a="http://schemas.openxmlformats.org/drawingml/2006/main" r:embed="rIdOfficeKitImage35d943dc999c7d05_1"/>
+          <a:srcRect xmlns:a="http://schemas.openxmlformats.org/drawingml/2006/main" l="0" t="32347" r="0" b="32347"/>
+          <a:stretch xmlns:a="http://schemas.openxmlformats.org/drawingml/2006/main">
+            <a:fillRect/>
+          </a:stretch>
+        </p:blipFill>
+        <p:spPr>
+          <a:xfrm xmlns:a="http://schemas.openxmlformats.org/drawingml/2006/main">
+            <a:off x="6858000" y="3162300"/>
+            <a:ext cx="1790700" cy="1123950"/>
+          </a:xfrm>
+          <a:prstGeom xmlns:a="http://schemas.openxmlformats.org/drawingml/2006/main" prst="rect">
+            <a:avLst/>
+          </a:prstGeom>
+        </p:spPr>
+      </p:pic>
+      <p:pic>
+        <p:nvPicPr>
+          <p:cNvPr id="11" name="image-evidence-3">
+            <a:extLst xmlns:a="http://schemas.openxmlformats.org/drawingml/2006/main">
+              <a:ext uri="{C183D7F6-B498-43B3-948B-1728B52AA6E4}">
+                <adec:decorative xmlns:adec="http://schemas.microsoft.com/office/drawing/2017/decorative" val="1"/>
+              </a:ext>
+            </a:extLst>
+          </p:cNvPr>
+          <p:cNvPicPr/>
+          <p:nvPr/>
+        </p:nvPicPr>
+        <p:blipFill>
+          <a:blip xmlns:r="http://schemas.openxmlformats.org/officeDocument/2006/relationships" xmlns:a="http://schemas.openxmlformats.org/drawingml/2006/main" r:embed="rIdOfficeKitImagedf986129197cef3b_1"/>
+          <a:srcRect xmlns:a="http://schemas.openxmlformats.org/drawingml/2006/main" l="0" t="32347" r="0" b="32347"/>
+          <a:stretch xmlns:a="http://schemas.openxmlformats.org/drawingml/2006/main">
+            <a:fillRect/>
+          </a:stretch>
+        </p:blipFill>
+        <p:spPr>
+          <a:xfrm xmlns:a="http://schemas.openxmlformats.org/drawingml/2006/main" flipH="1">
+            <a:off x="4895850" y="4457700"/>
+            <a:ext cx="1790700" cy="1123950"/>
+          </a:xfrm>
+          <a:prstGeom xmlns:a="http://schemas.openxmlformats.org/drawingml/2006/main" prst="rect">
+            <a:avLst/>
+          </a:prstGeom>
+        </p:spPr>
+      </p:pic>
+      <p:pic>
+        <p:nvPicPr>
+          <p:cNvPr id="12" name="image-evidence-4">
+            <a:extLst xmlns:a="http://schemas.openxmlformats.org/drawingml/2006/main">
+              <a:ext uri="{C183D7F6-B498-43B3-948B-1728B52AA6E4}">
+                <adec:decorative xmlns:adec="http://schemas.microsoft.com/office/drawing/2017/decorative" val="1"/>
+              </a:ext>
+            </a:extLst>
+          </p:cNvPr>
+          <p:cNvPicPr/>
+          <p:nvPr/>
+        </p:nvPicPr>
+        <p:blipFill>
+          <a:blip xmlns:r="http://schemas.openxmlformats.org/officeDocument/2006/relationships" xmlns:a="http://schemas.openxmlformats.org/drawingml/2006/main" r:embed="rIdOfficeKitImage84ff976f39aab728_1"/>
+          <a:srcRect xmlns:a="http://schemas.openxmlformats.org/drawingml/2006/main" l="0" t="32347" r="0" b="32347"/>
+          <a:stretch xmlns:a="http://schemas.openxmlformats.org/drawingml/2006/main">
+            <a:fillRect/>
+          </a:stretch>
+        </p:blipFill>
+        <p:spPr>
+          <a:xfrm xmlns:a="http://schemas.openxmlformats.org/drawingml/2006/main">
+            <a:off x="6858000" y="4457700"/>
+            <a:ext cx="1790700" cy="1123950"/>
+          </a:xfrm>
+          <a:prstGeom xmlns:a="http://schemas.openxmlformats.org/drawingml/2006/main" prst="rect">
+            <a:avLst/>
+          </a:prstGeom>
+        </p:spPr>
+      </p:pic>
+      <p:sp>
+        <p:nvSpPr>
+          <p:cNvPr id="13" name="image-matrix-label"/>
+          <p:cNvSpPr txBox="1"/>
+          <p:nvPr/>
+        </p:nvSpPr>
+        <p:spPr>
+          <a:xfrm xmlns:a="http://schemas.openxmlformats.org/drawingml/2006/main">
+            <a:off x="9620250" y="3314700"/>
+            <a:ext cx="2857500" cy="228600"/>
+          </a:xfrm>
+          <a:prstGeom xmlns:a="http://schemas.openxmlformats.org/drawingml/2006/main" prst="rect">
+            <a:avLst/>
+          </a:prstGeom>
+          <a:noFill xmlns:a="http://schemas.openxmlformats.org/drawingml/2006/main"/>
+          <a:ln xmlns:a="http://schemas.openxmlformats.org/drawingml/2006/main" w="0">
+            <a:noFill/>
+          </a:ln>
+        </p:spPr>
+        <p:txBody>
+          <a:bodyPr xmlns:a="http://schemas.openxmlformats.org/drawingml/2006/main" wrap="square" lIns="0" tIns="0" rIns="0" bIns="0" anchor="t"/>
+          <a:lstStyle xmlns:a="http://schemas.openxmlformats.org/drawingml/2006/main"/>
+          <a:p xmlns:a="http://schemas.openxmlformats.org/drawingml/2006/main">
+            <a:r>
+              <a:rPr lang="en-US" sz="1125" b="1">
                 <a:solidFill>
                   <a:srgbClr val="9A6B45"/>
                 </a:solidFill>
                 <a:latin typeface="Tahoma"/>
                 <a:ea typeface="Tahoma"/>
               </a:rPr>
-              <a:t>01</a:t>
-            </a:r>
-            <a:endParaRPr lang="en-US"/>
-          </a:p>
-        </p:txBody>
-      </p:sp>
-      <p:sp>
-        <p:nvSpPr>
-          <p:cNvPr id="11" name="process-label-0"/>
-          <p:cNvSpPr txBox="1"/>
-          <p:nvPr/>
-        </p:nvSpPr>
-        <p:spPr>
-          <a:xfrm xmlns:a="http://schemas.openxmlformats.org/drawingml/2006/main">
-            <a:off x="1714500" y="4000500"/>
-            <a:ext cx="1428750" cy="228600"/>
-          </a:xfrm>
-          <a:prstGeom xmlns:a="http://schemas.openxmlformats.org/drawingml/2006/main" prst="rect">
-            <a:avLst/>
-          </a:prstGeom>
-          <a:noFill xmlns:a="http://schemas.openxmlformats.org/drawingml/2006/main"/>
-          <a:ln xmlns:a="http://schemas.openxmlformats.org/drawingml/2006/main" w="0">
-            <a:noFill/>
-          </a:ln>
-        </p:spPr>
-        <p:txBody>
-          <a:bodyPr xmlns:a="http://schemas.openxmlformats.org/drawingml/2006/main" wrap="square" lIns="0" tIns="0" rIns="0" bIns="0" anchor="t"/>
-          <a:lstStyle xmlns:a="http://schemas.openxmlformats.org/drawingml/2006/main"/>
-          <a:p xmlns:a="http://schemas.openxmlformats.org/drawingml/2006/main">
-            <a:r>
-              <a:rPr lang="en-US" sz="1500" b="1">
+              <a:t>IMAGE MATRIX</a:t>
+            </a:r>
+            <a:endParaRPr lang="en-US"/>
+          </a:p>
+        </p:txBody>
+      </p:sp>
+      <p:sp>
+        <p:nvSpPr>
+          <p:cNvPr id="14" name="image-matrix-title"/>
+          <p:cNvSpPr txBox="1"/>
+          <p:nvPr/>
+        </p:nvSpPr>
+        <p:spPr>
+          <a:xfrm xmlns:a="http://schemas.openxmlformats.org/drawingml/2006/main">
+            <a:off x="9620250" y="3790950"/>
+            <a:ext cx="3714750" cy="723900"/>
+          </a:xfrm>
+          <a:prstGeom xmlns:a="http://schemas.openxmlformats.org/drawingml/2006/main" prst="rect">
+            <a:avLst/>
+          </a:prstGeom>
+          <a:noFill xmlns:a="http://schemas.openxmlformats.org/drawingml/2006/main"/>
+          <a:ln xmlns:a="http://schemas.openxmlformats.org/drawingml/2006/main" w="0">
+            <a:noFill/>
+          </a:ln>
+        </p:spPr>
+        <p:txBody>
+          <a:bodyPr xmlns:a="http://schemas.openxmlformats.org/drawingml/2006/main" wrap="square" lIns="0" tIns="0" rIns="0" bIns="0" anchor="t"/>
+          <a:lstStyle xmlns:a="http://schemas.openxmlformats.org/drawingml/2006/main"/>
+          <a:p xmlns:a="http://schemas.openxmlformats.org/drawingml/2006/main">
+            <a:r>
+              <a:rPr lang="en-US" sz="2100" b="1">
                 <a:solidFill>
                   <a:srgbClr val="171717"/>
                 </a:solidFill>
                 <a:latin typeface="Tahoma"/>
                 <a:ea typeface="Tahoma"/>
               </a:rPr>
-              <a:t>Frame</a:t>
-            </a:r>
-            <a:endParaRPr lang="en-US"/>
-          </a:p>
-        </p:txBody>
-      </p:sp>
-      <p:sp>
-        <p:nvSpPr>
-          <p:cNvPr id="12" name="process-text-0"/>
-          <p:cNvSpPr txBox="1"/>
-          <p:nvPr/>
-        </p:nvSpPr>
-        <p:spPr>
-          <a:xfrm xmlns:a="http://schemas.openxmlformats.org/drawingml/2006/main">
-            <a:off x="1714500" y="4324350"/>
-            <a:ext cx="1524000" cy="304800"/>
-          </a:xfrm>
-          <a:prstGeom xmlns:a="http://schemas.openxmlformats.org/drawingml/2006/main" prst="rect">
-            <a:avLst/>
-          </a:prstGeom>
-          <a:noFill xmlns:a="http://schemas.openxmlformats.org/drawingml/2006/main"/>
-          <a:ln xmlns:a="http://schemas.openxmlformats.org/drawingml/2006/main" w="0">
-            <a:noFill/>
-          </a:ln>
-        </p:spPr>
-        <p:txBody>
-          <a:bodyPr xmlns:a="http://schemas.openxmlformats.org/drawingml/2006/main" wrap="square" lIns="0" tIns="0" rIns="0" bIns="0" anchor="t"/>
-          <a:lstStyle xmlns:a="http://schemas.openxmlformats.org/drawingml/2006/main"/>
-          <a:p xmlns:a="http://schemas.openxmlformats.org/drawingml/2006/main">
-            <a:r>
-              <a:rPr lang="en-US" sz="1125">
+              <a:t>One subject, five ways to notice it.</a:t>
+            </a:r>
+            <a:endParaRPr lang="en-US"/>
+          </a:p>
+        </p:txBody>
+      </p:sp>
+      <p:sp>
+        <p:nvSpPr>
+          <p:cNvPr id="15" name="image-matrix-body"/>
+          <p:cNvSpPr txBox="1"/>
+          <p:nvPr/>
+        </p:nvSpPr>
+        <p:spPr>
+          <a:xfrm xmlns:a="http://schemas.openxmlformats.org/drawingml/2006/main">
+            <a:off x="9620250" y="4953000"/>
+            <a:ext cx="3524250" cy="781050"/>
+          </a:xfrm>
+          <a:prstGeom xmlns:a="http://schemas.openxmlformats.org/drawingml/2006/main" prst="rect">
+            <a:avLst/>
+          </a:prstGeom>
+          <a:noFill xmlns:a="http://schemas.openxmlformats.org/drawingml/2006/main"/>
+          <a:ln xmlns:a="http://schemas.openxmlformats.org/drawingml/2006/main" w="0">
+            <a:noFill/>
+          </a:ln>
+        </p:spPr>
+        <p:txBody>
+          <a:bodyPr xmlns:a="http://schemas.openxmlformats.org/drawingml/2006/main" wrap="square" lIns="0" tIns="0" rIns="0" bIns="0" anchor="t"/>
+          <a:lstStyle xmlns:a="http://schemas.openxmlformats.org/drawingml/2006/main"/>
+          <a:p xmlns:a="http://schemas.openxmlformats.org/drawingml/2006/main">
+            <a:r>
+              <a:rPr lang="en-US" sz="1200">
                 <a:solidFill>
                   <a:srgbClr val="898989"/>
                 </a:solidFill>
                 <a:latin typeface="Tahoma"/>
                 <a:ea typeface="Tahoma"/>
               </a:rPr>
-              <a:t>Name the question</a:t>
-            </a:r>
-            <a:endParaRPr lang="en-US"/>
-          </a:p>
-        </p:txBody>
-      </p:sp>
-      <p:sp>
-        <p:nvSpPr>
-          <p:cNvPr id="13" name="process-separator-0"/>
-          <p:cNvSpPr/>
-          <p:nvPr/>
-        </p:nvSpPr>
-        <p:spPr>
-          <a:xfrm xmlns:a="http://schemas.openxmlformats.org/drawingml/2006/main">
-            <a:off x="1676400" y="4724400"/>
-            <a:ext cx="1676400" cy="0"/>
-          </a:xfrm>
-          <a:prstGeom xmlns:a="http://schemas.openxmlformats.org/drawingml/2006/main" prst="line">
-            <a:avLst/>
-          </a:prstGeom>
-          <a:noFill xmlns:a="http://schemas.openxmlformats.org/drawingml/2006/main"/>
-          <a:ln xmlns:a="http://schemas.openxmlformats.org/drawingml/2006/main" w="12700">
-            <a:solidFill>
-              <a:srgbClr val="898989"/>
-            </a:solidFill>
-            <a:prstDash val="solid"/>
-          </a:ln>
-        </p:spPr>
-        <p:txBody>
-          <a:bodyPr xmlns:a="http://schemas.openxmlformats.org/drawingml/2006/main" wrap="square" lIns="0" tIns="0" rIns="0" bIns="0" anchor="t"/>
-          <a:lstStyle xmlns:a="http://schemas.openxmlformats.org/drawingml/2006/main"/>
-          <a:p xmlns:a="http://schemas.openxmlformats.org/drawingml/2006/main">
-            <a:r>
-              <a:rPr lang="en-US"/>
-              <a:t/>
-            </a:r>
-            <a:endParaRPr lang="en-US"/>
-          </a:p>
-        </p:txBody>
-      </p:sp>
-      <p:sp>
-        <p:nvSpPr>
-          <p:cNvPr id="14" name="process-node-1"/>
-          <p:cNvSpPr/>
-          <p:nvPr/>
-        </p:nvSpPr>
-        <p:spPr>
-          <a:xfrm xmlns:a="http://schemas.openxmlformats.org/drawingml/2006/main">
-            <a:off x="3524250" y="3943350"/>
-            <a:ext cx="342900" cy="342900"/>
-          </a:xfrm>
-          <a:prstGeom xmlns:a="http://schemas.openxmlformats.org/drawingml/2006/main" prst="ellipse">
-            <a:avLst/>
-          </a:prstGeom>
-          <a:solidFill xmlns:a="http://schemas.openxmlformats.org/drawingml/2006/main">
-            <a:srgbClr val="F2F3F3"/>
-          </a:solidFill>
-          <a:ln xmlns:a="http://schemas.openxmlformats.org/drawingml/2006/main" w="38100">
-            <a:solidFill>
-              <a:srgbClr val="171717"/>
-            </a:solidFill>
-            <a:prstDash val="solid"/>
-          </a:ln>
-        </p:spPr>
-        <p:txBody>
-          <a:bodyPr xmlns:a="http://schemas.openxmlformats.org/drawingml/2006/main" wrap="square" lIns="0" tIns="0" rIns="0" bIns="0" anchor="t"/>
-          <a:lstStyle xmlns:a="http://schemas.openxmlformats.org/drawingml/2006/main"/>
-          <a:p xmlns:a="http://schemas.openxmlformats.org/drawingml/2006/main">
-            <a:r>
-              <a:rPr lang="en-US"/>
-              <a:t/>
-            </a:r>
-            <a:endParaRPr lang="en-US"/>
-          </a:p>
-        </p:txBody>
-      </p:sp>
-      <p:sp>
-        <p:nvSpPr>
-          <p:cNvPr id="15" name="process-number-1"/>
-          <p:cNvSpPr txBox="1"/>
-          <p:nvPr/>
-        </p:nvSpPr>
-        <p:spPr>
-          <a:xfrm xmlns:a="http://schemas.openxmlformats.org/drawingml/2006/main">
-            <a:off x="3505200" y="3486150"/>
-            <a:ext cx="419100" cy="190500"/>
-          </a:xfrm>
-          <a:prstGeom xmlns:a="http://schemas.openxmlformats.org/drawingml/2006/main" prst="rect">
-            <a:avLst/>
-          </a:prstGeom>
-          <a:noFill xmlns:a="http://schemas.openxmlformats.org/drawingml/2006/main"/>
-          <a:ln xmlns:a="http://schemas.openxmlformats.org/drawingml/2006/main" w="0">
-            <a:noFill/>
-          </a:ln>
-        </p:spPr>
-        <p:txBody>
-          <a:bodyPr xmlns:a="http://schemas.openxmlformats.org/drawingml/2006/main" wrap="square" lIns="0" tIns="0" rIns="0" bIns="0" anchor="t"/>
-          <a:lstStyle xmlns:a="http://schemas.openxmlformats.org/drawingml/2006/main"/>
-          <a:p xmlns:a="http://schemas.openxmlformats.org/drawingml/2006/main">
-            <a:pPr algn="ctr"/>
-            <a:r>
-              <a:rPr lang="en-US" sz="975" b="1">
-                <a:solidFill>
-                  <a:srgbClr val="9A6B45"/>
-                </a:solidFill>
-                <a:latin typeface="Tahoma"/>
-                <a:ea typeface="Tahoma"/>
-              </a:rPr>
-              <a:t>02</a:t>
-            </a:r>
-            <a:endParaRPr lang="en-US"/>
-          </a:p>
-        </p:txBody>
-      </p:sp>
-      <p:sp>
-        <p:nvSpPr>
-          <p:cNvPr id="16" name="process-label-1"/>
-          <p:cNvSpPr txBox="1"/>
-          <p:nvPr/>
-        </p:nvSpPr>
-        <p:spPr>
-          <a:xfrm xmlns:a="http://schemas.openxmlformats.org/drawingml/2006/main">
-            <a:off x="4019550" y="4000500"/>
-            <a:ext cx="1428750" cy="228600"/>
-          </a:xfrm>
-          <a:prstGeom xmlns:a="http://schemas.openxmlformats.org/drawingml/2006/main" prst="rect">
-            <a:avLst/>
-          </a:prstGeom>
-          <a:noFill xmlns:a="http://schemas.openxmlformats.org/drawingml/2006/main"/>
-          <a:ln xmlns:a="http://schemas.openxmlformats.org/drawingml/2006/main" w="0">
-            <a:noFill/>
-          </a:ln>
-        </p:spPr>
-        <p:txBody>
-          <a:bodyPr xmlns:a="http://schemas.openxmlformats.org/drawingml/2006/main" wrap="square" lIns="0" tIns="0" rIns="0" bIns="0" anchor="t"/>
-          <a:lstStyle xmlns:a="http://schemas.openxmlformats.org/drawingml/2006/main"/>
-          <a:p xmlns:a="http://schemas.openxmlformats.org/drawingml/2006/main">
-            <a:r>
-              <a:rPr lang="en-US" sz="1500" b="1">
-                <a:solidFill>
-                  <a:srgbClr val="171717"/>
-                </a:solidFill>
-                <a:latin typeface="Tahoma"/>
-                <a:ea typeface="Tahoma"/>
-              </a:rPr>
-              <a:t>Test</a:t>
-            </a:r>
-            <a:endParaRPr lang="en-US"/>
-          </a:p>
-        </p:txBody>
-      </p:sp>
-      <p:sp>
-        <p:nvSpPr>
-          <p:cNvPr id="17" name="process-text-1"/>
-          <p:cNvSpPr txBox="1"/>
-          <p:nvPr/>
-        </p:nvSpPr>
-        <p:spPr>
-          <a:xfrm xmlns:a="http://schemas.openxmlformats.org/drawingml/2006/main">
-            <a:off x="4019550" y="4324350"/>
-            <a:ext cx="1524000" cy="304800"/>
-          </a:xfrm>
-          <a:prstGeom xmlns:a="http://schemas.openxmlformats.org/drawingml/2006/main" prst="rect">
-            <a:avLst/>
-          </a:prstGeom>
-          <a:noFill xmlns:a="http://schemas.openxmlformats.org/drawingml/2006/main"/>
-          <a:ln xmlns:a="http://schemas.openxmlformats.org/drawingml/2006/main" w="0">
-            <a:noFill/>
-          </a:ln>
-        </p:spPr>
-        <p:txBody>
-          <a:bodyPr xmlns:a="http://schemas.openxmlformats.org/drawingml/2006/main" wrap="square" lIns="0" tIns="0" rIns="0" bIns="0" anchor="t"/>
-          <a:lstStyle xmlns:a="http://schemas.openxmlformats.org/drawingml/2006/main"/>
-          <a:p xmlns:a="http://schemas.openxmlformats.org/drawingml/2006/main">
-            <a:r>
-              <a:rPr lang="en-US" sz="1125">
+              <a:t>One dominant frame plus four</a:t>
+            </a:r>
+            <a:endParaRPr lang="en-US"/>
+          </a:p>
+          <a:p xmlns:a="http://schemas.openxmlformats.org/drawingml/2006/main">
+            <a:r>
+              <a:rPr lang="en-US" sz="1200">
                 <a:solidFill>
                   <a:srgbClr val="898989"/>
                 </a:solidFill>
                 <a:latin typeface="Tahoma"/>
                 <a:ea typeface="Tahoma"/>
               </a:rPr>
-              <a:t>Hold the rule</a:t>
-            </a:r>
-            <a:endParaRPr lang="en-US"/>
-          </a:p>
-        </p:txBody>
-      </p:sp>
-      <p:sp>
-        <p:nvSpPr>
-          <p:cNvPr id="18" name="process-separator-1"/>
-          <p:cNvSpPr/>
-          <p:nvPr/>
-        </p:nvSpPr>
-        <p:spPr>
-          <a:xfrm xmlns:a="http://schemas.openxmlformats.org/drawingml/2006/main">
-            <a:off x="3981450" y="4724400"/>
-            <a:ext cx="1676400" cy="0"/>
-          </a:xfrm>
-          <a:prstGeom xmlns:a="http://schemas.openxmlformats.org/drawingml/2006/main" prst="line">
-            <a:avLst/>
-          </a:prstGeom>
-          <a:noFill xmlns:a="http://schemas.openxmlformats.org/drawingml/2006/main"/>
-          <a:ln xmlns:a="http://schemas.openxmlformats.org/drawingml/2006/main" w="12700">
-            <a:solidFill>
-              <a:srgbClr val="898989"/>
-            </a:solidFill>
-            <a:prstDash val="solid"/>
-          </a:ln>
-        </p:spPr>
-        <p:txBody>
-          <a:bodyPr xmlns:a="http://schemas.openxmlformats.org/drawingml/2006/main" wrap="square" lIns="0" tIns="0" rIns="0" bIns="0" anchor="t"/>
-          <a:lstStyle xmlns:a="http://schemas.openxmlformats.org/drawingml/2006/main"/>
-          <a:p xmlns:a="http://schemas.openxmlformats.org/drawingml/2006/main">
-            <a:r>
-              <a:rPr lang="en-US"/>
-              <a:t/>
-            </a:r>
-            <a:endParaRPr lang="en-US"/>
-          </a:p>
-        </p:txBody>
-      </p:sp>
-      <p:sp>
-        <p:nvSpPr>
-          <p:cNvPr id="19" name="process-node-2"/>
-          <p:cNvSpPr/>
-          <p:nvPr/>
-        </p:nvSpPr>
-        <p:spPr>
-          <a:xfrm xmlns:a="http://schemas.openxmlformats.org/drawingml/2006/main">
-            <a:off x="5829300" y="3943350"/>
-            <a:ext cx="342900" cy="342900"/>
-          </a:xfrm>
-          <a:prstGeom xmlns:a="http://schemas.openxmlformats.org/drawingml/2006/main" prst="ellipse">
-            <a:avLst/>
-          </a:prstGeom>
-          <a:solidFill xmlns:a="http://schemas.openxmlformats.org/drawingml/2006/main">
-            <a:srgbClr val="F2F3F3"/>
-          </a:solidFill>
-          <a:ln xmlns:a="http://schemas.openxmlformats.org/drawingml/2006/main" w="38100">
-            <a:solidFill>
-              <a:srgbClr val="171717"/>
-            </a:solidFill>
-            <a:prstDash val="solid"/>
-          </a:ln>
-        </p:spPr>
-        <p:txBody>
-          <a:bodyPr xmlns:a="http://schemas.openxmlformats.org/drawingml/2006/main" wrap="square" lIns="0" tIns="0" rIns="0" bIns="0" anchor="t"/>
-          <a:lstStyle xmlns:a="http://schemas.openxmlformats.org/drawingml/2006/main"/>
-          <a:p xmlns:a="http://schemas.openxmlformats.org/drawingml/2006/main">
-            <a:r>
-              <a:rPr lang="en-US"/>
-              <a:t/>
-            </a:r>
-            <a:endParaRPr lang="en-US"/>
-          </a:p>
-        </p:txBody>
-      </p:sp>
-      <p:sp>
-        <p:nvSpPr>
-          <p:cNvPr id="20" name="process-number-2"/>
-          <p:cNvSpPr txBox="1"/>
-          <p:nvPr/>
-        </p:nvSpPr>
-        <p:spPr>
-          <a:xfrm xmlns:a="http://schemas.openxmlformats.org/drawingml/2006/main">
-            <a:off x="5810250" y="3486150"/>
-            <a:ext cx="419100" cy="190500"/>
-          </a:xfrm>
-          <a:prstGeom xmlns:a="http://schemas.openxmlformats.org/drawingml/2006/main" prst="rect">
-            <a:avLst/>
-          </a:prstGeom>
-          <a:noFill xmlns:a="http://schemas.openxmlformats.org/drawingml/2006/main"/>
-          <a:ln xmlns:a="http://schemas.openxmlformats.org/drawingml/2006/main" w="0">
-            <a:noFill/>
-          </a:ln>
-        </p:spPr>
-        <p:txBody>
-          <a:bodyPr xmlns:a="http://schemas.openxmlformats.org/drawingml/2006/main" wrap="square" lIns="0" tIns="0" rIns="0" bIns="0" anchor="t"/>
-          <a:lstStyle xmlns:a="http://schemas.openxmlformats.org/drawingml/2006/main"/>
-          <a:p xmlns:a="http://schemas.openxmlformats.org/drawingml/2006/main">
-            <a:pPr algn="ctr"/>
-            <a:r>
-              <a:rPr lang="en-US" sz="975" b="1">
-                <a:solidFill>
-                  <a:srgbClr val="9A6B45"/>
-                </a:solidFill>
-                <a:latin typeface="Tahoma"/>
-                <a:ea typeface="Tahoma"/>
-              </a:rPr>
-              <a:t>03</a:t>
-            </a:r>
-            <a:endParaRPr lang="en-US"/>
-          </a:p>
-        </p:txBody>
-      </p:sp>
-      <p:sp>
-        <p:nvSpPr>
-          <p:cNvPr id="21" name="process-label-2"/>
-          <p:cNvSpPr txBox="1"/>
-          <p:nvPr/>
-        </p:nvSpPr>
-        <p:spPr>
-          <a:xfrm xmlns:a="http://schemas.openxmlformats.org/drawingml/2006/main">
-            <a:off x="6324600" y="4000500"/>
-            <a:ext cx="1428750" cy="228600"/>
-          </a:xfrm>
-          <a:prstGeom xmlns:a="http://schemas.openxmlformats.org/drawingml/2006/main" prst="rect">
-            <a:avLst/>
-          </a:prstGeom>
-          <a:noFill xmlns:a="http://schemas.openxmlformats.org/drawingml/2006/main"/>
-          <a:ln xmlns:a="http://schemas.openxmlformats.org/drawingml/2006/main" w="0">
-            <a:noFill/>
-          </a:ln>
-        </p:spPr>
-        <p:txBody>
-          <a:bodyPr xmlns:a="http://schemas.openxmlformats.org/drawingml/2006/main" wrap="square" lIns="0" tIns="0" rIns="0" bIns="0" anchor="t"/>
-          <a:lstStyle xmlns:a="http://schemas.openxmlformats.org/drawingml/2006/main"/>
-          <a:p xmlns:a="http://schemas.openxmlformats.org/drawingml/2006/main">
-            <a:r>
-              <a:rPr lang="en-US" sz="1500" b="1">
-                <a:solidFill>
-                  <a:srgbClr val="171717"/>
-                </a:solidFill>
-                <a:latin typeface="Tahoma"/>
-                <a:ea typeface="Tahoma"/>
-              </a:rPr>
-              <a:t>Read</a:t>
-            </a:r>
-            <a:endParaRPr lang="en-US"/>
-          </a:p>
-        </p:txBody>
-      </p:sp>
-      <p:sp>
-        <p:nvSpPr>
-          <p:cNvPr id="22" name="process-text-2"/>
-          <p:cNvSpPr txBox="1"/>
-          <p:nvPr/>
-        </p:nvSpPr>
-        <p:spPr>
-          <a:xfrm xmlns:a="http://schemas.openxmlformats.org/drawingml/2006/main">
-            <a:off x="6324600" y="4324350"/>
-            <a:ext cx="1524000" cy="304800"/>
-          </a:xfrm>
-          <a:prstGeom xmlns:a="http://schemas.openxmlformats.org/drawingml/2006/main" prst="rect">
-            <a:avLst/>
-          </a:prstGeom>
-          <a:noFill xmlns:a="http://schemas.openxmlformats.org/drawingml/2006/main"/>
-          <a:ln xmlns:a="http://schemas.openxmlformats.org/drawingml/2006/main" w="0">
-            <a:noFill/>
-          </a:ln>
-        </p:spPr>
-        <p:txBody>
-          <a:bodyPr xmlns:a="http://schemas.openxmlformats.org/drawingml/2006/main" wrap="square" lIns="0" tIns="0" rIns="0" bIns="0" anchor="t"/>
-          <a:lstStyle xmlns:a="http://schemas.openxmlformats.org/drawingml/2006/main"/>
-          <a:p xmlns:a="http://schemas.openxmlformats.org/drawingml/2006/main">
-            <a:r>
-              <a:rPr lang="en-US" sz="1125">
+              <a:t>supporting crops. Image carries</a:t>
+            </a:r>
+            <a:endParaRPr lang="en-US"/>
+          </a:p>
+          <a:p xmlns:a="http://schemas.openxmlformats.org/drawingml/2006/main">
+            <a:r>
+              <a:rPr lang="en-US" sz="1200">
                 <a:solidFill>
                   <a:srgbClr val="898989"/>
                 </a:solidFill>
                 <a:latin typeface="Tahoma"/>
                 <a:ea typeface="Tahoma"/>
               </a:rPr>
-              <a:t>Separate signal</a:t>
-            </a:r>
-            <a:endParaRPr lang="en-US"/>
-          </a:p>
-        </p:txBody>
-      </p:sp>
-      <p:sp>
-        <p:nvSpPr>
-          <p:cNvPr id="23" name="process-separator-2"/>
-          <p:cNvSpPr/>
-          <p:nvPr/>
-        </p:nvSpPr>
-        <p:spPr>
-          <a:xfrm xmlns:a="http://schemas.openxmlformats.org/drawingml/2006/main">
-            <a:off x="6286500" y="4724400"/>
-            <a:ext cx="1676400" cy="0"/>
-          </a:xfrm>
-          <a:prstGeom xmlns:a="http://schemas.openxmlformats.org/drawingml/2006/main" prst="line">
-            <a:avLst/>
-          </a:prstGeom>
-          <a:noFill xmlns:a="http://schemas.openxmlformats.org/drawingml/2006/main"/>
-          <a:ln xmlns:a="http://schemas.openxmlformats.org/drawingml/2006/main" w="12700">
-            <a:solidFill>
-              <a:srgbClr val="898989"/>
-            </a:solidFill>
-            <a:prstDash val="solid"/>
-          </a:ln>
-        </p:spPr>
-        <p:txBody>
-          <a:bodyPr xmlns:a="http://schemas.openxmlformats.org/drawingml/2006/main" wrap="square" lIns="0" tIns="0" rIns="0" bIns="0" anchor="t"/>
-          <a:lstStyle xmlns:a="http://schemas.openxmlformats.org/drawingml/2006/main"/>
-          <a:p xmlns:a="http://schemas.openxmlformats.org/drawingml/2006/main">
-            <a:r>
-              <a:rPr lang="en-US"/>
-              <a:t/>
-            </a:r>
-            <a:endParaRPr lang="en-US"/>
-          </a:p>
-        </p:txBody>
-      </p:sp>
-      <p:sp>
-        <p:nvSpPr>
-          <p:cNvPr id="24" name="process-node-3"/>
-          <p:cNvSpPr/>
-          <p:nvPr/>
-        </p:nvSpPr>
-        <p:spPr>
-          <a:xfrm xmlns:a="http://schemas.openxmlformats.org/drawingml/2006/main">
-            <a:off x="8134350" y="3943350"/>
-            <a:ext cx="342900" cy="342900"/>
-          </a:xfrm>
-          <a:prstGeom xmlns:a="http://schemas.openxmlformats.org/drawingml/2006/main" prst="ellipse">
-            <a:avLst/>
-          </a:prstGeom>
-          <a:solidFill xmlns:a="http://schemas.openxmlformats.org/drawingml/2006/main">
-            <a:srgbClr val="9A6B45"/>
-          </a:solidFill>
-          <a:ln xmlns:a="http://schemas.openxmlformats.org/drawingml/2006/main" w="38100">
-            <a:solidFill>
-              <a:srgbClr val="9A6B45"/>
-            </a:solidFill>
-            <a:prstDash val="solid"/>
-          </a:ln>
-        </p:spPr>
-        <p:txBody>
-          <a:bodyPr xmlns:a="http://schemas.openxmlformats.org/drawingml/2006/main" wrap="square" lIns="0" tIns="0" rIns="0" bIns="0" anchor="t"/>
-          <a:lstStyle xmlns:a="http://schemas.openxmlformats.org/drawingml/2006/main"/>
-          <a:p xmlns:a="http://schemas.openxmlformats.org/drawingml/2006/main">
-            <a:r>
-              <a:rPr lang="en-US"/>
-              <a:t/>
-            </a:r>
-            <a:endParaRPr lang="en-US"/>
-          </a:p>
-        </p:txBody>
-      </p:sp>
-      <p:sp>
-        <p:nvSpPr>
-          <p:cNvPr id="25" name="process-number-3"/>
-          <p:cNvSpPr txBox="1"/>
-          <p:nvPr/>
-        </p:nvSpPr>
-        <p:spPr>
-          <a:xfrm xmlns:a="http://schemas.openxmlformats.org/drawingml/2006/main">
-            <a:off x="8115300" y="3486150"/>
-            <a:ext cx="419100" cy="190500"/>
-          </a:xfrm>
-          <a:prstGeom xmlns:a="http://schemas.openxmlformats.org/drawingml/2006/main" prst="rect">
-            <a:avLst/>
-          </a:prstGeom>
-          <a:noFill xmlns:a="http://schemas.openxmlformats.org/drawingml/2006/main"/>
-          <a:ln xmlns:a="http://schemas.openxmlformats.org/drawingml/2006/main" w="0">
-            <a:noFill/>
-          </a:ln>
-        </p:spPr>
-        <p:txBody>
-          <a:bodyPr xmlns:a="http://schemas.openxmlformats.org/drawingml/2006/main" wrap="square" lIns="0" tIns="0" rIns="0" bIns="0" anchor="t"/>
-          <a:lstStyle xmlns:a="http://schemas.openxmlformats.org/drawingml/2006/main"/>
-          <a:p xmlns:a="http://schemas.openxmlformats.org/drawingml/2006/main">
-            <a:pPr algn="ctr"/>
-            <a:r>
-              <a:rPr lang="en-US" sz="975" b="1">
-                <a:solidFill>
-                  <a:srgbClr val="9A6B45"/>
-                </a:solidFill>
-                <a:latin typeface="Tahoma"/>
-                <a:ea typeface="Tahoma"/>
-              </a:rPr>
-              <a:t>04</a:t>
-            </a:r>
-            <a:endParaRPr lang="en-US"/>
-          </a:p>
-        </p:txBody>
-      </p:sp>
-      <p:sp>
-        <p:nvSpPr>
-          <p:cNvPr id="26" name="process-label-3"/>
-          <p:cNvSpPr txBox="1"/>
-          <p:nvPr/>
-        </p:nvSpPr>
-        <p:spPr>
-          <a:xfrm xmlns:a="http://schemas.openxmlformats.org/drawingml/2006/main">
-            <a:off x="8629650" y="4000500"/>
-            <a:ext cx="1428750" cy="228600"/>
-          </a:xfrm>
-          <a:prstGeom xmlns:a="http://schemas.openxmlformats.org/drawingml/2006/main" prst="rect">
-            <a:avLst/>
-          </a:prstGeom>
-          <a:noFill xmlns:a="http://schemas.openxmlformats.org/drawingml/2006/main"/>
-          <a:ln xmlns:a="http://schemas.openxmlformats.org/drawingml/2006/main" w="0">
-            <a:noFill/>
-          </a:ln>
-        </p:spPr>
-        <p:txBody>
-          <a:bodyPr xmlns:a="http://schemas.openxmlformats.org/drawingml/2006/main" wrap="square" lIns="0" tIns="0" rIns="0" bIns="0" anchor="t"/>
-          <a:lstStyle xmlns:a="http://schemas.openxmlformats.org/drawingml/2006/main"/>
-          <a:p xmlns:a="http://schemas.openxmlformats.org/drawingml/2006/main">
-            <a:r>
-              <a:rPr lang="en-US" sz="1500" b="1">
-                <a:solidFill>
-                  <a:srgbClr val="171717"/>
-                </a:solidFill>
-                <a:latin typeface="Tahoma"/>
-                <a:ea typeface="Tahoma"/>
-              </a:rPr>
-              <a:t>Decide</a:t>
-            </a:r>
-            <a:endParaRPr lang="en-US"/>
-          </a:p>
-        </p:txBody>
-      </p:sp>
-      <p:sp>
-        <p:nvSpPr>
-          <p:cNvPr id="27" name="process-text-3"/>
-          <p:cNvSpPr txBox="1"/>
-          <p:nvPr/>
-        </p:nvSpPr>
-        <p:spPr>
-          <a:xfrm xmlns:a="http://schemas.openxmlformats.org/drawingml/2006/main">
-            <a:off x="8629650" y="4324350"/>
-            <a:ext cx="1524000" cy="304800"/>
-          </a:xfrm>
-          <a:prstGeom xmlns:a="http://schemas.openxmlformats.org/drawingml/2006/main" prst="rect">
-            <a:avLst/>
-          </a:prstGeom>
-          <a:noFill xmlns:a="http://schemas.openxmlformats.org/drawingml/2006/main"/>
-          <a:ln xmlns:a="http://schemas.openxmlformats.org/drawingml/2006/main" w="0">
-            <a:noFill/>
-          </a:ln>
-        </p:spPr>
-        <p:txBody>
-          <a:bodyPr xmlns:a="http://schemas.openxmlformats.org/drawingml/2006/main" wrap="square" lIns="0" tIns="0" rIns="0" bIns="0" anchor="t"/>
-          <a:lstStyle xmlns:a="http://schemas.openxmlformats.org/drawingml/2006/main"/>
-          <a:p xmlns:a="http://schemas.openxmlformats.org/drawingml/2006/main">
-            <a:r>
-              <a:rPr lang="en-US" sz="1125">
-                <a:solidFill>
-                  <a:srgbClr val="898989"/>
-                </a:solidFill>
-                <a:latin typeface="Tahoma"/>
-                <a:ea typeface="Tahoma"/>
-              </a:rPr>
-              <a:t>Set the next gate</a:t>
-            </a:r>
-            <a:endParaRPr lang="en-US"/>
-          </a:p>
-        </p:txBody>
-      </p:sp>
-      <p:sp>
-        <p:nvSpPr>
-          <p:cNvPr id="28" name="process-read-label"/>
-          <p:cNvSpPr txBox="1"/>
-          <p:nvPr/>
-        </p:nvSpPr>
-        <p:spPr>
-          <a:xfrm xmlns:a="http://schemas.openxmlformats.org/drawingml/2006/main">
-            <a:off x="10668000" y="3333750"/>
-            <a:ext cx="2857500" cy="228600"/>
-          </a:xfrm>
-          <a:prstGeom xmlns:a="http://schemas.openxmlformats.org/drawingml/2006/main" prst="rect">
-            <a:avLst/>
-          </a:prstGeom>
-          <a:noFill xmlns:a="http://schemas.openxmlformats.org/drawingml/2006/main"/>
-          <a:ln xmlns:a="http://schemas.openxmlformats.org/drawingml/2006/main" w="0">
-            <a:noFill/>
-          </a:ln>
-        </p:spPr>
-        <p:txBody>
-          <a:bodyPr xmlns:a="http://schemas.openxmlformats.org/drawingml/2006/main" wrap="square" lIns="0" tIns="0" rIns="0" bIns="0" anchor="t"/>
-          <a:lstStyle xmlns:a="http://schemas.openxmlformats.org/drawingml/2006/main"/>
-          <a:p xmlns:a="http://schemas.openxmlformats.org/drawingml/2006/main">
-            <a:r>
-              <a:rPr lang="en-US" sz="1125" b="1">
-                <a:solidFill>
-                  <a:srgbClr val="9A6B45"/>
-                </a:solidFill>
-                <a:latin typeface="Tahoma"/>
-                <a:ea typeface="Tahoma"/>
-              </a:rPr>
-              <a:t>READ-THROUGH</a:t>
-            </a:r>
-            <a:endParaRPr lang="en-US"/>
-          </a:p>
-        </p:txBody>
-      </p:sp>
-      <p:sp>
-        <p:nvSpPr>
-          <p:cNvPr id="29" name="process-read-title"/>
-          <p:cNvSpPr txBox="1"/>
-          <p:nvPr/>
-        </p:nvSpPr>
-        <p:spPr>
-          <a:xfrm xmlns:a="http://schemas.openxmlformats.org/drawingml/2006/main">
-            <a:off x="10668000" y="3810000"/>
-            <a:ext cx="3048000" cy="666750"/>
-          </a:xfrm>
-          <a:prstGeom xmlns:a="http://schemas.openxmlformats.org/drawingml/2006/main" prst="rect">
-            <a:avLst/>
-          </a:prstGeom>
-          <a:noFill xmlns:a="http://schemas.openxmlformats.org/drawingml/2006/main"/>
-          <a:ln xmlns:a="http://schemas.openxmlformats.org/drawingml/2006/main" w="0">
-            <a:noFill/>
-          </a:ln>
-        </p:spPr>
-        <p:txBody>
-          <a:bodyPr xmlns:a="http://schemas.openxmlformats.org/drawingml/2006/main" wrap="square" lIns="0" tIns="0" rIns="0" bIns="0" anchor="t"/>
-          <a:lstStyle xmlns:a="http://schemas.openxmlformats.org/drawingml/2006/main"/>
-          <a:p xmlns:a="http://schemas.openxmlformats.org/drawingml/2006/main">
-            <a:r>
-              <a:rPr lang="en-US" sz="2175" b="1">
-                <a:solidFill>
-                  <a:srgbClr val="171717"/>
-                </a:solidFill>
-                <a:latin typeface="Tahoma"/>
-                <a:ea typeface="Tahoma"/>
-              </a:rPr>
-              <a:t>The sequence is the evidence.</a:t>
-            </a:r>
-            <a:endParaRPr lang="en-US"/>
-          </a:p>
-        </p:txBody>
-      </p:sp>
-      <p:sp>
-        <p:nvSpPr>
-          <p:cNvPr id="30" name="process-read-body"/>
-          <p:cNvSpPr txBox="1"/>
-          <p:nvPr/>
-        </p:nvSpPr>
-        <p:spPr>
-          <a:xfrm xmlns:a="http://schemas.openxmlformats.org/drawingml/2006/main">
-            <a:off x="10668000" y="4762500"/>
-            <a:ext cx="3143250" cy="800100"/>
-          </a:xfrm>
-          <a:prstGeom xmlns:a="http://schemas.openxmlformats.org/drawingml/2006/main" prst="rect">
-            <a:avLst/>
-          </a:prstGeom>
-          <a:noFill xmlns:a="http://schemas.openxmlformats.org/drawingml/2006/main"/>
-          <a:ln xmlns:a="http://schemas.openxmlformats.org/drawingml/2006/main" w="0">
-            <a:noFill/>
-          </a:ln>
-        </p:spPr>
-        <p:txBody>
-          <a:bodyPr xmlns:a="http://schemas.openxmlformats.org/drawingml/2006/main" wrap="square" lIns="0" tIns="0" rIns="0" bIns="0" anchor="t"/>
-          <a:lstStyle xmlns:a="http://schemas.openxmlformats.org/drawingml/2006/main"/>
-          <a:p xmlns:a="http://schemas.openxmlformats.org/drawingml/2006/main">
-            <a:r>
-              <a:rPr lang="en-US" sz="1275">
-                <a:solidFill>
-                  <a:srgbClr val="898989"/>
-                </a:solidFill>
-                <a:latin typeface="Tahoma"/>
-                <a:ea typeface="Tahoma"/>
-              </a:rPr>
-              <a:t>Keep each handoff adjacent to the condition that unlocks it; do not turn a real dependency into a decorative arrow.</a:t>
-            </a:r>
-            <a:endParaRPr lang="en-US"/>
-          </a:p>
-        </p:txBody>
-      </p:sp>
-      <p:sp>
-        <p:nvSpPr>
-          <p:cNvPr id="31" name="source"/>
+              <a:t>mood; labels carry the claim.</a:t>
+            </a:r>
+            <a:endParaRPr lang="en-US"/>
+          </a:p>
+        </p:txBody>
+      </p:sp>
+      <p:sp>
+        <p:nvSpPr>
+          <p:cNvPr id="16" name="source"/>
           <p:cNvSpPr txBox="1"/>
           <p:nvPr/>
         </p:nvSpPr>
@@ -2944,7 +2936,7 @@
       </p:sp>
       <p:sp>
         <p:nvSpPr>
-          <p:cNvPr id="32" name="page-number"/>
+          <p:cNvPr id="17" name="page-number"/>
           <p:cNvSpPr txBox="1"/>
           <p:nvPr/>
         </p:nvSpPr>
@@ -2994,7 +2986,7 @@
     <p:bg>
       <p:bgPr>
         <a:blipFill xmlns:a="http://schemas.openxmlformats.org/drawingml/2006/main">
-          <a:blip xmlns:r="http://schemas.openxmlformats.org/officeDocument/2006/relationships" r:embed="rIdOfficeKitImage3635f59fd49ef0e6_1"/>
+          <a:blip xmlns:r="http://schemas.openxmlformats.org/officeDocument/2006/relationships" r:embed="rIdOfficeKitImage06e55191024fa458_1"/>
           <a:stretch>
             <a:fillRect/>
           </a:stretch>
@@ -3324,7 +3316,7 @@
     <p:bg>
       <p:bgPr>
         <a:blipFill xmlns:a="http://schemas.openxmlformats.org/drawingml/2006/main">
-          <a:blip xmlns:r="http://schemas.openxmlformats.org/officeDocument/2006/relationships" r:embed="rIdOfficeKitImaged96cedd8678b85ac_1"/>
+          <a:blip xmlns:r="http://schemas.openxmlformats.org/officeDocument/2006/relationships" r:embed="rIdOfficeKitImagee231e9493e535fbe_1"/>
           <a:stretch>
             <a:fillRect/>
           </a:stretch>

--- a/skills/presentation-template-library/skills/artifact-template-silver-atelier/assets/reference.pptx
+++ b/skills/presentation-template-library/skills/artifact-template-silver-atelier/assets/reference.pptx
@@ -906,7 +906,7 @@
         </p:nvPicPr>
         <p:blipFill>
           <a:blip xmlns:r="http://schemas.openxmlformats.org/officeDocument/2006/relationships" xmlns:a="http://schemas.openxmlformats.org/drawingml/2006/main" r:embed="rIdOfficeKitImagee977612ad933c986_1"/>
-          <a:srcRect xmlns:a="http://schemas.openxmlformats.org/drawingml/2006/main" l="0" t="31906" r="0" b="31906"/>
+          <a:srcRect xmlns:a="http://schemas.openxmlformats.org/drawingml/2006/main" l="0" t="37401" r="0" b="37401"/>
           <a:stretch xmlns:a="http://schemas.openxmlformats.org/drawingml/2006/main">
             <a:fillRect/>
           </a:stretch>
@@ -914,22 +914,80 @@
         <p:spPr>
           <a:xfrm xmlns:a="http://schemas.openxmlformats.org/drawingml/2006/main">
             <a:off x="9525000" y="3143250"/>
-            <a:ext cx="4000500" cy="2571750"/>
+            <a:ext cx="4000500" cy="1790700"/>
           </a:xfrm>
           <a:prstGeom xmlns:a="http://schemas.openxmlformats.org/drawingml/2006/main" prst="rect">
             <a:avLst/>
           </a:prstGeom>
         </p:spPr>
       </p:pic>
-      <p:sp>
-        <p:nvSpPr>
-          <p:cNvPr id="12" name="promotion-image-rule"/>
+      <p:pic>
+        <p:nvPicPr>
+          <p:cNvPr id="12" name="promotion-detail-frame-one">
+            <a:extLst xmlns:a="http://schemas.openxmlformats.org/drawingml/2006/main">
+              <a:ext uri="{C183D7F6-B498-43B3-948B-1728B52AA6E4}">
+                <adec:decorative xmlns:adec="http://schemas.microsoft.com/office/drawing/2017/decorative" val="1"/>
+              </a:ext>
+            </a:extLst>
+          </p:cNvPr>
+          <p:cNvPicPr/>
+          <p:nvPr/>
+        </p:nvPicPr>
+        <p:blipFill>
+          <a:blip xmlns:r="http://schemas.openxmlformats.org/officeDocument/2006/relationships" xmlns:a="http://schemas.openxmlformats.org/drawingml/2006/main" r:embed="rIdOfficeKitImagee930dcb9c6b95953_1"/>
+          <a:srcRect xmlns:a="http://schemas.openxmlformats.org/drawingml/2006/main" l="0" t="34406" r="0" b="34406"/>
+          <a:stretch xmlns:a="http://schemas.openxmlformats.org/drawingml/2006/main">
+            <a:fillRect/>
+          </a:stretch>
+        </p:blipFill>
+        <p:spPr>
+          <a:xfrm xmlns:a="http://schemas.openxmlformats.org/drawingml/2006/main">
+            <a:off x="9525000" y="5162550"/>
+            <a:ext cx="1924050" cy="1066800"/>
+          </a:xfrm>
+          <a:prstGeom xmlns:a="http://schemas.openxmlformats.org/drawingml/2006/main" prst="rect">
+            <a:avLst/>
+          </a:prstGeom>
+        </p:spPr>
+      </p:pic>
+      <p:pic>
+        <p:nvPicPr>
+          <p:cNvPr id="13" name="promotion-detail-frame-two">
+            <a:extLst xmlns:a="http://schemas.openxmlformats.org/drawingml/2006/main">
+              <a:ext uri="{C183D7F6-B498-43B3-948B-1728B52AA6E4}">
+                <adec:decorative xmlns:adec="http://schemas.microsoft.com/office/drawing/2017/decorative" val="1"/>
+              </a:ext>
+            </a:extLst>
+          </p:cNvPr>
+          <p:cNvPicPr/>
+          <p:nvPr/>
+        </p:nvPicPr>
+        <p:blipFill>
+          <a:blip xmlns:r="http://schemas.openxmlformats.org/officeDocument/2006/relationships" xmlns:a="http://schemas.openxmlformats.org/drawingml/2006/main" r:embed="rIdOfficeKitImage3635f59fd49ef0e6_1"/>
+          <a:srcRect xmlns:a="http://schemas.openxmlformats.org/drawingml/2006/main" l="0" t="34394" r="0" b="34394"/>
+          <a:stretch xmlns:a="http://schemas.openxmlformats.org/drawingml/2006/main">
+            <a:fillRect/>
+          </a:stretch>
+        </p:blipFill>
+        <p:spPr>
+          <a:xfrm xmlns:a="http://schemas.openxmlformats.org/drawingml/2006/main">
+            <a:off x="11601450" y="5162550"/>
+            <a:ext cx="1924050" cy="1066800"/>
+          </a:xfrm>
+          <a:prstGeom xmlns:a="http://schemas.openxmlformats.org/drawingml/2006/main" prst="rect">
+            <a:avLst/>
+          </a:prstGeom>
+        </p:spPr>
+      </p:pic>
+      <p:sp>
+        <p:nvSpPr>
+          <p:cNvPr id="14" name="promotion-image-rule"/>
           <p:cNvSpPr/>
           <p:nvPr/>
         </p:nvSpPr>
         <p:spPr>
           <a:xfrm xmlns:a="http://schemas.openxmlformats.org/drawingml/2006/main">
-            <a:off x="9525000" y="5905500"/>
+            <a:off x="9525000" y="6438900"/>
             <a:ext cx="4000500" cy="0"/>
           </a:xfrm>
           <a:prstGeom xmlns:a="http://schemas.openxmlformats.org/drawingml/2006/main" prst="line">
@@ -957,13 +1015,13 @@
       </p:sp>
       <p:sp>
         <p:nvSpPr>
-          <p:cNvPr id="13" name="promotion-image-label"/>
-          <p:cNvSpPr txBox="1"/>
-          <p:nvPr/>
-        </p:nvSpPr>
-        <p:spPr>
-          <a:xfrm xmlns:a="http://schemas.openxmlformats.org/drawingml/2006/main">
-            <a:off x="9525000" y="6153150"/>
+          <p:cNvPr id="15" name="promotion-image-label"/>
+          <p:cNvSpPr txBox="1"/>
+          <p:nvPr/>
+        </p:nvSpPr>
+        <p:spPr>
+          <a:xfrm xmlns:a="http://schemas.openxmlformats.org/drawingml/2006/main">
+            <a:off x="9525000" y="6667500"/>
             <a:ext cx="4000500" cy="247650"/>
           </a:xfrm>
           <a:prstGeom xmlns:a="http://schemas.openxmlformats.org/drawingml/2006/main" prst="rect">
@@ -994,7 +1052,7 @@
       </p:sp>
       <p:sp>
         <p:nvSpPr>
-          <p:cNvPr id="14" name="source"/>
+          <p:cNvPr id="16" name="source"/>
           <p:cNvSpPr txBox="1"/>
           <p:nvPr/>
         </p:nvSpPr>
@@ -1031,7 +1089,7 @@
       </p:sp>
       <p:sp>
         <p:nvSpPr>
-          <p:cNvPr id="15" name="page-number"/>
+          <p:cNvPr id="17" name="page-number"/>
           <p:cNvSpPr txBox="1"/>
           <p:nvPr/>
         </p:nvSpPr>
@@ -1081,7 +1139,7 @@
     <p:bg>
       <p:bgPr>
         <a:blipFill xmlns:a="http://schemas.openxmlformats.org/drawingml/2006/main">
-          <a:blip xmlns:r="http://schemas.openxmlformats.org/officeDocument/2006/relationships" r:embed="rIdOfficeKitImagee930dcb9c6b95953_1"/>
+          <a:blip xmlns:r="http://schemas.openxmlformats.org/officeDocument/2006/relationships" r:embed="rIdOfficeKitImaged96cedd8678b85ac_1"/>
           <a:stretch>
             <a:fillRect/>
           </a:stretch>
@@ -2628,8 +2686,8 @@
           <p:nvPr/>
         </p:nvPicPr>
         <p:blipFill>
-          <a:blip xmlns:r="http://schemas.openxmlformats.org/officeDocument/2006/relationships" xmlns:a="http://schemas.openxmlformats.org/drawingml/2006/main" r:embed="rIdOfficeKitImage3635f59fd49ef0e6_1"/>
-          <a:srcRect xmlns:a="http://schemas.openxmlformats.org/drawingml/2006/main" l="0" t="31957" r="0" b="31957"/>
+          <a:blip xmlns:r="http://schemas.openxmlformats.org/officeDocument/2006/relationships" xmlns:a="http://schemas.openxmlformats.org/drawingml/2006/main" r:embed="rIdOfficeKitImage35d943dc999c7d05_1"/>
+          <a:srcRect xmlns:a="http://schemas.openxmlformats.org/drawingml/2006/main" l="0" t="31971" r="0" b="31971"/>
           <a:stretch xmlns:a="http://schemas.openxmlformats.org/drawingml/2006/main">
             <a:fillRect/>
           </a:stretch>
@@ -2657,14 +2715,14 @@
           <p:nvPr/>
         </p:nvPicPr>
         <p:blipFill>
-          <a:blip xmlns:r="http://schemas.openxmlformats.org/officeDocument/2006/relationships" xmlns:a="http://schemas.openxmlformats.org/drawingml/2006/main" r:embed="rIdOfficeKitImaged96cedd8678b85ac_1"/>
+          <a:blip xmlns:r="http://schemas.openxmlformats.org/officeDocument/2006/relationships" xmlns:a="http://schemas.openxmlformats.org/drawingml/2006/main" r:embed="rIdOfficeKitImagedf986129197cef3b_1"/>
           <a:srcRect xmlns:a="http://schemas.openxmlformats.org/drawingml/2006/main" l="0" t="32347" r="0" b="32347"/>
           <a:stretch xmlns:a="http://schemas.openxmlformats.org/drawingml/2006/main">
             <a:fillRect/>
           </a:stretch>
         </p:blipFill>
         <p:spPr>
-          <a:xfrm xmlns:a="http://schemas.openxmlformats.org/drawingml/2006/main">
+          <a:xfrm xmlns:a="http://schemas.openxmlformats.org/drawingml/2006/main" flipH="1">
             <a:off x="4895850" y="3162300"/>
             <a:ext cx="1790700" cy="1123950"/>
           </a:xfrm>
@@ -2686,7 +2744,7 @@
           <p:nvPr/>
         </p:nvPicPr>
         <p:blipFill>
-          <a:blip xmlns:r="http://schemas.openxmlformats.org/officeDocument/2006/relationships" xmlns:a="http://schemas.openxmlformats.org/drawingml/2006/main" r:embed="rIdOfficeKitImage35d943dc999c7d05_1"/>
+          <a:blip xmlns:r="http://schemas.openxmlformats.org/officeDocument/2006/relationships" xmlns:a="http://schemas.openxmlformats.org/drawingml/2006/main" r:embed="rIdOfficeKitImage84ff976f39aab728_1"/>
           <a:srcRect xmlns:a="http://schemas.openxmlformats.org/drawingml/2006/main" l="0" t="32347" r="0" b="32347"/>
           <a:stretch xmlns:a="http://schemas.openxmlformats.org/drawingml/2006/main">
             <a:fillRect/>
@@ -2715,14 +2773,14 @@
           <p:nvPr/>
         </p:nvPicPr>
         <p:blipFill>
-          <a:blip xmlns:r="http://schemas.openxmlformats.org/officeDocument/2006/relationships" xmlns:a="http://schemas.openxmlformats.org/drawingml/2006/main" r:embed="rIdOfficeKitImagedf986129197cef3b_1"/>
+          <a:blip xmlns:r="http://schemas.openxmlformats.org/officeDocument/2006/relationships" xmlns:a="http://schemas.openxmlformats.org/drawingml/2006/main" r:embed="rIdOfficeKitImage06e55191024fa458_1"/>
           <a:srcRect xmlns:a="http://schemas.openxmlformats.org/drawingml/2006/main" l="0" t="32347" r="0" b="32347"/>
           <a:stretch xmlns:a="http://schemas.openxmlformats.org/drawingml/2006/main">
             <a:fillRect/>
           </a:stretch>
         </p:blipFill>
         <p:spPr>
-          <a:xfrm xmlns:a="http://schemas.openxmlformats.org/drawingml/2006/main" flipH="1">
+          <a:xfrm xmlns:a="http://schemas.openxmlformats.org/drawingml/2006/main">
             <a:off x="4895850" y="4457700"/>
             <a:ext cx="1790700" cy="1123950"/>
           </a:xfrm>
@@ -2744,7 +2802,7 @@
           <p:nvPr/>
         </p:nvPicPr>
         <p:blipFill>
-          <a:blip xmlns:r="http://schemas.openxmlformats.org/officeDocument/2006/relationships" xmlns:a="http://schemas.openxmlformats.org/drawingml/2006/main" r:embed="rIdOfficeKitImage84ff976f39aab728_1"/>
+          <a:blip xmlns:r="http://schemas.openxmlformats.org/officeDocument/2006/relationships" xmlns:a="http://schemas.openxmlformats.org/drawingml/2006/main" r:embed="rIdOfficeKitImagee231e9493e535fbe_1"/>
           <a:srcRect xmlns:a="http://schemas.openxmlformats.org/drawingml/2006/main" l="0" t="32347" r="0" b="32347"/>
           <a:stretch xmlns:a="http://schemas.openxmlformats.org/drawingml/2006/main">
             <a:fillRect/>
@@ -2986,7 +3044,7 @@
     <p:bg>
       <p:bgPr>
         <a:blipFill xmlns:a="http://schemas.openxmlformats.org/drawingml/2006/main">
-          <a:blip xmlns:r="http://schemas.openxmlformats.org/officeDocument/2006/relationships" r:embed="rIdOfficeKitImage06e55191024fa458_1"/>
+          <a:blip xmlns:r="http://schemas.openxmlformats.org/officeDocument/2006/relationships" r:embed="rIdOfficeKitImagefff481b85b8743d2_1"/>
           <a:stretch>
             <a:fillRect/>
           </a:stretch>
@@ -3316,7 +3374,7 @@
     <p:bg>
       <p:bgPr>
         <a:blipFill xmlns:a="http://schemas.openxmlformats.org/drawingml/2006/main">
-          <a:blip xmlns:r="http://schemas.openxmlformats.org/officeDocument/2006/relationships" r:embed="rIdOfficeKitImagee231e9493e535fbe_1"/>
+          <a:blip xmlns:r="http://schemas.openxmlformats.org/officeDocument/2006/relationships" r:embed="rIdOfficeKitImage7acdacea277813e8_1"/>
           <a:stretch>
             <a:fillRect/>
           </a:stretch>

--- a/skills/presentation-template-library/skills/artifact-template-silver-atelier/assets/reference.pptx
+++ b/skills/presentation-template-library/skills/artifact-template-silver-atelier/assets/reference.pptx
@@ -200,6 +200,336 @@
     <p:bg>
       <p:bgPr>
         <a:blipFill xmlns:a="http://schemas.openxmlformats.org/drawingml/2006/main">
+          <a:blip xmlns:r="http://schemas.openxmlformats.org/officeDocument/2006/relationships" r:embed="rIdOfficeKitImagec49ddd99c59beda0_1"/>
+          <a:stretch>
+            <a:fillRect/>
+          </a:stretch>
+        </a:blipFill>
+      </p:bgPr>
+    </p:bg>
+    <p:spTree>
+      <p:nvGrpSpPr>
+        <p:cNvPr id="1" name=""/>
+        <p:cNvGrpSpPr/>
+        <p:nvPr/>
+      </p:nvGrpSpPr>
+      <p:grpSpPr>
+        <a:xfrm xmlns:a="http://schemas.openxmlformats.org/drawingml/2006/main">
+          <a:off x="0" y="0"/>
+          <a:ext cx="0" cy="0"/>
+          <a:chOff x="0" y="0"/>
+          <a:chExt cx="0" cy="0"/>
+        </a:xfrm>
+      </p:grpSpPr>
+      <p:sp>
+        <p:nvSpPr>
+          <p:cNvPr id="2" name="editorial-cover-scrim"/>
+          <p:cNvSpPr/>
+          <p:nvPr/>
+        </p:nvSpPr>
+        <p:spPr>
+          <a:xfrm xmlns:a="http://schemas.openxmlformats.org/drawingml/2006/main">
+            <a:off x="0" y="0"/>
+            <a:ext cx="7239000" cy="8572500"/>
+          </a:xfrm>
+          <a:prstGeom xmlns:a="http://schemas.openxmlformats.org/drawingml/2006/main" prst="rect">
+            <a:avLst/>
+          </a:prstGeom>
+          <a:solidFill xmlns:a="http://schemas.openxmlformats.org/drawingml/2006/main">
+            <a:srgbClr val="171717">
+              <a:alpha val="84000"/>
+            </a:srgbClr>
+          </a:solidFill>
+          <a:ln xmlns:a="http://schemas.openxmlformats.org/drawingml/2006/main" w="0">
+            <a:solidFill>
+              <a:srgbClr val="171717"/>
+            </a:solidFill>
+            <a:prstDash val="solid"/>
+          </a:ln>
+        </p:spPr>
+        <p:txBody>
+          <a:bodyPr xmlns:a="http://schemas.openxmlformats.org/drawingml/2006/main" wrap="square" lIns="0" tIns="0" rIns="0" bIns="0" anchor="t"/>
+          <a:lstStyle xmlns:a="http://schemas.openxmlformats.org/drawingml/2006/main"/>
+          <a:p xmlns:a="http://schemas.openxmlformats.org/drawingml/2006/main">
+            <a:r>
+              <a:rPr lang="en-US"/>
+              <a:t/>
+            </a:r>
+            <a:endParaRPr lang="en-US"/>
+          </a:p>
+        </p:txBody>
+      </p:sp>
+      <p:sp>
+        <p:nvSpPr>
+          <p:cNvPr id="3" name="eyebrow"/>
+          <p:cNvSpPr txBox="1"/>
+          <p:nvPr/>
+        </p:nvSpPr>
+        <p:spPr>
+          <a:xfrm xmlns:a="http://schemas.openxmlformats.org/drawingml/2006/main">
+            <a:off x="914400" y="800100"/>
+            <a:ext cx="7048500" cy="228600"/>
+          </a:xfrm>
+          <a:prstGeom xmlns:a="http://schemas.openxmlformats.org/drawingml/2006/main" prst="rect">
+            <a:avLst/>
+          </a:prstGeom>
+          <a:noFill xmlns:a="http://schemas.openxmlformats.org/drawingml/2006/main"/>
+          <a:ln xmlns:a="http://schemas.openxmlformats.org/drawingml/2006/main" w="0">
+            <a:noFill/>
+          </a:ln>
+        </p:spPr>
+        <p:txBody>
+          <a:bodyPr xmlns:a="http://schemas.openxmlformats.org/drawingml/2006/main" wrap="square" lIns="0" tIns="0" rIns="0" bIns="0" anchor="t"/>
+          <a:lstStyle xmlns:a="http://schemas.openxmlformats.org/drawingml/2006/main"/>
+          <a:p xmlns:a="http://schemas.openxmlformats.org/drawingml/2006/main">
+            <a:r>
+              <a:rPr lang="en-US" sz="1125" b="1">
+                <a:solidFill>
+                  <a:srgbClr val="9A6B45"/>
+                </a:solidFill>
+                <a:latin typeface="Tahoma"/>
+                <a:ea typeface="Tahoma"/>
+              </a:rPr>
+              <a:t>PROMOTION · OFFICEKIT CALIBRATION</a:t>
+            </a:r>
+            <a:endParaRPr lang="en-US"/>
+          </a:p>
+        </p:txBody>
+      </p:sp>
+      <p:sp>
+        <p:nvSpPr>
+          <p:cNvPr id="4" name="cover-title"/>
+          <p:cNvSpPr txBox="1"/>
+          <p:nvPr/>
+        </p:nvSpPr>
+        <p:spPr>
+          <a:xfrm xmlns:a="http://schemas.openxmlformats.org/drawingml/2006/main">
+            <a:off x="914400" y="1962150"/>
+            <a:ext cx="5810250" cy="1333500"/>
+          </a:xfrm>
+          <a:prstGeom xmlns:a="http://schemas.openxmlformats.org/drawingml/2006/main" prst="rect">
+            <a:avLst/>
+          </a:prstGeom>
+          <a:noFill xmlns:a="http://schemas.openxmlformats.org/drawingml/2006/main"/>
+          <a:ln xmlns:a="http://schemas.openxmlformats.org/drawingml/2006/main" w="0">
+            <a:noFill/>
+          </a:ln>
+        </p:spPr>
+        <p:txBody>
+          <a:bodyPr xmlns:a="http://schemas.openxmlformats.org/drawingml/2006/main" wrap="square" lIns="0" tIns="0" rIns="0" bIns="0" anchor="t"/>
+          <a:lstStyle xmlns:a="http://schemas.openxmlformats.org/drawingml/2006/main"/>
+          <a:p xmlns:a="http://schemas.openxmlformats.org/drawingml/2006/main">
+            <a:r>
+              <a:rPr lang="en-US" sz="3900" b="1">
+                <a:solidFill>
+                  <a:srgbClr val="FFFFFF"/>
+                </a:solidFill>
+                <a:latin typeface="Tahoma"/>
+                <a:ea typeface="Tahoma"/>
+              </a:rPr>
+              <a:t>Silver Atelier: a claim worth testing</a:t>
+            </a:r>
+            <a:endParaRPr lang="en-US"/>
+          </a:p>
+        </p:txBody>
+      </p:sp>
+      <p:sp>
+        <p:nvSpPr>
+          <p:cNvPr id="5" name="cover-subtitle"/>
+          <p:cNvSpPr txBox="1"/>
+          <p:nvPr/>
+        </p:nvSpPr>
+        <p:spPr>
+          <a:xfrm xmlns:a="http://schemas.openxmlformats.org/drawingml/2006/main">
+            <a:off x="952500" y="3638550"/>
+            <a:ext cx="5334000" cy="323850"/>
+          </a:xfrm>
+          <a:prstGeom xmlns:a="http://schemas.openxmlformats.org/drawingml/2006/main" prst="rect">
+            <a:avLst/>
+          </a:prstGeom>
+          <a:noFill xmlns:a="http://schemas.openxmlformats.org/drawingml/2006/main"/>
+          <a:ln xmlns:a="http://schemas.openxmlformats.org/drawingml/2006/main" w="0">
+            <a:noFill/>
+          </a:ln>
+        </p:spPr>
+        <p:txBody>
+          <a:bodyPr xmlns:a="http://schemas.openxmlformats.org/drawingml/2006/main" wrap="square" lIns="0" tIns="0" rIns="0" bIns="0" anchor="t"/>
+          <a:lstStyle xmlns:a="http://schemas.openxmlformats.org/drawingml/2006/main"/>
+          <a:p xmlns:a="http://schemas.openxmlformats.org/drawingml/2006/main">
+            <a:r>
+              <a:rPr lang="en-US" sz="1650">
+                <a:solidFill>
+                  <a:srgbClr val="F0F2F2"/>
+                </a:solidFill>
+                <a:latin typeface="Tahoma"/>
+                <a:ea typeface="Tahoma"/>
+              </a:rPr>
+              <a:t>A clean-room reference for a visual proposition.</a:t>
+            </a:r>
+            <a:endParaRPr lang="en-US"/>
+          </a:p>
+        </p:txBody>
+      </p:sp>
+      <p:sp>
+        <p:nvSpPr>
+          <p:cNvPr id="6" name="cover-photo-rule"/>
+          <p:cNvSpPr/>
+          <p:nvPr/>
+        </p:nvSpPr>
+        <p:spPr>
+          <a:xfrm xmlns:a="http://schemas.openxmlformats.org/drawingml/2006/main">
+            <a:off x="914400" y="4533900"/>
+            <a:ext cx="4895850" cy="0"/>
+          </a:xfrm>
+          <a:prstGeom xmlns:a="http://schemas.openxmlformats.org/drawingml/2006/main" prst="line">
+            <a:avLst/>
+          </a:prstGeom>
+          <a:noFill xmlns:a="http://schemas.openxmlformats.org/drawingml/2006/main"/>
+          <a:ln xmlns:a="http://schemas.openxmlformats.org/drawingml/2006/main" w="38100">
+            <a:solidFill>
+              <a:srgbClr val="9A6B45"/>
+            </a:solidFill>
+            <a:prstDash val="solid"/>
+          </a:ln>
+        </p:spPr>
+        <p:txBody>
+          <a:bodyPr xmlns:a="http://schemas.openxmlformats.org/drawingml/2006/main" wrap="square" lIns="0" tIns="0" rIns="0" bIns="0" anchor="t"/>
+          <a:lstStyle xmlns:a="http://schemas.openxmlformats.org/drawingml/2006/main"/>
+          <a:p xmlns:a="http://schemas.openxmlformats.org/drawingml/2006/main">
+            <a:r>
+              <a:rPr lang="en-US"/>
+              <a:t/>
+            </a:r>
+            <a:endParaRPr lang="en-US"/>
+          </a:p>
+        </p:txBody>
+      </p:sp>
+      <p:sp>
+        <p:nvSpPr>
+          <p:cNvPr id="7" name="cover-thesis"/>
+          <p:cNvSpPr txBox="1"/>
+          <p:nvPr/>
+        </p:nvSpPr>
+        <p:spPr>
+          <a:xfrm xmlns:a="http://schemas.openxmlformats.org/drawingml/2006/main">
+            <a:off x="952500" y="4895850"/>
+            <a:ext cx="5715000" cy="647700"/>
+          </a:xfrm>
+          <a:prstGeom xmlns:a="http://schemas.openxmlformats.org/drawingml/2006/main" prst="rect">
+            <a:avLst/>
+          </a:prstGeom>
+          <a:noFill xmlns:a="http://schemas.openxmlformats.org/drawingml/2006/main"/>
+          <a:ln xmlns:a="http://schemas.openxmlformats.org/drawingml/2006/main" w="0">
+            <a:noFill/>
+          </a:ln>
+        </p:spPr>
+        <p:txBody>
+          <a:bodyPr xmlns:a="http://schemas.openxmlformats.org/drawingml/2006/main" wrap="square" lIns="0" tIns="0" rIns="0" bIns="0" anchor="t"/>
+          <a:lstStyle xmlns:a="http://schemas.openxmlformats.org/drawingml/2006/main"/>
+          <a:p xmlns:a="http://schemas.openxmlformats.org/drawingml/2006/main">
+            <a:r>
+              <a:rPr lang="en-US" sz="1950" b="1">
+                <a:solidFill>
+                  <a:srgbClr val="FFFFFF"/>
+                </a:solidFill>
+                <a:latin typeface="Tahoma"/>
+                <a:ea typeface="Tahoma"/>
+              </a:rPr>
+              <a:t>A proposition earns attention when it gives a next move.</a:t>
+            </a:r>
+            <a:endParaRPr lang="en-US"/>
+          </a:p>
+        </p:txBody>
+      </p:sp>
+      <p:sp>
+        <p:nvSpPr>
+          <p:cNvPr id="8" name="cover-source"/>
+          <p:cNvSpPr txBox="1"/>
+          <p:nvPr/>
+        </p:nvSpPr>
+        <p:spPr>
+          <a:xfrm xmlns:a="http://schemas.openxmlformats.org/drawingml/2006/main">
+            <a:off x="952500" y="7334250"/>
+            <a:ext cx="9048750" cy="228600"/>
+          </a:xfrm>
+          <a:prstGeom xmlns:a="http://schemas.openxmlformats.org/drawingml/2006/main" prst="rect">
+            <a:avLst/>
+          </a:prstGeom>
+          <a:noFill xmlns:a="http://schemas.openxmlformats.org/drawingml/2006/main"/>
+          <a:ln xmlns:a="http://schemas.openxmlformats.org/drawingml/2006/main" w="0">
+            <a:noFill/>
+          </a:ln>
+        </p:spPr>
+        <p:txBody>
+          <a:bodyPr xmlns:a="http://schemas.openxmlformats.org/drawingml/2006/main" wrap="square" lIns="0" tIns="0" rIns="0" bIns="0" anchor="t"/>
+          <a:lstStyle xmlns:a="http://schemas.openxmlformats.org/drawingml/2006/main"/>
+          <a:p xmlns:a="http://schemas.openxmlformats.org/drawingml/2006/main">
+            <a:r>
+              <a:rPr lang="en-US" sz="1050">
+                <a:solidFill>
+                  <a:srgbClr val="F0F2F2"/>
+                </a:solidFill>
+                <a:latin typeface="Tahoma"/>
+                <a:ea typeface="Tahoma"/>
+              </a:rPr>
+              <a:t>OfficeKit original clean-room calibration · fictional content · 2026-08-29</a:t>
+            </a:r>
+            <a:endParaRPr lang="en-US"/>
+          </a:p>
+        </p:txBody>
+      </p:sp>
+      <p:sp>
+        <p:nvSpPr>
+          <p:cNvPr id="9" name="page-number"/>
+          <p:cNvSpPr txBox="1"/>
+          <p:nvPr/>
+        </p:nvSpPr>
+        <p:spPr>
+          <a:xfrm xmlns:a="http://schemas.openxmlformats.org/drawingml/2006/main">
+            <a:off x="13335000" y="7810500"/>
+            <a:ext cx="952500" cy="209550"/>
+          </a:xfrm>
+          <a:prstGeom xmlns:a="http://schemas.openxmlformats.org/drawingml/2006/main" prst="rect">
+            <a:avLst/>
+          </a:prstGeom>
+          <a:noFill xmlns:a="http://schemas.openxmlformats.org/drawingml/2006/main"/>
+          <a:ln xmlns:a="http://schemas.openxmlformats.org/drawingml/2006/main" w="0">
+            <a:noFill/>
+          </a:ln>
+        </p:spPr>
+        <p:txBody>
+          <a:bodyPr xmlns:a="http://schemas.openxmlformats.org/drawingml/2006/main" wrap="square" lIns="0" tIns="0" rIns="0" bIns="0" anchor="t"/>
+          <a:lstStyle xmlns:a="http://schemas.openxmlformats.org/drawingml/2006/main"/>
+          <a:p xmlns:a="http://schemas.openxmlformats.org/drawingml/2006/main">
+            <a:pPr algn="r"/>
+            <a:r>
+              <a:rPr lang="en-US" sz="1050">
+                <a:solidFill>
+                  <a:srgbClr val="F0F2F2"/>
+                </a:solidFill>
+                <a:latin typeface="Tahoma"/>
+                <a:ea typeface="Tahoma"/>
+              </a:rPr>
+              <a:t>1 / 6</a:t>
+            </a:r>
+            <a:endParaRPr lang="en-US"/>
+          </a:p>
+        </p:txBody>
+      </p:sp>
+    </p:spTree>
+  </p:cSld>
+  <p:clrMapOvr>
+    <a:masterClrMapping xmlns:a="http://schemas.openxmlformats.org/drawingml/2006/main"/>
+  </p:clrMapOvr>
+</p:sld>
+</file>
+
+<file path=ppt/slides/slide2.xml><?xml version="1.0" encoding="utf-8"?>
+<p:sld xmlns:p="http://schemas.openxmlformats.org/presentationml/2006/main">
+  <p:cSld name="Argument">
+    <p:bg>
+      <p:bgPr>
+        <a:blipFill xmlns:a="http://schemas.openxmlformats.org/drawingml/2006/main">
           <a:blip xmlns:r="http://schemas.openxmlformats.org/officeDocument/2006/relationships" r:embed="rIdOfficeKitImage6785cc6781fd2511_1"/>
           <a:stretch>
             <a:fillRect/>
@@ -223,336 +553,6 @@
       </p:grpSpPr>
       <p:sp>
         <p:nvSpPr>
-          <p:cNvPr id="2" name="editorial-cover-scrim"/>
-          <p:cNvSpPr/>
-          <p:nvPr/>
-        </p:nvSpPr>
-        <p:spPr>
-          <a:xfrm xmlns:a="http://schemas.openxmlformats.org/drawingml/2006/main">
-            <a:off x="0" y="0"/>
-            <a:ext cx="7239000" cy="8572500"/>
-          </a:xfrm>
-          <a:prstGeom xmlns:a="http://schemas.openxmlformats.org/drawingml/2006/main" prst="rect">
-            <a:avLst/>
-          </a:prstGeom>
-          <a:solidFill xmlns:a="http://schemas.openxmlformats.org/drawingml/2006/main">
-            <a:srgbClr val="171717">
-              <a:alpha val="84000"/>
-            </a:srgbClr>
-          </a:solidFill>
-          <a:ln xmlns:a="http://schemas.openxmlformats.org/drawingml/2006/main" w="0">
-            <a:solidFill>
-              <a:srgbClr val="171717"/>
-            </a:solidFill>
-            <a:prstDash val="solid"/>
-          </a:ln>
-        </p:spPr>
-        <p:txBody>
-          <a:bodyPr xmlns:a="http://schemas.openxmlformats.org/drawingml/2006/main" wrap="square" lIns="0" tIns="0" rIns="0" bIns="0" anchor="t"/>
-          <a:lstStyle xmlns:a="http://schemas.openxmlformats.org/drawingml/2006/main"/>
-          <a:p xmlns:a="http://schemas.openxmlformats.org/drawingml/2006/main">
-            <a:r>
-              <a:rPr lang="en-US"/>
-              <a:t/>
-            </a:r>
-            <a:endParaRPr lang="en-US"/>
-          </a:p>
-        </p:txBody>
-      </p:sp>
-      <p:sp>
-        <p:nvSpPr>
-          <p:cNvPr id="3" name="eyebrow"/>
-          <p:cNvSpPr txBox="1"/>
-          <p:nvPr/>
-        </p:nvSpPr>
-        <p:spPr>
-          <a:xfrm xmlns:a="http://schemas.openxmlformats.org/drawingml/2006/main">
-            <a:off x="914400" y="800100"/>
-            <a:ext cx="7048500" cy="228600"/>
-          </a:xfrm>
-          <a:prstGeom xmlns:a="http://schemas.openxmlformats.org/drawingml/2006/main" prst="rect">
-            <a:avLst/>
-          </a:prstGeom>
-          <a:noFill xmlns:a="http://schemas.openxmlformats.org/drawingml/2006/main"/>
-          <a:ln xmlns:a="http://schemas.openxmlformats.org/drawingml/2006/main" w="0">
-            <a:noFill/>
-          </a:ln>
-        </p:spPr>
-        <p:txBody>
-          <a:bodyPr xmlns:a="http://schemas.openxmlformats.org/drawingml/2006/main" wrap="square" lIns="0" tIns="0" rIns="0" bIns="0" anchor="t"/>
-          <a:lstStyle xmlns:a="http://schemas.openxmlformats.org/drawingml/2006/main"/>
-          <a:p xmlns:a="http://schemas.openxmlformats.org/drawingml/2006/main">
-            <a:r>
-              <a:rPr lang="en-US" sz="1125" b="1">
-                <a:solidFill>
-                  <a:srgbClr val="9A6B45"/>
-                </a:solidFill>
-                <a:latin typeface="Tahoma"/>
-                <a:ea typeface="Tahoma"/>
-              </a:rPr>
-              <a:t>PROMOTION · OFFICEKIT CALIBRATION</a:t>
-            </a:r>
-            <a:endParaRPr lang="en-US"/>
-          </a:p>
-        </p:txBody>
-      </p:sp>
-      <p:sp>
-        <p:nvSpPr>
-          <p:cNvPr id="4" name="cover-title"/>
-          <p:cNvSpPr txBox="1"/>
-          <p:nvPr/>
-        </p:nvSpPr>
-        <p:spPr>
-          <a:xfrm xmlns:a="http://schemas.openxmlformats.org/drawingml/2006/main">
-            <a:off x="914400" y="1962150"/>
-            <a:ext cx="5810250" cy="1333500"/>
-          </a:xfrm>
-          <a:prstGeom xmlns:a="http://schemas.openxmlformats.org/drawingml/2006/main" prst="rect">
-            <a:avLst/>
-          </a:prstGeom>
-          <a:noFill xmlns:a="http://schemas.openxmlformats.org/drawingml/2006/main"/>
-          <a:ln xmlns:a="http://schemas.openxmlformats.org/drawingml/2006/main" w="0">
-            <a:noFill/>
-          </a:ln>
-        </p:spPr>
-        <p:txBody>
-          <a:bodyPr xmlns:a="http://schemas.openxmlformats.org/drawingml/2006/main" wrap="square" lIns="0" tIns="0" rIns="0" bIns="0" anchor="t"/>
-          <a:lstStyle xmlns:a="http://schemas.openxmlformats.org/drawingml/2006/main"/>
-          <a:p xmlns:a="http://schemas.openxmlformats.org/drawingml/2006/main">
-            <a:r>
-              <a:rPr lang="en-US" sz="3900" b="1">
-                <a:solidFill>
-                  <a:srgbClr val="FFFFFF"/>
-                </a:solidFill>
-                <a:latin typeface="Tahoma"/>
-                <a:ea typeface="Tahoma"/>
-              </a:rPr>
-              <a:t>Silver Atelier: a claim worth testing</a:t>
-            </a:r>
-            <a:endParaRPr lang="en-US"/>
-          </a:p>
-        </p:txBody>
-      </p:sp>
-      <p:sp>
-        <p:nvSpPr>
-          <p:cNvPr id="5" name="cover-subtitle"/>
-          <p:cNvSpPr txBox="1"/>
-          <p:nvPr/>
-        </p:nvSpPr>
-        <p:spPr>
-          <a:xfrm xmlns:a="http://schemas.openxmlformats.org/drawingml/2006/main">
-            <a:off x="952500" y="3638550"/>
-            <a:ext cx="5334000" cy="323850"/>
-          </a:xfrm>
-          <a:prstGeom xmlns:a="http://schemas.openxmlformats.org/drawingml/2006/main" prst="rect">
-            <a:avLst/>
-          </a:prstGeom>
-          <a:noFill xmlns:a="http://schemas.openxmlformats.org/drawingml/2006/main"/>
-          <a:ln xmlns:a="http://schemas.openxmlformats.org/drawingml/2006/main" w="0">
-            <a:noFill/>
-          </a:ln>
-        </p:spPr>
-        <p:txBody>
-          <a:bodyPr xmlns:a="http://schemas.openxmlformats.org/drawingml/2006/main" wrap="square" lIns="0" tIns="0" rIns="0" bIns="0" anchor="t"/>
-          <a:lstStyle xmlns:a="http://schemas.openxmlformats.org/drawingml/2006/main"/>
-          <a:p xmlns:a="http://schemas.openxmlformats.org/drawingml/2006/main">
-            <a:r>
-              <a:rPr lang="en-US" sz="1650">
-                <a:solidFill>
-                  <a:srgbClr val="F0F2F2"/>
-                </a:solidFill>
-                <a:latin typeface="Tahoma"/>
-                <a:ea typeface="Tahoma"/>
-              </a:rPr>
-              <a:t>A clean-room reference for a visual proposition.</a:t>
-            </a:r>
-            <a:endParaRPr lang="en-US"/>
-          </a:p>
-        </p:txBody>
-      </p:sp>
-      <p:sp>
-        <p:nvSpPr>
-          <p:cNvPr id="6" name="cover-photo-rule"/>
-          <p:cNvSpPr/>
-          <p:nvPr/>
-        </p:nvSpPr>
-        <p:spPr>
-          <a:xfrm xmlns:a="http://schemas.openxmlformats.org/drawingml/2006/main">
-            <a:off x="914400" y="4533900"/>
-            <a:ext cx="4895850" cy="0"/>
-          </a:xfrm>
-          <a:prstGeom xmlns:a="http://schemas.openxmlformats.org/drawingml/2006/main" prst="line">
-            <a:avLst/>
-          </a:prstGeom>
-          <a:noFill xmlns:a="http://schemas.openxmlformats.org/drawingml/2006/main"/>
-          <a:ln xmlns:a="http://schemas.openxmlformats.org/drawingml/2006/main" w="38100">
-            <a:solidFill>
-              <a:srgbClr val="9A6B45"/>
-            </a:solidFill>
-            <a:prstDash val="solid"/>
-          </a:ln>
-        </p:spPr>
-        <p:txBody>
-          <a:bodyPr xmlns:a="http://schemas.openxmlformats.org/drawingml/2006/main" wrap="square" lIns="0" tIns="0" rIns="0" bIns="0" anchor="t"/>
-          <a:lstStyle xmlns:a="http://schemas.openxmlformats.org/drawingml/2006/main"/>
-          <a:p xmlns:a="http://schemas.openxmlformats.org/drawingml/2006/main">
-            <a:r>
-              <a:rPr lang="en-US"/>
-              <a:t/>
-            </a:r>
-            <a:endParaRPr lang="en-US"/>
-          </a:p>
-        </p:txBody>
-      </p:sp>
-      <p:sp>
-        <p:nvSpPr>
-          <p:cNvPr id="7" name="cover-thesis"/>
-          <p:cNvSpPr txBox="1"/>
-          <p:nvPr/>
-        </p:nvSpPr>
-        <p:spPr>
-          <a:xfrm xmlns:a="http://schemas.openxmlformats.org/drawingml/2006/main">
-            <a:off x="952500" y="4895850"/>
-            <a:ext cx="5715000" cy="647700"/>
-          </a:xfrm>
-          <a:prstGeom xmlns:a="http://schemas.openxmlformats.org/drawingml/2006/main" prst="rect">
-            <a:avLst/>
-          </a:prstGeom>
-          <a:noFill xmlns:a="http://schemas.openxmlformats.org/drawingml/2006/main"/>
-          <a:ln xmlns:a="http://schemas.openxmlformats.org/drawingml/2006/main" w="0">
-            <a:noFill/>
-          </a:ln>
-        </p:spPr>
-        <p:txBody>
-          <a:bodyPr xmlns:a="http://schemas.openxmlformats.org/drawingml/2006/main" wrap="square" lIns="0" tIns="0" rIns="0" bIns="0" anchor="t"/>
-          <a:lstStyle xmlns:a="http://schemas.openxmlformats.org/drawingml/2006/main"/>
-          <a:p xmlns:a="http://schemas.openxmlformats.org/drawingml/2006/main">
-            <a:r>
-              <a:rPr lang="en-US" sz="1950" b="1">
-                <a:solidFill>
-                  <a:srgbClr val="FFFFFF"/>
-                </a:solidFill>
-                <a:latin typeface="Tahoma"/>
-                <a:ea typeface="Tahoma"/>
-              </a:rPr>
-              <a:t>A proposition earns attention when it gives a next move.</a:t>
-            </a:r>
-            <a:endParaRPr lang="en-US"/>
-          </a:p>
-        </p:txBody>
-      </p:sp>
-      <p:sp>
-        <p:nvSpPr>
-          <p:cNvPr id="8" name="cover-source"/>
-          <p:cNvSpPr txBox="1"/>
-          <p:nvPr/>
-        </p:nvSpPr>
-        <p:spPr>
-          <a:xfrm xmlns:a="http://schemas.openxmlformats.org/drawingml/2006/main">
-            <a:off x="952500" y="7334250"/>
-            <a:ext cx="9048750" cy="228600"/>
-          </a:xfrm>
-          <a:prstGeom xmlns:a="http://schemas.openxmlformats.org/drawingml/2006/main" prst="rect">
-            <a:avLst/>
-          </a:prstGeom>
-          <a:noFill xmlns:a="http://schemas.openxmlformats.org/drawingml/2006/main"/>
-          <a:ln xmlns:a="http://schemas.openxmlformats.org/drawingml/2006/main" w="0">
-            <a:noFill/>
-          </a:ln>
-        </p:spPr>
-        <p:txBody>
-          <a:bodyPr xmlns:a="http://schemas.openxmlformats.org/drawingml/2006/main" wrap="square" lIns="0" tIns="0" rIns="0" bIns="0" anchor="t"/>
-          <a:lstStyle xmlns:a="http://schemas.openxmlformats.org/drawingml/2006/main"/>
-          <a:p xmlns:a="http://schemas.openxmlformats.org/drawingml/2006/main">
-            <a:r>
-              <a:rPr lang="en-US" sz="1050">
-                <a:solidFill>
-                  <a:srgbClr val="F0F2F2"/>
-                </a:solidFill>
-                <a:latin typeface="Tahoma"/>
-                <a:ea typeface="Tahoma"/>
-              </a:rPr>
-              <a:t>OfficeKit original clean-room calibration · fictional content · 2026-08-29</a:t>
-            </a:r>
-            <a:endParaRPr lang="en-US"/>
-          </a:p>
-        </p:txBody>
-      </p:sp>
-      <p:sp>
-        <p:nvSpPr>
-          <p:cNvPr id="9" name="page-number"/>
-          <p:cNvSpPr txBox="1"/>
-          <p:nvPr/>
-        </p:nvSpPr>
-        <p:spPr>
-          <a:xfrm xmlns:a="http://schemas.openxmlformats.org/drawingml/2006/main">
-            <a:off x="13335000" y="7810500"/>
-            <a:ext cx="952500" cy="209550"/>
-          </a:xfrm>
-          <a:prstGeom xmlns:a="http://schemas.openxmlformats.org/drawingml/2006/main" prst="rect">
-            <a:avLst/>
-          </a:prstGeom>
-          <a:noFill xmlns:a="http://schemas.openxmlformats.org/drawingml/2006/main"/>
-          <a:ln xmlns:a="http://schemas.openxmlformats.org/drawingml/2006/main" w="0">
-            <a:noFill/>
-          </a:ln>
-        </p:spPr>
-        <p:txBody>
-          <a:bodyPr xmlns:a="http://schemas.openxmlformats.org/drawingml/2006/main" wrap="square" lIns="0" tIns="0" rIns="0" bIns="0" anchor="t"/>
-          <a:lstStyle xmlns:a="http://schemas.openxmlformats.org/drawingml/2006/main"/>
-          <a:p xmlns:a="http://schemas.openxmlformats.org/drawingml/2006/main">
-            <a:pPr algn="r"/>
-            <a:r>
-              <a:rPr lang="en-US" sz="1050">
-                <a:solidFill>
-                  <a:srgbClr val="F0F2F2"/>
-                </a:solidFill>
-                <a:latin typeface="Tahoma"/>
-                <a:ea typeface="Tahoma"/>
-              </a:rPr>
-              <a:t>1 / 6</a:t>
-            </a:r>
-            <a:endParaRPr lang="en-US"/>
-          </a:p>
-        </p:txBody>
-      </p:sp>
-    </p:spTree>
-  </p:cSld>
-  <p:clrMapOvr>
-    <a:masterClrMapping xmlns:a="http://schemas.openxmlformats.org/drawingml/2006/main"/>
-  </p:clrMapOvr>
-</p:sld>
-</file>
-
-<file path=ppt/slides/slide2.xml><?xml version="1.0" encoding="utf-8"?>
-<p:sld xmlns:p="http://schemas.openxmlformats.org/presentationml/2006/main">
-  <p:cSld name="Argument">
-    <p:bg>
-      <p:bgPr>
-        <a:blipFill xmlns:a="http://schemas.openxmlformats.org/drawingml/2006/main">
-          <a:blip xmlns:r="http://schemas.openxmlformats.org/officeDocument/2006/relationships" r:embed="rIdOfficeKitImagecb4e39f1eccfa545_1"/>
-          <a:stretch>
-            <a:fillRect/>
-          </a:stretch>
-        </a:blipFill>
-      </p:bgPr>
-    </p:bg>
-    <p:spTree>
-      <p:nvGrpSpPr>
-        <p:cNvPr id="1" name=""/>
-        <p:cNvGrpSpPr/>
-        <p:nvPr/>
-      </p:nvGrpSpPr>
-      <p:grpSpPr>
-        <a:xfrm xmlns:a="http://schemas.openxmlformats.org/drawingml/2006/main">
-          <a:off x="0" y="0"/>
-          <a:ext cx="0" cy="0"/>
-          <a:chOff x="0" y="0"/>
-          <a:chExt cx="0" cy="0"/>
-        </a:xfrm>
-      </p:grpSpPr>
-      <p:sp>
-        <p:nvSpPr>
           <p:cNvPr id="2" name="argument-paper-scrim"/>
           <p:cNvSpPr/>
           <p:nvPr/>
@@ -905,7 +905,7 @@
           <p:nvPr/>
         </p:nvPicPr>
         <p:blipFill>
-          <a:blip xmlns:r="http://schemas.openxmlformats.org/officeDocument/2006/relationships" xmlns:a="http://schemas.openxmlformats.org/drawingml/2006/main" r:embed="rIdOfficeKitImagee977612ad933c986_1"/>
+          <a:blip xmlns:r="http://schemas.openxmlformats.org/officeDocument/2006/relationships" xmlns:a="http://schemas.openxmlformats.org/drawingml/2006/main" r:embed="rIdOfficeKitImagecb4e39f1eccfa545_1"/>
           <a:srcRect xmlns:a="http://schemas.openxmlformats.org/drawingml/2006/main" l="0" t="37401" r="0" b="37401"/>
           <a:stretch xmlns:a="http://schemas.openxmlformats.org/drawingml/2006/main">
             <a:fillRect/>
@@ -934,8 +934,8 @@
           <p:nvPr/>
         </p:nvPicPr>
         <p:blipFill>
-          <a:blip xmlns:r="http://schemas.openxmlformats.org/officeDocument/2006/relationships" xmlns:a="http://schemas.openxmlformats.org/drawingml/2006/main" r:embed="rIdOfficeKitImagee930dcb9c6b95953_1"/>
-          <a:srcRect xmlns:a="http://schemas.openxmlformats.org/drawingml/2006/main" l="0" t="34406" r="0" b="34406"/>
+          <a:blip xmlns:r="http://schemas.openxmlformats.org/officeDocument/2006/relationships" xmlns:a="http://schemas.openxmlformats.org/drawingml/2006/main" r:embed="rIdOfficeKitImagee977612ad933c986_1"/>
+          <a:srcRect xmlns:a="http://schemas.openxmlformats.org/drawingml/2006/main" l="0" t="34394" r="0" b="34394"/>
           <a:stretch xmlns:a="http://schemas.openxmlformats.org/drawingml/2006/main">
             <a:fillRect/>
           </a:stretch>
@@ -963,8 +963,8 @@
           <p:nvPr/>
         </p:nvPicPr>
         <p:blipFill>
-          <a:blip xmlns:r="http://schemas.openxmlformats.org/officeDocument/2006/relationships" xmlns:a="http://schemas.openxmlformats.org/drawingml/2006/main" r:embed="rIdOfficeKitImage3635f59fd49ef0e6_1"/>
-          <a:srcRect xmlns:a="http://schemas.openxmlformats.org/drawingml/2006/main" l="0" t="34394" r="0" b="34394"/>
+          <a:blip xmlns:r="http://schemas.openxmlformats.org/officeDocument/2006/relationships" xmlns:a="http://schemas.openxmlformats.org/drawingml/2006/main" r:embed="rIdOfficeKitImagefb0d559f34167a51_1"/>
+          <a:srcRect xmlns:a="http://schemas.openxmlformats.org/drawingml/2006/main" l="0" t="34406" r="0" b="34406"/>
           <a:stretch xmlns:a="http://schemas.openxmlformats.org/drawingml/2006/main">
             <a:fillRect/>
           </a:stretch>
@@ -1139,7 +1139,7 @@
     <p:bg>
       <p:bgPr>
         <a:blipFill xmlns:a="http://schemas.openxmlformats.org/drawingml/2006/main">
-          <a:blip xmlns:r="http://schemas.openxmlformats.org/officeDocument/2006/relationships" r:embed="rIdOfficeKitImaged96cedd8678b85ac_1"/>
+          <a:blip xmlns:r="http://schemas.openxmlformats.org/officeDocument/2006/relationships" r:embed="rIdOfficeKitImagee930dcb9c6b95953_1"/>
           <a:stretch>
             <a:fillRect/>
           </a:stretch>
@@ -2686,8 +2686,8 @@
           <p:nvPr/>
         </p:nvPicPr>
         <p:blipFill>
-          <a:blip xmlns:r="http://schemas.openxmlformats.org/officeDocument/2006/relationships" xmlns:a="http://schemas.openxmlformats.org/drawingml/2006/main" r:embed="rIdOfficeKitImage35d943dc999c7d05_1"/>
-          <a:srcRect xmlns:a="http://schemas.openxmlformats.org/drawingml/2006/main" l="0" t="31971" r="0" b="31971"/>
+          <a:blip xmlns:r="http://schemas.openxmlformats.org/officeDocument/2006/relationships" xmlns:a="http://schemas.openxmlformats.org/drawingml/2006/main" r:embed="rIdOfficeKitImage3635f59fd49ef0e6_1"/>
+          <a:srcRect xmlns:a="http://schemas.openxmlformats.org/drawingml/2006/main" l="0" t="31957" r="0" b="31957"/>
           <a:stretch xmlns:a="http://schemas.openxmlformats.org/drawingml/2006/main">
             <a:fillRect/>
           </a:stretch>
@@ -2715,14 +2715,14 @@
           <p:nvPr/>
         </p:nvPicPr>
         <p:blipFill>
-          <a:blip xmlns:r="http://schemas.openxmlformats.org/officeDocument/2006/relationships" xmlns:a="http://schemas.openxmlformats.org/drawingml/2006/main" r:embed="rIdOfficeKitImagedf986129197cef3b_1"/>
+          <a:blip xmlns:r="http://schemas.openxmlformats.org/officeDocument/2006/relationships" xmlns:a="http://schemas.openxmlformats.org/drawingml/2006/main" r:embed="rIdOfficeKitImaged96cedd8678b85ac_1"/>
           <a:srcRect xmlns:a="http://schemas.openxmlformats.org/drawingml/2006/main" l="0" t="32347" r="0" b="32347"/>
           <a:stretch xmlns:a="http://schemas.openxmlformats.org/drawingml/2006/main">
             <a:fillRect/>
           </a:stretch>
         </p:blipFill>
         <p:spPr>
-          <a:xfrm xmlns:a="http://schemas.openxmlformats.org/drawingml/2006/main" flipH="1">
+          <a:xfrm xmlns:a="http://schemas.openxmlformats.org/drawingml/2006/main">
             <a:off x="4895850" y="3162300"/>
             <a:ext cx="1790700" cy="1123950"/>
           </a:xfrm>
@@ -2744,7 +2744,7 @@
           <p:nvPr/>
         </p:nvPicPr>
         <p:blipFill>
-          <a:blip xmlns:r="http://schemas.openxmlformats.org/officeDocument/2006/relationships" xmlns:a="http://schemas.openxmlformats.org/drawingml/2006/main" r:embed="rIdOfficeKitImage84ff976f39aab728_1"/>
+          <a:blip xmlns:r="http://schemas.openxmlformats.org/officeDocument/2006/relationships" xmlns:a="http://schemas.openxmlformats.org/drawingml/2006/main" r:embed="rIdOfficeKitImage35d943dc999c7d05_1"/>
           <a:srcRect xmlns:a="http://schemas.openxmlformats.org/drawingml/2006/main" l="0" t="32347" r="0" b="32347"/>
           <a:stretch xmlns:a="http://schemas.openxmlformats.org/drawingml/2006/main">
             <a:fillRect/>
@@ -2773,14 +2773,14 @@
           <p:nvPr/>
         </p:nvPicPr>
         <p:blipFill>
-          <a:blip xmlns:r="http://schemas.openxmlformats.org/officeDocument/2006/relationships" xmlns:a="http://schemas.openxmlformats.org/drawingml/2006/main" r:embed="rIdOfficeKitImage06e55191024fa458_1"/>
+          <a:blip xmlns:r="http://schemas.openxmlformats.org/officeDocument/2006/relationships" xmlns:a="http://schemas.openxmlformats.org/drawingml/2006/main" r:embed="rIdOfficeKitImagedf986129197cef3b_1"/>
           <a:srcRect xmlns:a="http://schemas.openxmlformats.org/drawingml/2006/main" l="0" t="32347" r="0" b="32347"/>
           <a:stretch xmlns:a="http://schemas.openxmlformats.org/drawingml/2006/main">
             <a:fillRect/>
           </a:stretch>
         </p:blipFill>
         <p:spPr>
-          <a:xfrm xmlns:a="http://schemas.openxmlformats.org/drawingml/2006/main">
+          <a:xfrm xmlns:a="http://schemas.openxmlformats.org/drawingml/2006/main" flipH="1">
             <a:off x="4895850" y="4457700"/>
             <a:ext cx="1790700" cy="1123950"/>
           </a:xfrm>
@@ -2802,7 +2802,7 @@
           <p:nvPr/>
         </p:nvPicPr>
         <p:blipFill>
-          <a:blip xmlns:r="http://schemas.openxmlformats.org/officeDocument/2006/relationships" xmlns:a="http://schemas.openxmlformats.org/drawingml/2006/main" r:embed="rIdOfficeKitImagee231e9493e535fbe_1"/>
+          <a:blip xmlns:r="http://schemas.openxmlformats.org/officeDocument/2006/relationships" xmlns:a="http://schemas.openxmlformats.org/drawingml/2006/main" r:embed="rIdOfficeKitImage84ff976f39aab728_1"/>
           <a:srcRect xmlns:a="http://schemas.openxmlformats.org/drawingml/2006/main" l="0" t="32347" r="0" b="32347"/>
           <a:stretch xmlns:a="http://schemas.openxmlformats.org/drawingml/2006/main">
             <a:fillRect/>
@@ -3044,7 +3044,7 @@
     <p:bg>
       <p:bgPr>
         <a:blipFill xmlns:a="http://schemas.openxmlformats.org/drawingml/2006/main">
-          <a:blip xmlns:r="http://schemas.openxmlformats.org/officeDocument/2006/relationships" r:embed="rIdOfficeKitImagefff481b85b8743d2_1"/>
+          <a:blip xmlns:r="http://schemas.openxmlformats.org/officeDocument/2006/relationships" r:embed="rIdOfficeKitImage06e55191024fa458_1"/>
           <a:stretch>
             <a:fillRect/>
           </a:stretch>
@@ -3374,7 +3374,7 @@
     <p:bg>
       <p:bgPr>
         <a:blipFill xmlns:a="http://schemas.openxmlformats.org/drawingml/2006/main">
-          <a:blip xmlns:r="http://schemas.openxmlformats.org/officeDocument/2006/relationships" r:embed="rIdOfficeKitImage7acdacea277813e8_1"/>
+          <a:blip xmlns:r="http://schemas.openxmlformats.org/officeDocument/2006/relationships" r:embed="rIdOfficeKitImagee231e9493e535fbe_1"/>
           <a:stretch>
             <a:fillRect/>
           </a:stretch>
